--- a/downloads/presentations/modules/lesson-48-ai-risk-appetite-and-risk-tolerance-for-public-health.pptx
+++ b/downloads/presentations/modules/lesson-48-ai-risk-appetite-and-risk-tolerance-for-public-health.pptx
@@ -24,9 +24,11 @@
     <p:sldId id="272" r:id="rId18"/>
     <p:sldId id="273" r:id="rId19"/>
     <p:sldId id="274" r:id="rId20"/>
+    <p:sldId id="275" r:id="rId21"/>
+    <p:sldId id="276" r:id="rId22"/>
   </p:sldIdLst>
   <p:notesMasterIdLst>
-    <p:notesMasterId r:id="rId21"/>
+    <p:notesMasterId r:id="rId23"/>
   </p:notesMasterIdLst>
   <p:sldSz cx="12192000" cy="6858000"/>
   <p:notesSz cx="6858000" cy="12192000"/>
@@ -609,8 +611,10 @@
           <a:p>
             <a:r>
               <a:rPr lang="en-US" dirty="0"/>
-              <a:t>Application to AI-Supported Workflows
-Risk appetite applies differently across AI types. Generative AI for internal drafting may fall into a lower-risk category when reviewed by humans. Predictive models used for prioritization require stronger validation and monitoring. Agentic tools that can take system actions require strict limits, stop authority, and auditability. Risk appetite helps define these boundaries in advance.</a:t>
+              <a:t>Technical and Governance Deep Dive
+Risk appetite should be expressed in plain language and translated into operating rules. For example, an agency might state that it encourages low-risk AI uses that reduce internal administrative burden when no sensitive data are used and outputs are reviewed by staff. It might state that it will consider moderate-risk uses involving operational data only with documented validation, access controls, human review, and monitoring. It might state that it does not permit AI to make final public health enforcement, eligibility, or legal decisions without authorized human review.
+Risk tolerance turns these statements into thresholds. A tolerance may specify that a tool cannot be launched if source traceability is absent, if subgroup performance cannot be assessed for a prioritization model, if the false negative rate exceeds a defined threshold, or if the vendor cannot provide adequate documentation. Tolerances should be appropriate to the use case. A lower threshold may be acceptable for internal drafting than for case triage.
+Risk appetite should be reviewed regularly. Public expectations, laws, model capabilities, agency experience, and technical safeguards change over time. A use that was too risky during the first year of AI adoption may become acceptable after better infrastructure, policies, and monitoring are in place. Conversely, a use may become unacceptable if incidents, evidence, or community concerns reveal new harms.</a:t>
             </a:r>
             <a:endParaRPr lang="en-US" dirty="0"/>
           </a:p>
@@ -698,10 +702,9 @@
           <a:p>
             <a:r>
               <a:rPr lang="en-US" dirty="0"/>
-              <a:t>Reflection Questions
-Which current or proposed AI use case in your agency raises this leadership or governance issue most clearly?
-Who currently has authority to make decisions about this issue, and is that authority documented?
-What evidence would governance or leadership need before approving the use case?</a:t>
+              <a:t>Risks, Failure Modes, and Guardrails
+A common failure mode is vague risk language. Phrases like 'use AI responsibly' do not help staff decide what is allowed. A guardrail is to define concrete examples of encouraged, conditional, restricted, and prohibited uses.
+Another risk is risk appetite that ignores equity. A tool may appear operationally useful while shifting burden to communities that are already underrepresented or over-surveilled. A guardrail is to require equity impact review for uses that affect prioritization, access, enforcement, communication, or resource allocation.</a:t>
             </a:r>
             <a:endParaRPr lang="en-US" dirty="0"/>
           </a:p>
@@ -789,9 +792,8 @@
           <a:p>
             <a:r>
               <a:rPr lang="en-US" dirty="0"/>
-              <a:t>Reflection Questions
-Which staff, partners, or communities would be affected if this issue were handled poorly?
-What policy, process, or artifact should be created or updated after this module?</a:t>
+              <a:t>Application to AI-Supported Workflows
+Risk appetite applies differently across AI types. Generative AI for internal drafting may fall into a lower-risk category when reviewed by humans. Predictive models used for prioritization require stronger validation and monitoring. Agentic tools that can take system actions require strict limits, stop authority, and auditability. Risk appetite helps define these boundaries in advance.</a:t>
             </a:r>
             <a:endParaRPr lang="en-US" dirty="0"/>
           </a:p>
@@ -879,8 +881,10 @@
           <a:p>
             <a:r>
               <a:rPr lang="en-US" dirty="0"/>
-              <a:t>Practical Exercise
-Draft a risk appetite statement and a risk tolerance table for at least four AI use categories: internal productivity, staff decision support, public-facing communication, and automated or agentic workflows.</a:t>
+              <a:t>Reflection Questions
+Which current or proposed AI use case in your agency raises this leadership or governance issue most clearly?
+Who currently has authority to make decisions about this issue, and is that authority documented?
+What evidence would governance or leadership need before approving the use case?</a:t>
             </a:r>
             <a:endParaRPr lang="en-US" dirty="0"/>
           </a:p>
@@ -968,8 +972,9 @@
           <a:p>
             <a:r>
               <a:rPr lang="en-US" dirty="0"/>
-              <a:t>Before You Begin
-Choose a real or realistic public health AI use case. Document assumptions, unresolved questions, and which agency roles would need to review the artifact before it is adopted. The exercise should produce a work product that could support governance review, leadership discussion, implementation planning, or policy development.</a:t>
+              <a:t>Reflection Questions
+Which staff, partners, or communities would be affected if this issue were handled poorly?
+What policy, process, or artifact should be created or updated after this module?</a:t>
             </a:r>
             <a:endParaRPr lang="en-US" dirty="0"/>
           </a:p>
@@ -1057,8 +1062,8 @@
           <a:p>
             <a:r>
               <a:rPr lang="en-US" dirty="0"/>
-              <a:t>Expected Artifact or Evidence
-AI risk appetite statement; risk tolerance table; prohibited-use examples; mitigation and escalation conditions.</a:t>
+              <a:t>Practical Exercise
+Draft a risk appetite statement and a risk tolerance table for at least four AI use categories: internal productivity, staff decision support, public-facing communication, and automated or agentic workflows.</a:t>
             </a:r>
             <a:endParaRPr lang="en-US" dirty="0"/>
           </a:p>
@@ -1146,8 +1151,8 @@
           <a:p>
             <a:r>
               <a:rPr lang="en-US" dirty="0"/>
-              <a:t>Expected Assignment
-AI risk appetite statement; risk tolerance table; prohibited-use examples; mitigation and escalation conditions.</a:t>
+              <a:t>Before You Begin
+Choose a real or realistic public health AI use case. Document assumptions, unresolved questions, and which agency roles would need to review the artifact before it is adopted. The exercise should produce a work product that could support governance review, leadership discussion, implementation planning, or policy development.</a:t>
             </a:r>
             <a:endParaRPr lang="en-US" dirty="0"/>
           </a:p>
@@ -1235,12 +1240,8 @@
           <a:p>
             <a:r>
               <a:rPr lang="en-US" dirty="0"/>
-              <a:t>Knowledge Check
-1. What is the strongest reason this module topic belongs in AI leadership and governance training?
-2. Which practice best supports accountable public health AI governance?
-3. When should an AI use case be escalated for leadership or governance review?
-4. What is weak evidence of completion for a leadership and governance module?
-5. What should leaders do when an AI use case has meaningful benefits but unresolved risks?</a:t>
+              <a:t>Expected Artifact or Evidence
+AI risk appetite statement; risk tolerance table; prohibited-use examples; mitigation and escalation conditions.</a:t>
             </a:r>
             <a:endParaRPr lang="en-US" dirty="0"/>
           </a:p>
@@ -1328,12 +1329,8 @@
           <a:p>
             <a:r>
               <a:rPr lang="en-US" dirty="0"/>
-              <a:t>References and Resources
-NIST Artificial Intelligence Risk Management Framework (AI RMF 1.0): https://www.nist.gov/itl/ai-risk-management-framework
-NIST Generative AI Profile: https://www.nist.gov/publications/artificial-intelligence-risk-management-framework-generative-artificial-intelligence
-NIST Privacy Framework
-CDC Public Health Data Strategy and Data Modernization resources: https://www.cdc.gov/public-health-data-strategy/php/about/index.html
-WHO Ethics and Governance of Artificial Intelligence for Health: https://www.who.int/publications/i/item/9789240029200</a:t>
+              <a:t>Expected Assignment
+AI risk appetite statement; risk tolerance table; prohibited-use examples; mitigation and escalation conditions.</a:t>
             </a:r>
             <a:endParaRPr lang="en-US" dirty="0"/>
           </a:p>
@@ -1421,9 +1418,12 @@
           <a:p>
             <a:r>
               <a:rPr lang="en-US" dirty="0"/>
-              <a:t>References and Resources
-OMB Memorandum M-24-10 on federal AI governance, risk management, and innovation, where relevant to public-sector governance models
-Agency strategic plans, procurement policies, privacy policies, cybersecurity policies, records policies, and equity plans</a:t>
+              <a:t>Knowledge Check
+1. What is the strongest reason this module topic belongs in AI leadership and governance training?
+2. Which practice best supports accountable public health AI governance?
+3. When should an AI use case be escalated for leadership or governance review?
+4. What is weak evidence of completion for a leadership and governance module?
+5. What should leaders do when an AI use case has meaningful benefits but unresolved risks?</a:t>
             </a:r>
             <a:endParaRPr lang="en-US" dirty="0"/>
           </a:p>
@@ -1557,6 +1557,189 @@
 </p:notes>
 </file>
 
+<file path=ppt/notesSlides/notesSlide20.xml><?xml version="1.0" encoding="utf-8"?>
+<p:notes xmlns:a="http://schemas.openxmlformats.org/drawingml/2006/main" xmlns:r="http://schemas.openxmlformats.org/officeDocument/2006/relationships" xmlns:p="http://schemas.openxmlformats.org/presentationml/2006/main">
+  <p:cSld>
+    <p:spTree>
+      <p:nvGrpSpPr>
+        <p:cNvPr id="1" name=""/>
+        <p:cNvGrpSpPr/>
+        <p:nvPr/>
+      </p:nvGrpSpPr>
+      <p:grpSpPr>
+        <a:xfrm>
+          <a:off x="0" y="0"/>
+          <a:ext cx="0" cy="0"/>
+          <a:chOff x="0" y="0"/>
+          <a:chExt cx="0" cy="0"/>
+        </a:xfrm>
+      </p:grpSpPr>
+      <p:sp>
+        <p:nvSpPr>
+          <p:cNvPr id="2" name="Slide Image Placeholder 1"/>
+          <p:cNvSpPr>
+            <a:spLocks noGrp="1" noRot="1" noChangeAspect="1"/>
+          </p:cNvSpPr>
+          <p:nvPr>
+            <p:ph type="sldImg"/>
+          </p:nvPr>
+        </p:nvSpPr>
+        <p:spPr/>
+      </p:sp>
+      <p:sp>
+        <p:nvSpPr>
+          <p:cNvPr id="3" name="Notes Placeholder 2"/>
+          <p:cNvSpPr>
+            <a:spLocks noGrp="1"/>
+          </p:cNvSpPr>
+          <p:nvPr>
+            <p:ph type="body" idx="1"/>
+          </p:nvPr>
+        </p:nvSpPr>
+        <p:spPr/>
+        <p:txBody>
+          <a:bodyPr/>
+          <a:lstStyle/>
+          <a:p>
+            <a:r>
+              <a:rPr lang="en-US" dirty="0"/>
+              <a:t>References and Resources
+NIST Artificial Intelligence Risk Management Framework (AI RMF 1.0): https://www.nist.gov/itl/ai-risk-management-framework
+NIST Generative AI Profile: https://www.nist.gov/publications/artificial-intelligence-risk-management-framework-generative-artificial-intelligence
+NIST Privacy Framework
+CDC Public Health Data Strategy and Data Modernization resources: https://www.cdc.gov/public-health-data-strategy/php/about/index.html
+WHO Ethics and Governance of Artificial Intelligence for Health: https://www.who.int/publications/i/item/9789240029200</a:t>
+            </a:r>
+            <a:endParaRPr lang="en-US" dirty="0"/>
+          </a:p>
+        </p:txBody>
+      </p:sp>
+      <p:sp>
+        <p:nvSpPr>
+          <p:cNvPr id="4" name="Slide Number Placeholder 3"/>
+          <p:cNvSpPr>
+            <a:spLocks noGrp="1"/>
+          </p:cNvSpPr>
+          <p:nvPr>
+            <p:ph type="sldNum" sz="quarter" idx="10"/>
+          </p:nvPr>
+        </p:nvSpPr>
+        <p:spPr/>
+        <p:txBody>
+          <a:bodyPr/>
+          <a:lstStyle/>
+          <a:p>
+            <a:fld id="{F7021451-1387-4CA6-816F-3879F97B5CBC}" type="slidenum">
+              <a:rPr lang="en-US"/>
+              <a:t>20</a:t>
+            </a:fld>
+            <a:endParaRPr lang="en-US"/>
+          </a:p>
+        </p:txBody>
+      </p:sp>
+    </p:spTree>
+    <p:extLst>
+      <p:ext uri="{BB962C8B-B14F-4D97-AF65-F5344CB8AC3E}">
+        <p14:creationId xmlns:p14="http://schemas.microsoft.com/office/powerpoint/2010/main" val="1024086991"/>
+      </p:ext>
+    </p:extLst>
+  </p:cSld>
+  <p:clrMapOvr>
+    <a:masterClrMapping/>
+  </p:clrMapOvr>
+</p:notes>
+</file>
+
+<file path=ppt/notesSlides/notesSlide21.xml><?xml version="1.0" encoding="utf-8"?>
+<p:notes xmlns:a="http://schemas.openxmlformats.org/drawingml/2006/main" xmlns:r="http://schemas.openxmlformats.org/officeDocument/2006/relationships" xmlns:p="http://schemas.openxmlformats.org/presentationml/2006/main">
+  <p:cSld>
+    <p:spTree>
+      <p:nvGrpSpPr>
+        <p:cNvPr id="1" name=""/>
+        <p:cNvGrpSpPr/>
+        <p:nvPr/>
+      </p:nvGrpSpPr>
+      <p:grpSpPr>
+        <a:xfrm>
+          <a:off x="0" y="0"/>
+          <a:ext cx="0" cy="0"/>
+          <a:chOff x="0" y="0"/>
+          <a:chExt cx="0" cy="0"/>
+        </a:xfrm>
+      </p:grpSpPr>
+      <p:sp>
+        <p:nvSpPr>
+          <p:cNvPr id="2" name="Slide Image Placeholder 1"/>
+          <p:cNvSpPr>
+            <a:spLocks noGrp="1" noRot="1" noChangeAspect="1"/>
+          </p:cNvSpPr>
+          <p:nvPr>
+            <p:ph type="sldImg"/>
+          </p:nvPr>
+        </p:nvSpPr>
+        <p:spPr/>
+      </p:sp>
+      <p:sp>
+        <p:nvSpPr>
+          <p:cNvPr id="3" name="Notes Placeholder 2"/>
+          <p:cNvSpPr>
+            <a:spLocks noGrp="1"/>
+          </p:cNvSpPr>
+          <p:nvPr>
+            <p:ph type="body" idx="1"/>
+          </p:nvPr>
+        </p:nvSpPr>
+        <p:spPr/>
+        <p:txBody>
+          <a:bodyPr/>
+          <a:lstStyle/>
+          <a:p>
+            <a:r>
+              <a:rPr lang="en-US" dirty="0"/>
+              <a:t>References and Resources
+OMB Memorandum M-24-10 on federal AI governance, risk management, and innovation, where relevant to public-sector governance models
+Agency strategic plans, procurement policies, privacy policies, cybersecurity policies, records policies, and equity plans</a:t>
+            </a:r>
+            <a:endParaRPr lang="en-US" dirty="0"/>
+          </a:p>
+        </p:txBody>
+      </p:sp>
+      <p:sp>
+        <p:nvSpPr>
+          <p:cNvPr id="4" name="Slide Number Placeholder 3"/>
+          <p:cNvSpPr>
+            <a:spLocks noGrp="1"/>
+          </p:cNvSpPr>
+          <p:nvPr>
+            <p:ph type="sldNum" sz="quarter" idx="10"/>
+          </p:nvPr>
+        </p:nvSpPr>
+        <p:spPr/>
+        <p:txBody>
+          <a:bodyPr/>
+          <a:lstStyle/>
+          <a:p>
+            <a:fld id="{F7021451-1387-4CA6-816F-3879F97B5CBC}" type="slidenum">
+              <a:rPr lang="en-US"/>
+              <a:t>21</a:t>
+            </a:fld>
+            <a:endParaRPr lang="en-US"/>
+          </a:p>
+        </p:txBody>
+      </p:sp>
+    </p:spTree>
+    <p:extLst>
+      <p:ext uri="{BB962C8B-B14F-4D97-AF65-F5344CB8AC3E}">
+        <p14:creationId xmlns:p14="http://schemas.microsoft.com/office/powerpoint/2010/main" val="1024086991"/>
+      </p:ext>
+    </p:extLst>
+  </p:cSld>
+  <p:clrMapOvr>
+    <a:masterClrMapping/>
+  </p:clrMapOvr>
+</p:notes>
+</file>
+
 <file path=ppt/notesSlides/notesSlide3.xml><?xml version="1.0" encoding="utf-8"?>
 <p:notes xmlns:a="http://schemas.openxmlformats.org/drawingml/2006/main" xmlns:r="http://schemas.openxmlformats.org/officeDocument/2006/relationships" xmlns:p="http://schemas.openxmlformats.org/presentationml/2006/main">
   <p:cSld>
@@ -1603,12 +1786,11 @@
           <a:p>
             <a:r>
               <a:rPr lang="en-US" dirty="0"/>
-              <a:t>Learning Objectives
-Explain the difference between risk appetite, risk tolerance, and risk acceptance.
-Identify AI uses that may be low, moderate, high, or unacceptable risk in a public health context.
-Develop risk tolerance statements for different AI use categories.
-Connect risk tolerance to review level, safeguards, monitoring, and escalation.
-Produce a draft AI risk appetite statement for leadership or governance discussion.</a:t>
+              <a:t>Related Playbook Plays
+Play 11: Build and Deploy AI Solutions - This lesson informs Play 11 by helping learners connect the lesson topic to build and deploy ai solutions work in the AI Playbook.
+Play 7: Prioritize Use Cases - This lesson informs Play 7 by helping learners connect the lesson topic to prioritize use cases work in the AI Playbook sequence.
+Play 1: Vision &amp; Guardrails - This lesson informs Play 1 by helping learners connect the lesson topic to vision &amp; guardrails work in the AI Playbook sequence.
+Play 3: Establish AI Governance - This lesson informs Play 3 by helping learners connect the lesson topic to establish ai governance work in the AI Playbook sequence.</a:t>
             </a:r>
             <a:endParaRPr lang="en-US" dirty="0"/>
           </a:p>
@@ -1696,9 +1878,13 @@
           <a:p>
             <a:r>
               <a:rPr lang="en-US" dirty="0"/>
-              <a:t>Module Overview
-Leaders cannot manage AI risk effectively unless they define how much risk the agency is willing to accept for different types of use. Risk appetite describes the broad level of risk an organization is willing to take in pursuit of its mission. Risk tolerance translates that appetite into practical thresholds, conditions, and limits for specific AI uses.
-This module helps public health leaders define AI risk appetite in a way that reflects public health authority, community trust, legal obligations, health equity, privacy, safety, and operational needs. The goal is not to eliminate all risk. The goal is to make risk decisions explicit, proportionate, documented, and aligned with public health values.</a:t>
+              <a:t>Related Toolkit Resources
+Tool 1: AI Vision &amp; Principles Workshop (Workshop) - Use AI Vision &amp; Principles Workshop to translate this lesson into a documented public health AI planning, governance,.
+Tool 3: Equity Impact Assessment Checklist (Checklist) - Use this tool to complete or strengthen the practical exercise for the module using fictional, de-identified, or generalized.
+Tool 4: AI Policy Landscape Scan (Worksheet) - Use AI Policy Landscape Scan to translate this lesson into a documented public health AI planning, governance, implementation,.
+Tool 5: AI Environmental and Resource Impact Review (Checklist) - Use AI Environmental and Resource Impact Review to translate this lesson into a documented public health AI planning,.
+Tool 6: Human-Centered AI Decision Rule Checklist (Checklist) - Use Human-Centered AI Decision Rule Checklist to translate this lesson into a documented public health AI planning, governance,.
+Tool 8: AI Project Charter (Planning) - Use AI Project Charter to translate this lesson into a documented public health AI planning, governance, implementation, or.</a:t>
             </a:r>
             <a:endParaRPr lang="en-US" dirty="0"/>
           </a:p>
@@ -1786,8 +1972,12 @@
           <a:p>
             <a:r>
               <a:rPr lang="en-US" dirty="0"/>
-              <a:t>Jurisdiction and Agency Policy Note
-This module provides national-level training guidance for public health agencies and partners. It is not legal advice and does not replace review by agency legal counsel, privacy officers, procurement officials, civil rights staff, records officers, or other authorized decision-makers. Requirements may vary by state, locality, territory, Tribe, agency, funding source, data-sharing agreement, emergency authority, and organizational policy. Learners should use this module to identify the issues that require review and should confirm applicable requirements before approving, procuring, deploying, or publicly communicating about AI-supported work.</a:t>
+              <a:t>Learning Objectives
+Explain the difference between risk appetite, risk tolerance, and risk acceptance.
+Identify AI uses that may be low, moderate, high, or unacceptable risk in a public health context.
+Develop risk tolerance statements for different AI use categories.
+Connect risk tolerance to review level, safeguards, monitoring, and escalation.
+Produce a draft AI risk appetite statement for leadership or governance discussion.</a:t>
             </a:r>
             <a:endParaRPr lang="en-US" dirty="0"/>
           </a:p>
@@ -1875,9 +2065,9 @@
           <a:p>
             <a:r>
               <a:rPr lang="en-US" dirty="0"/>
-              <a:t>Why This Topic Matters for Public Health AI
-Public health agencies make risk decisions every day, but AI can make those decisions less visible. A generative AI tool might be acceptable for drafting internal meeting notes but not for producing unsupervised public health guidance. A predictive model might be acceptable for planning staffing levels but not for denying services. An agentic workflow might be acceptable for creating a draft task but not for sending an enforcement notice without human approval.
-Risk appetite helps agencies explain these distinctions. It provides a leadership-level statement of where the agency encourages innovation, where it requires caution, and where it prohibits use. It also helps staff understand that responsible AI is not a binary choice between adoption and avoidance. It is a disciplined process for matching safeguards to risk.</a:t>
+              <a:t>Module Overview
+Leaders cannot manage AI risk effectively unless they define how much risk the agency is willing to accept for different types of use. Risk appetite describes the broad level of risk an organization is willing to take in pursuit of its mission. Risk tolerance translates that appetite into practical thresholds, conditions, and limits for specific AI uses.
+This module helps public health leaders define AI risk appetite in a way that reflects public health authority, community trust, legal obligations, health equity, privacy, safety, and operational needs. The goal is not to eliminate all risk. The goal is to make risk decisions explicit, proportionate, documented, and aligned with public health values.</a:t>
             </a:r>
             <a:endParaRPr lang="en-US" dirty="0"/>
           </a:p>
@@ -1965,9 +2155,8 @@
           <a:p>
             <a:r>
               <a:rPr lang="en-US" dirty="0"/>
-              <a:t>Public Health Example
-An agency may define a higher risk appetite for internal administrative uses that do not involve sensitive data, public communication, or public health action. It may define a moderate appetite for staff-facing decision support when human review, validation, and documentation are required. It may define a very low appetite for unsupervised public-facing advice, automated eligibility decisions, enforcement actions, or tools that process sensitive data without approved safeguards.
-These statements help governance reviewers make consistent decisions. Instead of debating each proposal from the beginning, reviewers can ask whether the proposed use fits the agency's defined risk category and whether required safeguards are present. The discussion becomes more disciplined and less dependent on individual comfort with AI.</a:t>
+              <a:t>Jurisdiction and Agency Policy Note
+This module provides national-level training guidance for public health agencies and partners. It is not legal advice and does not replace review by agency legal counsel, privacy officers, procurement officials, civil rights staff, records officers, or other authorized decision-makers. Requirements may vary by state, locality, territory, Tribe, agency, funding source, data-sharing agreement, emergency authority, and organizational policy. Learners should use this module to identify the issues that require review and should confirm applicable requirements before approving, procuring, deploying, or publicly communicating about AI-supported work.</a:t>
             </a:r>
             <a:endParaRPr lang="en-US" dirty="0"/>
           </a:p>
@@ -2055,10 +2244,9 @@
           <a:p>
             <a:r>
               <a:rPr lang="en-US" dirty="0"/>
-              <a:t>Technical and Governance Deep Dive
-Risk appetite should be expressed in plain language and translated into operating rules. For example, an agency might state that it encourages low-risk AI uses that reduce internal administrative burden when no sensitive data are used and outputs are reviewed by staff. It might state that it will consider moderate-risk uses involving operational data only with documented validation, access controls, human review, and monitoring. It might state that it does not permit AI to make final public health enforcement, eligibility, or legal decisions without authorized human review.
-Risk tolerance turns these statements into thresholds. A tolerance may specify that a tool cannot be launched if source traceability is absent, if subgroup performance cannot be assessed for a prioritization model, if the false negative rate exceeds a defined threshold, or if the vendor cannot provide adequate documentation. Tolerances should be appropriate to the use case. A lower threshold may be acceptable for internal drafting than for case triage.
-Risk appetite should be reviewed regularly. Public expectations, laws, model capabilities, agency experience, and technical safeguards change over time. A use that was too risky during the first year of AI adoption may become acceptable after better infrastructure, policies, and monitoring are in place. Conversely, a use may become unacceptable if incidents, evidence, or community concerns reveal new harms.</a:t>
+              <a:t>Why This Topic Matters for Public Health AI
+Public health agencies make risk decisions every day, but AI can make those decisions less visible. A generative AI tool might be acceptable for drafting internal meeting notes but not for producing unsupervised public health guidance. A predictive model might be acceptable for planning staffing levels but not for denying services. An agentic workflow might be acceptable for creating a draft task but not for sending an enforcement notice without human approval.
+Risk appetite helps agencies explain these distinctions. It provides a leadership-level statement of where the agency encourages innovation, where it requires caution, and where it prohibits use. It also helps staff understand that responsible AI is not a binary choice between adoption and avoidance. It is a disciplined process for matching safeguards to risk.</a:t>
             </a:r>
             <a:endParaRPr lang="en-US" dirty="0"/>
           </a:p>
@@ -2146,9 +2334,9 @@
           <a:p>
             <a:r>
               <a:rPr lang="en-US" dirty="0"/>
-              <a:t>Risks, Failure Modes, and Guardrails
-A common failure mode is vague risk language. Phrases like 'use AI responsibly' do not help staff decide what is allowed. A guardrail is to define concrete examples of encouraged, conditional, restricted, and prohibited uses.
-Another risk is risk appetite that ignores equity. A tool may appear operationally useful while shifting burden to communities that are already underrepresented or over-surveilled. A guardrail is to require equity impact review for uses that affect prioritization, access, enforcement, communication, or resource allocation.</a:t>
+              <a:t>Public Health Example
+An agency may define a higher risk appetite for internal administrative uses that do not involve sensitive data, public communication, or public health action. It may define a moderate appetite for staff-facing decision support when human review, validation, and documentation are required. It may define a very low appetite for unsupervised public-facing advice, automated eligibility decisions, enforcement actions, or tools that process sensitive data without approved safeguards.
+These statements help governance reviewers make consistent decisions. Instead of debating each proposal from the beginning, reviewers can ask whether the proposed use fits the agency's defined risk category and whether required safeguards are present. The discussion becomes more disciplined and less dependent on individual comfort with AI.</a:t>
             </a:r>
             <a:endParaRPr lang="en-US" dirty="0"/>
           </a:p>
@@ -2771,7 +2959,32 @@
       </p:sp>
       <p:sp>
         <p:nvSpPr>
-          <p:cNvPr id="3" name="Text 1"/>
+          <p:cNvPr id="3" name="Shape 1"/>
+          <p:cNvSpPr/>
+          <p:nvPr/>
+        </p:nvSpPr>
+        <p:spPr>
+          <a:xfrm>
+            <a:off x="0" y="164592"/>
+            <a:ext cx="146304" cy="6693408"/>
+          </a:xfrm>
+          <a:prstGeom prst="rect">
+            <a:avLst/>
+          </a:prstGeom>
+          <a:solidFill>
+            <a:srgbClr val="2F8A28"/>
+          </a:solidFill>
+          <a:ln w="12700">
+            <a:solidFill>
+              <a:srgbClr val="2F8A28"/>
+            </a:solidFill>
+            <a:prstDash val="solid"/>
+          </a:ln>
+        </p:spPr>
+      </p:sp>
+      <p:sp>
+        <p:nvSpPr>
+          <p:cNvPr id="4" name="Text 2"/>
           <p:cNvSpPr/>
           <p:nvPr/>
         </p:nvSpPr>
@@ -2810,7 +3023,7 @@
       </p:sp>
       <p:sp>
         <p:nvSpPr>
-          <p:cNvPr id="4" name="Text 2"/>
+          <p:cNvPr id="5" name="Text 3"/>
           <p:cNvSpPr/>
           <p:nvPr/>
         </p:nvSpPr>
@@ -2849,7 +3062,7 @@
       </p:sp>
       <p:sp>
         <p:nvSpPr>
-          <p:cNvPr id="5" name="Text 3"/>
+          <p:cNvPr id="6" name="Text 4"/>
           <p:cNvSpPr/>
           <p:nvPr/>
         </p:nvSpPr>
@@ -2888,13 +3101,77 @@
       </p:sp>
       <p:sp>
         <p:nvSpPr>
-          <p:cNvPr id="6" name="Text 4"/>
+          <p:cNvPr id="7" name="Shape 5"/>
           <p:cNvSpPr/>
           <p:nvPr/>
         </p:nvSpPr>
         <p:spPr>
           <a:xfrm>
             <a:off x="640080" y="658368"/>
+            <a:ext cx="420624" cy="420624"/>
+          </a:xfrm>
+          <a:prstGeom prst="ellipse">
+            <a:avLst/>
+          </a:prstGeom>
+          <a:solidFill>
+            <a:srgbClr val="0068B7"/>
+          </a:solidFill>
+          <a:ln w="12700">
+            <a:solidFill>
+              <a:srgbClr val="0068B7"/>
+            </a:solidFill>
+            <a:prstDash val="solid"/>
+          </a:ln>
+        </p:spPr>
+      </p:sp>
+      <p:sp>
+        <p:nvSpPr>
+          <p:cNvPr id="8" name="Text 6"/>
+          <p:cNvSpPr/>
+          <p:nvPr/>
+        </p:nvSpPr>
+        <p:spPr>
+          <a:xfrm>
+            <a:off x="640080" y="731520"/>
+            <a:ext cx="420624" cy="164592"/>
+          </a:xfrm>
+          <a:prstGeom prst="rect">
+            <a:avLst/>
+          </a:prstGeom>
+          <a:noFill/>
+          <a:ln/>
+        </p:spPr>
+        <p:txBody>
+          <a:bodyPr wrap="square" lIns="0" tIns="0" rIns="0" bIns="0" rtlCol="0" anchor="ctr"/>
+          <a:lstStyle/>
+          <a:p>
+            <a:pPr algn="ctr" indent="0" marL="0">
+              <a:buNone/>
+            </a:pPr>
+            <a:r>
+              <a:rPr lang="en-US" sz="1100" b="1" dirty="0">
+                <a:solidFill>
+                  <a:srgbClr val="FFFFFF"/>
+                </a:solidFill>
+                <a:latin typeface="Aptos" pitchFamily="34" charset="0"/>
+                <a:ea typeface="Aptos" pitchFamily="34" charset="-122"/>
+                <a:cs typeface="Aptos" pitchFamily="34" charset="-120"/>
+              </a:rPr>
+              <a:t>6</a:t>
+            </a:r>
+            <a:endParaRPr lang="en-US" sz="1100" dirty="0"/>
+          </a:p>
+        </p:txBody>
+      </p:sp>
+      <p:sp>
+        <p:nvSpPr>
+          <p:cNvPr id="9" name="Text 7"/>
+          <p:cNvSpPr/>
+          <p:nvPr/>
+        </p:nvSpPr>
+        <p:spPr>
+          <a:xfrm>
+            <a:off x="640080" y="621792"/>
             <a:ext cx="10881360" cy="566928"/>
           </a:xfrm>
           <a:prstGeom prst="rect">
@@ -2921,7 +3198,7 @@
                 <a:ea typeface="Aptos Display" pitchFamily="34" charset="-122"/>
                 <a:cs typeface="Aptos Display" pitchFamily="34" charset="-120"/>
               </a:rPr>
-              <a:t>Application to AI-Supported Workflows</a:t>
+              <a:t>Technical and Governance Deep Dive</a:t>
             </a:r>
             <a:endParaRPr lang="en-US" sz="2700" dirty="0"/>
           </a:p>
@@ -2929,32 +3206,178 @@
       </p:sp>
       <p:sp>
         <p:nvSpPr>
-          <p:cNvPr id="7" name="Text 5"/>
-          <p:cNvSpPr/>
-          <p:nvPr/>
-        </p:nvSpPr>
-        <p:spPr>
-          <a:xfrm>
-            <a:off x="822960" y="1325880"/>
-            <a:ext cx="10378440" cy="4800600"/>
-          </a:xfrm>
-          <a:prstGeom prst="rect">
-            <a:avLst/>
-          </a:prstGeom>
-          <a:noFill/>
-          <a:ln/>
-        </p:spPr>
-        <p:txBody>
-          <a:bodyPr wrap="square" lIns="1016" tIns="1016" rIns="1016" bIns="1016" rtlCol="0" anchor="t">
+          <p:cNvPr id="10" name="Text 8"/>
+          <p:cNvSpPr/>
+          <p:nvPr/>
+        </p:nvSpPr>
+        <p:spPr>
+          <a:xfrm>
+            <a:off x="868680" y="1417320"/>
+            <a:ext cx="6675120" cy="4434840"/>
+          </a:xfrm>
+          <a:prstGeom prst="rect">
+            <a:avLst/>
+          </a:prstGeom>
+          <a:noFill/>
+          <a:ln/>
+        </p:spPr>
+        <p:txBody>
+          <a:bodyPr wrap="square" lIns="635" tIns="635" rIns="635" bIns="635" rtlCol="0" anchor="t">
             <a:normAutofit/>
           </a:bodyPr>
           <a:lstStyle/>
           <a:p>
+            <a:r>
+              <a:rPr lang="en-US" sz="1700" dirty="0">
+                <a:solidFill>
+                  <a:srgbClr val="17364A"/>
+                </a:solidFill>
+                <a:latin typeface="Aptos" pitchFamily="34" charset="0"/>
+                <a:ea typeface="Aptos" pitchFamily="34" charset="-122"/>
+                <a:cs typeface="Aptos" pitchFamily="34" charset="-120"/>
+              </a:rPr>
+              <a:t>Risk appetite should be expressed in plain language and translated into operating rules.</a:t>
+            </a:r>
+            <a:endParaRPr lang="en-US" sz="1700" dirty="0"/>
+          </a:p>
+          <a:p>
+            <a:r>
+              <a:rPr lang="en-US" sz="1700" dirty="0">
+                <a:solidFill>
+                  <a:srgbClr val="17364A"/>
+                </a:solidFill>
+                <a:latin typeface="Aptos" pitchFamily="34" charset="0"/>
+                <a:ea typeface="Aptos" pitchFamily="34" charset="-122"/>
+                <a:cs typeface="Aptos" pitchFamily="34" charset="-120"/>
+              </a:rPr>
+              <a:t>For example, an agency might state that it encourages low-risk AI uses that reduce internal administrative burden when no.</a:t>
+            </a:r>
+            <a:endParaRPr lang="en-US" sz="1700" dirty="0"/>
+          </a:p>
+          <a:p>
+            <a:r>
+              <a:rPr lang="en-US" sz="1700" dirty="0">
+                <a:solidFill>
+                  <a:srgbClr val="17364A"/>
+                </a:solidFill>
+                <a:latin typeface="Aptos" pitchFamily="34" charset="0"/>
+                <a:ea typeface="Aptos" pitchFamily="34" charset="-122"/>
+                <a:cs typeface="Aptos" pitchFamily="34" charset="-120"/>
+              </a:rPr>
+              <a:t>It might state that it will consider moderate-risk uses involving operational data only with documented validation, access.</a:t>
+            </a:r>
+            <a:endParaRPr lang="en-US" sz="1700" dirty="0"/>
+          </a:p>
+          <a:p>
+            <a:r>
+              <a:rPr lang="en-US" sz="1700" dirty="0">
+                <a:solidFill>
+                  <a:srgbClr val="17364A"/>
+                </a:solidFill>
+                <a:latin typeface="Aptos" pitchFamily="34" charset="0"/>
+                <a:ea typeface="Aptos" pitchFamily="34" charset="-122"/>
+                <a:cs typeface="Aptos" pitchFamily="34" charset="-120"/>
+              </a:rPr>
+              <a:t>It might state that it does not permit AI to make final public health enforcement, eligibility, or legal decisions without.</a:t>
+            </a:r>
+            <a:endParaRPr lang="en-US" sz="1700" dirty="0"/>
+          </a:p>
+        </p:txBody>
+      </p:sp>
+      <p:sp>
+        <p:nvSpPr>
+          <p:cNvPr id="11" name="Shape 9"/>
+          <p:cNvSpPr/>
+          <p:nvPr/>
+        </p:nvSpPr>
+        <p:spPr>
+          <a:xfrm>
+            <a:off x="7909560" y="1417320"/>
+            <a:ext cx="3154680" cy="1828800"/>
+          </a:xfrm>
+          <a:prstGeom prst="roundRect">
+            <a:avLst>
+              <a:gd name="adj" fmla="val 6000"/>
+            </a:avLst>
+          </a:prstGeom>
+          <a:solidFill>
+            <a:srgbClr val="EEF8ED"/>
+          </a:solidFill>
+          <a:ln w="12700">
+            <a:solidFill>
+              <a:srgbClr val="B9D7E6"/>
+            </a:solidFill>
+            <a:prstDash val="solid"/>
+          </a:ln>
+        </p:spPr>
+      </p:sp>
+      <p:sp>
+        <p:nvSpPr>
+          <p:cNvPr id="12" name="Text 10"/>
+          <p:cNvSpPr/>
+          <p:nvPr/>
+        </p:nvSpPr>
+        <p:spPr>
+          <a:xfrm>
+            <a:off x="8074152" y="1563624"/>
+            <a:ext cx="2825496" cy="201168"/>
+          </a:xfrm>
+          <a:prstGeom prst="rect">
+            <a:avLst/>
+          </a:prstGeom>
+          <a:noFill/>
+          <a:ln/>
+        </p:spPr>
+        <p:txBody>
+          <a:bodyPr wrap="square" lIns="0" tIns="0" rIns="0" bIns="0" rtlCol="0" anchor="ctr"/>
+          <a:lstStyle/>
+          <a:p>
             <a:pPr indent="0" marL="0">
               <a:buNone/>
             </a:pPr>
             <a:r>
-              <a:rPr lang="en-US" sz="1420" dirty="0">
+              <a:rPr lang="en-US" sz="950" b="1" dirty="0">
+                <a:solidFill>
+                  <a:srgbClr val="0068B7"/>
+                </a:solidFill>
+                <a:latin typeface="Aptos" pitchFamily="34" charset="0"/>
+                <a:ea typeface="Aptos" pitchFamily="34" charset="-122"/>
+                <a:cs typeface="Aptos" pitchFamily="34" charset="-120"/>
+              </a:rPr>
+              <a:t>Key idea</a:t>
+            </a:r>
+            <a:endParaRPr lang="en-US" sz="950" dirty="0"/>
+          </a:p>
+        </p:txBody>
+      </p:sp>
+      <p:sp>
+        <p:nvSpPr>
+          <p:cNvPr id="13" name="Text 11"/>
+          <p:cNvSpPr/>
+          <p:nvPr/>
+        </p:nvSpPr>
+        <p:spPr>
+          <a:xfrm>
+            <a:off x="8074152" y="1856232"/>
+            <a:ext cx="2825496" cy="1261872"/>
+          </a:xfrm>
+          <a:prstGeom prst="rect">
+            <a:avLst/>
+          </a:prstGeom>
+          <a:noFill/>
+          <a:ln/>
+        </p:spPr>
+        <p:txBody>
+          <a:bodyPr wrap="square" lIns="0" tIns="0" rIns="0" bIns="0" rtlCol="0" anchor="t">
+            <a:normAutofit/>
+          </a:bodyPr>
+          <a:lstStyle/>
+          <a:p>
+            <a:pPr indent="0" marL="0">
+              <a:buNone/>
+            </a:pPr>
+            <a:r>
+              <a:rPr lang="en-US" sz="1250" dirty="0">
                 <a:solidFill>
                   <a:srgbClr val="17364A"/>
                 </a:solidFill>
@@ -2962,9 +3385,116 @@
                 <a:ea typeface="Aptos" pitchFamily="34" charset="-122"/>
                 <a:cs typeface="Aptos" pitchFamily="34" charset="-120"/>
               </a:rPr>
-              <a:t>Risk appetite applies differently across AI types. Generative AI for internal drafting may fall into a lower-risk category when reviewed by humans. Predictive models used for prioritization require stronger validation and monitoring. Agentic tools that can take system actions require strict limits, stop authority, and auditability. Risk appetite helps define these boundaries in advance.</a:t>
-            </a:r>
-            <a:endParaRPr lang="en-US" sz="1420" dirty="0"/>
+              <a:t>Risk appetite should be expressed in plain language and translated into operating rules.</a:t>
+            </a:r>
+            <a:endParaRPr lang="en-US" sz="1250" dirty="0"/>
+          </a:p>
+        </p:txBody>
+      </p:sp>
+      <p:sp>
+        <p:nvSpPr>
+          <p:cNvPr id="14" name="Shape 12"/>
+          <p:cNvSpPr/>
+          <p:nvPr/>
+        </p:nvSpPr>
+        <p:spPr>
+          <a:xfrm>
+            <a:off x="7909560" y="3520440"/>
+            <a:ext cx="3154680" cy="1737360"/>
+          </a:xfrm>
+          <a:prstGeom prst="roundRect">
+            <a:avLst>
+              <a:gd name="adj" fmla="val 6316"/>
+            </a:avLst>
+          </a:prstGeom>
+          <a:solidFill>
+            <a:srgbClr val="EAF6F8"/>
+          </a:solidFill>
+          <a:ln w="12700">
+            <a:solidFill>
+              <a:srgbClr val="B9D7E6"/>
+            </a:solidFill>
+            <a:prstDash val="solid"/>
+          </a:ln>
+        </p:spPr>
+      </p:sp>
+      <p:sp>
+        <p:nvSpPr>
+          <p:cNvPr id="15" name="Text 13"/>
+          <p:cNvSpPr/>
+          <p:nvPr/>
+        </p:nvSpPr>
+        <p:spPr>
+          <a:xfrm>
+            <a:off x="8074152" y="3666744"/>
+            <a:ext cx="2825496" cy="201168"/>
+          </a:xfrm>
+          <a:prstGeom prst="rect">
+            <a:avLst/>
+          </a:prstGeom>
+          <a:noFill/>
+          <a:ln/>
+        </p:spPr>
+        <p:txBody>
+          <a:bodyPr wrap="square" lIns="0" tIns="0" rIns="0" bIns="0" rtlCol="0" anchor="ctr"/>
+          <a:lstStyle/>
+          <a:p>
+            <a:pPr indent="0" marL="0">
+              <a:buNone/>
+            </a:pPr>
+            <a:r>
+              <a:rPr lang="en-US" sz="950" b="1" dirty="0">
+                <a:solidFill>
+                  <a:srgbClr val="0068B7"/>
+                </a:solidFill>
+                <a:latin typeface="Aptos" pitchFamily="34" charset="0"/>
+                <a:ea typeface="Aptos" pitchFamily="34" charset="-122"/>
+                <a:cs typeface="Aptos" pitchFamily="34" charset="-120"/>
+              </a:rPr>
+              <a:t>Use this for</a:t>
+            </a:r>
+            <a:endParaRPr lang="en-US" sz="950" dirty="0"/>
+          </a:p>
+        </p:txBody>
+      </p:sp>
+      <p:sp>
+        <p:nvSpPr>
+          <p:cNvPr id="16" name="Text 14"/>
+          <p:cNvSpPr/>
+          <p:nvPr/>
+        </p:nvSpPr>
+        <p:spPr>
+          <a:xfrm>
+            <a:off x="8074152" y="3959352"/>
+            <a:ext cx="2825496" cy="1170432"/>
+          </a:xfrm>
+          <a:prstGeom prst="rect">
+            <a:avLst/>
+          </a:prstGeom>
+          <a:noFill/>
+          <a:ln/>
+        </p:spPr>
+        <p:txBody>
+          <a:bodyPr wrap="square" lIns="0" tIns="0" rIns="0" bIns="0" rtlCol="0" anchor="t">
+            <a:normAutofit/>
+          </a:bodyPr>
+          <a:lstStyle/>
+          <a:p>
+            <a:pPr indent="0" marL="0">
+              <a:buNone/>
+            </a:pPr>
+            <a:r>
+              <a:rPr lang="en-US" sz="1250" dirty="0">
+                <a:solidFill>
+                  <a:srgbClr val="17364A"/>
+                </a:solidFill>
+                <a:latin typeface="Aptos" pitchFamily="34" charset="0"/>
+                <a:ea typeface="Aptos" pitchFamily="34" charset="-122"/>
+                <a:cs typeface="Aptos" pitchFamily="34" charset="-120"/>
+              </a:rPr>
+              <a:t>Connect the concept to public health decisions, safeguards, documentation, or implementation work.</a:t>
+            </a:r>
+            <a:endParaRPr lang="en-US" sz="1250" dirty="0"/>
           </a:p>
         </p:txBody>
       </p:sp>
@@ -3027,7 +3557,32 @@
       </p:sp>
       <p:sp>
         <p:nvSpPr>
-          <p:cNvPr id="3" name="Text 1"/>
+          <p:cNvPr id="3" name="Shape 1"/>
+          <p:cNvSpPr/>
+          <p:nvPr/>
+        </p:nvSpPr>
+        <p:spPr>
+          <a:xfrm>
+            <a:off x="0" y="164592"/>
+            <a:ext cx="146304" cy="6693408"/>
+          </a:xfrm>
+          <a:prstGeom prst="rect">
+            <a:avLst/>
+          </a:prstGeom>
+          <a:solidFill>
+            <a:srgbClr val="2F8A28"/>
+          </a:solidFill>
+          <a:ln w="12700">
+            <a:solidFill>
+              <a:srgbClr val="2F8A28"/>
+            </a:solidFill>
+            <a:prstDash val="solid"/>
+          </a:ln>
+        </p:spPr>
+      </p:sp>
+      <p:sp>
+        <p:nvSpPr>
+          <p:cNvPr id="4" name="Text 2"/>
           <p:cNvSpPr/>
           <p:nvPr/>
         </p:nvSpPr>
@@ -3066,7 +3621,7 @@
       </p:sp>
       <p:sp>
         <p:nvSpPr>
-          <p:cNvPr id="4" name="Text 2"/>
+          <p:cNvPr id="5" name="Text 3"/>
           <p:cNvSpPr/>
           <p:nvPr/>
         </p:nvSpPr>
@@ -3105,7 +3660,7 @@
       </p:sp>
       <p:sp>
         <p:nvSpPr>
-          <p:cNvPr id="5" name="Text 3"/>
+          <p:cNvPr id="6" name="Text 4"/>
           <p:cNvSpPr/>
           <p:nvPr/>
         </p:nvSpPr>
@@ -3144,13 +3699,77 @@
       </p:sp>
       <p:sp>
         <p:nvSpPr>
-          <p:cNvPr id="6" name="Text 4"/>
+          <p:cNvPr id="7" name="Shape 5"/>
           <p:cNvSpPr/>
           <p:nvPr/>
         </p:nvSpPr>
         <p:spPr>
           <a:xfrm>
             <a:off x="640080" y="658368"/>
+            <a:ext cx="420624" cy="420624"/>
+          </a:xfrm>
+          <a:prstGeom prst="ellipse">
+            <a:avLst/>
+          </a:prstGeom>
+          <a:solidFill>
+            <a:srgbClr val="0068B7"/>
+          </a:solidFill>
+          <a:ln w="12700">
+            <a:solidFill>
+              <a:srgbClr val="0068B7"/>
+            </a:solidFill>
+            <a:prstDash val="solid"/>
+          </a:ln>
+        </p:spPr>
+      </p:sp>
+      <p:sp>
+        <p:nvSpPr>
+          <p:cNvPr id="8" name="Text 6"/>
+          <p:cNvSpPr/>
+          <p:nvPr/>
+        </p:nvSpPr>
+        <p:spPr>
+          <a:xfrm>
+            <a:off x="640080" y="731520"/>
+            <a:ext cx="420624" cy="164592"/>
+          </a:xfrm>
+          <a:prstGeom prst="rect">
+            <a:avLst/>
+          </a:prstGeom>
+          <a:noFill/>
+          <a:ln/>
+        </p:spPr>
+        <p:txBody>
+          <a:bodyPr wrap="square" lIns="0" tIns="0" rIns="0" bIns="0" rtlCol="0" anchor="ctr"/>
+          <a:lstStyle/>
+          <a:p>
+            <a:pPr algn="ctr" indent="0" marL="0">
+              <a:buNone/>
+            </a:pPr>
+            <a:r>
+              <a:rPr lang="en-US" sz="1100" b="1" dirty="0">
+                <a:solidFill>
+                  <a:srgbClr val="FFFFFF"/>
+                </a:solidFill>
+                <a:latin typeface="Aptos" pitchFamily="34" charset="0"/>
+                <a:ea typeface="Aptos" pitchFamily="34" charset="-122"/>
+                <a:cs typeface="Aptos" pitchFamily="34" charset="-120"/>
+              </a:rPr>
+              <a:t>7</a:t>
+            </a:r>
+            <a:endParaRPr lang="en-US" sz="1100" dirty="0"/>
+          </a:p>
+        </p:txBody>
+      </p:sp>
+      <p:sp>
+        <p:nvSpPr>
+          <p:cNvPr id="9" name="Text 7"/>
+          <p:cNvSpPr/>
+          <p:nvPr/>
+        </p:nvSpPr>
+        <p:spPr>
+          <a:xfrm>
+            <a:off x="640080" y="621792"/>
             <a:ext cx="10881360" cy="566928"/>
           </a:xfrm>
           <a:prstGeom prst="rect">
@@ -3177,7 +3796,7 @@
                 <a:ea typeface="Aptos Display" pitchFamily="34" charset="-122"/>
                 <a:cs typeface="Aptos Display" pitchFamily="34" charset="-120"/>
               </a:rPr>
-              <a:t>Reflection Questions</a:t>
+              <a:t>Risks, Failure Modes, and Guardrails</a:t>
             </a:r>
             <a:endParaRPr lang="en-US" sz="2700" dirty="0"/>
           </a:p>
@@ -3185,32 +3804,178 @@
       </p:sp>
       <p:sp>
         <p:nvSpPr>
-          <p:cNvPr id="7" name="Text 5"/>
-          <p:cNvSpPr/>
-          <p:nvPr/>
-        </p:nvSpPr>
-        <p:spPr>
-          <a:xfrm>
-            <a:off x="822960" y="1325880"/>
-            <a:ext cx="10378440" cy="4800600"/>
-          </a:xfrm>
-          <a:prstGeom prst="rect">
-            <a:avLst/>
-          </a:prstGeom>
-          <a:noFill/>
-          <a:ln/>
-        </p:spPr>
-        <p:txBody>
-          <a:bodyPr wrap="square" lIns="1016" tIns="1016" rIns="1016" bIns="1016" rtlCol="0" anchor="t">
+          <p:cNvPr id="10" name="Text 8"/>
+          <p:cNvSpPr/>
+          <p:nvPr/>
+        </p:nvSpPr>
+        <p:spPr>
+          <a:xfrm>
+            <a:off x="868680" y="1417320"/>
+            <a:ext cx="6675120" cy="4434840"/>
+          </a:xfrm>
+          <a:prstGeom prst="rect">
+            <a:avLst/>
+          </a:prstGeom>
+          <a:noFill/>
+          <a:ln/>
+        </p:spPr>
+        <p:txBody>
+          <a:bodyPr wrap="square" lIns="635" tIns="635" rIns="635" bIns="635" rtlCol="0" anchor="t">
             <a:normAutofit/>
           </a:bodyPr>
           <a:lstStyle/>
           <a:p>
+            <a:r>
+              <a:rPr lang="en-US" sz="1700" dirty="0">
+                <a:solidFill>
+                  <a:srgbClr val="17364A"/>
+                </a:solidFill>
+                <a:latin typeface="Aptos" pitchFamily="34" charset="0"/>
+                <a:ea typeface="Aptos" pitchFamily="34" charset="-122"/>
+                <a:cs typeface="Aptos" pitchFamily="34" charset="-120"/>
+              </a:rPr>
+              <a:t>A common failure mode is vague risk language.</a:t>
+            </a:r>
+            <a:endParaRPr lang="en-US" sz="1700" dirty="0"/>
+          </a:p>
+          <a:p>
+            <a:r>
+              <a:rPr lang="en-US" sz="1700" dirty="0">
+                <a:solidFill>
+                  <a:srgbClr val="17364A"/>
+                </a:solidFill>
+                <a:latin typeface="Aptos" pitchFamily="34" charset="0"/>
+                <a:ea typeface="Aptos" pitchFamily="34" charset="-122"/>
+                <a:cs typeface="Aptos" pitchFamily="34" charset="-120"/>
+              </a:rPr>
+              <a:t>Phrases like 'use AI responsibly' do not help staff decide what is allowed.</a:t>
+            </a:r>
+            <a:endParaRPr lang="en-US" sz="1700" dirty="0"/>
+          </a:p>
+          <a:p>
+            <a:r>
+              <a:rPr lang="en-US" sz="1700" dirty="0">
+                <a:solidFill>
+                  <a:srgbClr val="17364A"/>
+                </a:solidFill>
+                <a:latin typeface="Aptos" pitchFamily="34" charset="0"/>
+                <a:ea typeface="Aptos" pitchFamily="34" charset="-122"/>
+                <a:cs typeface="Aptos" pitchFamily="34" charset="-120"/>
+              </a:rPr>
+              <a:t>A guardrail is to define concrete examples of encouraged, conditional, restricted, and prohibited uses.</a:t>
+            </a:r>
+            <a:endParaRPr lang="en-US" sz="1700" dirty="0"/>
+          </a:p>
+          <a:p>
+            <a:r>
+              <a:rPr lang="en-US" sz="1700" dirty="0">
+                <a:solidFill>
+                  <a:srgbClr val="17364A"/>
+                </a:solidFill>
+                <a:latin typeface="Aptos" pitchFamily="34" charset="0"/>
+                <a:ea typeface="Aptos" pitchFamily="34" charset="-122"/>
+                <a:cs typeface="Aptos" pitchFamily="34" charset="-120"/>
+              </a:rPr>
+              <a:t>Another risk is risk appetite that ignores equity.</a:t>
+            </a:r>
+            <a:endParaRPr lang="en-US" sz="1700" dirty="0"/>
+          </a:p>
+        </p:txBody>
+      </p:sp>
+      <p:sp>
+        <p:nvSpPr>
+          <p:cNvPr id="11" name="Shape 9"/>
+          <p:cNvSpPr/>
+          <p:nvPr/>
+        </p:nvSpPr>
+        <p:spPr>
+          <a:xfrm>
+            <a:off x="7909560" y="1417320"/>
+            <a:ext cx="3154680" cy="1828800"/>
+          </a:xfrm>
+          <a:prstGeom prst="roundRect">
+            <a:avLst>
+              <a:gd name="adj" fmla="val 6000"/>
+            </a:avLst>
+          </a:prstGeom>
+          <a:solidFill>
+            <a:srgbClr val="EEF8ED"/>
+          </a:solidFill>
+          <a:ln w="12700">
+            <a:solidFill>
+              <a:srgbClr val="B9D7E6"/>
+            </a:solidFill>
+            <a:prstDash val="solid"/>
+          </a:ln>
+        </p:spPr>
+      </p:sp>
+      <p:sp>
+        <p:nvSpPr>
+          <p:cNvPr id="12" name="Text 10"/>
+          <p:cNvSpPr/>
+          <p:nvPr/>
+        </p:nvSpPr>
+        <p:spPr>
+          <a:xfrm>
+            <a:off x="8074152" y="1563624"/>
+            <a:ext cx="2825496" cy="201168"/>
+          </a:xfrm>
+          <a:prstGeom prst="rect">
+            <a:avLst/>
+          </a:prstGeom>
+          <a:noFill/>
+          <a:ln/>
+        </p:spPr>
+        <p:txBody>
+          <a:bodyPr wrap="square" lIns="0" tIns="0" rIns="0" bIns="0" rtlCol="0" anchor="ctr"/>
+          <a:lstStyle/>
+          <a:p>
             <a:pPr indent="0" marL="0">
               <a:buNone/>
             </a:pPr>
             <a:r>
-              <a:rPr lang="en-US" sz="1420" dirty="0">
+              <a:rPr lang="en-US" sz="950" b="1" dirty="0">
+                <a:solidFill>
+                  <a:srgbClr val="0068B7"/>
+                </a:solidFill>
+                <a:latin typeface="Aptos" pitchFamily="34" charset="0"/>
+                <a:ea typeface="Aptos" pitchFamily="34" charset="-122"/>
+                <a:cs typeface="Aptos" pitchFamily="34" charset="-120"/>
+              </a:rPr>
+              <a:t>Key idea</a:t>
+            </a:r>
+            <a:endParaRPr lang="en-US" sz="950" dirty="0"/>
+          </a:p>
+        </p:txBody>
+      </p:sp>
+      <p:sp>
+        <p:nvSpPr>
+          <p:cNvPr id="13" name="Text 11"/>
+          <p:cNvSpPr/>
+          <p:nvPr/>
+        </p:nvSpPr>
+        <p:spPr>
+          <a:xfrm>
+            <a:off x="8074152" y="1856232"/>
+            <a:ext cx="2825496" cy="1261872"/>
+          </a:xfrm>
+          <a:prstGeom prst="rect">
+            <a:avLst/>
+          </a:prstGeom>
+          <a:noFill/>
+          <a:ln/>
+        </p:spPr>
+        <p:txBody>
+          <a:bodyPr wrap="square" lIns="0" tIns="0" rIns="0" bIns="0" rtlCol="0" anchor="t">
+            <a:normAutofit/>
+          </a:bodyPr>
+          <a:lstStyle/>
+          <a:p>
+            <a:pPr indent="0" marL="0">
+              <a:buNone/>
+            </a:pPr>
+            <a:r>
+              <a:rPr lang="en-US" sz="1250" dirty="0">
                 <a:solidFill>
                   <a:srgbClr val="17364A"/>
                 </a:solidFill>
@@ -3218,9 +3983,116 @@
                 <a:ea typeface="Aptos" pitchFamily="34" charset="-122"/>
                 <a:cs typeface="Aptos" pitchFamily="34" charset="-120"/>
               </a:rPr>
-              <a:t>Which current or proposed AI use case in your agency raises this leadership or governance issue most clearly? Who currently has authority to make decisions about this issue, and is that authority documented? What evidence would governance or leadership need before approving the use case?</a:t>
-            </a:r>
-            <a:endParaRPr lang="en-US" sz="1420" dirty="0"/>
+              <a:t>A common failure mode is vague risk language.</a:t>
+            </a:r>
+            <a:endParaRPr lang="en-US" sz="1250" dirty="0"/>
+          </a:p>
+        </p:txBody>
+      </p:sp>
+      <p:sp>
+        <p:nvSpPr>
+          <p:cNvPr id="14" name="Shape 12"/>
+          <p:cNvSpPr/>
+          <p:nvPr/>
+        </p:nvSpPr>
+        <p:spPr>
+          <a:xfrm>
+            <a:off x="7909560" y="3520440"/>
+            <a:ext cx="3154680" cy="1737360"/>
+          </a:xfrm>
+          <a:prstGeom prst="roundRect">
+            <a:avLst>
+              <a:gd name="adj" fmla="val 6316"/>
+            </a:avLst>
+          </a:prstGeom>
+          <a:solidFill>
+            <a:srgbClr val="EAF6F8"/>
+          </a:solidFill>
+          <a:ln w="12700">
+            <a:solidFill>
+              <a:srgbClr val="B9D7E6"/>
+            </a:solidFill>
+            <a:prstDash val="solid"/>
+          </a:ln>
+        </p:spPr>
+      </p:sp>
+      <p:sp>
+        <p:nvSpPr>
+          <p:cNvPr id="15" name="Text 13"/>
+          <p:cNvSpPr/>
+          <p:nvPr/>
+        </p:nvSpPr>
+        <p:spPr>
+          <a:xfrm>
+            <a:off x="8074152" y="3666744"/>
+            <a:ext cx="2825496" cy="201168"/>
+          </a:xfrm>
+          <a:prstGeom prst="rect">
+            <a:avLst/>
+          </a:prstGeom>
+          <a:noFill/>
+          <a:ln/>
+        </p:spPr>
+        <p:txBody>
+          <a:bodyPr wrap="square" lIns="0" tIns="0" rIns="0" bIns="0" rtlCol="0" anchor="ctr"/>
+          <a:lstStyle/>
+          <a:p>
+            <a:pPr indent="0" marL="0">
+              <a:buNone/>
+            </a:pPr>
+            <a:r>
+              <a:rPr lang="en-US" sz="950" b="1" dirty="0">
+                <a:solidFill>
+                  <a:srgbClr val="0068B7"/>
+                </a:solidFill>
+                <a:latin typeface="Aptos" pitchFamily="34" charset="0"/>
+                <a:ea typeface="Aptos" pitchFamily="34" charset="-122"/>
+                <a:cs typeface="Aptos" pitchFamily="34" charset="-120"/>
+              </a:rPr>
+              <a:t>Use this for</a:t>
+            </a:r>
+            <a:endParaRPr lang="en-US" sz="950" dirty="0"/>
+          </a:p>
+        </p:txBody>
+      </p:sp>
+      <p:sp>
+        <p:nvSpPr>
+          <p:cNvPr id="16" name="Text 14"/>
+          <p:cNvSpPr/>
+          <p:nvPr/>
+        </p:nvSpPr>
+        <p:spPr>
+          <a:xfrm>
+            <a:off x="8074152" y="3959352"/>
+            <a:ext cx="2825496" cy="1170432"/>
+          </a:xfrm>
+          <a:prstGeom prst="rect">
+            <a:avLst/>
+          </a:prstGeom>
+          <a:noFill/>
+          <a:ln/>
+        </p:spPr>
+        <p:txBody>
+          <a:bodyPr wrap="square" lIns="0" tIns="0" rIns="0" bIns="0" rtlCol="0" anchor="t">
+            <a:normAutofit/>
+          </a:bodyPr>
+          <a:lstStyle/>
+          <a:p>
+            <a:pPr indent="0" marL="0">
+              <a:buNone/>
+            </a:pPr>
+            <a:r>
+              <a:rPr lang="en-US" sz="1250" dirty="0">
+                <a:solidFill>
+                  <a:srgbClr val="17364A"/>
+                </a:solidFill>
+                <a:latin typeface="Aptos" pitchFamily="34" charset="0"/>
+                <a:ea typeface="Aptos" pitchFamily="34" charset="-122"/>
+                <a:cs typeface="Aptos" pitchFamily="34" charset="-120"/>
+              </a:rPr>
+              <a:t>Connect the concept to public health decisions, safeguards, documentation, or implementation work.</a:t>
+            </a:r>
+            <a:endParaRPr lang="en-US" sz="1250" dirty="0"/>
           </a:p>
         </p:txBody>
       </p:sp>
@@ -3283,7 +4155,32 @@
       </p:sp>
       <p:sp>
         <p:nvSpPr>
-          <p:cNvPr id="3" name="Text 1"/>
+          <p:cNvPr id="3" name="Shape 1"/>
+          <p:cNvSpPr/>
+          <p:nvPr/>
+        </p:nvSpPr>
+        <p:spPr>
+          <a:xfrm>
+            <a:off x="0" y="164592"/>
+            <a:ext cx="146304" cy="6693408"/>
+          </a:xfrm>
+          <a:prstGeom prst="rect">
+            <a:avLst/>
+          </a:prstGeom>
+          <a:solidFill>
+            <a:srgbClr val="2F8A28"/>
+          </a:solidFill>
+          <a:ln w="12700">
+            <a:solidFill>
+              <a:srgbClr val="2F8A28"/>
+            </a:solidFill>
+            <a:prstDash val="solid"/>
+          </a:ln>
+        </p:spPr>
+      </p:sp>
+      <p:sp>
+        <p:nvSpPr>
+          <p:cNvPr id="4" name="Text 2"/>
           <p:cNvSpPr/>
           <p:nvPr/>
         </p:nvSpPr>
@@ -3322,7 +4219,7 @@
       </p:sp>
       <p:sp>
         <p:nvSpPr>
-          <p:cNvPr id="4" name="Text 2"/>
+          <p:cNvPr id="5" name="Text 3"/>
           <p:cNvSpPr/>
           <p:nvPr/>
         </p:nvSpPr>
@@ -3361,7 +4258,7 @@
       </p:sp>
       <p:sp>
         <p:nvSpPr>
-          <p:cNvPr id="5" name="Text 3"/>
+          <p:cNvPr id="6" name="Text 4"/>
           <p:cNvSpPr/>
           <p:nvPr/>
         </p:nvSpPr>
@@ -3400,13 +4297,77 @@
       </p:sp>
       <p:sp>
         <p:nvSpPr>
-          <p:cNvPr id="6" name="Text 4"/>
+          <p:cNvPr id="7" name="Shape 5"/>
           <p:cNvSpPr/>
           <p:nvPr/>
         </p:nvSpPr>
         <p:spPr>
           <a:xfrm>
             <a:off x="640080" y="658368"/>
+            <a:ext cx="420624" cy="420624"/>
+          </a:xfrm>
+          <a:prstGeom prst="ellipse">
+            <a:avLst/>
+          </a:prstGeom>
+          <a:solidFill>
+            <a:srgbClr val="0068B7"/>
+          </a:solidFill>
+          <a:ln w="12700">
+            <a:solidFill>
+              <a:srgbClr val="0068B7"/>
+            </a:solidFill>
+            <a:prstDash val="solid"/>
+          </a:ln>
+        </p:spPr>
+      </p:sp>
+      <p:sp>
+        <p:nvSpPr>
+          <p:cNvPr id="8" name="Text 6"/>
+          <p:cNvSpPr/>
+          <p:nvPr/>
+        </p:nvSpPr>
+        <p:spPr>
+          <a:xfrm>
+            <a:off x="640080" y="731520"/>
+            <a:ext cx="420624" cy="164592"/>
+          </a:xfrm>
+          <a:prstGeom prst="rect">
+            <a:avLst/>
+          </a:prstGeom>
+          <a:noFill/>
+          <a:ln/>
+        </p:spPr>
+        <p:txBody>
+          <a:bodyPr wrap="square" lIns="0" tIns="0" rIns="0" bIns="0" rtlCol="0" anchor="ctr"/>
+          <a:lstStyle/>
+          <a:p>
+            <a:pPr algn="ctr" indent="0" marL="0">
+              <a:buNone/>
+            </a:pPr>
+            <a:r>
+              <a:rPr lang="en-US" sz="1100" b="1" dirty="0">
+                <a:solidFill>
+                  <a:srgbClr val="FFFFFF"/>
+                </a:solidFill>
+                <a:latin typeface="Aptos" pitchFamily="34" charset="0"/>
+                <a:ea typeface="Aptos" pitchFamily="34" charset="-122"/>
+                <a:cs typeface="Aptos" pitchFamily="34" charset="-120"/>
+              </a:rPr>
+              <a:t>8</a:t>
+            </a:r>
+            <a:endParaRPr lang="en-US" sz="1100" dirty="0"/>
+          </a:p>
+        </p:txBody>
+      </p:sp>
+      <p:sp>
+        <p:nvSpPr>
+          <p:cNvPr id="9" name="Text 7"/>
+          <p:cNvSpPr/>
+          <p:nvPr/>
+        </p:nvSpPr>
+        <p:spPr>
+          <a:xfrm>
+            <a:off x="640080" y="621792"/>
             <a:ext cx="10881360" cy="566928"/>
           </a:xfrm>
           <a:prstGeom prst="rect">
@@ -3433,7 +4394,7 @@
                 <a:ea typeface="Aptos Display" pitchFamily="34" charset="-122"/>
                 <a:cs typeface="Aptos Display" pitchFamily="34" charset="-120"/>
               </a:rPr>
-              <a:t>Reflection Questions Continued</a:t>
+              <a:t>Application to AI-Supported Workflows</a:t>
             </a:r>
             <a:endParaRPr lang="en-US" sz="2700" dirty="0"/>
           </a:p>
@@ -3441,32 +4402,178 @@
       </p:sp>
       <p:sp>
         <p:nvSpPr>
-          <p:cNvPr id="7" name="Text 5"/>
-          <p:cNvSpPr/>
-          <p:nvPr/>
-        </p:nvSpPr>
-        <p:spPr>
-          <a:xfrm>
-            <a:off x="822960" y="1325880"/>
-            <a:ext cx="10378440" cy="4800600"/>
-          </a:xfrm>
-          <a:prstGeom prst="rect">
-            <a:avLst/>
-          </a:prstGeom>
-          <a:noFill/>
-          <a:ln/>
-        </p:spPr>
-        <p:txBody>
-          <a:bodyPr wrap="square" lIns="1016" tIns="1016" rIns="1016" bIns="1016" rtlCol="0" anchor="t">
+          <p:cNvPr id="10" name="Text 8"/>
+          <p:cNvSpPr/>
+          <p:nvPr/>
+        </p:nvSpPr>
+        <p:spPr>
+          <a:xfrm>
+            <a:off x="868680" y="1417320"/>
+            <a:ext cx="6675120" cy="4434840"/>
+          </a:xfrm>
+          <a:prstGeom prst="rect">
+            <a:avLst/>
+          </a:prstGeom>
+          <a:noFill/>
+          <a:ln/>
+        </p:spPr>
+        <p:txBody>
+          <a:bodyPr wrap="square" lIns="635" tIns="635" rIns="635" bIns="635" rtlCol="0" anchor="t">
             <a:normAutofit/>
           </a:bodyPr>
           <a:lstStyle/>
           <a:p>
+            <a:r>
+              <a:rPr lang="en-US" sz="1700" dirty="0">
+                <a:solidFill>
+                  <a:srgbClr val="17364A"/>
+                </a:solidFill>
+                <a:latin typeface="Aptos" pitchFamily="34" charset="0"/>
+                <a:ea typeface="Aptos" pitchFamily="34" charset="-122"/>
+                <a:cs typeface="Aptos" pitchFamily="34" charset="-120"/>
+              </a:rPr>
+              <a:t>Risk appetite applies differently across AI types.</a:t>
+            </a:r>
+            <a:endParaRPr lang="en-US" sz="1700" dirty="0"/>
+          </a:p>
+          <a:p>
+            <a:r>
+              <a:rPr lang="en-US" sz="1700" dirty="0">
+                <a:solidFill>
+                  <a:srgbClr val="17364A"/>
+                </a:solidFill>
+                <a:latin typeface="Aptos" pitchFamily="34" charset="0"/>
+                <a:ea typeface="Aptos" pitchFamily="34" charset="-122"/>
+                <a:cs typeface="Aptos" pitchFamily="34" charset="-120"/>
+              </a:rPr>
+              <a:t>Generative AI for internal drafting may fall into a lower-risk category when reviewed by humans.</a:t>
+            </a:r>
+            <a:endParaRPr lang="en-US" sz="1700" dirty="0"/>
+          </a:p>
+          <a:p>
+            <a:r>
+              <a:rPr lang="en-US" sz="1700" dirty="0">
+                <a:solidFill>
+                  <a:srgbClr val="17364A"/>
+                </a:solidFill>
+                <a:latin typeface="Aptos" pitchFamily="34" charset="0"/>
+                <a:ea typeface="Aptos" pitchFamily="34" charset="-122"/>
+                <a:cs typeface="Aptos" pitchFamily="34" charset="-120"/>
+              </a:rPr>
+              <a:t>Predictive models used for prioritization require stronger validation and monitoring.</a:t>
+            </a:r>
+            <a:endParaRPr lang="en-US" sz="1700" dirty="0"/>
+          </a:p>
+          <a:p>
+            <a:r>
+              <a:rPr lang="en-US" sz="1700" dirty="0">
+                <a:solidFill>
+                  <a:srgbClr val="17364A"/>
+                </a:solidFill>
+                <a:latin typeface="Aptos" pitchFamily="34" charset="0"/>
+                <a:ea typeface="Aptos" pitchFamily="34" charset="-122"/>
+                <a:cs typeface="Aptos" pitchFamily="34" charset="-120"/>
+              </a:rPr>
+              <a:t>Agentic tools that can take system actions require strict limits, stop authority, and auditability.</a:t>
+            </a:r>
+            <a:endParaRPr lang="en-US" sz="1700" dirty="0"/>
+          </a:p>
+        </p:txBody>
+      </p:sp>
+      <p:sp>
+        <p:nvSpPr>
+          <p:cNvPr id="11" name="Shape 9"/>
+          <p:cNvSpPr/>
+          <p:nvPr/>
+        </p:nvSpPr>
+        <p:spPr>
+          <a:xfrm>
+            <a:off x="7909560" y="1417320"/>
+            <a:ext cx="3154680" cy="1828800"/>
+          </a:xfrm>
+          <a:prstGeom prst="roundRect">
+            <a:avLst>
+              <a:gd name="adj" fmla="val 6000"/>
+            </a:avLst>
+          </a:prstGeom>
+          <a:solidFill>
+            <a:srgbClr val="EEF8ED"/>
+          </a:solidFill>
+          <a:ln w="12700">
+            <a:solidFill>
+              <a:srgbClr val="B9D7E6"/>
+            </a:solidFill>
+            <a:prstDash val="solid"/>
+          </a:ln>
+        </p:spPr>
+      </p:sp>
+      <p:sp>
+        <p:nvSpPr>
+          <p:cNvPr id="12" name="Text 10"/>
+          <p:cNvSpPr/>
+          <p:nvPr/>
+        </p:nvSpPr>
+        <p:spPr>
+          <a:xfrm>
+            <a:off x="8074152" y="1563624"/>
+            <a:ext cx="2825496" cy="201168"/>
+          </a:xfrm>
+          <a:prstGeom prst="rect">
+            <a:avLst/>
+          </a:prstGeom>
+          <a:noFill/>
+          <a:ln/>
+        </p:spPr>
+        <p:txBody>
+          <a:bodyPr wrap="square" lIns="0" tIns="0" rIns="0" bIns="0" rtlCol="0" anchor="ctr"/>
+          <a:lstStyle/>
+          <a:p>
             <a:pPr indent="0" marL="0">
               <a:buNone/>
             </a:pPr>
             <a:r>
-              <a:rPr lang="en-US" sz="1420" dirty="0">
+              <a:rPr lang="en-US" sz="950" b="1" dirty="0">
+                <a:solidFill>
+                  <a:srgbClr val="0068B7"/>
+                </a:solidFill>
+                <a:latin typeface="Aptos" pitchFamily="34" charset="0"/>
+                <a:ea typeface="Aptos" pitchFamily="34" charset="-122"/>
+                <a:cs typeface="Aptos" pitchFamily="34" charset="-120"/>
+              </a:rPr>
+              <a:t>Key idea</a:t>
+            </a:r>
+            <a:endParaRPr lang="en-US" sz="950" dirty="0"/>
+          </a:p>
+        </p:txBody>
+      </p:sp>
+      <p:sp>
+        <p:nvSpPr>
+          <p:cNvPr id="13" name="Text 11"/>
+          <p:cNvSpPr/>
+          <p:nvPr/>
+        </p:nvSpPr>
+        <p:spPr>
+          <a:xfrm>
+            <a:off x="8074152" y="1856232"/>
+            <a:ext cx="2825496" cy="1261872"/>
+          </a:xfrm>
+          <a:prstGeom prst="rect">
+            <a:avLst/>
+          </a:prstGeom>
+          <a:noFill/>
+          <a:ln/>
+        </p:spPr>
+        <p:txBody>
+          <a:bodyPr wrap="square" lIns="0" tIns="0" rIns="0" bIns="0" rtlCol="0" anchor="t">
+            <a:normAutofit/>
+          </a:bodyPr>
+          <a:lstStyle/>
+          <a:p>
+            <a:pPr indent="0" marL="0">
+              <a:buNone/>
+            </a:pPr>
+            <a:r>
+              <a:rPr lang="en-US" sz="1250" dirty="0">
                 <a:solidFill>
                   <a:srgbClr val="17364A"/>
                 </a:solidFill>
@@ -3474,9 +4581,116 @@
                 <a:ea typeface="Aptos" pitchFamily="34" charset="-122"/>
                 <a:cs typeface="Aptos" pitchFamily="34" charset="-120"/>
               </a:rPr>
-              <a:t>Which staff, partners, or communities would be affected if this issue were handled poorly? What policy, process, or artifact should be created or updated after this module?</a:t>
-            </a:r>
-            <a:endParaRPr lang="en-US" sz="1420" dirty="0"/>
+              <a:t>Risk appetite applies differently across AI types.</a:t>
+            </a:r>
+            <a:endParaRPr lang="en-US" sz="1250" dirty="0"/>
+          </a:p>
+        </p:txBody>
+      </p:sp>
+      <p:sp>
+        <p:nvSpPr>
+          <p:cNvPr id="14" name="Shape 12"/>
+          <p:cNvSpPr/>
+          <p:nvPr/>
+        </p:nvSpPr>
+        <p:spPr>
+          <a:xfrm>
+            <a:off x="7909560" y="3520440"/>
+            <a:ext cx="3154680" cy="1737360"/>
+          </a:xfrm>
+          <a:prstGeom prst="roundRect">
+            <a:avLst>
+              <a:gd name="adj" fmla="val 6316"/>
+            </a:avLst>
+          </a:prstGeom>
+          <a:solidFill>
+            <a:srgbClr val="EAF6F8"/>
+          </a:solidFill>
+          <a:ln w="12700">
+            <a:solidFill>
+              <a:srgbClr val="B9D7E6"/>
+            </a:solidFill>
+            <a:prstDash val="solid"/>
+          </a:ln>
+        </p:spPr>
+      </p:sp>
+      <p:sp>
+        <p:nvSpPr>
+          <p:cNvPr id="15" name="Text 13"/>
+          <p:cNvSpPr/>
+          <p:nvPr/>
+        </p:nvSpPr>
+        <p:spPr>
+          <a:xfrm>
+            <a:off x="8074152" y="3666744"/>
+            <a:ext cx="2825496" cy="201168"/>
+          </a:xfrm>
+          <a:prstGeom prst="rect">
+            <a:avLst/>
+          </a:prstGeom>
+          <a:noFill/>
+          <a:ln/>
+        </p:spPr>
+        <p:txBody>
+          <a:bodyPr wrap="square" lIns="0" tIns="0" rIns="0" bIns="0" rtlCol="0" anchor="ctr"/>
+          <a:lstStyle/>
+          <a:p>
+            <a:pPr indent="0" marL="0">
+              <a:buNone/>
+            </a:pPr>
+            <a:r>
+              <a:rPr lang="en-US" sz="950" b="1" dirty="0">
+                <a:solidFill>
+                  <a:srgbClr val="0068B7"/>
+                </a:solidFill>
+                <a:latin typeface="Aptos" pitchFamily="34" charset="0"/>
+                <a:ea typeface="Aptos" pitchFamily="34" charset="-122"/>
+                <a:cs typeface="Aptos" pitchFamily="34" charset="-120"/>
+              </a:rPr>
+              <a:t>Use this for</a:t>
+            </a:r>
+            <a:endParaRPr lang="en-US" sz="950" dirty="0"/>
+          </a:p>
+        </p:txBody>
+      </p:sp>
+      <p:sp>
+        <p:nvSpPr>
+          <p:cNvPr id="16" name="Text 14"/>
+          <p:cNvSpPr/>
+          <p:nvPr/>
+        </p:nvSpPr>
+        <p:spPr>
+          <a:xfrm>
+            <a:off x="8074152" y="3959352"/>
+            <a:ext cx="2825496" cy="1170432"/>
+          </a:xfrm>
+          <a:prstGeom prst="rect">
+            <a:avLst/>
+          </a:prstGeom>
+          <a:noFill/>
+          <a:ln/>
+        </p:spPr>
+        <p:txBody>
+          <a:bodyPr wrap="square" lIns="0" tIns="0" rIns="0" bIns="0" rtlCol="0" anchor="t">
+            <a:normAutofit/>
+          </a:bodyPr>
+          <a:lstStyle/>
+          <a:p>
+            <a:pPr indent="0" marL="0">
+              <a:buNone/>
+            </a:pPr>
+            <a:r>
+              <a:rPr lang="en-US" sz="1250" dirty="0">
+                <a:solidFill>
+                  <a:srgbClr val="17364A"/>
+                </a:solidFill>
+                <a:latin typeface="Aptos" pitchFamily="34" charset="0"/>
+                <a:ea typeface="Aptos" pitchFamily="34" charset="-122"/>
+                <a:cs typeface="Aptos" pitchFamily="34" charset="-120"/>
+              </a:rPr>
+              <a:t>Connect the concept to public health decisions, safeguards, documentation, or implementation work.</a:t>
+            </a:r>
+            <a:endParaRPr lang="en-US" sz="1250" dirty="0"/>
           </a:p>
         </p:txBody>
       </p:sp>
@@ -3539,7 +4753,32 @@
       </p:sp>
       <p:sp>
         <p:nvSpPr>
-          <p:cNvPr id="3" name="Text 1"/>
+          <p:cNvPr id="3" name="Shape 1"/>
+          <p:cNvSpPr/>
+          <p:nvPr/>
+        </p:nvSpPr>
+        <p:spPr>
+          <a:xfrm>
+            <a:off x="0" y="164592"/>
+            <a:ext cx="146304" cy="6693408"/>
+          </a:xfrm>
+          <a:prstGeom prst="rect">
+            <a:avLst/>
+          </a:prstGeom>
+          <a:solidFill>
+            <a:srgbClr val="2F8A28"/>
+          </a:solidFill>
+          <a:ln w="12700">
+            <a:solidFill>
+              <a:srgbClr val="2F8A28"/>
+            </a:solidFill>
+            <a:prstDash val="solid"/>
+          </a:ln>
+        </p:spPr>
+      </p:sp>
+      <p:sp>
+        <p:nvSpPr>
+          <p:cNvPr id="4" name="Text 2"/>
           <p:cNvSpPr/>
           <p:nvPr/>
         </p:nvSpPr>
@@ -3578,7 +4817,7 @@
       </p:sp>
       <p:sp>
         <p:nvSpPr>
-          <p:cNvPr id="4" name="Text 2"/>
+          <p:cNvPr id="5" name="Text 3"/>
           <p:cNvSpPr/>
           <p:nvPr/>
         </p:nvSpPr>
@@ -3617,7 +4856,7 @@
       </p:sp>
       <p:sp>
         <p:nvSpPr>
-          <p:cNvPr id="5" name="Text 3"/>
+          <p:cNvPr id="6" name="Text 4"/>
           <p:cNvSpPr/>
           <p:nvPr/>
         </p:nvSpPr>
@@ -3656,13 +4895,77 @@
       </p:sp>
       <p:sp>
         <p:nvSpPr>
-          <p:cNvPr id="6" name="Text 4"/>
+          <p:cNvPr id="7" name="Shape 5"/>
           <p:cNvSpPr/>
           <p:nvPr/>
         </p:nvSpPr>
         <p:spPr>
           <a:xfrm>
             <a:off x="640080" y="658368"/>
+            <a:ext cx="420624" cy="420624"/>
+          </a:xfrm>
+          <a:prstGeom prst="ellipse">
+            <a:avLst/>
+          </a:prstGeom>
+          <a:solidFill>
+            <a:srgbClr val="0068B7"/>
+          </a:solidFill>
+          <a:ln w="12700">
+            <a:solidFill>
+              <a:srgbClr val="0068B7"/>
+            </a:solidFill>
+            <a:prstDash val="solid"/>
+          </a:ln>
+        </p:spPr>
+      </p:sp>
+      <p:sp>
+        <p:nvSpPr>
+          <p:cNvPr id="8" name="Text 6"/>
+          <p:cNvSpPr/>
+          <p:nvPr/>
+        </p:nvSpPr>
+        <p:spPr>
+          <a:xfrm>
+            <a:off x="640080" y="731520"/>
+            <a:ext cx="420624" cy="164592"/>
+          </a:xfrm>
+          <a:prstGeom prst="rect">
+            <a:avLst/>
+          </a:prstGeom>
+          <a:noFill/>
+          <a:ln/>
+        </p:spPr>
+        <p:txBody>
+          <a:bodyPr wrap="square" lIns="0" tIns="0" rIns="0" bIns="0" rtlCol="0" anchor="ctr"/>
+          <a:lstStyle/>
+          <a:p>
+            <a:pPr algn="ctr" indent="0" marL="0">
+              <a:buNone/>
+            </a:pPr>
+            <a:r>
+              <a:rPr lang="en-US" sz="1100" b="1" dirty="0">
+                <a:solidFill>
+                  <a:srgbClr val="FFFFFF"/>
+                </a:solidFill>
+                <a:latin typeface="Aptos" pitchFamily="34" charset="0"/>
+                <a:ea typeface="Aptos" pitchFamily="34" charset="-122"/>
+                <a:cs typeface="Aptos" pitchFamily="34" charset="-120"/>
+              </a:rPr>
+              <a:t>9</a:t>
+            </a:r>
+            <a:endParaRPr lang="en-US" sz="1100" dirty="0"/>
+          </a:p>
+        </p:txBody>
+      </p:sp>
+      <p:sp>
+        <p:nvSpPr>
+          <p:cNvPr id="9" name="Text 7"/>
+          <p:cNvSpPr/>
+          <p:nvPr/>
+        </p:nvSpPr>
+        <p:spPr>
+          <a:xfrm>
+            <a:off x="640080" y="621792"/>
             <a:ext cx="10881360" cy="566928"/>
           </a:xfrm>
           <a:prstGeom prst="rect">
@@ -3689,7 +4992,7 @@
                 <a:ea typeface="Aptos Display" pitchFamily="34" charset="-122"/>
                 <a:cs typeface="Aptos Display" pitchFamily="34" charset="-120"/>
               </a:rPr>
-              <a:t>Practical Exercise</a:t>
+              <a:t>Reflection Questions</a:t>
             </a:r>
             <a:endParaRPr lang="en-US" sz="2700" dirty="0"/>
           </a:p>
@@ -3697,32 +5000,164 @@
       </p:sp>
       <p:sp>
         <p:nvSpPr>
-          <p:cNvPr id="7" name="Text 5"/>
-          <p:cNvSpPr/>
-          <p:nvPr/>
-        </p:nvSpPr>
-        <p:spPr>
-          <a:xfrm>
-            <a:off x="822960" y="1325880"/>
-            <a:ext cx="10378440" cy="4800600"/>
-          </a:xfrm>
-          <a:prstGeom prst="rect">
-            <a:avLst/>
-          </a:prstGeom>
-          <a:noFill/>
-          <a:ln/>
-        </p:spPr>
-        <p:txBody>
-          <a:bodyPr wrap="square" lIns="1016" tIns="1016" rIns="1016" bIns="1016" rtlCol="0" anchor="t">
+          <p:cNvPr id="10" name="Text 8"/>
+          <p:cNvSpPr/>
+          <p:nvPr/>
+        </p:nvSpPr>
+        <p:spPr>
+          <a:xfrm>
+            <a:off x="868680" y="1417320"/>
+            <a:ext cx="6675120" cy="4434840"/>
+          </a:xfrm>
+          <a:prstGeom prst="rect">
+            <a:avLst/>
+          </a:prstGeom>
+          <a:noFill/>
+          <a:ln/>
+        </p:spPr>
+        <p:txBody>
+          <a:bodyPr wrap="square" lIns="635" tIns="635" rIns="635" bIns="635" rtlCol="0" anchor="t">
             <a:normAutofit/>
           </a:bodyPr>
           <a:lstStyle/>
           <a:p>
+            <a:r>
+              <a:rPr lang="en-US" sz="1700" dirty="0">
+                <a:solidFill>
+                  <a:srgbClr val="17364A"/>
+                </a:solidFill>
+                <a:latin typeface="Aptos" pitchFamily="34" charset="0"/>
+                <a:ea typeface="Aptos" pitchFamily="34" charset="-122"/>
+                <a:cs typeface="Aptos" pitchFamily="34" charset="-120"/>
+              </a:rPr>
+              <a:t>Which current or proposed AI use case in your agency raises this leadership or governance issue most clearly?</a:t>
+            </a:r>
+            <a:endParaRPr lang="en-US" sz="1700" dirty="0"/>
+          </a:p>
+          <a:p>
+            <a:r>
+              <a:rPr lang="en-US" sz="1700" dirty="0">
+                <a:solidFill>
+                  <a:srgbClr val="17364A"/>
+                </a:solidFill>
+                <a:latin typeface="Aptos" pitchFamily="34" charset="0"/>
+                <a:ea typeface="Aptos" pitchFamily="34" charset="-122"/>
+                <a:cs typeface="Aptos" pitchFamily="34" charset="-120"/>
+              </a:rPr>
+              <a:t>Who currently has authority to make decisions about this issue, and is that authority documented?</a:t>
+            </a:r>
+            <a:endParaRPr lang="en-US" sz="1700" dirty="0"/>
+          </a:p>
+          <a:p>
+            <a:r>
+              <a:rPr lang="en-US" sz="1700" dirty="0">
+                <a:solidFill>
+                  <a:srgbClr val="17364A"/>
+                </a:solidFill>
+                <a:latin typeface="Aptos" pitchFamily="34" charset="0"/>
+                <a:ea typeface="Aptos" pitchFamily="34" charset="-122"/>
+                <a:cs typeface="Aptos" pitchFamily="34" charset="-120"/>
+              </a:rPr>
+              <a:t>What evidence would governance or leadership need before approving the use case?</a:t>
+            </a:r>
+            <a:endParaRPr lang="en-US" sz="1700" dirty="0"/>
+          </a:p>
+        </p:txBody>
+      </p:sp>
+      <p:sp>
+        <p:nvSpPr>
+          <p:cNvPr id="11" name="Shape 9"/>
+          <p:cNvSpPr/>
+          <p:nvPr/>
+        </p:nvSpPr>
+        <p:spPr>
+          <a:xfrm>
+            <a:off x="7909560" y="1417320"/>
+            <a:ext cx="3154680" cy="1828800"/>
+          </a:xfrm>
+          <a:prstGeom prst="roundRect">
+            <a:avLst>
+              <a:gd name="adj" fmla="val 6000"/>
+            </a:avLst>
+          </a:prstGeom>
+          <a:solidFill>
+            <a:srgbClr val="EEF8ED"/>
+          </a:solidFill>
+          <a:ln w="12700">
+            <a:solidFill>
+              <a:srgbClr val="B9D7E6"/>
+            </a:solidFill>
+            <a:prstDash val="solid"/>
+          </a:ln>
+        </p:spPr>
+      </p:sp>
+      <p:sp>
+        <p:nvSpPr>
+          <p:cNvPr id="12" name="Text 10"/>
+          <p:cNvSpPr/>
+          <p:nvPr/>
+        </p:nvSpPr>
+        <p:spPr>
+          <a:xfrm>
+            <a:off x="8074152" y="1563624"/>
+            <a:ext cx="2825496" cy="201168"/>
+          </a:xfrm>
+          <a:prstGeom prst="rect">
+            <a:avLst/>
+          </a:prstGeom>
+          <a:noFill/>
+          <a:ln/>
+        </p:spPr>
+        <p:txBody>
+          <a:bodyPr wrap="square" lIns="0" tIns="0" rIns="0" bIns="0" rtlCol="0" anchor="ctr"/>
+          <a:lstStyle/>
+          <a:p>
             <a:pPr indent="0" marL="0">
               <a:buNone/>
             </a:pPr>
             <a:r>
-              <a:rPr lang="en-US" sz="1420" dirty="0">
+              <a:rPr lang="en-US" sz="950" b="1" dirty="0">
+                <a:solidFill>
+                  <a:srgbClr val="0068B7"/>
+                </a:solidFill>
+                <a:latin typeface="Aptos" pitchFamily="34" charset="0"/>
+                <a:ea typeface="Aptos" pitchFamily="34" charset="-122"/>
+                <a:cs typeface="Aptos" pitchFamily="34" charset="-120"/>
+              </a:rPr>
+              <a:t>Key idea</a:t>
+            </a:r>
+            <a:endParaRPr lang="en-US" sz="950" dirty="0"/>
+          </a:p>
+        </p:txBody>
+      </p:sp>
+      <p:sp>
+        <p:nvSpPr>
+          <p:cNvPr id="13" name="Text 11"/>
+          <p:cNvSpPr/>
+          <p:nvPr/>
+        </p:nvSpPr>
+        <p:spPr>
+          <a:xfrm>
+            <a:off x="8074152" y="1856232"/>
+            <a:ext cx="2825496" cy="1261872"/>
+          </a:xfrm>
+          <a:prstGeom prst="rect">
+            <a:avLst/>
+          </a:prstGeom>
+          <a:noFill/>
+          <a:ln/>
+        </p:spPr>
+        <p:txBody>
+          <a:bodyPr wrap="square" lIns="0" tIns="0" rIns="0" bIns="0" rtlCol="0" anchor="t">
+            <a:normAutofit/>
+          </a:bodyPr>
+          <a:lstStyle/>
+          <a:p>
+            <a:pPr indent="0" marL="0">
+              <a:buNone/>
+            </a:pPr>
+            <a:r>
+              <a:rPr lang="en-US" sz="1250" dirty="0">
                 <a:solidFill>
                   <a:srgbClr val="17364A"/>
                 </a:solidFill>
@@ -3730,9 +5165,116 @@
                 <a:ea typeface="Aptos" pitchFamily="34" charset="-122"/>
                 <a:cs typeface="Aptos" pitchFamily="34" charset="-120"/>
               </a:rPr>
-              <a:t>Draft a risk appetite statement and a risk tolerance table for at least four AI use categories: internal productivity, staff decision support, public-facing communication, and automated or agentic workflows.</a:t>
-            </a:r>
-            <a:endParaRPr lang="en-US" sz="1420" dirty="0"/>
+              <a:t>Which current or proposed AI use case in your agency raises this leadership or governance issue most clearly?</a:t>
+            </a:r>
+            <a:endParaRPr lang="en-US" sz="1250" dirty="0"/>
+          </a:p>
+        </p:txBody>
+      </p:sp>
+      <p:sp>
+        <p:nvSpPr>
+          <p:cNvPr id="14" name="Shape 12"/>
+          <p:cNvSpPr/>
+          <p:nvPr/>
+        </p:nvSpPr>
+        <p:spPr>
+          <a:xfrm>
+            <a:off x="7909560" y="3520440"/>
+            <a:ext cx="3154680" cy="1737360"/>
+          </a:xfrm>
+          <a:prstGeom prst="roundRect">
+            <a:avLst>
+              <a:gd name="adj" fmla="val 6316"/>
+            </a:avLst>
+          </a:prstGeom>
+          <a:solidFill>
+            <a:srgbClr val="EAF6F8"/>
+          </a:solidFill>
+          <a:ln w="12700">
+            <a:solidFill>
+              <a:srgbClr val="B9D7E6"/>
+            </a:solidFill>
+            <a:prstDash val="solid"/>
+          </a:ln>
+        </p:spPr>
+      </p:sp>
+      <p:sp>
+        <p:nvSpPr>
+          <p:cNvPr id="15" name="Text 13"/>
+          <p:cNvSpPr/>
+          <p:nvPr/>
+        </p:nvSpPr>
+        <p:spPr>
+          <a:xfrm>
+            <a:off x="8074152" y="3666744"/>
+            <a:ext cx="2825496" cy="201168"/>
+          </a:xfrm>
+          <a:prstGeom prst="rect">
+            <a:avLst/>
+          </a:prstGeom>
+          <a:noFill/>
+          <a:ln/>
+        </p:spPr>
+        <p:txBody>
+          <a:bodyPr wrap="square" lIns="0" tIns="0" rIns="0" bIns="0" rtlCol="0" anchor="ctr"/>
+          <a:lstStyle/>
+          <a:p>
+            <a:pPr indent="0" marL="0">
+              <a:buNone/>
+            </a:pPr>
+            <a:r>
+              <a:rPr lang="en-US" sz="950" b="1" dirty="0">
+                <a:solidFill>
+                  <a:srgbClr val="0068B7"/>
+                </a:solidFill>
+                <a:latin typeface="Aptos" pitchFamily="34" charset="0"/>
+                <a:ea typeface="Aptos" pitchFamily="34" charset="-122"/>
+                <a:cs typeface="Aptos" pitchFamily="34" charset="-120"/>
+              </a:rPr>
+              <a:t>Use this for</a:t>
+            </a:r>
+            <a:endParaRPr lang="en-US" sz="950" dirty="0"/>
+          </a:p>
+        </p:txBody>
+      </p:sp>
+      <p:sp>
+        <p:nvSpPr>
+          <p:cNvPr id="16" name="Text 14"/>
+          <p:cNvSpPr/>
+          <p:nvPr/>
+        </p:nvSpPr>
+        <p:spPr>
+          <a:xfrm>
+            <a:off x="8074152" y="3959352"/>
+            <a:ext cx="2825496" cy="1170432"/>
+          </a:xfrm>
+          <a:prstGeom prst="rect">
+            <a:avLst/>
+          </a:prstGeom>
+          <a:noFill/>
+          <a:ln/>
+        </p:spPr>
+        <p:txBody>
+          <a:bodyPr wrap="square" lIns="0" tIns="0" rIns="0" bIns="0" rtlCol="0" anchor="t">
+            <a:normAutofit/>
+          </a:bodyPr>
+          <a:lstStyle/>
+          <a:p>
+            <a:pPr indent="0" marL="0">
+              <a:buNone/>
+            </a:pPr>
+            <a:r>
+              <a:rPr lang="en-US" sz="1250" dirty="0">
+                <a:solidFill>
+                  <a:srgbClr val="17364A"/>
+                </a:solidFill>
+                <a:latin typeface="Aptos" pitchFamily="34" charset="0"/>
+                <a:ea typeface="Aptos" pitchFamily="34" charset="-122"/>
+                <a:cs typeface="Aptos" pitchFamily="34" charset="-120"/>
+              </a:rPr>
+              <a:t>Connect the concept to public health decisions, safeguards, documentation, or implementation work.</a:t>
+            </a:r>
+            <a:endParaRPr lang="en-US" sz="1250" dirty="0"/>
           </a:p>
         </p:txBody>
       </p:sp>
@@ -3795,7 +5337,32 @@
       </p:sp>
       <p:sp>
         <p:nvSpPr>
-          <p:cNvPr id="3" name="Text 1"/>
+          <p:cNvPr id="3" name="Shape 1"/>
+          <p:cNvSpPr/>
+          <p:nvPr/>
+        </p:nvSpPr>
+        <p:spPr>
+          <a:xfrm>
+            <a:off x="0" y="164592"/>
+            <a:ext cx="146304" cy="6693408"/>
+          </a:xfrm>
+          <a:prstGeom prst="rect">
+            <a:avLst/>
+          </a:prstGeom>
+          <a:solidFill>
+            <a:srgbClr val="2F8A28"/>
+          </a:solidFill>
+          <a:ln w="12700">
+            <a:solidFill>
+              <a:srgbClr val="2F8A28"/>
+            </a:solidFill>
+            <a:prstDash val="solid"/>
+          </a:ln>
+        </p:spPr>
+      </p:sp>
+      <p:sp>
+        <p:nvSpPr>
+          <p:cNvPr id="4" name="Text 2"/>
           <p:cNvSpPr/>
           <p:nvPr/>
         </p:nvSpPr>
@@ -3834,7 +5401,7 @@
       </p:sp>
       <p:sp>
         <p:nvSpPr>
-          <p:cNvPr id="4" name="Text 2"/>
+          <p:cNvPr id="5" name="Text 3"/>
           <p:cNvSpPr/>
           <p:nvPr/>
         </p:nvSpPr>
@@ -3873,7 +5440,7 @@
       </p:sp>
       <p:sp>
         <p:nvSpPr>
-          <p:cNvPr id="5" name="Text 3"/>
+          <p:cNvPr id="6" name="Text 4"/>
           <p:cNvSpPr/>
           <p:nvPr/>
         </p:nvSpPr>
@@ -3912,7 +5479,7 @@
       </p:sp>
       <p:sp>
         <p:nvSpPr>
-          <p:cNvPr id="6" name="Text 4"/>
+          <p:cNvPr id="7" name="Text 5"/>
           <p:cNvSpPr/>
           <p:nvPr/>
         </p:nvSpPr>
@@ -3945,7 +5512,7 @@
                 <a:ea typeface="Aptos Display" pitchFamily="34" charset="-122"/>
                 <a:cs typeface="Aptos Display" pitchFamily="34" charset="-120"/>
               </a:rPr>
-              <a:t>Before You Begin</a:t>
+              <a:t>Reflection Questions Continued</a:t>
             </a:r>
             <a:endParaRPr lang="en-US" sz="2700" dirty="0"/>
           </a:p>
@@ -3953,32 +5520,150 @@
       </p:sp>
       <p:sp>
         <p:nvSpPr>
-          <p:cNvPr id="7" name="Text 5"/>
-          <p:cNvSpPr/>
-          <p:nvPr/>
-        </p:nvSpPr>
-        <p:spPr>
-          <a:xfrm>
-            <a:off x="822960" y="1325880"/>
-            <a:ext cx="10378440" cy="4800600"/>
-          </a:xfrm>
-          <a:prstGeom prst="rect">
-            <a:avLst/>
-          </a:prstGeom>
-          <a:noFill/>
-          <a:ln/>
-        </p:spPr>
-        <p:txBody>
-          <a:bodyPr wrap="square" lIns="1016" tIns="1016" rIns="1016" bIns="1016" rtlCol="0" anchor="t">
+          <p:cNvPr id="8" name="Text 6"/>
+          <p:cNvSpPr/>
+          <p:nvPr/>
+        </p:nvSpPr>
+        <p:spPr>
+          <a:xfrm>
+            <a:off x="868680" y="1417320"/>
+            <a:ext cx="6675120" cy="4434840"/>
+          </a:xfrm>
+          <a:prstGeom prst="rect">
+            <a:avLst/>
+          </a:prstGeom>
+          <a:noFill/>
+          <a:ln/>
+        </p:spPr>
+        <p:txBody>
+          <a:bodyPr wrap="square" lIns="635" tIns="635" rIns="635" bIns="635" rtlCol="0" anchor="t">
             <a:normAutofit/>
           </a:bodyPr>
           <a:lstStyle/>
           <a:p>
+            <a:r>
+              <a:rPr lang="en-US" sz="1700" dirty="0">
+                <a:solidFill>
+                  <a:srgbClr val="17364A"/>
+                </a:solidFill>
+                <a:latin typeface="Aptos" pitchFamily="34" charset="0"/>
+                <a:ea typeface="Aptos" pitchFamily="34" charset="-122"/>
+                <a:cs typeface="Aptos" pitchFamily="34" charset="-120"/>
+              </a:rPr>
+              <a:t>Which staff, partners, or communities would be affected if this issue were handled poorly?</a:t>
+            </a:r>
+            <a:endParaRPr lang="en-US" sz="1700" dirty="0"/>
+          </a:p>
+          <a:p>
+            <a:r>
+              <a:rPr lang="en-US" sz="1700" dirty="0">
+                <a:solidFill>
+                  <a:srgbClr val="17364A"/>
+                </a:solidFill>
+                <a:latin typeface="Aptos" pitchFamily="34" charset="0"/>
+                <a:ea typeface="Aptos" pitchFamily="34" charset="-122"/>
+                <a:cs typeface="Aptos" pitchFamily="34" charset="-120"/>
+              </a:rPr>
+              <a:t>What policy, process, or artifact should be created or updated after this module?</a:t>
+            </a:r>
+            <a:endParaRPr lang="en-US" sz="1700" dirty="0"/>
+          </a:p>
+        </p:txBody>
+      </p:sp>
+      <p:sp>
+        <p:nvSpPr>
+          <p:cNvPr id="9" name="Shape 7"/>
+          <p:cNvSpPr/>
+          <p:nvPr/>
+        </p:nvSpPr>
+        <p:spPr>
+          <a:xfrm>
+            <a:off x="7909560" y="1417320"/>
+            <a:ext cx="3154680" cy="1828800"/>
+          </a:xfrm>
+          <a:prstGeom prst="roundRect">
+            <a:avLst>
+              <a:gd name="adj" fmla="val 6000"/>
+            </a:avLst>
+          </a:prstGeom>
+          <a:solidFill>
+            <a:srgbClr val="EEF8ED"/>
+          </a:solidFill>
+          <a:ln w="12700">
+            <a:solidFill>
+              <a:srgbClr val="B9D7E6"/>
+            </a:solidFill>
+            <a:prstDash val="solid"/>
+          </a:ln>
+        </p:spPr>
+      </p:sp>
+      <p:sp>
+        <p:nvSpPr>
+          <p:cNvPr id="10" name="Text 8"/>
+          <p:cNvSpPr/>
+          <p:nvPr/>
+        </p:nvSpPr>
+        <p:spPr>
+          <a:xfrm>
+            <a:off x="8074152" y="1563624"/>
+            <a:ext cx="2825496" cy="201168"/>
+          </a:xfrm>
+          <a:prstGeom prst="rect">
+            <a:avLst/>
+          </a:prstGeom>
+          <a:noFill/>
+          <a:ln/>
+        </p:spPr>
+        <p:txBody>
+          <a:bodyPr wrap="square" lIns="0" tIns="0" rIns="0" bIns="0" rtlCol="0" anchor="ctr"/>
+          <a:lstStyle/>
+          <a:p>
             <a:pPr indent="0" marL="0">
               <a:buNone/>
             </a:pPr>
             <a:r>
-              <a:rPr lang="en-US" sz="1420" dirty="0">
+              <a:rPr lang="en-US" sz="950" b="1" dirty="0">
+                <a:solidFill>
+                  <a:srgbClr val="0068B7"/>
+                </a:solidFill>
+                <a:latin typeface="Aptos" pitchFamily="34" charset="0"/>
+                <a:ea typeface="Aptos" pitchFamily="34" charset="-122"/>
+                <a:cs typeface="Aptos" pitchFamily="34" charset="-120"/>
+              </a:rPr>
+              <a:t>Key idea</a:t>
+            </a:r>
+            <a:endParaRPr lang="en-US" sz="950" dirty="0"/>
+          </a:p>
+        </p:txBody>
+      </p:sp>
+      <p:sp>
+        <p:nvSpPr>
+          <p:cNvPr id="11" name="Text 9"/>
+          <p:cNvSpPr/>
+          <p:nvPr/>
+        </p:nvSpPr>
+        <p:spPr>
+          <a:xfrm>
+            <a:off x="8074152" y="1856232"/>
+            <a:ext cx="2825496" cy="1261872"/>
+          </a:xfrm>
+          <a:prstGeom prst="rect">
+            <a:avLst/>
+          </a:prstGeom>
+          <a:noFill/>
+          <a:ln/>
+        </p:spPr>
+        <p:txBody>
+          <a:bodyPr wrap="square" lIns="0" tIns="0" rIns="0" bIns="0" rtlCol="0" anchor="t">
+            <a:normAutofit/>
+          </a:bodyPr>
+          <a:lstStyle/>
+          <a:p>
+            <a:pPr indent="0" marL="0">
+              <a:buNone/>
+            </a:pPr>
+            <a:r>
+              <a:rPr lang="en-US" sz="1250" dirty="0">
                 <a:solidFill>
                   <a:srgbClr val="17364A"/>
                 </a:solidFill>
@@ -3986,9 +5671,116 @@
                 <a:ea typeface="Aptos" pitchFamily="34" charset="-122"/>
                 <a:cs typeface="Aptos" pitchFamily="34" charset="-120"/>
               </a:rPr>
-              <a:t>Choose a real or realistic public health AI use case. Document assumptions, unresolved questions, and which agency roles would need to review the artifact before it is adopted. The exercise should produce a work product that could support governance review, leadership discussion, implementation planning, or policy development.</a:t>
-            </a:r>
-            <a:endParaRPr lang="en-US" sz="1420" dirty="0"/>
+              <a:t>Which staff, partners, or communities would be affected if this issue were handled poorly?</a:t>
+            </a:r>
+            <a:endParaRPr lang="en-US" sz="1250" dirty="0"/>
+          </a:p>
+        </p:txBody>
+      </p:sp>
+      <p:sp>
+        <p:nvSpPr>
+          <p:cNvPr id="12" name="Shape 10"/>
+          <p:cNvSpPr/>
+          <p:nvPr/>
+        </p:nvSpPr>
+        <p:spPr>
+          <a:xfrm>
+            <a:off x="7909560" y="3520440"/>
+            <a:ext cx="3154680" cy="1737360"/>
+          </a:xfrm>
+          <a:prstGeom prst="roundRect">
+            <a:avLst>
+              <a:gd name="adj" fmla="val 6316"/>
+            </a:avLst>
+          </a:prstGeom>
+          <a:solidFill>
+            <a:srgbClr val="EAF6F8"/>
+          </a:solidFill>
+          <a:ln w="12700">
+            <a:solidFill>
+              <a:srgbClr val="B9D7E6"/>
+            </a:solidFill>
+            <a:prstDash val="solid"/>
+          </a:ln>
+        </p:spPr>
+      </p:sp>
+      <p:sp>
+        <p:nvSpPr>
+          <p:cNvPr id="13" name="Text 11"/>
+          <p:cNvSpPr/>
+          <p:nvPr/>
+        </p:nvSpPr>
+        <p:spPr>
+          <a:xfrm>
+            <a:off x="8074152" y="3666744"/>
+            <a:ext cx="2825496" cy="201168"/>
+          </a:xfrm>
+          <a:prstGeom prst="rect">
+            <a:avLst/>
+          </a:prstGeom>
+          <a:noFill/>
+          <a:ln/>
+        </p:spPr>
+        <p:txBody>
+          <a:bodyPr wrap="square" lIns="0" tIns="0" rIns="0" bIns="0" rtlCol="0" anchor="ctr"/>
+          <a:lstStyle/>
+          <a:p>
+            <a:pPr indent="0" marL="0">
+              <a:buNone/>
+            </a:pPr>
+            <a:r>
+              <a:rPr lang="en-US" sz="950" b="1" dirty="0">
+                <a:solidFill>
+                  <a:srgbClr val="0068B7"/>
+                </a:solidFill>
+                <a:latin typeface="Aptos" pitchFamily="34" charset="0"/>
+                <a:ea typeface="Aptos" pitchFamily="34" charset="-122"/>
+                <a:cs typeface="Aptos" pitchFamily="34" charset="-120"/>
+              </a:rPr>
+              <a:t>Use this for</a:t>
+            </a:r>
+            <a:endParaRPr lang="en-US" sz="950" dirty="0"/>
+          </a:p>
+        </p:txBody>
+      </p:sp>
+      <p:sp>
+        <p:nvSpPr>
+          <p:cNvPr id="14" name="Text 12"/>
+          <p:cNvSpPr/>
+          <p:nvPr/>
+        </p:nvSpPr>
+        <p:spPr>
+          <a:xfrm>
+            <a:off x="8074152" y="3959352"/>
+            <a:ext cx="2825496" cy="1170432"/>
+          </a:xfrm>
+          <a:prstGeom prst="rect">
+            <a:avLst/>
+          </a:prstGeom>
+          <a:noFill/>
+          <a:ln/>
+        </p:spPr>
+        <p:txBody>
+          <a:bodyPr wrap="square" lIns="0" tIns="0" rIns="0" bIns="0" rtlCol="0" anchor="t">
+            <a:normAutofit/>
+          </a:bodyPr>
+          <a:lstStyle/>
+          <a:p>
+            <a:pPr indent="0" marL="0">
+              <a:buNone/>
+            </a:pPr>
+            <a:r>
+              <a:rPr lang="en-US" sz="1250" dirty="0">
+                <a:solidFill>
+                  <a:srgbClr val="17364A"/>
+                </a:solidFill>
+                <a:latin typeface="Aptos" pitchFamily="34" charset="0"/>
+                <a:ea typeface="Aptos" pitchFamily="34" charset="-122"/>
+                <a:cs typeface="Aptos" pitchFamily="34" charset="-120"/>
+              </a:rPr>
+              <a:t>Connect the concept to public health decisions, safeguards, documentation, or implementation work.</a:t>
+            </a:r>
+            <a:endParaRPr lang="en-US" sz="1250" dirty="0"/>
           </a:p>
         </p:txBody>
       </p:sp>
@@ -4051,7 +5843,32 @@
       </p:sp>
       <p:sp>
         <p:nvSpPr>
-          <p:cNvPr id="3" name="Text 1"/>
+          <p:cNvPr id="3" name="Shape 1"/>
+          <p:cNvSpPr/>
+          <p:nvPr/>
+        </p:nvSpPr>
+        <p:spPr>
+          <a:xfrm>
+            <a:off x="0" y="164592"/>
+            <a:ext cx="146304" cy="6693408"/>
+          </a:xfrm>
+          <a:prstGeom prst="rect">
+            <a:avLst/>
+          </a:prstGeom>
+          <a:solidFill>
+            <a:srgbClr val="2F8A28"/>
+          </a:solidFill>
+          <a:ln w="12700">
+            <a:solidFill>
+              <a:srgbClr val="2F8A28"/>
+            </a:solidFill>
+            <a:prstDash val="solid"/>
+          </a:ln>
+        </p:spPr>
+      </p:sp>
+      <p:sp>
+        <p:nvSpPr>
+          <p:cNvPr id="4" name="Text 2"/>
           <p:cNvSpPr/>
           <p:nvPr/>
         </p:nvSpPr>
@@ -4090,7 +5907,7 @@
       </p:sp>
       <p:sp>
         <p:nvSpPr>
-          <p:cNvPr id="4" name="Text 2"/>
+          <p:cNvPr id="5" name="Text 3"/>
           <p:cNvSpPr/>
           <p:nvPr/>
         </p:nvSpPr>
@@ -4129,7 +5946,7 @@
       </p:sp>
       <p:sp>
         <p:nvSpPr>
-          <p:cNvPr id="5" name="Text 3"/>
+          <p:cNvPr id="6" name="Text 4"/>
           <p:cNvSpPr/>
           <p:nvPr/>
         </p:nvSpPr>
@@ -4168,13 +5985,77 @@
       </p:sp>
       <p:sp>
         <p:nvSpPr>
-          <p:cNvPr id="6" name="Text 4"/>
+          <p:cNvPr id="7" name="Shape 5"/>
           <p:cNvSpPr/>
           <p:nvPr/>
         </p:nvSpPr>
         <p:spPr>
           <a:xfrm>
             <a:off x="640080" y="658368"/>
+            <a:ext cx="420624" cy="420624"/>
+          </a:xfrm>
+          <a:prstGeom prst="ellipse">
+            <a:avLst/>
+          </a:prstGeom>
+          <a:solidFill>
+            <a:srgbClr val="0068B7"/>
+          </a:solidFill>
+          <a:ln w="12700">
+            <a:solidFill>
+              <a:srgbClr val="0068B7"/>
+            </a:solidFill>
+            <a:prstDash val="solid"/>
+          </a:ln>
+        </p:spPr>
+      </p:sp>
+      <p:sp>
+        <p:nvSpPr>
+          <p:cNvPr id="8" name="Text 6"/>
+          <p:cNvSpPr/>
+          <p:nvPr/>
+        </p:nvSpPr>
+        <p:spPr>
+          <a:xfrm>
+            <a:off x="640080" y="731520"/>
+            <a:ext cx="420624" cy="164592"/>
+          </a:xfrm>
+          <a:prstGeom prst="rect">
+            <a:avLst/>
+          </a:prstGeom>
+          <a:noFill/>
+          <a:ln/>
+        </p:spPr>
+        <p:txBody>
+          <a:bodyPr wrap="square" lIns="0" tIns="0" rIns="0" bIns="0" rtlCol="0" anchor="ctr"/>
+          <a:lstStyle/>
+          <a:p>
+            <a:pPr algn="ctr" indent="0" marL="0">
+              <a:buNone/>
+            </a:pPr>
+            <a:r>
+              <a:rPr lang="en-US" sz="1100" b="1" dirty="0">
+                <a:solidFill>
+                  <a:srgbClr val="FFFFFF"/>
+                </a:solidFill>
+                <a:latin typeface="Aptos" pitchFamily="34" charset="0"/>
+                <a:ea typeface="Aptos" pitchFamily="34" charset="-122"/>
+                <a:cs typeface="Aptos" pitchFamily="34" charset="-120"/>
+              </a:rPr>
+              <a:t>10</a:t>
+            </a:r>
+            <a:endParaRPr lang="en-US" sz="1100" dirty="0"/>
+          </a:p>
+        </p:txBody>
+      </p:sp>
+      <p:sp>
+        <p:nvSpPr>
+          <p:cNvPr id="9" name="Text 7"/>
+          <p:cNvSpPr/>
+          <p:nvPr/>
+        </p:nvSpPr>
+        <p:spPr>
+          <a:xfrm>
+            <a:off x="640080" y="621792"/>
             <a:ext cx="10881360" cy="566928"/>
           </a:xfrm>
           <a:prstGeom prst="rect">
@@ -4201,7 +6082,7 @@
                 <a:ea typeface="Aptos Display" pitchFamily="34" charset="-122"/>
                 <a:cs typeface="Aptos Display" pitchFamily="34" charset="-120"/>
               </a:rPr>
-              <a:t>Expected Artifact or Evidence</a:t>
+              <a:t>Practical Exercise</a:t>
             </a:r>
             <a:endParaRPr lang="en-US" sz="2700" dirty="0"/>
           </a:p>
@@ -4209,32 +6090,136 @@
       </p:sp>
       <p:sp>
         <p:nvSpPr>
-          <p:cNvPr id="7" name="Text 5"/>
-          <p:cNvSpPr/>
-          <p:nvPr/>
-        </p:nvSpPr>
-        <p:spPr>
-          <a:xfrm>
-            <a:off x="822960" y="1325880"/>
-            <a:ext cx="10378440" cy="4800600"/>
-          </a:xfrm>
-          <a:prstGeom prst="rect">
-            <a:avLst/>
-          </a:prstGeom>
-          <a:noFill/>
-          <a:ln/>
-        </p:spPr>
-        <p:txBody>
-          <a:bodyPr wrap="square" lIns="1016" tIns="1016" rIns="1016" bIns="1016" rtlCol="0" anchor="t">
+          <p:cNvPr id="10" name="Text 8"/>
+          <p:cNvSpPr/>
+          <p:nvPr/>
+        </p:nvSpPr>
+        <p:spPr>
+          <a:xfrm>
+            <a:off x="868680" y="1417320"/>
+            <a:ext cx="6675120" cy="4434840"/>
+          </a:xfrm>
+          <a:prstGeom prst="rect">
+            <a:avLst/>
+          </a:prstGeom>
+          <a:noFill/>
+          <a:ln/>
+        </p:spPr>
+        <p:txBody>
+          <a:bodyPr wrap="square" lIns="635" tIns="635" rIns="635" bIns="635" rtlCol="0" anchor="t">
             <a:normAutofit/>
           </a:bodyPr>
           <a:lstStyle/>
           <a:p>
+            <a:r>
+              <a:rPr lang="en-US" sz="1700" dirty="0">
+                <a:solidFill>
+                  <a:srgbClr val="17364A"/>
+                </a:solidFill>
+                <a:latin typeface="Aptos" pitchFamily="34" charset="0"/>
+                <a:ea typeface="Aptos" pitchFamily="34" charset="-122"/>
+                <a:cs typeface="Aptos" pitchFamily="34" charset="-120"/>
+              </a:rPr>
+              <a:t>Draft a risk appetite statement and a risk tolerance table for at least four AI use categories: internal productivity,.</a:t>
+            </a:r>
+            <a:endParaRPr lang="en-US" sz="1700" dirty="0"/>
+          </a:p>
+        </p:txBody>
+      </p:sp>
+      <p:sp>
+        <p:nvSpPr>
+          <p:cNvPr id="11" name="Shape 9"/>
+          <p:cNvSpPr/>
+          <p:nvPr/>
+        </p:nvSpPr>
+        <p:spPr>
+          <a:xfrm>
+            <a:off x="7909560" y="1417320"/>
+            <a:ext cx="3154680" cy="1828800"/>
+          </a:xfrm>
+          <a:prstGeom prst="roundRect">
+            <a:avLst>
+              <a:gd name="adj" fmla="val 6000"/>
+            </a:avLst>
+          </a:prstGeom>
+          <a:solidFill>
+            <a:srgbClr val="EEF8ED"/>
+          </a:solidFill>
+          <a:ln w="12700">
+            <a:solidFill>
+              <a:srgbClr val="B9D7E6"/>
+            </a:solidFill>
+            <a:prstDash val="solid"/>
+          </a:ln>
+        </p:spPr>
+      </p:sp>
+      <p:sp>
+        <p:nvSpPr>
+          <p:cNvPr id="12" name="Text 10"/>
+          <p:cNvSpPr/>
+          <p:nvPr/>
+        </p:nvSpPr>
+        <p:spPr>
+          <a:xfrm>
+            <a:off x="8074152" y="1563624"/>
+            <a:ext cx="2825496" cy="201168"/>
+          </a:xfrm>
+          <a:prstGeom prst="rect">
+            <a:avLst/>
+          </a:prstGeom>
+          <a:noFill/>
+          <a:ln/>
+        </p:spPr>
+        <p:txBody>
+          <a:bodyPr wrap="square" lIns="0" tIns="0" rIns="0" bIns="0" rtlCol="0" anchor="ctr"/>
+          <a:lstStyle/>
+          <a:p>
             <a:pPr indent="0" marL="0">
               <a:buNone/>
             </a:pPr>
             <a:r>
-              <a:rPr lang="en-US" sz="1420" dirty="0">
+              <a:rPr lang="en-US" sz="950" b="1" dirty="0">
+                <a:solidFill>
+                  <a:srgbClr val="0068B7"/>
+                </a:solidFill>
+                <a:latin typeface="Aptos" pitchFamily="34" charset="0"/>
+                <a:ea typeface="Aptos" pitchFamily="34" charset="-122"/>
+                <a:cs typeface="Aptos" pitchFamily="34" charset="-120"/>
+              </a:rPr>
+              <a:t>Key idea</a:t>
+            </a:r>
+            <a:endParaRPr lang="en-US" sz="950" dirty="0"/>
+          </a:p>
+        </p:txBody>
+      </p:sp>
+      <p:sp>
+        <p:nvSpPr>
+          <p:cNvPr id="13" name="Text 11"/>
+          <p:cNvSpPr/>
+          <p:nvPr/>
+        </p:nvSpPr>
+        <p:spPr>
+          <a:xfrm>
+            <a:off x="8074152" y="1856232"/>
+            <a:ext cx="2825496" cy="1261872"/>
+          </a:xfrm>
+          <a:prstGeom prst="rect">
+            <a:avLst/>
+          </a:prstGeom>
+          <a:noFill/>
+          <a:ln/>
+        </p:spPr>
+        <p:txBody>
+          <a:bodyPr wrap="square" lIns="0" tIns="0" rIns="0" bIns="0" rtlCol="0" anchor="t">
+            <a:normAutofit/>
+          </a:bodyPr>
+          <a:lstStyle/>
+          <a:p>
+            <a:pPr indent="0" marL="0">
+              <a:buNone/>
+            </a:pPr>
+            <a:r>
+              <a:rPr lang="en-US" sz="1250" dirty="0">
                 <a:solidFill>
                   <a:srgbClr val="17364A"/>
                 </a:solidFill>
@@ -4242,9 +6227,116 @@
                 <a:ea typeface="Aptos" pitchFamily="34" charset="-122"/>
                 <a:cs typeface="Aptos" pitchFamily="34" charset="-120"/>
               </a:rPr>
-              <a:t>AI risk appetite statement; risk tolerance table; prohibited-use examples; mitigation and escalation conditions.</a:t>
-            </a:r>
-            <a:endParaRPr lang="en-US" sz="1420" dirty="0"/>
+              <a:t>Draft a risk appetite statement and a risk tolerance table for at least four AI use categories: internal productivity,.</a:t>
+            </a:r>
+            <a:endParaRPr lang="en-US" sz="1250" dirty="0"/>
+          </a:p>
+        </p:txBody>
+      </p:sp>
+      <p:sp>
+        <p:nvSpPr>
+          <p:cNvPr id="14" name="Shape 12"/>
+          <p:cNvSpPr/>
+          <p:nvPr/>
+        </p:nvSpPr>
+        <p:spPr>
+          <a:xfrm>
+            <a:off x="7909560" y="3520440"/>
+            <a:ext cx="3154680" cy="1737360"/>
+          </a:xfrm>
+          <a:prstGeom prst="roundRect">
+            <a:avLst>
+              <a:gd name="adj" fmla="val 6316"/>
+            </a:avLst>
+          </a:prstGeom>
+          <a:solidFill>
+            <a:srgbClr val="EAF6F8"/>
+          </a:solidFill>
+          <a:ln w="12700">
+            <a:solidFill>
+              <a:srgbClr val="B9D7E6"/>
+            </a:solidFill>
+            <a:prstDash val="solid"/>
+          </a:ln>
+        </p:spPr>
+      </p:sp>
+      <p:sp>
+        <p:nvSpPr>
+          <p:cNvPr id="15" name="Text 13"/>
+          <p:cNvSpPr/>
+          <p:nvPr/>
+        </p:nvSpPr>
+        <p:spPr>
+          <a:xfrm>
+            <a:off x="8074152" y="3666744"/>
+            <a:ext cx="2825496" cy="201168"/>
+          </a:xfrm>
+          <a:prstGeom prst="rect">
+            <a:avLst/>
+          </a:prstGeom>
+          <a:noFill/>
+          <a:ln/>
+        </p:spPr>
+        <p:txBody>
+          <a:bodyPr wrap="square" lIns="0" tIns="0" rIns="0" bIns="0" rtlCol="0" anchor="ctr"/>
+          <a:lstStyle/>
+          <a:p>
+            <a:pPr indent="0" marL="0">
+              <a:buNone/>
+            </a:pPr>
+            <a:r>
+              <a:rPr lang="en-US" sz="950" b="1" dirty="0">
+                <a:solidFill>
+                  <a:srgbClr val="0068B7"/>
+                </a:solidFill>
+                <a:latin typeface="Aptos" pitchFamily="34" charset="0"/>
+                <a:ea typeface="Aptos" pitchFamily="34" charset="-122"/>
+                <a:cs typeface="Aptos" pitchFamily="34" charset="-120"/>
+              </a:rPr>
+              <a:t>Use this for</a:t>
+            </a:r>
+            <a:endParaRPr lang="en-US" sz="950" dirty="0"/>
+          </a:p>
+        </p:txBody>
+      </p:sp>
+      <p:sp>
+        <p:nvSpPr>
+          <p:cNvPr id="16" name="Text 14"/>
+          <p:cNvSpPr/>
+          <p:nvPr/>
+        </p:nvSpPr>
+        <p:spPr>
+          <a:xfrm>
+            <a:off x="8074152" y="3959352"/>
+            <a:ext cx="2825496" cy="1170432"/>
+          </a:xfrm>
+          <a:prstGeom prst="rect">
+            <a:avLst/>
+          </a:prstGeom>
+          <a:noFill/>
+          <a:ln/>
+        </p:spPr>
+        <p:txBody>
+          <a:bodyPr wrap="square" lIns="0" tIns="0" rIns="0" bIns="0" rtlCol="0" anchor="t">
+            <a:normAutofit/>
+          </a:bodyPr>
+          <a:lstStyle/>
+          <a:p>
+            <a:pPr indent="0" marL="0">
+              <a:buNone/>
+            </a:pPr>
+            <a:r>
+              <a:rPr lang="en-US" sz="1250" dirty="0">
+                <a:solidFill>
+                  <a:srgbClr val="17364A"/>
+                </a:solidFill>
+                <a:latin typeface="Aptos" pitchFamily="34" charset="0"/>
+                <a:ea typeface="Aptos" pitchFamily="34" charset="-122"/>
+                <a:cs typeface="Aptos" pitchFamily="34" charset="-120"/>
+              </a:rPr>
+              <a:t>Connect the concept to public health decisions, safeguards, documentation, or implementation work.</a:t>
+            </a:r>
+            <a:endParaRPr lang="en-US" sz="1250" dirty="0"/>
           </a:p>
         </p:txBody>
       </p:sp>
@@ -4307,7 +6399,32 @@
       </p:sp>
       <p:sp>
         <p:nvSpPr>
-          <p:cNvPr id="3" name="Text 1"/>
+          <p:cNvPr id="3" name="Shape 1"/>
+          <p:cNvSpPr/>
+          <p:nvPr/>
+        </p:nvSpPr>
+        <p:spPr>
+          <a:xfrm>
+            <a:off x="0" y="164592"/>
+            <a:ext cx="146304" cy="6693408"/>
+          </a:xfrm>
+          <a:prstGeom prst="rect">
+            <a:avLst/>
+          </a:prstGeom>
+          <a:solidFill>
+            <a:srgbClr val="2F8A28"/>
+          </a:solidFill>
+          <a:ln w="12700">
+            <a:solidFill>
+              <a:srgbClr val="2F8A28"/>
+            </a:solidFill>
+            <a:prstDash val="solid"/>
+          </a:ln>
+        </p:spPr>
+      </p:sp>
+      <p:sp>
+        <p:nvSpPr>
+          <p:cNvPr id="4" name="Text 2"/>
           <p:cNvSpPr/>
           <p:nvPr/>
         </p:nvSpPr>
@@ -4346,7 +6463,7 @@
       </p:sp>
       <p:sp>
         <p:nvSpPr>
-          <p:cNvPr id="4" name="Text 2"/>
+          <p:cNvPr id="5" name="Text 3"/>
           <p:cNvSpPr/>
           <p:nvPr/>
         </p:nvSpPr>
@@ -4385,7 +6502,7 @@
       </p:sp>
       <p:sp>
         <p:nvSpPr>
-          <p:cNvPr id="5" name="Text 3"/>
+          <p:cNvPr id="6" name="Text 4"/>
           <p:cNvSpPr/>
           <p:nvPr/>
         </p:nvSpPr>
@@ -4424,13 +6541,77 @@
       </p:sp>
       <p:sp>
         <p:nvSpPr>
-          <p:cNvPr id="6" name="Text 4"/>
+          <p:cNvPr id="7" name="Shape 5"/>
           <p:cNvSpPr/>
           <p:nvPr/>
         </p:nvSpPr>
         <p:spPr>
           <a:xfrm>
             <a:off x="640080" y="658368"/>
+            <a:ext cx="420624" cy="420624"/>
+          </a:xfrm>
+          <a:prstGeom prst="ellipse">
+            <a:avLst/>
+          </a:prstGeom>
+          <a:solidFill>
+            <a:srgbClr val="0068B7"/>
+          </a:solidFill>
+          <a:ln w="12700">
+            <a:solidFill>
+              <a:srgbClr val="0068B7"/>
+            </a:solidFill>
+            <a:prstDash val="solid"/>
+          </a:ln>
+        </p:spPr>
+      </p:sp>
+      <p:sp>
+        <p:nvSpPr>
+          <p:cNvPr id="8" name="Text 6"/>
+          <p:cNvSpPr/>
+          <p:nvPr/>
+        </p:nvSpPr>
+        <p:spPr>
+          <a:xfrm>
+            <a:off x="640080" y="731520"/>
+            <a:ext cx="420624" cy="164592"/>
+          </a:xfrm>
+          <a:prstGeom prst="rect">
+            <a:avLst/>
+          </a:prstGeom>
+          <a:noFill/>
+          <a:ln/>
+        </p:spPr>
+        <p:txBody>
+          <a:bodyPr wrap="square" lIns="0" tIns="0" rIns="0" bIns="0" rtlCol="0" anchor="ctr"/>
+          <a:lstStyle/>
+          <a:p>
+            <a:pPr algn="ctr" indent="0" marL="0">
+              <a:buNone/>
+            </a:pPr>
+            <a:r>
+              <a:rPr lang="en-US" sz="1100" b="1" dirty="0">
+                <a:solidFill>
+                  <a:srgbClr val="FFFFFF"/>
+                </a:solidFill>
+                <a:latin typeface="Aptos" pitchFamily="34" charset="0"/>
+                <a:ea typeface="Aptos" pitchFamily="34" charset="-122"/>
+                <a:cs typeface="Aptos" pitchFamily="34" charset="-120"/>
+              </a:rPr>
+              <a:t>11</a:t>
+            </a:r>
+            <a:endParaRPr lang="en-US" sz="1100" dirty="0"/>
+          </a:p>
+        </p:txBody>
+      </p:sp>
+      <p:sp>
+        <p:nvSpPr>
+          <p:cNvPr id="9" name="Text 7"/>
+          <p:cNvSpPr/>
+          <p:nvPr/>
+        </p:nvSpPr>
+        <p:spPr>
+          <a:xfrm>
+            <a:off x="640080" y="621792"/>
             <a:ext cx="10881360" cy="566928"/>
           </a:xfrm>
           <a:prstGeom prst="rect">
@@ -4457,7 +6638,7 @@
                 <a:ea typeface="Aptos Display" pitchFamily="34" charset="-122"/>
                 <a:cs typeface="Aptos Display" pitchFamily="34" charset="-120"/>
               </a:rPr>
-              <a:t>Expected Assignment</a:t>
+              <a:t>Before You Begin</a:t>
             </a:r>
             <a:endParaRPr lang="en-US" sz="2700" dirty="0"/>
           </a:p>
@@ -4465,14 +6646,14 @@
       </p:sp>
       <p:sp>
         <p:nvSpPr>
-          <p:cNvPr id="7" name="Text 5"/>
-          <p:cNvSpPr/>
-          <p:nvPr/>
-        </p:nvSpPr>
-        <p:spPr>
-          <a:xfrm>
-            <a:off x="822960" y="1325880"/>
-            <a:ext cx="10378440" cy="4800600"/>
+          <p:cNvPr id="10" name="Text 8"/>
+          <p:cNvSpPr/>
+          <p:nvPr/>
+        </p:nvSpPr>
+        <p:spPr>
+          <a:xfrm>
+            <a:off x="868680" y="1417320"/>
+            <a:ext cx="6675120" cy="4434840"/>
           </a:xfrm>
           <a:prstGeom prst="rect">
             <a:avLst/>
@@ -4487,7 +6668,7 @@
           <a:lstStyle/>
           <a:p>
             <a:r>
-              <a:rPr lang="en-US" sz="1450" dirty="0">
+              <a:rPr lang="en-US" sz="1700" dirty="0">
                 <a:solidFill>
                   <a:srgbClr val="17364A"/>
                 </a:solidFill>
@@ -4495,9 +6676,251 @@
                 <a:ea typeface="Aptos" pitchFamily="34" charset="-122"/>
                 <a:cs typeface="Aptos" pitchFamily="34" charset="-120"/>
               </a:rPr>
-              <a:t>AI risk appetite statement; risk tolerance table; prohibited-use examples; mitigation and escalation conditions.</a:t>
-            </a:r>
-            <a:endParaRPr lang="en-US" sz="1450" dirty="0"/>
+              <a:t>Choose a real or realistic public health AI use case.</a:t>
+            </a:r>
+            <a:endParaRPr lang="en-US" sz="1700" dirty="0"/>
+          </a:p>
+          <a:p>
+            <a:r>
+              <a:rPr lang="en-US" sz="1700" dirty="0">
+                <a:solidFill>
+                  <a:srgbClr val="17364A"/>
+                </a:solidFill>
+                <a:latin typeface="Aptos" pitchFamily="34" charset="0"/>
+                <a:ea typeface="Aptos" pitchFamily="34" charset="-122"/>
+                <a:cs typeface="Aptos" pitchFamily="34" charset="-120"/>
+              </a:rPr>
+              <a:t>Document assumptions, unresolved questions, and which agency roles would need to review the artifact before it is adopted.</a:t>
+            </a:r>
+            <a:endParaRPr lang="en-US" sz="1700" dirty="0"/>
+          </a:p>
+          <a:p>
+            <a:r>
+              <a:rPr lang="en-US" sz="1700" dirty="0">
+                <a:solidFill>
+                  <a:srgbClr val="17364A"/>
+                </a:solidFill>
+                <a:latin typeface="Aptos" pitchFamily="34" charset="0"/>
+                <a:ea typeface="Aptos" pitchFamily="34" charset="-122"/>
+                <a:cs typeface="Aptos" pitchFamily="34" charset="-120"/>
+              </a:rPr>
+              <a:t>The exercise should produce a work product that could support governance review, leadership discussion, implementation.</a:t>
+            </a:r>
+            <a:endParaRPr lang="en-US" sz="1700" dirty="0"/>
+          </a:p>
+        </p:txBody>
+      </p:sp>
+      <p:sp>
+        <p:nvSpPr>
+          <p:cNvPr id="11" name="Shape 9"/>
+          <p:cNvSpPr/>
+          <p:nvPr/>
+        </p:nvSpPr>
+        <p:spPr>
+          <a:xfrm>
+            <a:off x="7909560" y="1417320"/>
+            <a:ext cx="3154680" cy="1828800"/>
+          </a:xfrm>
+          <a:prstGeom prst="roundRect">
+            <a:avLst>
+              <a:gd name="adj" fmla="val 6000"/>
+            </a:avLst>
+          </a:prstGeom>
+          <a:solidFill>
+            <a:srgbClr val="EEF8ED"/>
+          </a:solidFill>
+          <a:ln w="12700">
+            <a:solidFill>
+              <a:srgbClr val="B9D7E6"/>
+            </a:solidFill>
+            <a:prstDash val="solid"/>
+          </a:ln>
+        </p:spPr>
+      </p:sp>
+      <p:sp>
+        <p:nvSpPr>
+          <p:cNvPr id="12" name="Text 10"/>
+          <p:cNvSpPr/>
+          <p:nvPr/>
+        </p:nvSpPr>
+        <p:spPr>
+          <a:xfrm>
+            <a:off x="8074152" y="1563624"/>
+            <a:ext cx="2825496" cy="201168"/>
+          </a:xfrm>
+          <a:prstGeom prst="rect">
+            <a:avLst/>
+          </a:prstGeom>
+          <a:noFill/>
+          <a:ln/>
+        </p:spPr>
+        <p:txBody>
+          <a:bodyPr wrap="square" lIns="0" tIns="0" rIns="0" bIns="0" rtlCol="0" anchor="ctr"/>
+          <a:lstStyle/>
+          <a:p>
+            <a:pPr indent="0" marL="0">
+              <a:buNone/>
+            </a:pPr>
+            <a:r>
+              <a:rPr lang="en-US" sz="950" b="1" dirty="0">
+                <a:solidFill>
+                  <a:srgbClr val="0068B7"/>
+                </a:solidFill>
+                <a:latin typeface="Aptos" pitchFamily="34" charset="0"/>
+                <a:ea typeface="Aptos" pitchFamily="34" charset="-122"/>
+                <a:cs typeface="Aptos" pitchFamily="34" charset="-120"/>
+              </a:rPr>
+              <a:t>Key idea</a:t>
+            </a:r>
+            <a:endParaRPr lang="en-US" sz="950" dirty="0"/>
+          </a:p>
+        </p:txBody>
+      </p:sp>
+      <p:sp>
+        <p:nvSpPr>
+          <p:cNvPr id="13" name="Text 11"/>
+          <p:cNvSpPr/>
+          <p:nvPr/>
+        </p:nvSpPr>
+        <p:spPr>
+          <a:xfrm>
+            <a:off x="8074152" y="1856232"/>
+            <a:ext cx="2825496" cy="1261872"/>
+          </a:xfrm>
+          <a:prstGeom prst="rect">
+            <a:avLst/>
+          </a:prstGeom>
+          <a:noFill/>
+          <a:ln/>
+        </p:spPr>
+        <p:txBody>
+          <a:bodyPr wrap="square" lIns="0" tIns="0" rIns="0" bIns="0" rtlCol="0" anchor="t">
+            <a:normAutofit/>
+          </a:bodyPr>
+          <a:lstStyle/>
+          <a:p>
+            <a:pPr indent="0" marL="0">
+              <a:buNone/>
+            </a:pPr>
+            <a:r>
+              <a:rPr lang="en-US" sz="1250" dirty="0">
+                <a:solidFill>
+                  <a:srgbClr val="17364A"/>
+                </a:solidFill>
+                <a:latin typeface="Aptos" pitchFamily="34" charset="0"/>
+                <a:ea typeface="Aptos" pitchFamily="34" charset="-122"/>
+                <a:cs typeface="Aptos" pitchFamily="34" charset="-120"/>
+              </a:rPr>
+              <a:t>Choose a real or realistic public health AI use case.</a:t>
+            </a:r>
+            <a:endParaRPr lang="en-US" sz="1250" dirty="0"/>
+          </a:p>
+        </p:txBody>
+      </p:sp>
+      <p:sp>
+        <p:nvSpPr>
+          <p:cNvPr id="14" name="Shape 12"/>
+          <p:cNvSpPr/>
+          <p:nvPr/>
+        </p:nvSpPr>
+        <p:spPr>
+          <a:xfrm>
+            <a:off x="7909560" y="3520440"/>
+            <a:ext cx="3154680" cy="1737360"/>
+          </a:xfrm>
+          <a:prstGeom prst="roundRect">
+            <a:avLst>
+              <a:gd name="adj" fmla="val 6316"/>
+            </a:avLst>
+          </a:prstGeom>
+          <a:solidFill>
+            <a:srgbClr val="EAF6F8"/>
+          </a:solidFill>
+          <a:ln w="12700">
+            <a:solidFill>
+              <a:srgbClr val="B9D7E6"/>
+            </a:solidFill>
+            <a:prstDash val="solid"/>
+          </a:ln>
+        </p:spPr>
+      </p:sp>
+      <p:sp>
+        <p:nvSpPr>
+          <p:cNvPr id="15" name="Text 13"/>
+          <p:cNvSpPr/>
+          <p:nvPr/>
+        </p:nvSpPr>
+        <p:spPr>
+          <a:xfrm>
+            <a:off x="8074152" y="3666744"/>
+            <a:ext cx="2825496" cy="201168"/>
+          </a:xfrm>
+          <a:prstGeom prst="rect">
+            <a:avLst/>
+          </a:prstGeom>
+          <a:noFill/>
+          <a:ln/>
+        </p:spPr>
+        <p:txBody>
+          <a:bodyPr wrap="square" lIns="0" tIns="0" rIns="0" bIns="0" rtlCol="0" anchor="ctr"/>
+          <a:lstStyle/>
+          <a:p>
+            <a:pPr indent="0" marL="0">
+              <a:buNone/>
+            </a:pPr>
+            <a:r>
+              <a:rPr lang="en-US" sz="950" b="1" dirty="0">
+                <a:solidFill>
+                  <a:srgbClr val="0068B7"/>
+                </a:solidFill>
+                <a:latin typeface="Aptos" pitchFamily="34" charset="0"/>
+                <a:ea typeface="Aptos" pitchFamily="34" charset="-122"/>
+                <a:cs typeface="Aptos" pitchFamily="34" charset="-120"/>
+              </a:rPr>
+              <a:t>Use this for</a:t>
+            </a:r>
+            <a:endParaRPr lang="en-US" sz="950" dirty="0"/>
+          </a:p>
+        </p:txBody>
+      </p:sp>
+      <p:sp>
+        <p:nvSpPr>
+          <p:cNvPr id="16" name="Text 14"/>
+          <p:cNvSpPr/>
+          <p:nvPr/>
+        </p:nvSpPr>
+        <p:spPr>
+          <a:xfrm>
+            <a:off x="8074152" y="3959352"/>
+            <a:ext cx="2825496" cy="1170432"/>
+          </a:xfrm>
+          <a:prstGeom prst="rect">
+            <a:avLst/>
+          </a:prstGeom>
+          <a:noFill/>
+          <a:ln/>
+        </p:spPr>
+        <p:txBody>
+          <a:bodyPr wrap="square" lIns="0" tIns="0" rIns="0" bIns="0" rtlCol="0" anchor="t">
+            <a:normAutofit/>
+          </a:bodyPr>
+          <a:lstStyle/>
+          <a:p>
+            <a:pPr indent="0" marL="0">
+              <a:buNone/>
+            </a:pPr>
+            <a:r>
+              <a:rPr lang="en-US" sz="1250" dirty="0">
+                <a:solidFill>
+                  <a:srgbClr val="17364A"/>
+                </a:solidFill>
+                <a:latin typeface="Aptos" pitchFamily="34" charset="0"/>
+                <a:ea typeface="Aptos" pitchFamily="34" charset="-122"/>
+                <a:cs typeface="Aptos" pitchFamily="34" charset="-120"/>
+              </a:rPr>
+              <a:t>Connect the concept to public health decisions, safeguards, documentation, or implementation work.</a:t>
+            </a:r>
+            <a:endParaRPr lang="en-US" sz="1250" dirty="0"/>
           </a:p>
         </p:txBody>
       </p:sp>
@@ -4560,7 +6983,32 @@
       </p:sp>
       <p:sp>
         <p:nvSpPr>
-          <p:cNvPr id="3" name="Text 1"/>
+          <p:cNvPr id="3" name="Shape 1"/>
+          <p:cNvSpPr/>
+          <p:nvPr/>
+        </p:nvSpPr>
+        <p:spPr>
+          <a:xfrm>
+            <a:off x="0" y="164592"/>
+            <a:ext cx="146304" cy="6693408"/>
+          </a:xfrm>
+          <a:prstGeom prst="rect">
+            <a:avLst/>
+          </a:prstGeom>
+          <a:solidFill>
+            <a:srgbClr val="2F8A28"/>
+          </a:solidFill>
+          <a:ln w="12700">
+            <a:solidFill>
+              <a:srgbClr val="2F8A28"/>
+            </a:solidFill>
+            <a:prstDash val="solid"/>
+          </a:ln>
+        </p:spPr>
+      </p:sp>
+      <p:sp>
+        <p:nvSpPr>
+          <p:cNvPr id="4" name="Text 2"/>
           <p:cNvSpPr/>
           <p:nvPr/>
         </p:nvSpPr>
@@ -4599,7 +7047,7 @@
       </p:sp>
       <p:sp>
         <p:nvSpPr>
-          <p:cNvPr id="4" name="Text 2"/>
+          <p:cNvPr id="5" name="Text 3"/>
           <p:cNvSpPr/>
           <p:nvPr/>
         </p:nvSpPr>
@@ -4638,7 +7086,7 @@
       </p:sp>
       <p:sp>
         <p:nvSpPr>
-          <p:cNvPr id="5" name="Text 3"/>
+          <p:cNvPr id="6" name="Text 4"/>
           <p:cNvSpPr/>
           <p:nvPr/>
         </p:nvSpPr>
@@ -4677,13 +7125,77 @@
       </p:sp>
       <p:sp>
         <p:nvSpPr>
-          <p:cNvPr id="6" name="Text 4"/>
+          <p:cNvPr id="7" name="Shape 5"/>
           <p:cNvSpPr/>
           <p:nvPr/>
         </p:nvSpPr>
         <p:spPr>
           <a:xfrm>
             <a:off x="640080" y="658368"/>
+            <a:ext cx="420624" cy="420624"/>
+          </a:xfrm>
+          <a:prstGeom prst="ellipse">
+            <a:avLst/>
+          </a:prstGeom>
+          <a:solidFill>
+            <a:srgbClr val="0068B7"/>
+          </a:solidFill>
+          <a:ln w="12700">
+            <a:solidFill>
+              <a:srgbClr val="0068B7"/>
+            </a:solidFill>
+            <a:prstDash val="solid"/>
+          </a:ln>
+        </p:spPr>
+      </p:sp>
+      <p:sp>
+        <p:nvSpPr>
+          <p:cNvPr id="8" name="Text 6"/>
+          <p:cNvSpPr/>
+          <p:nvPr/>
+        </p:nvSpPr>
+        <p:spPr>
+          <a:xfrm>
+            <a:off x="640080" y="731520"/>
+            <a:ext cx="420624" cy="164592"/>
+          </a:xfrm>
+          <a:prstGeom prst="rect">
+            <a:avLst/>
+          </a:prstGeom>
+          <a:noFill/>
+          <a:ln/>
+        </p:spPr>
+        <p:txBody>
+          <a:bodyPr wrap="square" lIns="0" tIns="0" rIns="0" bIns="0" rtlCol="0" anchor="ctr"/>
+          <a:lstStyle/>
+          <a:p>
+            <a:pPr algn="ctr" indent="0" marL="0">
+              <a:buNone/>
+            </a:pPr>
+            <a:r>
+              <a:rPr lang="en-US" sz="1100" b="1" dirty="0">
+                <a:solidFill>
+                  <a:srgbClr val="FFFFFF"/>
+                </a:solidFill>
+                <a:latin typeface="Aptos" pitchFamily="34" charset="0"/>
+                <a:ea typeface="Aptos" pitchFamily="34" charset="-122"/>
+                <a:cs typeface="Aptos" pitchFamily="34" charset="-120"/>
+              </a:rPr>
+              <a:t>12</a:t>
+            </a:r>
+            <a:endParaRPr lang="en-US" sz="1100" dirty="0"/>
+          </a:p>
+        </p:txBody>
+      </p:sp>
+      <p:sp>
+        <p:nvSpPr>
+          <p:cNvPr id="9" name="Text 7"/>
+          <p:cNvSpPr/>
+          <p:nvPr/>
+        </p:nvSpPr>
+        <p:spPr>
+          <a:xfrm>
+            <a:off x="640080" y="621792"/>
             <a:ext cx="10881360" cy="566928"/>
           </a:xfrm>
           <a:prstGeom prst="rect">
@@ -4710,7 +7222,7 @@
                 <a:ea typeface="Aptos Display" pitchFamily="34" charset="-122"/>
                 <a:cs typeface="Aptos Display" pitchFamily="34" charset="-120"/>
               </a:rPr>
-              <a:t>Knowledge Check</a:t>
+              <a:t>Expected Artifact or Evidence</a:t>
             </a:r>
             <a:endParaRPr lang="en-US" sz="2700" dirty="0"/>
           </a:p>
@@ -4718,14 +7230,14 @@
       </p:sp>
       <p:sp>
         <p:nvSpPr>
-          <p:cNvPr id="7" name="Text 5"/>
-          <p:cNvSpPr/>
-          <p:nvPr/>
-        </p:nvSpPr>
-        <p:spPr>
-          <a:xfrm>
-            <a:off x="822960" y="1325880"/>
-            <a:ext cx="10378440" cy="4800600"/>
+          <p:cNvPr id="10" name="Text 8"/>
+          <p:cNvSpPr/>
+          <p:nvPr/>
+        </p:nvSpPr>
+        <p:spPr>
+          <a:xfrm>
+            <a:off x="868680" y="1417320"/>
+            <a:ext cx="6675120" cy="4434840"/>
           </a:xfrm>
           <a:prstGeom prst="rect">
             <a:avLst/>
@@ -4740,7 +7252,7 @@
           <a:lstStyle/>
           <a:p>
             <a:r>
-              <a:rPr lang="en-US" sz="1450" dirty="0">
+              <a:rPr lang="en-US" sz="1700" dirty="0">
                 <a:solidFill>
                   <a:srgbClr val="17364A"/>
                 </a:solidFill>
@@ -4748,13 +7260,106 @@
                 <a:ea typeface="Aptos" pitchFamily="34" charset="-122"/>
                 <a:cs typeface="Aptos" pitchFamily="34" charset="-120"/>
               </a:rPr>
-              <a:t>1. What is the strongest reason this module topic belongs in AI leadership and governance training?</a:t>
-            </a:r>
-            <a:endParaRPr lang="en-US" sz="1450" dirty="0"/>
-          </a:p>
-          <a:p>
-            <a:r>
-              <a:rPr lang="en-US" sz="1450" dirty="0">
+              <a:t>AI risk appetite statement; risk tolerance table; prohibited-use examples; mitigation and escalation conditions.</a:t>
+            </a:r>
+            <a:endParaRPr lang="en-US" sz="1700" dirty="0"/>
+          </a:p>
+        </p:txBody>
+      </p:sp>
+      <p:sp>
+        <p:nvSpPr>
+          <p:cNvPr id="11" name="Shape 9"/>
+          <p:cNvSpPr/>
+          <p:nvPr/>
+        </p:nvSpPr>
+        <p:spPr>
+          <a:xfrm>
+            <a:off x="7909560" y="1417320"/>
+            <a:ext cx="3154680" cy="1828800"/>
+          </a:xfrm>
+          <a:prstGeom prst="roundRect">
+            <a:avLst>
+              <a:gd name="adj" fmla="val 6000"/>
+            </a:avLst>
+          </a:prstGeom>
+          <a:solidFill>
+            <a:srgbClr val="EEF8ED"/>
+          </a:solidFill>
+          <a:ln w="12700">
+            <a:solidFill>
+              <a:srgbClr val="B9D7E6"/>
+            </a:solidFill>
+            <a:prstDash val="solid"/>
+          </a:ln>
+        </p:spPr>
+      </p:sp>
+      <p:sp>
+        <p:nvSpPr>
+          <p:cNvPr id="12" name="Text 10"/>
+          <p:cNvSpPr/>
+          <p:nvPr/>
+        </p:nvSpPr>
+        <p:spPr>
+          <a:xfrm>
+            <a:off x="8074152" y="1563624"/>
+            <a:ext cx="2825496" cy="201168"/>
+          </a:xfrm>
+          <a:prstGeom prst="rect">
+            <a:avLst/>
+          </a:prstGeom>
+          <a:noFill/>
+          <a:ln/>
+        </p:spPr>
+        <p:txBody>
+          <a:bodyPr wrap="square" lIns="0" tIns="0" rIns="0" bIns="0" rtlCol="0" anchor="ctr"/>
+          <a:lstStyle/>
+          <a:p>
+            <a:pPr indent="0" marL="0">
+              <a:buNone/>
+            </a:pPr>
+            <a:r>
+              <a:rPr lang="en-US" sz="950" b="1" dirty="0">
+                <a:solidFill>
+                  <a:srgbClr val="0068B7"/>
+                </a:solidFill>
+                <a:latin typeface="Aptos" pitchFamily="34" charset="0"/>
+                <a:ea typeface="Aptos" pitchFamily="34" charset="-122"/>
+                <a:cs typeface="Aptos" pitchFamily="34" charset="-120"/>
+              </a:rPr>
+              <a:t>Key idea</a:t>
+            </a:r>
+            <a:endParaRPr lang="en-US" sz="950" dirty="0"/>
+          </a:p>
+        </p:txBody>
+      </p:sp>
+      <p:sp>
+        <p:nvSpPr>
+          <p:cNvPr id="13" name="Text 11"/>
+          <p:cNvSpPr/>
+          <p:nvPr/>
+        </p:nvSpPr>
+        <p:spPr>
+          <a:xfrm>
+            <a:off x="8074152" y="1856232"/>
+            <a:ext cx="2825496" cy="1261872"/>
+          </a:xfrm>
+          <a:prstGeom prst="rect">
+            <a:avLst/>
+          </a:prstGeom>
+          <a:noFill/>
+          <a:ln/>
+        </p:spPr>
+        <p:txBody>
+          <a:bodyPr wrap="square" lIns="0" tIns="0" rIns="0" bIns="0" rtlCol="0" anchor="t">
+            <a:normAutofit/>
+          </a:bodyPr>
+          <a:lstStyle/>
+          <a:p>
+            <a:pPr indent="0" marL="0">
+              <a:buNone/>
+            </a:pPr>
+            <a:r>
+              <a:rPr lang="en-US" sz="1250" dirty="0">
                 <a:solidFill>
                   <a:srgbClr val="17364A"/>
                 </a:solidFill>
@@ -4762,13 +7367,106 @@
                 <a:ea typeface="Aptos" pitchFamily="34" charset="-122"/>
                 <a:cs typeface="Aptos" pitchFamily="34" charset="-120"/>
               </a:rPr>
-              <a:t>2. Which practice best supports accountable public health AI governance?</a:t>
-            </a:r>
-            <a:endParaRPr lang="en-US" sz="1450" dirty="0"/>
-          </a:p>
-          <a:p>
-            <a:r>
-              <a:rPr lang="en-US" sz="1450" dirty="0">
+              <a:t>AI risk appetite statement; risk tolerance table; prohibited-use examples; mitigation and escalation conditions.</a:t>
+            </a:r>
+            <a:endParaRPr lang="en-US" sz="1250" dirty="0"/>
+          </a:p>
+        </p:txBody>
+      </p:sp>
+      <p:sp>
+        <p:nvSpPr>
+          <p:cNvPr id="14" name="Shape 12"/>
+          <p:cNvSpPr/>
+          <p:nvPr/>
+        </p:nvSpPr>
+        <p:spPr>
+          <a:xfrm>
+            <a:off x="7909560" y="3520440"/>
+            <a:ext cx="3154680" cy="1737360"/>
+          </a:xfrm>
+          <a:prstGeom prst="roundRect">
+            <a:avLst>
+              <a:gd name="adj" fmla="val 6316"/>
+            </a:avLst>
+          </a:prstGeom>
+          <a:solidFill>
+            <a:srgbClr val="EAF6F8"/>
+          </a:solidFill>
+          <a:ln w="12700">
+            <a:solidFill>
+              <a:srgbClr val="B9D7E6"/>
+            </a:solidFill>
+            <a:prstDash val="solid"/>
+          </a:ln>
+        </p:spPr>
+      </p:sp>
+      <p:sp>
+        <p:nvSpPr>
+          <p:cNvPr id="15" name="Text 13"/>
+          <p:cNvSpPr/>
+          <p:nvPr/>
+        </p:nvSpPr>
+        <p:spPr>
+          <a:xfrm>
+            <a:off x="8074152" y="3666744"/>
+            <a:ext cx="2825496" cy="201168"/>
+          </a:xfrm>
+          <a:prstGeom prst="rect">
+            <a:avLst/>
+          </a:prstGeom>
+          <a:noFill/>
+          <a:ln/>
+        </p:spPr>
+        <p:txBody>
+          <a:bodyPr wrap="square" lIns="0" tIns="0" rIns="0" bIns="0" rtlCol="0" anchor="ctr"/>
+          <a:lstStyle/>
+          <a:p>
+            <a:pPr indent="0" marL="0">
+              <a:buNone/>
+            </a:pPr>
+            <a:r>
+              <a:rPr lang="en-US" sz="950" b="1" dirty="0">
+                <a:solidFill>
+                  <a:srgbClr val="0068B7"/>
+                </a:solidFill>
+                <a:latin typeface="Aptos" pitchFamily="34" charset="0"/>
+                <a:ea typeface="Aptos" pitchFamily="34" charset="-122"/>
+                <a:cs typeface="Aptos" pitchFamily="34" charset="-120"/>
+              </a:rPr>
+              <a:t>Use this for</a:t>
+            </a:r>
+            <a:endParaRPr lang="en-US" sz="950" dirty="0"/>
+          </a:p>
+        </p:txBody>
+      </p:sp>
+      <p:sp>
+        <p:nvSpPr>
+          <p:cNvPr id="16" name="Text 14"/>
+          <p:cNvSpPr/>
+          <p:nvPr/>
+        </p:nvSpPr>
+        <p:spPr>
+          <a:xfrm>
+            <a:off x="8074152" y="3959352"/>
+            <a:ext cx="2825496" cy="1170432"/>
+          </a:xfrm>
+          <a:prstGeom prst="rect">
+            <a:avLst/>
+          </a:prstGeom>
+          <a:noFill/>
+          <a:ln/>
+        </p:spPr>
+        <p:txBody>
+          <a:bodyPr wrap="square" lIns="0" tIns="0" rIns="0" bIns="0" rtlCol="0" anchor="t">
+            <a:normAutofit/>
+          </a:bodyPr>
+          <a:lstStyle/>
+          <a:p>
+            <a:pPr indent="0" marL="0">
+              <a:buNone/>
+            </a:pPr>
+            <a:r>
+              <a:rPr lang="en-US" sz="1250" dirty="0">
                 <a:solidFill>
                   <a:srgbClr val="17364A"/>
                 </a:solidFill>
@@ -4776,37 +7474,9 @@
                 <a:ea typeface="Aptos" pitchFamily="34" charset="-122"/>
                 <a:cs typeface="Aptos" pitchFamily="34" charset="-120"/>
               </a:rPr>
-              <a:t>3. When should an AI use case be escalated for leadership or governance review?</a:t>
-            </a:r>
-            <a:endParaRPr lang="en-US" sz="1450" dirty="0"/>
-          </a:p>
-          <a:p>
-            <a:r>
-              <a:rPr lang="en-US" sz="1450" dirty="0">
-                <a:solidFill>
-                  <a:srgbClr val="17364A"/>
-                </a:solidFill>
-                <a:latin typeface="Aptos" pitchFamily="34" charset="0"/>
-                <a:ea typeface="Aptos" pitchFamily="34" charset="-122"/>
-                <a:cs typeface="Aptos" pitchFamily="34" charset="-120"/>
-              </a:rPr>
-              <a:t>4. What is weak evidence of completion for a leadership and governance module?</a:t>
-            </a:r>
-            <a:endParaRPr lang="en-US" sz="1450" dirty="0"/>
-          </a:p>
-          <a:p>
-            <a:r>
-              <a:rPr lang="en-US" sz="1450" dirty="0">
-                <a:solidFill>
-                  <a:srgbClr val="17364A"/>
-                </a:solidFill>
-                <a:latin typeface="Aptos" pitchFamily="34" charset="0"/>
-                <a:ea typeface="Aptos" pitchFamily="34" charset="-122"/>
-                <a:cs typeface="Aptos" pitchFamily="34" charset="-120"/>
-              </a:rPr>
-              <a:t>5. What should leaders do when an AI use case has meaningful benefits but unresolved risks?</a:t>
-            </a:r>
-            <a:endParaRPr lang="en-US" sz="1450" dirty="0"/>
+              <a:t>Connect the concept to public health decisions, safeguards, documentation, or implementation work.</a:t>
+            </a:r>
+            <a:endParaRPr lang="en-US" sz="1250" dirty="0"/>
           </a:p>
         </p:txBody>
       </p:sp>
@@ -4869,7 +7539,32 @@
       </p:sp>
       <p:sp>
         <p:nvSpPr>
-          <p:cNvPr id="3" name="Text 1"/>
+          <p:cNvPr id="3" name="Shape 1"/>
+          <p:cNvSpPr/>
+          <p:nvPr/>
+        </p:nvSpPr>
+        <p:spPr>
+          <a:xfrm>
+            <a:off x="0" y="164592"/>
+            <a:ext cx="146304" cy="6693408"/>
+          </a:xfrm>
+          <a:prstGeom prst="rect">
+            <a:avLst/>
+          </a:prstGeom>
+          <a:solidFill>
+            <a:srgbClr val="2F8A28"/>
+          </a:solidFill>
+          <a:ln w="12700">
+            <a:solidFill>
+              <a:srgbClr val="2F8A28"/>
+            </a:solidFill>
+            <a:prstDash val="solid"/>
+          </a:ln>
+        </p:spPr>
+      </p:sp>
+      <p:sp>
+        <p:nvSpPr>
+          <p:cNvPr id="4" name="Text 2"/>
           <p:cNvSpPr/>
           <p:nvPr/>
         </p:nvSpPr>
@@ -4908,7 +7603,7 @@
       </p:sp>
       <p:sp>
         <p:nvSpPr>
-          <p:cNvPr id="4" name="Text 2"/>
+          <p:cNvPr id="5" name="Text 3"/>
           <p:cNvSpPr/>
           <p:nvPr/>
         </p:nvSpPr>
@@ -4947,7 +7642,7 @@
       </p:sp>
       <p:sp>
         <p:nvSpPr>
-          <p:cNvPr id="5" name="Text 3"/>
+          <p:cNvPr id="6" name="Text 4"/>
           <p:cNvSpPr/>
           <p:nvPr/>
         </p:nvSpPr>
@@ -4986,13 +7681,77 @@
       </p:sp>
       <p:sp>
         <p:nvSpPr>
-          <p:cNvPr id="6" name="Text 4"/>
+          <p:cNvPr id="7" name="Shape 5"/>
           <p:cNvSpPr/>
           <p:nvPr/>
         </p:nvSpPr>
         <p:spPr>
           <a:xfrm>
             <a:off x="640080" y="658368"/>
+            <a:ext cx="420624" cy="420624"/>
+          </a:xfrm>
+          <a:prstGeom prst="ellipse">
+            <a:avLst/>
+          </a:prstGeom>
+          <a:solidFill>
+            <a:srgbClr val="0068B7"/>
+          </a:solidFill>
+          <a:ln w="12700">
+            <a:solidFill>
+              <a:srgbClr val="0068B7"/>
+            </a:solidFill>
+            <a:prstDash val="solid"/>
+          </a:ln>
+        </p:spPr>
+      </p:sp>
+      <p:sp>
+        <p:nvSpPr>
+          <p:cNvPr id="8" name="Text 6"/>
+          <p:cNvSpPr/>
+          <p:nvPr/>
+        </p:nvSpPr>
+        <p:spPr>
+          <a:xfrm>
+            <a:off x="640080" y="731520"/>
+            <a:ext cx="420624" cy="164592"/>
+          </a:xfrm>
+          <a:prstGeom prst="rect">
+            <a:avLst/>
+          </a:prstGeom>
+          <a:noFill/>
+          <a:ln/>
+        </p:spPr>
+        <p:txBody>
+          <a:bodyPr wrap="square" lIns="0" tIns="0" rIns="0" bIns="0" rtlCol="0" anchor="ctr"/>
+          <a:lstStyle/>
+          <a:p>
+            <a:pPr algn="ctr" indent="0" marL="0">
+              <a:buNone/>
+            </a:pPr>
+            <a:r>
+              <a:rPr lang="en-US" sz="1100" b="1" dirty="0">
+                <a:solidFill>
+                  <a:srgbClr val="FFFFFF"/>
+                </a:solidFill>
+                <a:latin typeface="Aptos" pitchFamily="34" charset="0"/>
+                <a:ea typeface="Aptos" pitchFamily="34" charset="-122"/>
+                <a:cs typeface="Aptos" pitchFamily="34" charset="-120"/>
+              </a:rPr>
+              <a:t>13</a:t>
+            </a:r>
+            <a:endParaRPr lang="en-US" sz="1100" dirty="0"/>
+          </a:p>
+        </p:txBody>
+      </p:sp>
+      <p:sp>
+        <p:nvSpPr>
+          <p:cNvPr id="9" name="Text 7"/>
+          <p:cNvSpPr/>
+          <p:nvPr/>
+        </p:nvSpPr>
+        <p:spPr>
+          <a:xfrm>
+            <a:off x="640080" y="621792"/>
             <a:ext cx="10881360" cy="566928"/>
           </a:xfrm>
           <a:prstGeom prst="rect">
@@ -5019,7 +7778,7 @@
                 <a:ea typeface="Aptos Display" pitchFamily="34" charset="-122"/>
                 <a:cs typeface="Aptos Display" pitchFamily="34" charset="-120"/>
               </a:rPr>
-              <a:t>References and Resources</a:t>
+              <a:t>Expected Assignment</a:t>
             </a:r>
             <a:endParaRPr lang="en-US" sz="2700" dirty="0"/>
           </a:p>
@@ -5027,14 +7786,14 @@
       </p:sp>
       <p:sp>
         <p:nvSpPr>
-          <p:cNvPr id="7" name="Text 5"/>
-          <p:cNvSpPr/>
-          <p:nvPr/>
-        </p:nvSpPr>
-        <p:spPr>
-          <a:xfrm>
-            <a:off x="822960" y="1325880"/>
-            <a:ext cx="10378440" cy="4800600"/>
+          <p:cNvPr id="10" name="Text 8"/>
+          <p:cNvSpPr/>
+          <p:nvPr/>
+        </p:nvSpPr>
+        <p:spPr>
+          <a:xfrm>
+            <a:off x="868680" y="1417320"/>
+            <a:ext cx="6675120" cy="4434840"/>
           </a:xfrm>
           <a:prstGeom prst="rect">
             <a:avLst/>
@@ -5049,7 +7808,7 @@
           <a:lstStyle/>
           <a:p>
             <a:r>
-              <a:rPr lang="en-US" sz="1450" dirty="0">
+              <a:rPr lang="en-US" sz="1700" dirty="0">
                 <a:solidFill>
                   <a:srgbClr val="17364A"/>
                 </a:solidFill>
@@ -5057,13 +7816,106 @@
                 <a:ea typeface="Aptos" pitchFamily="34" charset="-122"/>
                 <a:cs typeface="Aptos" pitchFamily="34" charset="-120"/>
               </a:rPr>
-              <a:t>NIST Artificial Intelligence Risk Management Framework (AI RMF 1.0): https://www.nist.gov/itl/ai-risk-management-framework</a:t>
-            </a:r>
-            <a:endParaRPr lang="en-US" sz="1450" dirty="0"/>
-          </a:p>
-          <a:p>
-            <a:r>
-              <a:rPr lang="en-US" sz="1450" dirty="0">
+              <a:t>AI risk appetite statement; risk tolerance table; prohibited-use examples; mitigation and escalation conditions.</a:t>
+            </a:r>
+            <a:endParaRPr lang="en-US" sz="1700" dirty="0"/>
+          </a:p>
+        </p:txBody>
+      </p:sp>
+      <p:sp>
+        <p:nvSpPr>
+          <p:cNvPr id="11" name="Shape 9"/>
+          <p:cNvSpPr/>
+          <p:nvPr/>
+        </p:nvSpPr>
+        <p:spPr>
+          <a:xfrm>
+            <a:off x="7909560" y="1417320"/>
+            <a:ext cx="3154680" cy="1828800"/>
+          </a:xfrm>
+          <a:prstGeom prst="roundRect">
+            <a:avLst>
+              <a:gd name="adj" fmla="val 6000"/>
+            </a:avLst>
+          </a:prstGeom>
+          <a:solidFill>
+            <a:srgbClr val="EEF8ED"/>
+          </a:solidFill>
+          <a:ln w="12700">
+            <a:solidFill>
+              <a:srgbClr val="B9D7E6"/>
+            </a:solidFill>
+            <a:prstDash val="solid"/>
+          </a:ln>
+        </p:spPr>
+      </p:sp>
+      <p:sp>
+        <p:nvSpPr>
+          <p:cNvPr id="12" name="Text 10"/>
+          <p:cNvSpPr/>
+          <p:nvPr/>
+        </p:nvSpPr>
+        <p:spPr>
+          <a:xfrm>
+            <a:off x="8074152" y="1563624"/>
+            <a:ext cx="2825496" cy="201168"/>
+          </a:xfrm>
+          <a:prstGeom prst="rect">
+            <a:avLst/>
+          </a:prstGeom>
+          <a:noFill/>
+          <a:ln/>
+        </p:spPr>
+        <p:txBody>
+          <a:bodyPr wrap="square" lIns="0" tIns="0" rIns="0" bIns="0" rtlCol="0" anchor="ctr"/>
+          <a:lstStyle/>
+          <a:p>
+            <a:pPr indent="0" marL="0">
+              <a:buNone/>
+            </a:pPr>
+            <a:r>
+              <a:rPr lang="en-US" sz="950" b="1" dirty="0">
+                <a:solidFill>
+                  <a:srgbClr val="0068B7"/>
+                </a:solidFill>
+                <a:latin typeface="Aptos" pitchFamily="34" charset="0"/>
+                <a:ea typeface="Aptos" pitchFamily="34" charset="-122"/>
+                <a:cs typeface="Aptos" pitchFamily="34" charset="-120"/>
+              </a:rPr>
+              <a:t>Key idea</a:t>
+            </a:r>
+            <a:endParaRPr lang="en-US" sz="950" dirty="0"/>
+          </a:p>
+        </p:txBody>
+      </p:sp>
+      <p:sp>
+        <p:nvSpPr>
+          <p:cNvPr id="13" name="Text 11"/>
+          <p:cNvSpPr/>
+          <p:nvPr/>
+        </p:nvSpPr>
+        <p:spPr>
+          <a:xfrm>
+            <a:off x="8074152" y="1856232"/>
+            <a:ext cx="2825496" cy="1261872"/>
+          </a:xfrm>
+          <a:prstGeom prst="rect">
+            <a:avLst/>
+          </a:prstGeom>
+          <a:noFill/>
+          <a:ln/>
+        </p:spPr>
+        <p:txBody>
+          <a:bodyPr wrap="square" lIns="0" tIns="0" rIns="0" bIns="0" rtlCol="0" anchor="t">
+            <a:normAutofit/>
+          </a:bodyPr>
+          <a:lstStyle/>
+          <a:p>
+            <a:pPr indent="0" marL="0">
+              <a:buNone/>
+            </a:pPr>
+            <a:r>
+              <a:rPr lang="en-US" sz="1250" dirty="0">
                 <a:solidFill>
                   <a:srgbClr val="17364A"/>
                 </a:solidFill>
@@ -5071,13 +7923,106 @@
                 <a:ea typeface="Aptos" pitchFamily="34" charset="-122"/>
                 <a:cs typeface="Aptos" pitchFamily="34" charset="-120"/>
               </a:rPr>
-              <a:t>NIST Generative AI Profile: https://www.nist.gov/publications/artificial-intelligence-risk-management-framework-generative-artificial-intelligence</a:t>
-            </a:r>
-            <a:endParaRPr lang="en-US" sz="1450" dirty="0"/>
-          </a:p>
-          <a:p>
-            <a:r>
-              <a:rPr lang="en-US" sz="1450" dirty="0">
+              <a:t>AI risk appetite statement; risk tolerance table; prohibited-use examples; mitigation and escalation conditions.</a:t>
+            </a:r>
+            <a:endParaRPr lang="en-US" sz="1250" dirty="0"/>
+          </a:p>
+        </p:txBody>
+      </p:sp>
+      <p:sp>
+        <p:nvSpPr>
+          <p:cNvPr id="14" name="Shape 12"/>
+          <p:cNvSpPr/>
+          <p:nvPr/>
+        </p:nvSpPr>
+        <p:spPr>
+          <a:xfrm>
+            <a:off x="7909560" y="3520440"/>
+            <a:ext cx="3154680" cy="1737360"/>
+          </a:xfrm>
+          <a:prstGeom prst="roundRect">
+            <a:avLst>
+              <a:gd name="adj" fmla="val 6316"/>
+            </a:avLst>
+          </a:prstGeom>
+          <a:solidFill>
+            <a:srgbClr val="EAF6F8"/>
+          </a:solidFill>
+          <a:ln w="12700">
+            <a:solidFill>
+              <a:srgbClr val="B9D7E6"/>
+            </a:solidFill>
+            <a:prstDash val="solid"/>
+          </a:ln>
+        </p:spPr>
+      </p:sp>
+      <p:sp>
+        <p:nvSpPr>
+          <p:cNvPr id="15" name="Text 13"/>
+          <p:cNvSpPr/>
+          <p:nvPr/>
+        </p:nvSpPr>
+        <p:spPr>
+          <a:xfrm>
+            <a:off x="8074152" y="3666744"/>
+            <a:ext cx="2825496" cy="201168"/>
+          </a:xfrm>
+          <a:prstGeom prst="rect">
+            <a:avLst/>
+          </a:prstGeom>
+          <a:noFill/>
+          <a:ln/>
+        </p:spPr>
+        <p:txBody>
+          <a:bodyPr wrap="square" lIns="0" tIns="0" rIns="0" bIns="0" rtlCol="0" anchor="ctr"/>
+          <a:lstStyle/>
+          <a:p>
+            <a:pPr indent="0" marL="0">
+              <a:buNone/>
+            </a:pPr>
+            <a:r>
+              <a:rPr lang="en-US" sz="950" b="1" dirty="0">
+                <a:solidFill>
+                  <a:srgbClr val="0068B7"/>
+                </a:solidFill>
+                <a:latin typeface="Aptos" pitchFamily="34" charset="0"/>
+                <a:ea typeface="Aptos" pitchFamily="34" charset="-122"/>
+                <a:cs typeface="Aptos" pitchFamily="34" charset="-120"/>
+              </a:rPr>
+              <a:t>Use this for</a:t>
+            </a:r>
+            <a:endParaRPr lang="en-US" sz="950" dirty="0"/>
+          </a:p>
+        </p:txBody>
+      </p:sp>
+      <p:sp>
+        <p:nvSpPr>
+          <p:cNvPr id="16" name="Text 14"/>
+          <p:cNvSpPr/>
+          <p:nvPr/>
+        </p:nvSpPr>
+        <p:spPr>
+          <a:xfrm>
+            <a:off x="8074152" y="3959352"/>
+            <a:ext cx="2825496" cy="1170432"/>
+          </a:xfrm>
+          <a:prstGeom prst="rect">
+            <a:avLst/>
+          </a:prstGeom>
+          <a:noFill/>
+          <a:ln/>
+        </p:spPr>
+        <p:txBody>
+          <a:bodyPr wrap="square" lIns="0" tIns="0" rIns="0" bIns="0" rtlCol="0" anchor="t">
+            <a:normAutofit/>
+          </a:bodyPr>
+          <a:lstStyle/>
+          <a:p>
+            <a:pPr indent="0" marL="0">
+              <a:buNone/>
+            </a:pPr>
+            <a:r>
+              <a:rPr lang="en-US" sz="1250" dirty="0">
                 <a:solidFill>
                   <a:srgbClr val="17364A"/>
                 </a:solidFill>
@@ -5085,37 +8030,9 @@
                 <a:ea typeface="Aptos" pitchFamily="34" charset="-122"/>
                 <a:cs typeface="Aptos" pitchFamily="34" charset="-120"/>
               </a:rPr>
-              <a:t>NIST Privacy Framework</a:t>
-            </a:r>
-            <a:endParaRPr lang="en-US" sz="1450" dirty="0"/>
-          </a:p>
-          <a:p>
-            <a:r>
-              <a:rPr lang="en-US" sz="1450" dirty="0">
-                <a:solidFill>
-                  <a:srgbClr val="17364A"/>
-                </a:solidFill>
-                <a:latin typeface="Aptos" pitchFamily="34" charset="0"/>
-                <a:ea typeface="Aptos" pitchFamily="34" charset="-122"/>
-                <a:cs typeface="Aptos" pitchFamily="34" charset="-120"/>
-              </a:rPr>
-              <a:t>CDC Public Health Data Strategy and Data Modernization resources: https://www.cdc.gov/public-health-data-strategy/php/about/index.html</a:t>
-            </a:r>
-            <a:endParaRPr lang="en-US" sz="1450" dirty="0"/>
-          </a:p>
-          <a:p>
-            <a:r>
-              <a:rPr lang="en-US" sz="1450" dirty="0">
-                <a:solidFill>
-                  <a:srgbClr val="17364A"/>
-                </a:solidFill>
-                <a:latin typeface="Aptos" pitchFamily="34" charset="0"/>
-                <a:ea typeface="Aptos" pitchFamily="34" charset="-122"/>
-                <a:cs typeface="Aptos" pitchFamily="34" charset="-120"/>
-              </a:rPr>
-              <a:t>WHO Ethics and Governance of Artificial Intelligence for Health: https://www.who.int/publications/i/item/9789240029200</a:t>
-            </a:r>
-            <a:endParaRPr lang="en-US" sz="1450" dirty="0"/>
+              <a:t>Connect the concept to public health decisions, safeguards, documentation, or implementation work.</a:t>
+            </a:r>
+            <a:endParaRPr lang="en-US" sz="1250" dirty="0"/>
           </a:p>
         </p:txBody>
       </p:sp>
@@ -5178,7 +8095,32 @@
       </p:sp>
       <p:sp>
         <p:nvSpPr>
-          <p:cNvPr id="3" name="Text 1"/>
+          <p:cNvPr id="3" name="Shape 1"/>
+          <p:cNvSpPr/>
+          <p:nvPr/>
+        </p:nvSpPr>
+        <p:spPr>
+          <a:xfrm>
+            <a:off x="0" y="164592"/>
+            <a:ext cx="146304" cy="6693408"/>
+          </a:xfrm>
+          <a:prstGeom prst="rect">
+            <a:avLst/>
+          </a:prstGeom>
+          <a:solidFill>
+            <a:srgbClr val="2F8A28"/>
+          </a:solidFill>
+          <a:ln w="12700">
+            <a:solidFill>
+              <a:srgbClr val="2F8A28"/>
+            </a:solidFill>
+            <a:prstDash val="solid"/>
+          </a:ln>
+        </p:spPr>
+      </p:sp>
+      <p:sp>
+        <p:nvSpPr>
+          <p:cNvPr id="4" name="Text 2"/>
           <p:cNvSpPr/>
           <p:nvPr/>
         </p:nvSpPr>
@@ -5217,7 +8159,7 @@
       </p:sp>
       <p:sp>
         <p:nvSpPr>
-          <p:cNvPr id="4" name="Text 2"/>
+          <p:cNvPr id="5" name="Text 3"/>
           <p:cNvSpPr/>
           <p:nvPr/>
         </p:nvSpPr>
@@ -5256,7 +8198,7 @@
       </p:sp>
       <p:sp>
         <p:nvSpPr>
-          <p:cNvPr id="5" name="Text 3"/>
+          <p:cNvPr id="6" name="Text 4"/>
           <p:cNvSpPr/>
           <p:nvPr/>
         </p:nvSpPr>
@@ -5295,13 +8237,77 @@
       </p:sp>
       <p:sp>
         <p:nvSpPr>
-          <p:cNvPr id="6" name="Text 4"/>
+          <p:cNvPr id="7" name="Shape 5"/>
           <p:cNvSpPr/>
           <p:nvPr/>
         </p:nvSpPr>
         <p:spPr>
           <a:xfrm>
             <a:off x="640080" y="658368"/>
+            <a:ext cx="420624" cy="420624"/>
+          </a:xfrm>
+          <a:prstGeom prst="ellipse">
+            <a:avLst/>
+          </a:prstGeom>
+          <a:solidFill>
+            <a:srgbClr val="0068B7"/>
+          </a:solidFill>
+          <a:ln w="12700">
+            <a:solidFill>
+              <a:srgbClr val="0068B7"/>
+            </a:solidFill>
+            <a:prstDash val="solid"/>
+          </a:ln>
+        </p:spPr>
+      </p:sp>
+      <p:sp>
+        <p:nvSpPr>
+          <p:cNvPr id="8" name="Text 6"/>
+          <p:cNvSpPr/>
+          <p:nvPr/>
+        </p:nvSpPr>
+        <p:spPr>
+          <a:xfrm>
+            <a:off x="640080" y="731520"/>
+            <a:ext cx="420624" cy="164592"/>
+          </a:xfrm>
+          <a:prstGeom prst="rect">
+            <a:avLst/>
+          </a:prstGeom>
+          <a:noFill/>
+          <a:ln/>
+        </p:spPr>
+        <p:txBody>
+          <a:bodyPr wrap="square" lIns="0" tIns="0" rIns="0" bIns="0" rtlCol="0" anchor="ctr"/>
+          <a:lstStyle/>
+          <a:p>
+            <a:pPr algn="ctr" indent="0" marL="0">
+              <a:buNone/>
+            </a:pPr>
+            <a:r>
+              <a:rPr lang="en-US" sz="1100" b="1" dirty="0">
+                <a:solidFill>
+                  <a:srgbClr val="FFFFFF"/>
+                </a:solidFill>
+                <a:latin typeface="Aptos" pitchFamily="34" charset="0"/>
+                <a:ea typeface="Aptos" pitchFamily="34" charset="-122"/>
+                <a:cs typeface="Aptos" pitchFamily="34" charset="-120"/>
+              </a:rPr>
+              <a:t>14</a:t>
+            </a:r>
+            <a:endParaRPr lang="en-US" sz="1100" dirty="0"/>
+          </a:p>
+        </p:txBody>
+      </p:sp>
+      <p:sp>
+        <p:nvSpPr>
+          <p:cNvPr id="9" name="Text 7"/>
+          <p:cNvSpPr/>
+          <p:nvPr/>
+        </p:nvSpPr>
+        <p:spPr>
+          <a:xfrm>
+            <a:off x="640080" y="621792"/>
             <a:ext cx="10881360" cy="566928"/>
           </a:xfrm>
           <a:prstGeom prst="rect">
@@ -5328,7 +8334,7 @@
                 <a:ea typeface="Aptos Display" pitchFamily="34" charset="-122"/>
                 <a:cs typeface="Aptos Display" pitchFamily="34" charset="-120"/>
               </a:rPr>
-              <a:t>References and Resources Continued</a:t>
+              <a:t>Knowledge Check</a:t>
             </a:r>
             <a:endParaRPr lang="en-US" sz="2700" dirty="0"/>
           </a:p>
@@ -5336,14 +8342,14 @@
       </p:sp>
       <p:sp>
         <p:nvSpPr>
-          <p:cNvPr id="7" name="Text 5"/>
-          <p:cNvSpPr/>
-          <p:nvPr/>
-        </p:nvSpPr>
-        <p:spPr>
-          <a:xfrm>
-            <a:off x="822960" y="1325880"/>
-            <a:ext cx="10378440" cy="4800600"/>
+          <p:cNvPr id="10" name="Text 8"/>
+          <p:cNvSpPr/>
+          <p:nvPr/>
+        </p:nvSpPr>
+        <p:spPr>
+          <a:xfrm>
+            <a:off x="868680" y="1417320"/>
+            <a:ext cx="6675120" cy="4434840"/>
           </a:xfrm>
           <a:prstGeom prst="rect">
             <a:avLst/>
@@ -5358,7 +8364,7 @@
           <a:lstStyle/>
           <a:p>
             <a:r>
-              <a:rPr lang="en-US" sz="1450" dirty="0">
+              <a:rPr lang="en-US" sz="1700" dirty="0">
                 <a:solidFill>
                   <a:srgbClr val="17364A"/>
                 </a:solidFill>
@@ -5366,13 +8372,13 @@
                 <a:ea typeface="Aptos" pitchFamily="34" charset="-122"/>
                 <a:cs typeface="Aptos" pitchFamily="34" charset="-120"/>
               </a:rPr>
-              <a:t>OMB Memorandum M-24-10 on federal AI governance, risk management, and innovation, where relevant to public-sector governance models</a:t>
-            </a:r>
-            <a:endParaRPr lang="en-US" sz="1450" dirty="0"/>
-          </a:p>
-          <a:p>
-            <a:r>
-              <a:rPr lang="en-US" sz="1450" dirty="0">
+              <a:t>1. What is the strongest reason this module topic belongs in AI leadership and governance training?</a:t>
+            </a:r>
+            <a:endParaRPr lang="en-US" sz="1700" dirty="0"/>
+          </a:p>
+          <a:p>
+            <a:r>
+              <a:rPr lang="en-US" sz="1700" dirty="0">
                 <a:solidFill>
                   <a:srgbClr val="17364A"/>
                 </a:solidFill>
@@ -5380,9 +8386,251 @@
                 <a:ea typeface="Aptos" pitchFamily="34" charset="-122"/>
                 <a:cs typeface="Aptos" pitchFamily="34" charset="-120"/>
               </a:rPr>
-              <a:t>Agency strategic plans, procurement policies, privacy policies, cybersecurity policies, records policies, and equity plans</a:t>
-            </a:r>
-            <a:endParaRPr lang="en-US" sz="1450" dirty="0"/>
+              <a:t>2. Which practice best supports accountable public health AI governance?</a:t>
+            </a:r>
+            <a:endParaRPr lang="en-US" sz="1700" dirty="0"/>
+          </a:p>
+          <a:p>
+            <a:r>
+              <a:rPr lang="en-US" sz="1700" dirty="0">
+                <a:solidFill>
+                  <a:srgbClr val="17364A"/>
+                </a:solidFill>
+                <a:latin typeface="Aptos" pitchFamily="34" charset="0"/>
+                <a:ea typeface="Aptos" pitchFamily="34" charset="-122"/>
+                <a:cs typeface="Aptos" pitchFamily="34" charset="-120"/>
+              </a:rPr>
+              <a:t>3. When should an AI use case be escalated for leadership or governance review?</a:t>
+            </a:r>
+            <a:endParaRPr lang="en-US" sz="1700" dirty="0"/>
+          </a:p>
+          <a:p>
+            <a:r>
+              <a:rPr lang="en-US" sz="1700" dirty="0">
+                <a:solidFill>
+                  <a:srgbClr val="17364A"/>
+                </a:solidFill>
+                <a:latin typeface="Aptos" pitchFamily="34" charset="0"/>
+                <a:ea typeface="Aptos" pitchFamily="34" charset="-122"/>
+                <a:cs typeface="Aptos" pitchFamily="34" charset="-120"/>
+              </a:rPr>
+              <a:t>4. What is weak evidence of completion for a leadership and governance module?</a:t>
+            </a:r>
+            <a:endParaRPr lang="en-US" sz="1700" dirty="0"/>
+          </a:p>
+        </p:txBody>
+      </p:sp>
+      <p:sp>
+        <p:nvSpPr>
+          <p:cNvPr id="11" name="Shape 9"/>
+          <p:cNvSpPr/>
+          <p:nvPr/>
+        </p:nvSpPr>
+        <p:spPr>
+          <a:xfrm>
+            <a:off x="7909560" y="1417320"/>
+            <a:ext cx="3154680" cy="1828800"/>
+          </a:xfrm>
+          <a:prstGeom prst="roundRect">
+            <a:avLst>
+              <a:gd name="adj" fmla="val 6000"/>
+            </a:avLst>
+          </a:prstGeom>
+          <a:solidFill>
+            <a:srgbClr val="EEF8ED"/>
+          </a:solidFill>
+          <a:ln w="12700">
+            <a:solidFill>
+              <a:srgbClr val="B9D7E6"/>
+            </a:solidFill>
+            <a:prstDash val="solid"/>
+          </a:ln>
+        </p:spPr>
+      </p:sp>
+      <p:sp>
+        <p:nvSpPr>
+          <p:cNvPr id="12" name="Text 10"/>
+          <p:cNvSpPr/>
+          <p:nvPr/>
+        </p:nvSpPr>
+        <p:spPr>
+          <a:xfrm>
+            <a:off x="8074152" y="1563624"/>
+            <a:ext cx="2825496" cy="201168"/>
+          </a:xfrm>
+          <a:prstGeom prst="rect">
+            <a:avLst/>
+          </a:prstGeom>
+          <a:noFill/>
+          <a:ln/>
+        </p:spPr>
+        <p:txBody>
+          <a:bodyPr wrap="square" lIns="0" tIns="0" rIns="0" bIns="0" rtlCol="0" anchor="ctr"/>
+          <a:lstStyle/>
+          <a:p>
+            <a:pPr indent="0" marL="0">
+              <a:buNone/>
+            </a:pPr>
+            <a:r>
+              <a:rPr lang="en-US" sz="950" b="1" dirty="0">
+                <a:solidFill>
+                  <a:srgbClr val="0068B7"/>
+                </a:solidFill>
+                <a:latin typeface="Aptos" pitchFamily="34" charset="0"/>
+                <a:ea typeface="Aptos" pitchFamily="34" charset="-122"/>
+                <a:cs typeface="Aptos" pitchFamily="34" charset="-120"/>
+              </a:rPr>
+              <a:t>Key idea</a:t>
+            </a:r>
+            <a:endParaRPr lang="en-US" sz="950" dirty="0"/>
+          </a:p>
+        </p:txBody>
+      </p:sp>
+      <p:sp>
+        <p:nvSpPr>
+          <p:cNvPr id="13" name="Text 11"/>
+          <p:cNvSpPr/>
+          <p:nvPr/>
+        </p:nvSpPr>
+        <p:spPr>
+          <a:xfrm>
+            <a:off x="8074152" y="1856232"/>
+            <a:ext cx="2825496" cy="1261872"/>
+          </a:xfrm>
+          <a:prstGeom prst="rect">
+            <a:avLst/>
+          </a:prstGeom>
+          <a:noFill/>
+          <a:ln/>
+        </p:spPr>
+        <p:txBody>
+          <a:bodyPr wrap="square" lIns="0" tIns="0" rIns="0" bIns="0" rtlCol="0" anchor="t">
+            <a:normAutofit/>
+          </a:bodyPr>
+          <a:lstStyle/>
+          <a:p>
+            <a:pPr indent="0" marL="0">
+              <a:buNone/>
+            </a:pPr>
+            <a:r>
+              <a:rPr lang="en-US" sz="1250" dirty="0">
+                <a:solidFill>
+                  <a:srgbClr val="17364A"/>
+                </a:solidFill>
+                <a:latin typeface="Aptos" pitchFamily="34" charset="0"/>
+                <a:ea typeface="Aptos" pitchFamily="34" charset="-122"/>
+                <a:cs typeface="Aptos" pitchFamily="34" charset="-120"/>
+              </a:rPr>
+              <a:t>1. What is the strongest reason this module topic belongs in AI leadership and governance training?</a:t>
+            </a:r>
+            <a:endParaRPr lang="en-US" sz="1250" dirty="0"/>
+          </a:p>
+        </p:txBody>
+      </p:sp>
+      <p:sp>
+        <p:nvSpPr>
+          <p:cNvPr id="14" name="Shape 12"/>
+          <p:cNvSpPr/>
+          <p:nvPr/>
+        </p:nvSpPr>
+        <p:spPr>
+          <a:xfrm>
+            <a:off x="7909560" y="3520440"/>
+            <a:ext cx="3154680" cy="1737360"/>
+          </a:xfrm>
+          <a:prstGeom prst="roundRect">
+            <a:avLst>
+              <a:gd name="adj" fmla="val 6316"/>
+            </a:avLst>
+          </a:prstGeom>
+          <a:solidFill>
+            <a:srgbClr val="EAF6F8"/>
+          </a:solidFill>
+          <a:ln w="12700">
+            <a:solidFill>
+              <a:srgbClr val="B9D7E6"/>
+            </a:solidFill>
+            <a:prstDash val="solid"/>
+          </a:ln>
+        </p:spPr>
+      </p:sp>
+      <p:sp>
+        <p:nvSpPr>
+          <p:cNvPr id="15" name="Text 13"/>
+          <p:cNvSpPr/>
+          <p:nvPr/>
+        </p:nvSpPr>
+        <p:spPr>
+          <a:xfrm>
+            <a:off x="8074152" y="3666744"/>
+            <a:ext cx="2825496" cy="201168"/>
+          </a:xfrm>
+          <a:prstGeom prst="rect">
+            <a:avLst/>
+          </a:prstGeom>
+          <a:noFill/>
+          <a:ln/>
+        </p:spPr>
+        <p:txBody>
+          <a:bodyPr wrap="square" lIns="0" tIns="0" rIns="0" bIns="0" rtlCol="0" anchor="ctr"/>
+          <a:lstStyle/>
+          <a:p>
+            <a:pPr indent="0" marL="0">
+              <a:buNone/>
+            </a:pPr>
+            <a:r>
+              <a:rPr lang="en-US" sz="950" b="1" dirty="0">
+                <a:solidFill>
+                  <a:srgbClr val="0068B7"/>
+                </a:solidFill>
+                <a:latin typeface="Aptos" pitchFamily="34" charset="0"/>
+                <a:ea typeface="Aptos" pitchFamily="34" charset="-122"/>
+                <a:cs typeface="Aptos" pitchFamily="34" charset="-120"/>
+              </a:rPr>
+              <a:t>Use this for</a:t>
+            </a:r>
+            <a:endParaRPr lang="en-US" sz="950" dirty="0"/>
+          </a:p>
+        </p:txBody>
+      </p:sp>
+      <p:sp>
+        <p:nvSpPr>
+          <p:cNvPr id="16" name="Text 14"/>
+          <p:cNvSpPr/>
+          <p:nvPr/>
+        </p:nvSpPr>
+        <p:spPr>
+          <a:xfrm>
+            <a:off x="8074152" y="3959352"/>
+            <a:ext cx="2825496" cy="1170432"/>
+          </a:xfrm>
+          <a:prstGeom prst="rect">
+            <a:avLst/>
+          </a:prstGeom>
+          <a:noFill/>
+          <a:ln/>
+        </p:spPr>
+        <p:txBody>
+          <a:bodyPr wrap="square" lIns="0" tIns="0" rIns="0" bIns="0" rtlCol="0" anchor="t">
+            <a:normAutofit/>
+          </a:bodyPr>
+          <a:lstStyle/>
+          <a:p>
+            <a:pPr indent="0" marL="0">
+              <a:buNone/>
+            </a:pPr>
+            <a:r>
+              <a:rPr lang="en-US" sz="1250" dirty="0">
+                <a:solidFill>
+                  <a:srgbClr val="17364A"/>
+                </a:solidFill>
+                <a:latin typeface="Aptos" pitchFamily="34" charset="0"/>
+                <a:ea typeface="Aptos" pitchFamily="34" charset="-122"/>
+                <a:cs typeface="Aptos" pitchFamily="34" charset="-120"/>
+              </a:rPr>
+              <a:t>Connect the concept to public health decisions, safeguards, documentation, or implementation work.</a:t>
+            </a:r>
+            <a:endParaRPr lang="en-US" sz="1250" dirty="0"/>
           </a:p>
         </p:txBody>
       </p:sp>
@@ -5445,7 +8693,32 @@
       </p:sp>
       <p:sp>
         <p:nvSpPr>
-          <p:cNvPr id="3" name="Text 1"/>
+          <p:cNvPr id="3" name="Shape 1"/>
+          <p:cNvSpPr/>
+          <p:nvPr/>
+        </p:nvSpPr>
+        <p:spPr>
+          <a:xfrm>
+            <a:off x="0" y="164592"/>
+            <a:ext cx="146304" cy="6693408"/>
+          </a:xfrm>
+          <a:prstGeom prst="rect">
+            <a:avLst/>
+          </a:prstGeom>
+          <a:solidFill>
+            <a:srgbClr val="2F8A28"/>
+          </a:solidFill>
+          <a:ln w="12700">
+            <a:solidFill>
+              <a:srgbClr val="2F8A28"/>
+            </a:solidFill>
+            <a:prstDash val="solid"/>
+          </a:ln>
+        </p:spPr>
+      </p:sp>
+      <p:sp>
+        <p:nvSpPr>
+          <p:cNvPr id="4" name="Text 2"/>
           <p:cNvSpPr/>
           <p:nvPr/>
         </p:nvSpPr>
@@ -5484,7 +8757,7 @@
       </p:sp>
       <p:sp>
         <p:nvSpPr>
-          <p:cNvPr id="4" name="Text 2"/>
+          <p:cNvPr id="5" name="Text 3"/>
           <p:cNvSpPr/>
           <p:nvPr/>
         </p:nvSpPr>
@@ -5523,7 +8796,7 @@
       </p:sp>
       <p:sp>
         <p:nvSpPr>
-          <p:cNvPr id="5" name="Text 3"/>
+          <p:cNvPr id="6" name="Text 4"/>
           <p:cNvSpPr/>
           <p:nvPr/>
         </p:nvSpPr>
@@ -5562,7 +8835,7 @@
       </p:sp>
       <p:sp>
         <p:nvSpPr>
-          <p:cNvPr id="6" name="Text 4"/>
+          <p:cNvPr id="7" name="Text 5"/>
           <p:cNvSpPr/>
           <p:nvPr/>
         </p:nvSpPr>
@@ -5595,7 +8868,7 @@
                 <a:ea typeface="Aptos Display" pitchFamily="34" charset="-122"/>
                 <a:cs typeface="Aptos Display" pitchFamily="34" charset="-120"/>
               </a:rPr>
-              <a:t>Module Context</a:t>
+              <a:t>What this module helps you do</a:t>
             </a:r>
             <a:endParaRPr lang="en-US" sz="2700" dirty="0"/>
           </a:p>
@@ -5603,14 +8876,14 @@
       </p:sp>
       <p:sp>
         <p:nvSpPr>
-          <p:cNvPr id="7" name="Text 5"/>
-          <p:cNvSpPr/>
-          <p:nvPr/>
-        </p:nvSpPr>
-        <p:spPr>
-          <a:xfrm>
-            <a:off x="822960" y="1325880"/>
-            <a:ext cx="10378440" cy="1371600"/>
+          <p:cNvPr id="8" name="Text 6"/>
+          <p:cNvSpPr/>
+          <p:nvPr/>
+        </p:nvSpPr>
+        <p:spPr>
+          <a:xfrm>
+            <a:off x="868680" y="1417320"/>
+            <a:ext cx="6675120" cy="3291840"/>
           </a:xfrm>
           <a:prstGeom prst="rect">
             <a:avLst/>
@@ -5625,7 +8898,7 @@
           <a:lstStyle/>
           <a:p>
             <a:r>
-              <a:rPr lang="en-US" sz="1600" dirty="0">
+              <a:rPr lang="en-US" sz="1700" dirty="0">
                 <a:solidFill>
                   <a:srgbClr val="17364A"/>
                 </a:solidFill>
@@ -5633,13 +8906,13 @@
                 <a:ea typeface="Aptos" pitchFamily="34" charset="-122"/>
                 <a:cs typeface="Aptos" pitchFamily="34" charset="-120"/>
               </a:rPr>
-              <a:t>Level: advanced/leadership</a:t>
-            </a:r>
-            <a:endParaRPr lang="en-US" sz="1600" dirty="0"/>
-          </a:p>
-          <a:p>
-            <a:r>
-              <a:rPr lang="en-US" sz="1600" dirty="0">
+              <a:t>Leaders cannot manage AI risk effectively unless they define how much risk the agency is willing to accept for different types of use.</a:t>
+            </a:r>
+            <a:endParaRPr lang="en-US" sz="1700" dirty="0"/>
+          </a:p>
+          <a:p>
+            <a:r>
+              <a:rPr lang="en-US" sz="1700" dirty="0">
                 <a:solidFill>
                   <a:srgbClr val="17364A"/>
                 </a:solidFill>
@@ -5647,13 +8920,13 @@
                 <a:ea typeface="Aptos" pitchFamily="34" charset="-122"/>
                 <a:cs typeface="Aptos" pitchFamily="34" charset="-120"/>
               </a:rPr>
-              <a:t>Primary track: Governance and Security Track</a:t>
-            </a:r>
-            <a:endParaRPr lang="en-US" sz="1600" dirty="0"/>
-          </a:p>
-          <a:p>
-            <a:r>
-              <a:rPr lang="en-US" sz="1600" dirty="0">
+              <a:t>Risk appetite describes the broad level of risk an organization is willing to take in pursuit of its mission.</a:t>
+            </a:r>
+            <a:endParaRPr lang="en-US" sz="1700" dirty="0"/>
+          </a:p>
+          <a:p>
+            <a:r>
+              <a:rPr lang="en-US" sz="1700" dirty="0">
                 <a:solidFill>
                   <a:srgbClr val="17364A"/>
                 </a:solidFill>
@@ -5661,31 +8934,111 @@
                 <a:ea typeface="Aptos" pitchFamily="34" charset="-122"/>
                 <a:cs typeface="Aptos" pitchFamily="34" charset="-120"/>
               </a:rPr>
-              <a:t>Appears in tracks: governance-security</a:t>
-            </a:r>
-            <a:endParaRPr lang="en-US" sz="1600" dirty="0"/>
-          </a:p>
-        </p:txBody>
-      </p:sp>
-      <p:sp>
-        <p:nvSpPr>
-          <p:cNvPr id="8" name="Text 6"/>
-          <p:cNvSpPr/>
-          <p:nvPr/>
-        </p:nvSpPr>
-        <p:spPr>
-          <a:xfrm>
-            <a:off x="822960" y="2743200"/>
-            <a:ext cx="10378440" cy="2834640"/>
-          </a:xfrm>
-          <a:prstGeom prst="rect">
-            <a:avLst/>
-          </a:prstGeom>
-          <a:noFill/>
-          <a:ln/>
-        </p:spPr>
-        <p:txBody>
-          <a:bodyPr wrap="square" lIns="1016" tIns="1016" rIns="1016" bIns="1016" rtlCol="0" anchor="t">
+              <a:t>Risk tolerance translates that appetite into practical thresholds, conditions, and limits for specific AI uses.</a:t>
+            </a:r>
+            <a:endParaRPr lang="en-US" sz="1700" dirty="0"/>
+          </a:p>
+          <a:p>
+            <a:r>
+              <a:rPr lang="en-US" sz="1700" dirty="0">
+                <a:solidFill>
+                  <a:srgbClr val="17364A"/>
+                </a:solidFill>
+                <a:latin typeface="Aptos" pitchFamily="34" charset="0"/>
+                <a:ea typeface="Aptos" pitchFamily="34" charset="-122"/>
+                <a:cs typeface="Aptos" pitchFamily="34" charset="-120"/>
+              </a:rPr>
+              <a:t>This module helps public health leaders define AI risk appetite in a way that reflects public health authority, community trust, legal obligations,.</a:t>
+            </a:r>
+            <a:endParaRPr lang="en-US" sz="1700" dirty="0"/>
+          </a:p>
+        </p:txBody>
+      </p:sp>
+      <p:sp>
+        <p:nvSpPr>
+          <p:cNvPr id="9" name="Shape 7"/>
+          <p:cNvSpPr/>
+          <p:nvPr/>
+        </p:nvSpPr>
+        <p:spPr>
+          <a:xfrm>
+            <a:off x="7909560" y="1417320"/>
+            <a:ext cx="3154680" cy="1920240"/>
+          </a:xfrm>
+          <a:prstGeom prst="roundRect">
+            <a:avLst>
+              <a:gd name="adj" fmla="val 5714"/>
+            </a:avLst>
+          </a:prstGeom>
+          <a:solidFill>
+            <a:srgbClr val="EAF6F8"/>
+          </a:solidFill>
+          <a:ln w="12700">
+            <a:solidFill>
+              <a:srgbClr val="B9D7E6"/>
+            </a:solidFill>
+            <a:prstDash val="solid"/>
+          </a:ln>
+        </p:spPr>
+      </p:sp>
+      <p:sp>
+        <p:nvSpPr>
+          <p:cNvPr id="10" name="Text 8"/>
+          <p:cNvSpPr/>
+          <p:nvPr/>
+        </p:nvSpPr>
+        <p:spPr>
+          <a:xfrm>
+            <a:off x="8074152" y="1563624"/>
+            <a:ext cx="2825496" cy="201168"/>
+          </a:xfrm>
+          <a:prstGeom prst="rect">
+            <a:avLst/>
+          </a:prstGeom>
+          <a:noFill/>
+          <a:ln/>
+        </p:spPr>
+        <p:txBody>
+          <a:bodyPr wrap="square" lIns="0" tIns="0" rIns="0" bIns="0" rtlCol="0" anchor="ctr"/>
+          <a:lstStyle/>
+          <a:p>
+            <a:pPr indent="0" marL="0">
+              <a:buNone/>
+            </a:pPr>
+            <a:r>
+              <a:rPr lang="en-US" sz="950" b="1" dirty="0">
+                <a:solidFill>
+                  <a:srgbClr val="0068B7"/>
+                </a:solidFill>
+                <a:latin typeface="Aptos" pitchFamily="34" charset="0"/>
+                <a:ea typeface="Aptos" pitchFamily="34" charset="-122"/>
+                <a:cs typeface="Aptos" pitchFamily="34" charset="-120"/>
+              </a:rPr>
+              <a:t>Module details</a:t>
+            </a:r>
+            <a:endParaRPr lang="en-US" sz="950" dirty="0"/>
+          </a:p>
+        </p:txBody>
+      </p:sp>
+      <p:sp>
+        <p:nvSpPr>
+          <p:cNvPr id="11" name="Text 9"/>
+          <p:cNvSpPr/>
+          <p:nvPr/>
+        </p:nvSpPr>
+        <p:spPr>
+          <a:xfrm>
+            <a:off x="8074152" y="1856232"/>
+            <a:ext cx="2825496" cy="1353312"/>
+          </a:xfrm>
+          <a:prstGeom prst="rect">
+            <a:avLst/>
+          </a:prstGeom>
+          <a:noFill/>
+          <a:ln/>
+        </p:spPr>
+        <p:txBody>
+          <a:bodyPr wrap="square" lIns="0" tIns="0" rIns="0" bIns="0" rtlCol="0" anchor="t">
             <a:normAutofit/>
           </a:bodyPr>
           <a:lstStyle/>
@@ -5694,7 +9047,7 @@
               <a:buNone/>
             </a:pPr>
             <a:r>
-              <a:rPr lang="en-US" sz="1400" dirty="0">
+              <a:rPr lang="en-US" sz="1250" dirty="0">
                 <a:solidFill>
                   <a:srgbClr val="17364A"/>
                 </a:solidFill>
@@ -5702,9 +9055,1254 @@
                 <a:ea typeface="Aptos" pitchFamily="34" charset="-122"/>
                 <a:cs typeface="Aptos" pitchFamily="34" charset="-120"/>
               </a:rPr>
-              <a:t>Leaders cannot manage AI risk effectively unless they define how much risk the agency is willing to accept for different types of use. Risk appetite describes the broad level of risk an organization is willing to take in pursuit of its mission. Risk tolerance translates that appetite into practical thresholds, conditions, and limits for specific AI uses. This module helps public health leaders define AI risk appetite in a way that reflects public health authority, community trust, legal obligations, health equity, privacy, safety, and operational needs. The goal is not to eliminate all risk. The goal is to make risk decisions explicit, proportionate, documented, and aligned with public health values.</a:t>
-            </a:r>
-            <a:endParaRPr lang="en-US" sz="1400" dirty="0"/>
+              <a:t>Level: advanced/leadership</a:t>
+            </a:r>
+            <a:endParaRPr lang="en-US" sz="1250" dirty="0"/>
+          </a:p>
+          <a:p>
+            <a:pPr indent="0" marL="0">
+              <a:buNone/>
+            </a:pPr>
+            <a:r>
+              <a:rPr lang="en-US" sz="1250" dirty="0">
+                <a:solidFill>
+                  <a:srgbClr val="17364A"/>
+                </a:solidFill>
+                <a:latin typeface="Aptos" pitchFamily="34" charset="0"/>
+                <a:ea typeface="Aptos" pitchFamily="34" charset="-122"/>
+                <a:cs typeface="Aptos" pitchFamily="34" charset="-120"/>
+              </a:rPr>
+              <a:t>Primary track: Governance and Security Track</a:t>
+            </a:r>
+            <a:endParaRPr lang="en-US" sz="1250" dirty="0"/>
+          </a:p>
+          <a:p>
+            <a:pPr indent="0" marL="0">
+              <a:buNone/>
+            </a:pPr>
+            <a:r>
+              <a:rPr lang="en-US" sz="1250" dirty="0">
+                <a:solidFill>
+                  <a:srgbClr val="17364A"/>
+                </a:solidFill>
+                <a:latin typeface="Aptos" pitchFamily="34" charset="0"/>
+                <a:ea typeface="Aptos" pitchFamily="34" charset="-122"/>
+                <a:cs typeface="Aptos" pitchFamily="34" charset="-120"/>
+              </a:rPr>
+              <a:t>Appears in tracks: governance-security</a:t>
+            </a:r>
+            <a:endParaRPr lang="en-US" sz="1250" dirty="0"/>
+          </a:p>
+        </p:txBody>
+      </p:sp>
+      <p:sp>
+        <p:nvSpPr>
+          <p:cNvPr id="12" name="Shape 10"/>
+          <p:cNvSpPr/>
+          <p:nvPr/>
+        </p:nvSpPr>
+        <p:spPr>
+          <a:xfrm>
+            <a:off x="7909560" y="3611880"/>
+            <a:ext cx="3154680" cy="1783080"/>
+          </a:xfrm>
+          <a:prstGeom prst="roundRect">
+            <a:avLst>
+              <a:gd name="adj" fmla="val 6154"/>
+            </a:avLst>
+          </a:prstGeom>
+          <a:solidFill>
+            <a:srgbClr val="EEF8ED"/>
+          </a:solidFill>
+          <a:ln w="12700">
+            <a:solidFill>
+              <a:srgbClr val="B9D7E6"/>
+            </a:solidFill>
+            <a:prstDash val="solid"/>
+          </a:ln>
+        </p:spPr>
+      </p:sp>
+      <p:sp>
+        <p:nvSpPr>
+          <p:cNvPr id="13" name="Text 11"/>
+          <p:cNvSpPr/>
+          <p:nvPr/>
+        </p:nvSpPr>
+        <p:spPr>
+          <a:xfrm>
+            <a:off x="8074152" y="3758184"/>
+            <a:ext cx="2825496" cy="201168"/>
+          </a:xfrm>
+          <a:prstGeom prst="rect">
+            <a:avLst/>
+          </a:prstGeom>
+          <a:noFill/>
+          <a:ln/>
+        </p:spPr>
+        <p:txBody>
+          <a:bodyPr wrap="square" lIns="0" tIns="0" rIns="0" bIns="0" rtlCol="0" anchor="ctr"/>
+          <a:lstStyle/>
+          <a:p>
+            <a:pPr indent="0" marL="0">
+              <a:buNone/>
+            </a:pPr>
+            <a:r>
+              <a:rPr lang="en-US" sz="950" b="1" dirty="0">
+                <a:solidFill>
+                  <a:srgbClr val="0068B7"/>
+                </a:solidFill>
+                <a:latin typeface="Aptos" pitchFamily="34" charset="0"/>
+                <a:ea typeface="Aptos" pitchFamily="34" charset="-122"/>
+                <a:cs typeface="Aptos" pitchFamily="34" charset="-120"/>
+              </a:rPr>
+              <a:t>Learning approach</a:t>
+            </a:r>
+            <a:endParaRPr lang="en-US" sz="950" dirty="0"/>
+          </a:p>
+        </p:txBody>
+      </p:sp>
+      <p:sp>
+        <p:nvSpPr>
+          <p:cNvPr id="14" name="Text 12"/>
+          <p:cNvSpPr/>
+          <p:nvPr/>
+        </p:nvSpPr>
+        <p:spPr>
+          <a:xfrm>
+            <a:off x="8074152" y="4050792"/>
+            <a:ext cx="2825496" cy="1216152"/>
+          </a:xfrm>
+          <a:prstGeom prst="rect">
+            <a:avLst/>
+          </a:prstGeom>
+          <a:noFill/>
+          <a:ln/>
+        </p:spPr>
+        <p:txBody>
+          <a:bodyPr wrap="square" lIns="0" tIns="0" rIns="0" bIns="0" rtlCol="0" anchor="t">
+            <a:normAutofit/>
+          </a:bodyPr>
+          <a:lstStyle/>
+          <a:p>
+            <a:pPr indent="0" marL="0">
+              <a:buNone/>
+            </a:pPr>
+            <a:r>
+              <a:rPr lang="en-US" sz="1250" dirty="0">
+                <a:solidFill>
+                  <a:srgbClr val="17364A"/>
+                </a:solidFill>
+                <a:latin typeface="Aptos" pitchFamily="34" charset="0"/>
+                <a:ea typeface="Aptos" pitchFamily="34" charset="-122"/>
+                <a:cs typeface="Aptos" pitchFamily="34" charset="-120"/>
+              </a:rPr>
+              <a:t>Review the core ideas, complete the practical exercise, check your understanding, and use the related plays and tools to apply the lesson.</a:t>
+            </a:r>
+            <a:endParaRPr lang="en-US" sz="1250" dirty="0"/>
+          </a:p>
+        </p:txBody>
+      </p:sp>
+    </p:spTree>
+  </p:cSld>
+  <p:clrMapOvr>
+    <a:masterClrMapping/>
+  </p:clrMapOvr>
+</p:sld>
+</file>
+
+<file path=ppt/slides/slide20.xml><?xml version="1.0" encoding="utf-8"?>
+<p:sld xmlns:a="http://schemas.openxmlformats.org/drawingml/2006/main" xmlns:r="http://schemas.openxmlformats.org/officeDocument/2006/relationships" xmlns:p="http://schemas.openxmlformats.org/presentationml/2006/main">
+  <p:cSld name="Slide 20">
+    <p:bg>
+      <p:bgPr>
+        <a:solidFill>
+          <a:srgbClr val="F7FBFD"/>
+        </a:solidFill>
+      </p:bgPr>
+    </p:bg>
+    <p:spTree>
+      <p:nvGrpSpPr>
+        <p:cNvPr id="1" name=""/>
+        <p:cNvGrpSpPr/>
+        <p:nvPr/>
+      </p:nvGrpSpPr>
+      <p:grpSpPr>
+        <a:xfrm>
+          <a:off x="0" y="0"/>
+          <a:ext cx="0" cy="0"/>
+          <a:chOff x="0" y="0"/>
+          <a:chExt cx="0" cy="0"/>
+        </a:xfrm>
+      </p:grpSpPr>
+      <p:sp>
+        <p:nvSpPr>
+          <p:cNvPr id="2" name="Shape 0"/>
+          <p:cNvSpPr/>
+          <p:nvPr/>
+        </p:nvSpPr>
+        <p:spPr>
+          <a:xfrm>
+            <a:off x="0" y="0"/>
+            <a:ext cx="12191695" cy="164592"/>
+          </a:xfrm>
+          <a:prstGeom prst="rect">
+            <a:avLst/>
+          </a:prstGeom>
+          <a:solidFill>
+            <a:srgbClr val="0068B7"/>
+          </a:solidFill>
+          <a:ln w="12700">
+            <a:solidFill>
+              <a:srgbClr val="0068B7"/>
+            </a:solidFill>
+            <a:prstDash val="solid"/>
+          </a:ln>
+        </p:spPr>
+      </p:sp>
+      <p:sp>
+        <p:nvSpPr>
+          <p:cNvPr id="3" name="Shape 1"/>
+          <p:cNvSpPr/>
+          <p:nvPr/>
+        </p:nvSpPr>
+        <p:spPr>
+          <a:xfrm>
+            <a:off x="0" y="164592"/>
+            <a:ext cx="146304" cy="6693408"/>
+          </a:xfrm>
+          <a:prstGeom prst="rect">
+            <a:avLst/>
+          </a:prstGeom>
+          <a:solidFill>
+            <a:srgbClr val="2F8A28"/>
+          </a:solidFill>
+          <a:ln w="12700">
+            <a:solidFill>
+              <a:srgbClr val="2F8A28"/>
+            </a:solidFill>
+            <a:prstDash val="solid"/>
+          </a:ln>
+        </p:spPr>
+      </p:sp>
+      <p:sp>
+        <p:nvSpPr>
+          <p:cNvPr id="4" name="Text 2"/>
+          <p:cNvSpPr/>
+          <p:nvPr/>
+        </p:nvSpPr>
+        <p:spPr>
+          <a:xfrm>
+            <a:off x="502920" y="292608"/>
+            <a:ext cx="10149840" cy="256032"/>
+          </a:xfrm>
+          <a:prstGeom prst="rect">
+            <a:avLst/>
+          </a:prstGeom>
+          <a:noFill/>
+          <a:ln/>
+        </p:spPr>
+        <p:txBody>
+          <a:bodyPr wrap="square" lIns="0" tIns="0" rIns="0" bIns="0" rtlCol="0" anchor="ctr"/>
+          <a:lstStyle/>
+          <a:p>
+            <a:pPr indent="0" marL="0">
+              <a:buNone/>
+            </a:pPr>
+            <a:r>
+              <a:rPr lang="en-US" sz="900" b="1" dirty="0">
+                <a:solidFill>
+                  <a:srgbClr val="5F7181"/>
+                </a:solidFill>
+                <a:latin typeface="Aptos" pitchFamily="34" charset="0"/>
+                <a:ea typeface="Aptos" pitchFamily="34" charset="-122"/>
+                <a:cs typeface="Aptos" pitchFamily="34" charset="-120"/>
+              </a:rPr>
+              <a:t>AI Risk Appetite and Risk Tolerance for Public Health</a:t>
+            </a:r>
+            <a:endParaRPr lang="en-US" sz="900" dirty="0"/>
+          </a:p>
+        </p:txBody>
+      </p:sp>
+      <p:sp>
+        <p:nvSpPr>
+          <p:cNvPr id="5" name="Text 3"/>
+          <p:cNvSpPr/>
+          <p:nvPr/>
+        </p:nvSpPr>
+        <p:spPr>
+          <a:xfrm>
+            <a:off x="502920" y="6537960"/>
+            <a:ext cx="7772400" cy="201168"/>
+          </a:xfrm>
+          <a:prstGeom prst="rect">
+            <a:avLst/>
+          </a:prstGeom>
+          <a:noFill/>
+          <a:ln/>
+        </p:spPr>
+        <p:txBody>
+          <a:bodyPr wrap="square" lIns="0" tIns="0" rIns="0" bIns="0" rtlCol="0" anchor="ctr"/>
+          <a:lstStyle/>
+          <a:p>
+            <a:pPr indent="0" marL="0">
+              <a:buNone/>
+            </a:pPr>
+            <a:r>
+              <a:rPr lang="en-US" sz="800" dirty="0">
+                <a:solidFill>
+                  <a:srgbClr val="5F7181"/>
+                </a:solidFill>
+                <a:latin typeface="Aptos" pitchFamily="34" charset="0"/>
+                <a:ea typeface="Aptos" pitchFamily="34" charset="-122"/>
+                <a:cs typeface="Aptos" pitchFamily="34" charset="-120"/>
+              </a:rPr>
+              <a:t>AI Playbook and Toolkit for Public Health Departments</a:t>
+            </a:r>
+            <a:endParaRPr lang="en-US" sz="800" dirty="0"/>
+          </a:p>
+        </p:txBody>
+      </p:sp>
+      <p:sp>
+        <p:nvSpPr>
+          <p:cNvPr id="6" name="Text 4"/>
+          <p:cNvSpPr/>
+          <p:nvPr/>
+        </p:nvSpPr>
+        <p:spPr>
+          <a:xfrm>
+            <a:off x="9966960" y="6537960"/>
+            <a:ext cx="1645920" cy="201168"/>
+          </a:xfrm>
+          <a:prstGeom prst="rect">
+            <a:avLst/>
+          </a:prstGeom>
+          <a:noFill/>
+          <a:ln/>
+        </p:spPr>
+        <p:txBody>
+          <a:bodyPr wrap="square" lIns="0" tIns="0" rIns="0" bIns="0" rtlCol="0" anchor="ctr"/>
+          <a:lstStyle/>
+          <a:p>
+            <a:pPr algn="r" indent="0" marL="0">
+              <a:buNone/>
+            </a:pPr>
+            <a:r>
+              <a:rPr lang="en-US" sz="800" dirty="0">
+                <a:solidFill>
+                  <a:srgbClr val="5F7181"/>
+                </a:solidFill>
+                <a:latin typeface="Aptos" pitchFamily="34" charset="0"/>
+                <a:ea typeface="Aptos" pitchFamily="34" charset="-122"/>
+                <a:cs typeface="Aptos" pitchFamily="34" charset="-120"/>
+              </a:rPr>
+              <a:t>© Paula Soper</a:t>
+            </a:r>
+            <a:endParaRPr lang="en-US" sz="800" dirty="0"/>
+          </a:p>
+        </p:txBody>
+      </p:sp>
+      <p:sp>
+        <p:nvSpPr>
+          <p:cNvPr id="7" name="Shape 5"/>
+          <p:cNvSpPr/>
+          <p:nvPr/>
+        </p:nvSpPr>
+        <p:spPr>
+          <a:xfrm>
+            <a:off x="640080" y="658368"/>
+            <a:ext cx="420624" cy="420624"/>
+          </a:xfrm>
+          <a:prstGeom prst="ellipse">
+            <a:avLst/>
+          </a:prstGeom>
+          <a:solidFill>
+            <a:srgbClr val="0068B7"/>
+          </a:solidFill>
+          <a:ln w="12700">
+            <a:solidFill>
+              <a:srgbClr val="0068B7"/>
+            </a:solidFill>
+            <a:prstDash val="solid"/>
+          </a:ln>
+        </p:spPr>
+      </p:sp>
+      <p:sp>
+        <p:nvSpPr>
+          <p:cNvPr id="8" name="Text 6"/>
+          <p:cNvSpPr/>
+          <p:nvPr/>
+        </p:nvSpPr>
+        <p:spPr>
+          <a:xfrm>
+            <a:off x="640080" y="731520"/>
+            <a:ext cx="420624" cy="164592"/>
+          </a:xfrm>
+          <a:prstGeom prst="rect">
+            <a:avLst/>
+          </a:prstGeom>
+          <a:noFill/>
+          <a:ln/>
+        </p:spPr>
+        <p:txBody>
+          <a:bodyPr wrap="square" lIns="0" tIns="0" rIns="0" bIns="0" rtlCol="0" anchor="ctr"/>
+          <a:lstStyle/>
+          <a:p>
+            <a:pPr algn="ctr" indent="0" marL="0">
+              <a:buNone/>
+            </a:pPr>
+            <a:r>
+              <a:rPr lang="en-US" sz="1100" b="1" dirty="0">
+                <a:solidFill>
+                  <a:srgbClr val="FFFFFF"/>
+                </a:solidFill>
+                <a:latin typeface="Aptos" pitchFamily="34" charset="0"/>
+                <a:ea typeface="Aptos" pitchFamily="34" charset="-122"/>
+                <a:cs typeface="Aptos" pitchFamily="34" charset="-120"/>
+              </a:rPr>
+              <a:t>15</a:t>
+            </a:r>
+            <a:endParaRPr lang="en-US" sz="1100" dirty="0"/>
+          </a:p>
+        </p:txBody>
+      </p:sp>
+      <p:sp>
+        <p:nvSpPr>
+          <p:cNvPr id="9" name="Text 7"/>
+          <p:cNvSpPr/>
+          <p:nvPr/>
+        </p:nvSpPr>
+        <p:spPr>
+          <a:xfrm>
+            <a:off x="640080" y="621792"/>
+            <a:ext cx="10881360" cy="566928"/>
+          </a:xfrm>
+          <a:prstGeom prst="rect">
+            <a:avLst/>
+          </a:prstGeom>
+          <a:noFill/>
+          <a:ln/>
+        </p:spPr>
+        <p:txBody>
+          <a:bodyPr wrap="square" lIns="0" tIns="0" rIns="0" bIns="0" rtlCol="0" anchor="ctr">
+            <a:normAutofit/>
+          </a:bodyPr>
+          <a:lstStyle/>
+          <a:p>
+            <a:pPr indent="0" marL="0">
+              <a:buNone/>
+            </a:pPr>
+            <a:r>
+              <a:rPr lang="en-US" sz="2700" b="1" dirty="0">
+                <a:solidFill>
+                  <a:srgbClr val="003A63"/>
+                </a:solidFill>
+                <a:latin typeface="Aptos Display" pitchFamily="34" charset="0"/>
+                <a:ea typeface="Aptos Display" pitchFamily="34" charset="-122"/>
+                <a:cs typeface="Aptos Display" pitchFamily="34" charset="-120"/>
+              </a:rPr>
+              <a:t>References and Resources</a:t>
+            </a:r>
+            <a:endParaRPr lang="en-US" sz="2700" dirty="0"/>
+          </a:p>
+        </p:txBody>
+      </p:sp>
+      <p:sp>
+        <p:nvSpPr>
+          <p:cNvPr id="10" name="Text 8"/>
+          <p:cNvSpPr/>
+          <p:nvPr/>
+        </p:nvSpPr>
+        <p:spPr>
+          <a:xfrm>
+            <a:off x="868680" y="1417320"/>
+            <a:ext cx="6675120" cy="4434840"/>
+          </a:xfrm>
+          <a:prstGeom prst="rect">
+            <a:avLst/>
+          </a:prstGeom>
+          <a:noFill/>
+          <a:ln/>
+        </p:spPr>
+        <p:txBody>
+          <a:bodyPr wrap="square" lIns="635" tIns="635" rIns="635" bIns="635" rtlCol="0" anchor="t">
+            <a:normAutofit/>
+          </a:bodyPr>
+          <a:lstStyle/>
+          <a:p>
+            <a:r>
+              <a:rPr lang="en-US" sz="1700" dirty="0">
+                <a:solidFill>
+                  <a:srgbClr val="17364A"/>
+                </a:solidFill>
+                <a:latin typeface="Aptos" pitchFamily="34" charset="0"/>
+                <a:ea typeface="Aptos" pitchFamily="34" charset="-122"/>
+                <a:cs typeface="Aptos" pitchFamily="34" charset="-120"/>
+              </a:rPr>
+              <a:t>NIST Artificial Intelligence Risk Management Framework (AI RMF 1.0): https://www.nist.gov/itl/ai-risk-management-framework</a:t>
+            </a:r>
+            <a:endParaRPr lang="en-US" sz="1700" dirty="0"/>
+          </a:p>
+          <a:p>
+            <a:r>
+              <a:rPr lang="en-US" sz="1700" dirty="0">
+                <a:solidFill>
+                  <a:srgbClr val="17364A"/>
+                </a:solidFill>
+                <a:latin typeface="Aptos" pitchFamily="34" charset="0"/>
+                <a:ea typeface="Aptos" pitchFamily="34" charset="-122"/>
+                <a:cs typeface="Aptos" pitchFamily="34" charset="-120"/>
+              </a:rPr>
+              <a:t>NIST Generative AI Profile:.</a:t>
+            </a:r>
+            <a:endParaRPr lang="en-US" sz="1700" dirty="0"/>
+          </a:p>
+          <a:p>
+            <a:r>
+              <a:rPr lang="en-US" sz="1700" dirty="0">
+                <a:solidFill>
+                  <a:srgbClr val="17364A"/>
+                </a:solidFill>
+                <a:latin typeface="Aptos" pitchFamily="34" charset="0"/>
+                <a:ea typeface="Aptos" pitchFamily="34" charset="-122"/>
+                <a:cs typeface="Aptos" pitchFamily="34" charset="-120"/>
+              </a:rPr>
+              <a:t>NIST Privacy Framework</a:t>
+            </a:r>
+            <a:endParaRPr lang="en-US" sz="1700" dirty="0"/>
+          </a:p>
+          <a:p>
+            <a:r>
+              <a:rPr lang="en-US" sz="1700" dirty="0">
+                <a:solidFill>
+                  <a:srgbClr val="17364A"/>
+                </a:solidFill>
+                <a:latin typeface="Aptos" pitchFamily="34" charset="0"/>
+                <a:ea typeface="Aptos" pitchFamily="34" charset="-122"/>
+                <a:cs typeface="Aptos" pitchFamily="34" charset="-120"/>
+              </a:rPr>
+              <a:t>CDC Public Health Data Strategy and Data Modernization resources:.</a:t>
+            </a:r>
+            <a:endParaRPr lang="en-US" sz="1700" dirty="0"/>
+          </a:p>
+        </p:txBody>
+      </p:sp>
+      <p:sp>
+        <p:nvSpPr>
+          <p:cNvPr id="11" name="Shape 9"/>
+          <p:cNvSpPr/>
+          <p:nvPr/>
+        </p:nvSpPr>
+        <p:spPr>
+          <a:xfrm>
+            <a:off x="7909560" y="1417320"/>
+            <a:ext cx="3154680" cy="1828800"/>
+          </a:xfrm>
+          <a:prstGeom prst="roundRect">
+            <a:avLst>
+              <a:gd name="adj" fmla="val 6000"/>
+            </a:avLst>
+          </a:prstGeom>
+          <a:solidFill>
+            <a:srgbClr val="EEF8ED"/>
+          </a:solidFill>
+          <a:ln w="12700">
+            <a:solidFill>
+              <a:srgbClr val="B9D7E6"/>
+            </a:solidFill>
+            <a:prstDash val="solid"/>
+          </a:ln>
+        </p:spPr>
+      </p:sp>
+      <p:sp>
+        <p:nvSpPr>
+          <p:cNvPr id="12" name="Text 10"/>
+          <p:cNvSpPr/>
+          <p:nvPr/>
+        </p:nvSpPr>
+        <p:spPr>
+          <a:xfrm>
+            <a:off x="8074152" y="1563624"/>
+            <a:ext cx="2825496" cy="201168"/>
+          </a:xfrm>
+          <a:prstGeom prst="rect">
+            <a:avLst/>
+          </a:prstGeom>
+          <a:noFill/>
+          <a:ln/>
+        </p:spPr>
+        <p:txBody>
+          <a:bodyPr wrap="square" lIns="0" tIns="0" rIns="0" bIns="0" rtlCol="0" anchor="ctr"/>
+          <a:lstStyle/>
+          <a:p>
+            <a:pPr indent="0" marL="0">
+              <a:buNone/>
+            </a:pPr>
+            <a:r>
+              <a:rPr lang="en-US" sz="950" b="1" dirty="0">
+                <a:solidFill>
+                  <a:srgbClr val="0068B7"/>
+                </a:solidFill>
+                <a:latin typeface="Aptos" pitchFamily="34" charset="0"/>
+                <a:ea typeface="Aptos" pitchFamily="34" charset="-122"/>
+                <a:cs typeface="Aptos" pitchFamily="34" charset="-120"/>
+              </a:rPr>
+              <a:t>Key idea</a:t>
+            </a:r>
+            <a:endParaRPr lang="en-US" sz="950" dirty="0"/>
+          </a:p>
+        </p:txBody>
+      </p:sp>
+      <p:sp>
+        <p:nvSpPr>
+          <p:cNvPr id="13" name="Text 11"/>
+          <p:cNvSpPr/>
+          <p:nvPr/>
+        </p:nvSpPr>
+        <p:spPr>
+          <a:xfrm>
+            <a:off x="8074152" y="1856232"/>
+            <a:ext cx="2825496" cy="1261872"/>
+          </a:xfrm>
+          <a:prstGeom prst="rect">
+            <a:avLst/>
+          </a:prstGeom>
+          <a:noFill/>
+          <a:ln/>
+        </p:spPr>
+        <p:txBody>
+          <a:bodyPr wrap="square" lIns="0" tIns="0" rIns="0" bIns="0" rtlCol="0" anchor="t">
+            <a:normAutofit/>
+          </a:bodyPr>
+          <a:lstStyle/>
+          <a:p>
+            <a:pPr indent="0" marL="0">
+              <a:buNone/>
+            </a:pPr>
+            <a:r>
+              <a:rPr lang="en-US" sz="1250" dirty="0">
+                <a:solidFill>
+                  <a:srgbClr val="17364A"/>
+                </a:solidFill>
+                <a:latin typeface="Aptos" pitchFamily="34" charset="0"/>
+                <a:ea typeface="Aptos" pitchFamily="34" charset="-122"/>
+                <a:cs typeface="Aptos" pitchFamily="34" charset="-120"/>
+              </a:rPr>
+              <a:t>NIST Artificial Intelligence Risk Management Framework (AI RMF 1.0): https://www.nist.gov/itl/ai-risk-management-framework</a:t>
+            </a:r>
+            <a:endParaRPr lang="en-US" sz="1250" dirty="0"/>
+          </a:p>
+        </p:txBody>
+      </p:sp>
+      <p:sp>
+        <p:nvSpPr>
+          <p:cNvPr id="14" name="Shape 12"/>
+          <p:cNvSpPr/>
+          <p:nvPr/>
+        </p:nvSpPr>
+        <p:spPr>
+          <a:xfrm>
+            <a:off x="7909560" y="3520440"/>
+            <a:ext cx="3154680" cy="1737360"/>
+          </a:xfrm>
+          <a:prstGeom prst="roundRect">
+            <a:avLst>
+              <a:gd name="adj" fmla="val 6316"/>
+            </a:avLst>
+          </a:prstGeom>
+          <a:solidFill>
+            <a:srgbClr val="EAF6F8"/>
+          </a:solidFill>
+          <a:ln w="12700">
+            <a:solidFill>
+              <a:srgbClr val="B9D7E6"/>
+            </a:solidFill>
+            <a:prstDash val="solid"/>
+          </a:ln>
+        </p:spPr>
+      </p:sp>
+      <p:sp>
+        <p:nvSpPr>
+          <p:cNvPr id="15" name="Text 13"/>
+          <p:cNvSpPr/>
+          <p:nvPr/>
+        </p:nvSpPr>
+        <p:spPr>
+          <a:xfrm>
+            <a:off x="8074152" y="3666744"/>
+            <a:ext cx="2825496" cy="201168"/>
+          </a:xfrm>
+          <a:prstGeom prst="rect">
+            <a:avLst/>
+          </a:prstGeom>
+          <a:noFill/>
+          <a:ln/>
+        </p:spPr>
+        <p:txBody>
+          <a:bodyPr wrap="square" lIns="0" tIns="0" rIns="0" bIns="0" rtlCol="0" anchor="ctr"/>
+          <a:lstStyle/>
+          <a:p>
+            <a:pPr indent="0" marL="0">
+              <a:buNone/>
+            </a:pPr>
+            <a:r>
+              <a:rPr lang="en-US" sz="950" b="1" dirty="0">
+                <a:solidFill>
+                  <a:srgbClr val="0068B7"/>
+                </a:solidFill>
+                <a:latin typeface="Aptos" pitchFamily="34" charset="0"/>
+                <a:ea typeface="Aptos" pitchFamily="34" charset="-122"/>
+                <a:cs typeface="Aptos" pitchFamily="34" charset="-120"/>
+              </a:rPr>
+              <a:t>Use this for</a:t>
+            </a:r>
+            <a:endParaRPr lang="en-US" sz="950" dirty="0"/>
+          </a:p>
+        </p:txBody>
+      </p:sp>
+      <p:sp>
+        <p:nvSpPr>
+          <p:cNvPr id="16" name="Text 14"/>
+          <p:cNvSpPr/>
+          <p:nvPr/>
+        </p:nvSpPr>
+        <p:spPr>
+          <a:xfrm>
+            <a:off x="8074152" y="3959352"/>
+            <a:ext cx="2825496" cy="1170432"/>
+          </a:xfrm>
+          <a:prstGeom prst="rect">
+            <a:avLst/>
+          </a:prstGeom>
+          <a:noFill/>
+          <a:ln/>
+        </p:spPr>
+        <p:txBody>
+          <a:bodyPr wrap="square" lIns="0" tIns="0" rIns="0" bIns="0" rtlCol="0" anchor="t">
+            <a:normAutofit/>
+          </a:bodyPr>
+          <a:lstStyle/>
+          <a:p>
+            <a:pPr indent="0" marL="0">
+              <a:buNone/>
+            </a:pPr>
+            <a:r>
+              <a:rPr lang="en-US" sz="1250" dirty="0">
+                <a:solidFill>
+                  <a:srgbClr val="17364A"/>
+                </a:solidFill>
+                <a:latin typeface="Aptos" pitchFamily="34" charset="0"/>
+                <a:ea typeface="Aptos" pitchFamily="34" charset="-122"/>
+                <a:cs typeface="Aptos" pitchFamily="34" charset="-120"/>
+              </a:rPr>
+              <a:t>Connect the concept to public health decisions, safeguards, documentation, or implementation work.</a:t>
+            </a:r>
+            <a:endParaRPr lang="en-US" sz="1250" dirty="0"/>
+          </a:p>
+        </p:txBody>
+      </p:sp>
+    </p:spTree>
+  </p:cSld>
+  <p:clrMapOvr>
+    <a:masterClrMapping/>
+  </p:clrMapOvr>
+</p:sld>
+</file>
+
+<file path=ppt/slides/slide21.xml><?xml version="1.0" encoding="utf-8"?>
+<p:sld xmlns:a="http://schemas.openxmlformats.org/drawingml/2006/main" xmlns:r="http://schemas.openxmlformats.org/officeDocument/2006/relationships" xmlns:p="http://schemas.openxmlformats.org/presentationml/2006/main">
+  <p:cSld name="Slide 21">
+    <p:bg>
+      <p:bgPr>
+        <a:solidFill>
+          <a:srgbClr val="F7FBFD"/>
+        </a:solidFill>
+      </p:bgPr>
+    </p:bg>
+    <p:spTree>
+      <p:nvGrpSpPr>
+        <p:cNvPr id="1" name=""/>
+        <p:cNvGrpSpPr/>
+        <p:nvPr/>
+      </p:nvGrpSpPr>
+      <p:grpSpPr>
+        <a:xfrm>
+          <a:off x="0" y="0"/>
+          <a:ext cx="0" cy="0"/>
+          <a:chOff x="0" y="0"/>
+          <a:chExt cx="0" cy="0"/>
+        </a:xfrm>
+      </p:grpSpPr>
+      <p:sp>
+        <p:nvSpPr>
+          <p:cNvPr id="2" name="Shape 0"/>
+          <p:cNvSpPr/>
+          <p:nvPr/>
+        </p:nvSpPr>
+        <p:spPr>
+          <a:xfrm>
+            <a:off x="0" y="0"/>
+            <a:ext cx="12191695" cy="164592"/>
+          </a:xfrm>
+          <a:prstGeom prst="rect">
+            <a:avLst/>
+          </a:prstGeom>
+          <a:solidFill>
+            <a:srgbClr val="0068B7"/>
+          </a:solidFill>
+          <a:ln w="12700">
+            <a:solidFill>
+              <a:srgbClr val="0068B7"/>
+            </a:solidFill>
+            <a:prstDash val="solid"/>
+          </a:ln>
+        </p:spPr>
+      </p:sp>
+      <p:sp>
+        <p:nvSpPr>
+          <p:cNvPr id="3" name="Shape 1"/>
+          <p:cNvSpPr/>
+          <p:nvPr/>
+        </p:nvSpPr>
+        <p:spPr>
+          <a:xfrm>
+            <a:off x="0" y="164592"/>
+            <a:ext cx="146304" cy="6693408"/>
+          </a:xfrm>
+          <a:prstGeom prst="rect">
+            <a:avLst/>
+          </a:prstGeom>
+          <a:solidFill>
+            <a:srgbClr val="2F8A28"/>
+          </a:solidFill>
+          <a:ln w="12700">
+            <a:solidFill>
+              <a:srgbClr val="2F8A28"/>
+            </a:solidFill>
+            <a:prstDash val="solid"/>
+          </a:ln>
+        </p:spPr>
+      </p:sp>
+      <p:sp>
+        <p:nvSpPr>
+          <p:cNvPr id="4" name="Text 2"/>
+          <p:cNvSpPr/>
+          <p:nvPr/>
+        </p:nvSpPr>
+        <p:spPr>
+          <a:xfrm>
+            <a:off x="502920" y="292608"/>
+            <a:ext cx="10149840" cy="256032"/>
+          </a:xfrm>
+          <a:prstGeom prst="rect">
+            <a:avLst/>
+          </a:prstGeom>
+          <a:noFill/>
+          <a:ln/>
+        </p:spPr>
+        <p:txBody>
+          <a:bodyPr wrap="square" lIns="0" tIns="0" rIns="0" bIns="0" rtlCol="0" anchor="ctr"/>
+          <a:lstStyle/>
+          <a:p>
+            <a:pPr indent="0" marL="0">
+              <a:buNone/>
+            </a:pPr>
+            <a:r>
+              <a:rPr lang="en-US" sz="900" b="1" dirty="0">
+                <a:solidFill>
+                  <a:srgbClr val="5F7181"/>
+                </a:solidFill>
+                <a:latin typeface="Aptos" pitchFamily="34" charset="0"/>
+                <a:ea typeface="Aptos" pitchFamily="34" charset="-122"/>
+                <a:cs typeface="Aptos" pitchFamily="34" charset="-120"/>
+              </a:rPr>
+              <a:t>AI Risk Appetite and Risk Tolerance for Public Health</a:t>
+            </a:r>
+            <a:endParaRPr lang="en-US" sz="900" dirty="0"/>
+          </a:p>
+        </p:txBody>
+      </p:sp>
+      <p:sp>
+        <p:nvSpPr>
+          <p:cNvPr id="5" name="Text 3"/>
+          <p:cNvSpPr/>
+          <p:nvPr/>
+        </p:nvSpPr>
+        <p:spPr>
+          <a:xfrm>
+            <a:off x="502920" y="6537960"/>
+            <a:ext cx="7772400" cy="201168"/>
+          </a:xfrm>
+          <a:prstGeom prst="rect">
+            <a:avLst/>
+          </a:prstGeom>
+          <a:noFill/>
+          <a:ln/>
+        </p:spPr>
+        <p:txBody>
+          <a:bodyPr wrap="square" lIns="0" tIns="0" rIns="0" bIns="0" rtlCol="0" anchor="ctr"/>
+          <a:lstStyle/>
+          <a:p>
+            <a:pPr indent="0" marL="0">
+              <a:buNone/>
+            </a:pPr>
+            <a:r>
+              <a:rPr lang="en-US" sz="800" dirty="0">
+                <a:solidFill>
+                  <a:srgbClr val="5F7181"/>
+                </a:solidFill>
+                <a:latin typeface="Aptos" pitchFamily="34" charset="0"/>
+                <a:ea typeface="Aptos" pitchFamily="34" charset="-122"/>
+                <a:cs typeface="Aptos" pitchFamily="34" charset="-120"/>
+              </a:rPr>
+              <a:t>AI Playbook and Toolkit for Public Health Departments</a:t>
+            </a:r>
+            <a:endParaRPr lang="en-US" sz="800" dirty="0"/>
+          </a:p>
+        </p:txBody>
+      </p:sp>
+      <p:sp>
+        <p:nvSpPr>
+          <p:cNvPr id="6" name="Text 4"/>
+          <p:cNvSpPr/>
+          <p:nvPr/>
+        </p:nvSpPr>
+        <p:spPr>
+          <a:xfrm>
+            <a:off x="9966960" y="6537960"/>
+            <a:ext cx="1645920" cy="201168"/>
+          </a:xfrm>
+          <a:prstGeom prst="rect">
+            <a:avLst/>
+          </a:prstGeom>
+          <a:noFill/>
+          <a:ln/>
+        </p:spPr>
+        <p:txBody>
+          <a:bodyPr wrap="square" lIns="0" tIns="0" rIns="0" bIns="0" rtlCol="0" anchor="ctr"/>
+          <a:lstStyle/>
+          <a:p>
+            <a:pPr algn="r" indent="0" marL="0">
+              <a:buNone/>
+            </a:pPr>
+            <a:r>
+              <a:rPr lang="en-US" sz="800" dirty="0">
+                <a:solidFill>
+                  <a:srgbClr val="5F7181"/>
+                </a:solidFill>
+                <a:latin typeface="Aptos" pitchFamily="34" charset="0"/>
+                <a:ea typeface="Aptos" pitchFamily="34" charset="-122"/>
+                <a:cs typeface="Aptos" pitchFamily="34" charset="-120"/>
+              </a:rPr>
+              <a:t>© Paula Soper</a:t>
+            </a:r>
+            <a:endParaRPr lang="en-US" sz="800" dirty="0"/>
+          </a:p>
+        </p:txBody>
+      </p:sp>
+      <p:sp>
+        <p:nvSpPr>
+          <p:cNvPr id="7" name="Text 5"/>
+          <p:cNvSpPr/>
+          <p:nvPr/>
+        </p:nvSpPr>
+        <p:spPr>
+          <a:xfrm>
+            <a:off x="640080" y="658368"/>
+            <a:ext cx="10881360" cy="566928"/>
+          </a:xfrm>
+          <a:prstGeom prst="rect">
+            <a:avLst/>
+          </a:prstGeom>
+          <a:noFill/>
+          <a:ln/>
+        </p:spPr>
+        <p:txBody>
+          <a:bodyPr wrap="square" lIns="0" tIns="0" rIns="0" bIns="0" rtlCol="0" anchor="ctr">
+            <a:normAutofit/>
+          </a:bodyPr>
+          <a:lstStyle/>
+          <a:p>
+            <a:pPr indent="0" marL="0">
+              <a:buNone/>
+            </a:pPr>
+            <a:r>
+              <a:rPr lang="en-US" sz="2700" b="1" dirty="0">
+                <a:solidFill>
+                  <a:srgbClr val="003A63"/>
+                </a:solidFill>
+                <a:latin typeface="Aptos Display" pitchFamily="34" charset="0"/>
+                <a:ea typeface="Aptos Display" pitchFamily="34" charset="-122"/>
+                <a:cs typeface="Aptos Display" pitchFamily="34" charset="-120"/>
+              </a:rPr>
+              <a:t>References and Resources Continued</a:t>
+            </a:r>
+            <a:endParaRPr lang="en-US" sz="2700" dirty="0"/>
+          </a:p>
+        </p:txBody>
+      </p:sp>
+      <p:sp>
+        <p:nvSpPr>
+          <p:cNvPr id="8" name="Text 6"/>
+          <p:cNvSpPr/>
+          <p:nvPr/>
+        </p:nvSpPr>
+        <p:spPr>
+          <a:xfrm>
+            <a:off x="868680" y="1417320"/>
+            <a:ext cx="6675120" cy="4434840"/>
+          </a:xfrm>
+          <a:prstGeom prst="rect">
+            <a:avLst/>
+          </a:prstGeom>
+          <a:noFill/>
+          <a:ln/>
+        </p:spPr>
+        <p:txBody>
+          <a:bodyPr wrap="square" lIns="635" tIns="635" rIns="635" bIns="635" rtlCol="0" anchor="t">
+            <a:normAutofit/>
+          </a:bodyPr>
+          <a:lstStyle/>
+          <a:p>
+            <a:r>
+              <a:rPr lang="en-US" sz="1700" dirty="0">
+                <a:solidFill>
+                  <a:srgbClr val="17364A"/>
+                </a:solidFill>
+                <a:latin typeface="Aptos" pitchFamily="34" charset="0"/>
+                <a:ea typeface="Aptos" pitchFamily="34" charset="-122"/>
+                <a:cs typeface="Aptos" pitchFamily="34" charset="-120"/>
+              </a:rPr>
+              <a:t>OMB Memorandum M-24-10 on federal AI governance, risk management, and innovation, where relevant to public-sector governance.</a:t>
+            </a:r>
+            <a:endParaRPr lang="en-US" sz="1700" dirty="0"/>
+          </a:p>
+          <a:p>
+            <a:r>
+              <a:rPr lang="en-US" sz="1700" dirty="0">
+                <a:solidFill>
+                  <a:srgbClr val="17364A"/>
+                </a:solidFill>
+                <a:latin typeface="Aptos" pitchFamily="34" charset="0"/>
+                <a:ea typeface="Aptos" pitchFamily="34" charset="-122"/>
+                <a:cs typeface="Aptos" pitchFamily="34" charset="-120"/>
+              </a:rPr>
+              <a:t>Agency strategic plans, procurement policies, privacy policies, cybersecurity policies, records policies, and equity plans</a:t>
+            </a:r>
+            <a:endParaRPr lang="en-US" sz="1700" dirty="0"/>
+          </a:p>
+        </p:txBody>
+      </p:sp>
+      <p:sp>
+        <p:nvSpPr>
+          <p:cNvPr id="9" name="Shape 7"/>
+          <p:cNvSpPr/>
+          <p:nvPr/>
+        </p:nvSpPr>
+        <p:spPr>
+          <a:xfrm>
+            <a:off x="7909560" y="1417320"/>
+            <a:ext cx="3154680" cy="1828800"/>
+          </a:xfrm>
+          <a:prstGeom prst="roundRect">
+            <a:avLst>
+              <a:gd name="adj" fmla="val 6000"/>
+            </a:avLst>
+          </a:prstGeom>
+          <a:solidFill>
+            <a:srgbClr val="EEF8ED"/>
+          </a:solidFill>
+          <a:ln w="12700">
+            <a:solidFill>
+              <a:srgbClr val="B9D7E6"/>
+            </a:solidFill>
+            <a:prstDash val="solid"/>
+          </a:ln>
+        </p:spPr>
+      </p:sp>
+      <p:sp>
+        <p:nvSpPr>
+          <p:cNvPr id="10" name="Text 8"/>
+          <p:cNvSpPr/>
+          <p:nvPr/>
+        </p:nvSpPr>
+        <p:spPr>
+          <a:xfrm>
+            <a:off x="8074152" y="1563624"/>
+            <a:ext cx="2825496" cy="201168"/>
+          </a:xfrm>
+          <a:prstGeom prst="rect">
+            <a:avLst/>
+          </a:prstGeom>
+          <a:noFill/>
+          <a:ln/>
+        </p:spPr>
+        <p:txBody>
+          <a:bodyPr wrap="square" lIns="0" tIns="0" rIns="0" bIns="0" rtlCol="0" anchor="ctr"/>
+          <a:lstStyle/>
+          <a:p>
+            <a:pPr indent="0" marL="0">
+              <a:buNone/>
+            </a:pPr>
+            <a:r>
+              <a:rPr lang="en-US" sz="950" b="1" dirty="0">
+                <a:solidFill>
+                  <a:srgbClr val="0068B7"/>
+                </a:solidFill>
+                <a:latin typeface="Aptos" pitchFamily="34" charset="0"/>
+                <a:ea typeface="Aptos" pitchFamily="34" charset="-122"/>
+                <a:cs typeface="Aptos" pitchFamily="34" charset="-120"/>
+              </a:rPr>
+              <a:t>Key idea</a:t>
+            </a:r>
+            <a:endParaRPr lang="en-US" sz="950" dirty="0"/>
+          </a:p>
+        </p:txBody>
+      </p:sp>
+      <p:sp>
+        <p:nvSpPr>
+          <p:cNvPr id="11" name="Text 9"/>
+          <p:cNvSpPr/>
+          <p:nvPr/>
+        </p:nvSpPr>
+        <p:spPr>
+          <a:xfrm>
+            <a:off x="8074152" y="1856232"/>
+            <a:ext cx="2825496" cy="1261872"/>
+          </a:xfrm>
+          <a:prstGeom prst="rect">
+            <a:avLst/>
+          </a:prstGeom>
+          <a:noFill/>
+          <a:ln/>
+        </p:spPr>
+        <p:txBody>
+          <a:bodyPr wrap="square" lIns="0" tIns="0" rIns="0" bIns="0" rtlCol="0" anchor="t">
+            <a:normAutofit/>
+          </a:bodyPr>
+          <a:lstStyle/>
+          <a:p>
+            <a:pPr indent="0" marL="0">
+              <a:buNone/>
+            </a:pPr>
+            <a:r>
+              <a:rPr lang="en-US" sz="1250" dirty="0">
+                <a:solidFill>
+                  <a:srgbClr val="17364A"/>
+                </a:solidFill>
+                <a:latin typeface="Aptos" pitchFamily="34" charset="0"/>
+                <a:ea typeface="Aptos" pitchFamily="34" charset="-122"/>
+                <a:cs typeface="Aptos" pitchFamily="34" charset="-120"/>
+              </a:rPr>
+              <a:t>OMB Memorandum M-24-10 on federal AI governance, risk management, and innovation, where relevant to public-sector governance.</a:t>
+            </a:r>
+            <a:endParaRPr lang="en-US" sz="1250" dirty="0"/>
+          </a:p>
+        </p:txBody>
+      </p:sp>
+      <p:sp>
+        <p:nvSpPr>
+          <p:cNvPr id="12" name="Shape 10"/>
+          <p:cNvSpPr/>
+          <p:nvPr/>
+        </p:nvSpPr>
+        <p:spPr>
+          <a:xfrm>
+            <a:off x="7909560" y="3520440"/>
+            <a:ext cx="3154680" cy="1737360"/>
+          </a:xfrm>
+          <a:prstGeom prst="roundRect">
+            <a:avLst>
+              <a:gd name="adj" fmla="val 6316"/>
+            </a:avLst>
+          </a:prstGeom>
+          <a:solidFill>
+            <a:srgbClr val="EAF6F8"/>
+          </a:solidFill>
+          <a:ln w="12700">
+            <a:solidFill>
+              <a:srgbClr val="B9D7E6"/>
+            </a:solidFill>
+            <a:prstDash val="solid"/>
+          </a:ln>
+        </p:spPr>
+      </p:sp>
+      <p:sp>
+        <p:nvSpPr>
+          <p:cNvPr id="13" name="Text 11"/>
+          <p:cNvSpPr/>
+          <p:nvPr/>
+        </p:nvSpPr>
+        <p:spPr>
+          <a:xfrm>
+            <a:off x="8074152" y="3666744"/>
+            <a:ext cx="2825496" cy="201168"/>
+          </a:xfrm>
+          <a:prstGeom prst="rect">
+            <a:avLst/>
+          </a:prstGeom>
+          <a:noFill/>
+          <a:ln/>
+        </p:spPr>
+        <p:txBody>
+          <a:bodyPr wrap="square" lIns="0" tIns="0" rIns="0" bIns="0" rtlCol="0" anchor="ctr"/>
+          <a:lstStyle/>
+          <a:p>
+            <a:pPr indent="0" marL="0">
+              <a:buNone/>
+            </a:pPr>
+            <a:r>
+              <a:rPr lang="en-US" sz="950" b="1" dirty="0">
+                <a:solidFill>
+                  <a:srgbClr val="0068B7"/>
+                </a:solidFill>
+                <a:latin typeface="Aptos" pitchFamily="34" charset="0"/>
+                <a:ea typeface="Aptos" pitchFamily="34" charset="-122"/>
+                <a:cs typeface="Aptos" pitchFamily="34" charset="-120"/>
+              </a:rPr>
+              <a:t>Use this for</a:t>
+            </a:r>
+            <a:endParaRPr lang="en-US" sz="950" dirty="0"/>
+          </a:p>
+        </p:txBody>
+      </p:sp>
+      <p:sp>
+        <p:nvSpPr>
+          <p:cNvPr id="14" name="Text 12"/>
+          <p:cNvSpPr/>
+          <p:nvPr/>
+        </p:nvSpPr>
+        <p:spPr>
+          <a:xfrm>
+            <a:off x="8074152" y="3959352"/>
+            <a:ext cx="2825496" cy="1170432"/>
+          </a:xfrm>
+          <a:prstGeom prst="rect">
+            <a:avLst/>
+          </a:prstGeom>
+          <a:noFill/>
+          <a:ln/>
+        </p:spPr>
+        <p:txBody>
+          <a:bodyPr wrap="square" lIns="0" tIns="0" rIns="0" bIns="0" rtlCol="0" anchor="t">
+            <a:normAutofit/>
+          </a:bodyPr>
+          <a:lstStyle/>
+          <a:p>
+            <a:pPr indent="0" marL="0">
+              <a:buNone/>
+            </a:pPr>
+            <a:r>
+              <a:rPr lang="en-US" sz="1250" dirty="0">
+                <a:solidFill>
+                  <a:srgbClr val="17364A"/>
+                </a:solidFill>
+                <a:latin typeface="Aptos" pitchFamily="34" charset="0"/>
+                <a:ea typeface="Aptos" pitchFamily="34" charset="-122"/>
+                <a:cs typeface="Aptos" pitchFamily="34" charset="-120"/>
+              </a:rPr>
+              <a:t>Connect the concept to public health decisions, safeguards, documentation, or implementation work.</a:t>
+            </a:r>
+            <a:endParaRPr lang="en-US" sz="1250" dirty="0"/>
           </a:p>
         </p:txBody>
       </p:sp>
@@ -5767,7 +10365,32 @@
       </p:sp>
       <p:sp>
         <p:nvSpPr>
-          <p:cNvPr id="3" name="Text 1"/>
+          <p:cNvPr id="3" name="Shape 1"/>
+          <p:cNvSpPr/>
+          <p:nvPr/>
+        </p:nvSpPr>
+        <p:spPr>
+          <a:xfrm>
+            <a:off x="0" y="164592"/>
+            <a:ext cx="146304" cy="6693408"/>
+          </a:xfrm>
+          <a:prstGeom prst="rect">
+            <a:avLst/>
+          </a:prstGeom>
+          <a:solidFill>
+            <a:srgbClr val="2F8A28"/>
+          </a:solidFill>
+          <a:ln w="12700">
+            <a:solidFill>
+              <a:srgbClr val="2F8A28"/>
+            </a:solidFill>
+            <a:prstDash val="solid"/>
+          </a:ln>
+        </p:spPr>
+      </p:sp>
+      <p:sp>
+        <p:nvSpPr>
+          <p:cNvPr id="4" name="Text 2"/>
           <p:cNvSpPr/>
           <p:nvPr/>
         </p:nvSpPr>
@@ -5806,7 +10429,7 @@
       </p:sp>
       <p:sp>
         <p:nvSpPr>
-          <p:cNvPr id="4" name="Text 2"/>
+          <p:cNvPr id="5" name="Text 3"/>
           <p:cNvSpPr/>
           <p:nvPr/>
         </p:nvSpPr>
@@ -5845,7 +10468,7 @@
       </p:sp>
       <p:sp>
         <p:nvSpPr>
-          <p:cNvPr id="5" name="Text 3"/>
+          <p:cNvPr id="6" name="Text 4"/>
           <p:cNvSpPr/>
           <p:nvPr/>
         </p:nvSpPr>
@@ -5884,7 +10507,7 @@
       </p:sp>
       <p:sp>
         <p:nvSpPr>
-          <p:cNvPr id="6" name="Text 4"/>
+          <p:cNvPr id="7" name="Text 5"/>
           <p:cNvSpPr/>
           <p:nvPr/>
         </p:nvSpPr>
@@ -5917,7 +10540,7 @@
                 <a:ea typeface="Aptos Display" pitchFamily="34" charset="-122"/>
                 <a:cs typeface="Aptos Display" pitchFamily="34" charset="-120"/>
               </a:rPr>
-              <a:t>Learning Objectives</a:t>
+              <a:t>How this module connects to the playbook</a:t>
             </a:r>
             <a:endParaRPr lang="en-US" sz="2700" dirty="0"/>
           </a:p>
@@ -5925,14 +10548,14 @@
       </p:sp>
       <p:sp>
         <p:nvSpPr>
-          <p:cNvPr id="7" name="Text 5"/>
-          <p:cNvSpPr/>
-          <p:nvPr/>
-        </p:nvSpPr>
-        <p:spPr>
-          <a:xfrm>
-            <a:off x="822960" y="1325880"/>
-            <a:ext cx="10378440" cy="4800600"/>
+          <p:cNvPr id="8" name="Text 6"/>
+          <p:cNvSpPr/>
+          <p:nvPr/>
+        </p:nvSpPr>
+        <p:spPr>
+          <a:xfrm>
+            <a:off x="868680" y="1417320"/>
+            <a:ext cx="6903720" cy="4480560"/>
           </a:xfrm>
           <a:prstGeom prst="rect">
             <a:avLst/>
@@ -5947,7 +10570,7 @@
           <a:lstStyle/>
           <a:p>
             <a:r>
-              <a:rPr lang="en-US" sz="1450" dirty="0">
+              <a:rPr lang="en-US" sz="1540" dirty="0">
                 <a:solidFill>
                   <a:srgbClr val="17364A"/>
                 </a:solidFill>
@@ -5955,13 +10578,13 @@
                 <a:ea typeface="Aptos" pitchFamily="34" charset="-122"/>
                 <a:cs typeface="Aptos" pitchFamily="34" charset="-120"/>
               </a:rPr>
-              <a:t>Explain the difference between risk appetite, risk tolerance, and risk acceptance.</a:t>
-            </a:r>
-            <a:endParaRPr lang="en-US" sz="1450" dirty="0"/>
-          </a:p>
-          <a:p>
-            <a:r>
-              <a:rPr lang="en-US" sz="1450" dirty="0">
+              <a:t>Play 11: Build and Deploy AI Solutions - This lesson informs Play 11 by helping learners connect the lesson topic to build and deploy.</a:t>
+            </a:r>
+            <a:endParaRPr lang="en-US" sz="1540" dirty="0"/>
+          </a:p>
+          <a:p>
+            <a:r>
+              <a:rPr lang="en-US" sz="1540" dirty="0">
                 <a:solidFill>
                   <a:srgbClr val="17364A"/>
                 </a:solidFill>
@@ -5969,13 +10592,13 @@
                 <a:ea typeface="Aptos" pitchFamily="34" charset="-122"/>
                 <a:cs typeface="Aptos" pitchFamily="34" charset="-120"/>
               </a:rPr>
-              <a:t>Identify AI uses that may be low, moderate, high, or unacceptable risk in a public health context.</a:t>
-            </a:r>
-            <a:endParaRPr lang="en-US" sz="1450" dirty="0"/>
-          </a:p>
-          <a:p>
-            <a:r>
-              <a:rPr lang="en-US" sz="1450" dirty="0">
+              <a:t>Play 7: Prioritize Use Cases - This lesson informs Play 7 by helping learners connect the lesson topic to prioritize use cases work.</a:t>
+            </a:r>
+            <a:endParaRPr lang="en-US" sz="1540" dirty="0"/>
+          </a:p>
+          <a:p>
+            <a:r>
+              <a:rPr lang="en-US" sz="1540" dirty="0">
                 <a:solidFill>
                   <a:srgbClr val="17364A"/>
                 </a:solidFill>
@@ -5983,13 +10606,13 @@
                 <a:ea typeface="Aptos" pitchFamily="34" charset="-122"/>
                 <a:cs typeface="Aptos" pitchFamily="34" charset="-120"/>
               </a:rPr>
-              <a:t>Develop risk tolerance statements for different AI use categories.</a:t>
-            </a:r>
-            <a:endParaRPr lang="en-US" sz="1450" dirty="0"/>
-          </a:p>
-          <a:p>
-            <a:r>
-              <a:rPr lang="en-US" sz="1450" dirty="0">
+              <a:t>Play 1: Vision &amp; Guardrails - This lesson informs Play 1 by helping learners connect the lesson topic to vision &amp; guardrails work in.</a:t>
+            </a:r>
+            <a:endParaRPr lang="en-US" sz="1540" dirty="0"/>
+          </a:p>
+          <a:p>
+            <a:r>
+              <a:rPr lang="en-US" sz="1540" dirty="0">
                 <a:solidFill>
                   <a:srgbClr val="17364A"/>
                 </a:solidFill>
@@ -5997,13 +10620,106 @@
                 <a:ea typeface="Aptos" pitchFamily="34" charset="-122"/>
                 <a:cs typeface="Aptos" pitchFamily="34" charset="-120"/>
               </a:rPr>
-              <a:t>Connect risk tolerance to review level, safeguards, monitoring, and escalation.</a:t>
-            </a:r>
-            <a:endParaRPr lang="en-US" sz="1450" dirty="0"/>
-          </a:p>
-          <a:p>
-            <a:r>
-              <a:rPr lang="en-US" sz="1450" dirty="0">
+              <a:t>Play 3: Establish AI Governance - This lesson informs Play 3 by helping learners connect the lesson topic to establish ai governance.</a:t>
+            </a:r>
+            <a:endParaRPr lang="en-US" sz="1540" dirty="0"/>
+          </a:p>
+        </p:txBody>
+      </p:sp>
+      <p:sp>
+        <p:nvSpPr>
+          <p:cNvPr id="9" name="Shape 7"/>
+          <p:cNvSpPr/>
+          <p:nvPr/>
+        </p:nvSpPr>
+        <p:spPr>
+          <a:xfrm>
+            <a:off x="8046720" y="1417320"/>
+            <a:ext cx="3063240" cy="2103120"/>
+          </a:xfrm>
+          <a:prstGeom prst="roundRect">
+            <a:avLst>
+              <a:gd name="adj" fmla="val 5217"/>
+            </a:avLst>
+          </a:prstGeom>
+          <a:solidFill>
+            <a:srgbClr val="EEF8ED"/>
+          </a:solidFill>
+          <a:ln w="12700">
+            <a:solidFill>
+              <a:srgbClr val="B9D7E6"/>
+            </a:solidFill>
+            <a:prstDash val="solid"/>
+          </a:ln>
+        </p:spPr>
+      </p:sp>
+      <p:sp>
+        <p:nvSpPr>
+          <p:cNvPr id="10" name="Text 8"/>
+          <p:cNvSpPr/>
+          <p:nvPr/>
+        </p:nvSpPr>
+        <p:spPr>
+          <a:xfrm>
+            <a:off x="8211312" y="1563624"/>
+            <a:ext cx="2734056" cy="201168"/>
+          </a:xfrm>
+          <a:prstGeom prst="rect">
+            <a:avLst/>
+          </a:prstGeom>
+          <a:noFill/>
+          <a:ln/>
+        </p:spPr>
+        <p:txBody>
+          <a:bodyPr wrap="square" lIns="0" tIns="0" rIns="0" bIns="0" rtlCol="0" anchor="ctr"/>
+          <a:lstStyle/>
+          <a:p>
+            <a:pPr indent="0" marL="0">
+              <a:buNone/>
+            </a:pPr>
+            <a:r>
+              <a:rPr lang="en-US" sz="950" b="1" dirty="0">
+                <a:solidFill>
+                  <a:srgbClr val="0068B7"/>
+                </a:solidFill>
+                <a:latin typeface="Aptos" pitchFamily="34" charset="0"/>
+                <a:ea typeface="Aptos" pitchFamily="34" charset="-122"/>
+                <a:cs typeface="Aptos" pitchFamily="34" charset="-120"/>
+              </a:rPr>
+              <a:t>Apply the lesson</a:t>
+            </a:r>
+            <a:endParaRPr lang="en-US" sz="950" dirty="0"/>
+          </a:p>
+        </p:txBody>
+      </p:sp>
+      <p:sp>
+        <p:nvSpPr>
+          <p:cNvPr id="11" name="Text 9"/>
+          <p:cNvSpPr/>
+          <p:nvPr/>
+        </p:nvSpPr>
+        <p:spPr>
+          <a:xfrm>
+            <a:off x="8211312" y="1856232"/>
+            <a:ext cx="2734056" cy="1536192"/>
+          </a:xfrm>
+          <a:prstGeom prst="rect">
+            <a:avLst/>
+          </a:prstGeom>
+          <a:noFill/>
+          <a:ln/>
+        </p:spPr>
+        <p:txBody>
+          <a:bodyPr wrap="square" lIns="0" tIns="0" rIns="0" bIns="0" rtlCol="0" anchor="t">
+            <a:normAutofit/>
+          </a:bodyPr>
+          <a:lstStyle/>
+          <a:p>
+            <a:pPr indent="0" marL="0">
+              <a:buNone/>
+            </a:pPr>
+            <a:r>
+              <a:rPr lang="en-US" sz="1250" dirty="0">
                 <a:solidFill>
                   <a:srgbClr val="17364A"/>
                 </a:solidFill>
@@ -6011,9 +10727,116 @@
                 <a:ea typeface="Aptos" pitchFamily="34" charset="-122"/>
                 <a:cs typeface="Aptos" pitchFamily="34" charset="-120"/>
               </a:rPr>
-              <a:t>Produce a draft AI risk appetite statement for leadership or governance discussion.</a:t>
-            </a:r>
-            <a:endParaRPr lang="en-US" sz="1450" dirty="0"/>
+              <a:t>Use the related plays to identify decisions, participants, timing, approvals, and documentation needed for responsible implementation.</a:t>
+            </a:r>
+            <a:endParaRPr lang="en-US" sz="1250" dirty="0"/>
+          </a:p>
+        </p:txBody>
+      </p:sp>
+      <p:sp>
+        <p:nvSpPr>
+          <p:cNvPr id="12" name="Shape 10"/>
+          <p:cNvSpPr/>
+          <p:nvPr/>
+        </p:nvSpPr>
+        <p:spPr>
+          <a:xfrm>
+            <a:off x="8046720" y="3794760"/>
+            <a:ext cx="3063240" cy="1508760"/>
+          </a:xfrm>
+          <a:prstGeom prst="roundRect">
+            <a:avLst>
+              <a:gd name="adj" fmla="val 7273"/>
+            </a:avLst>
+          </a:prstGeom>
+          <a:solidFill>
+            <a:srgbClr val="FFF4D9"/>
+          </a:solidFill>
+          <a:ln w="12700">
+            <a:solidFill>
+              <a:srgbClr val="B9D7E6"/>
+            </a:solidFill>
+            <a:prstDash val="solid"/>
+          </a:ln>
+        </p:spPr>
+      </p:sp>
+      <p:sp>
+        <p:nvSpPr>
+          <p:cNvPr id="13" name="Text 11"/>
+          <p:cNvSpPr/>
+          <p:nvPr/>
+        </p:nvSpPr>
+        <p:spPr>
+          <a:xfrm>
+            <a:off x="8211312" y="3941064"/>
+            <a:ext cx="2734056" cy="201168"/>
+          </a:xfrm>
+          <a:prstGeom prst="rect">
+            <a:avLst/>
+          </a:prstGeom>
+          <a:noFill/>
+          <a:ln/>
+        </p:spPr>
+        <p:txBody>
+          <a:bodyPr wrap="square" lIns="0" tIns="0" rIns="0" bIns="0" rtlCol="0" anchor="ctr"/>
+          <a:lstStyle/>
+          <a:p>
+            <a:pPr indent="0" marL="0">
+              <a:buNone/>
+            </a:pPr>
+            <a:r>
+              <a:rPr lang="en-US" sz="950" b="1" dirty="0">
+                <a:solidFill>
+                  <a:srgbClr val="0068B7"/>
+                </a:solidFill>
+                <a:latin typeface="Aptos" pitchFamily="34" charset="0"/>
+                <a:ea typeface="Aptos" pitchFamily="34" charset="-122"/>
+                <a:cs typeface="Aptos" pitchFamily="34" charset="-120"/>
+              </a:rPr>
+              <a:t>Keep in mind</a:t>
+            </a:r>
+            <a:endParaRPr lang="en-US" sz="950" dirty="0"/>
+          </a:p>
+        </p:txBody>
+      </p:sp>
+      <p:sp>
+        <p:nvSpPr>
+          <p:cNvPr id="14" name="Text 12"/>
+          <p:cNvSpPr/>
+          <p:nvPr/>
+        </p:nvSpPr>
+        <p:spPr>
+          <a:xfrm>
+            <a:off x="8211312" y="4233672"/>
+            <a:ext cx="2734056" cy="941832"/>
+          </a:xfrm>
+          <a:prstGeom prst="rect">
+            <a:avLst/>
+          </a:prstGeom>
+          <a:noFill/>
+          <a:ln/>
+        </p:spPr>
+        <p:txBody>
+          <a:bodyPr wrap="square" lIns="0" tIns="0" rIns="0" bIns="0" rtlCol="0" anchor="t">
+            <a:normAutofit/>
+          </a:bodyPr>
+          <a:lstStyle/>
+          <a:p>
+            <a:pPr indent="0" marL="0">
+              <a:buNone/>
+            </a:pPr>
+            <a:r>
+              <a:rPr lang="en-US" sz="1250" dirty="0">
+                <a:solidFill>
+                  <a:srgbClr val="17364A"/>
+                </a:solidFill>
+                <a:latin typeface="Aptos" pitchFamily="34" charset="0"/>
+                <a:ea typeface="Aptos" pitchFamily="34" charset="-122"/>
+                <a:cs typeface="Aptos" pitchFamily="34" charset="-120"/>
+              </a:rPr>
+              <a:t>The playbook connection helps turn training into agency work, not just individual knowledge.</a:t>
+            </a:r>
+            <a:endParaRPr lang="en-US" sz="1250" dirty="0"/>
           </a:p>
         </p:txBody>
       </p:sp>
@@ -6076,7 +10899,32 @@
       </p:sp>
       <p:sp>
         <p:nvSpPr>
-          <p:cNvPr id="3" name="Text 1"/>
+          <p:cNvPr id="3" name="Shape 1"/>
+          <p:cNvSpPr/>
+          <p:nvPr/>
+        </p:nvSpPr>
+        <p:spPr>
+          <a:xfrm>
+            <a:off x="0" y="164592"/>
+            <a:ext cx="146304" cy="6693408"/>
+          </a:xfrm>
+          <a:prstGeom prst="rect">
+            <a:avLst/>
+          </a:prstGeom>
+          <a:solidFill>
+            <a:srgbClr val="2F8A28"/>
+          </a:solidFill>
+          <a:ln w="12700">
+            <a:solidFill>
+              <a:srgbClr val="2F8A28"/>
+            </a:solidFill>
+            <a:prstDash val="solid"/>
+          </a:ln>
+        </p:spPr>
+      </p:sp>
+      <p:sp>
+        <p:nvSpPr>
+          <p:cNvPr id="4" name="Text 2"/>
           <p:cNvSpPr/>
           <p:nvPr/>
         </p:nvSpPr>
@@ -6115,7 +10963,7 @@
       </p:sp>
       <p:sp>
         <p:nvSpPr>
-          <p:cNvPr id="4" name="Text 2"/>
+          <p:cNvPr id="5" name="Text 3"/>
           <p:cNvSpPr/>
           <p:nvPr/>
         </p:nvSpPr>
@@ -6154,7 +11002,7 @@
       </p:sp>
       <p:sp>
         <p:nvSpPr>
-          <p:cNvPr id="5" name="Text 3"/>
+          <p:cNvPr id="6" name="Text 4"/>
           <p:cNvSpPr/>
           <p:nvPr/>
         </p:nvSpPr>
@@ -6193,7 +11041,7 @@
       </p:sp>
       <p:sp>
         <p:nvSpPr>
-          <p:cNvPr id="6" name="Text 4"/>
+          <p:cNvPr id="7" name="Text 5"/>
           <p:cNvSpPr/>
           <p:nvPr/>
         </p:nvSpPr>
@@ -6226,7 +11074,7 @@
                 <a:ea typeface="Aptos Display" pitchFamily="34" charset="-122"/>
                 <a:cs typeface="Aptos Display" pitchFamily="34" charset="-120"/>
               </a:rPr>
-              <a:t>Module Overview</a:t>
+              <a:t>Related toolkit resources</a:t>
             </a:r>
             <a:endParaRPr lang="en-US" sz="2700" dirty="0"/>
           </a:p>
@@ -6234,32 +11082,192 @@
       </p:sp>
       <p:sp>
         <p:nvSpPr>
-          <p:cNvPr id="7" name="Text 5"/>
-          <p:cNvSpPr/>
-          <p:nvPr/>
-        </p:nvSpPr>
-        <p:spPr>
-          <a:xfrm>
-            <a:off x="822960" y="1325880"/>
-            <a:ext cx="10378440" cy="4800600"/>
-          </a:xfrm>
-          <a:prstGeom prst="rect">
-            <a:avLst/>
-          </a:prstGeom>
-          <a:noFill/>
-          <a:ln/>
-        </p:spPr>
-        <p:txBody>
-          <a:bodyPr wrap="square" lIns="1016" tIns="1016" rIns="1016" bIns="1016" rtlCol="0" anchor="t">
+          <p:cNvPr id="8" name="Text 6"/>
+          <p:cNvSpPr/>
+          <p:nvPr/>
+        </p:nvSpPr>
+        <p:spPr>
+          <a:xfrm>
+            <a:off x="868680" y="1417320"/>
+            <a:ext cx="6903720" cy="4480560"/>
+          </a:xfrm>
+          <a:prstGeom prst="rect">
+            <a:avLst/>
+          </a:prstGeom>
+          <a:noFill/>
+          <a:ln/>
+        </p:spPr>
+        <p:txBody>
+          <a:bodyPr wrap="square" lIns="635" tIns="635" rIns="635" bIns="635" rtlCol="0" anchor="t">
             <a:normAutofit/>
           </a:bodyPr>
           <a:lstStyle/>
           <a:p>
+            <a:r>
+              <a:rPr lang="en-US" sz="1460" dirty="0">
+                <a:solidFill>
+                  <a:srgbClr val="17364A"/>
+                </a:solidFill>
+                <a:latin typeface="Aptos" pitchFamily="34" charset="0"/>
+                <a:ea typeface="Aptos" pitchFamily="34" charset="-122"/>
+                <a:cs typeface="Aptos" pitchFamily="34" charset="-120"/>
+              </a:rPr>
+              <a:t>Tool 1: AI Vision &amp; Principles Workshop (Workshop) - Use AI Vision &amp; Principles Workshop to translate this lesson into a documented.</a:t>
+            </a:r>
+            <a:endParaRPr lang="en-US" sz="1460" dirty="0"/>
+          </a:p>
+          <a:p>
+            <a:r>
+              <a:rPr lang="en-US" sz="1460" dirty="0">
+                <a:solidFill>
+                  <a:srgbClr val="17364A"/>
+                </a:solidFill>
+                <a:latin typeface="Aptos" pitchFamily="34" charset="0"/>
+                <a:ea typeface="Aptos" pitchFamily="34" charset="-122"/>
+                <a:cs typeface="Aptos" pitchFamily="34" charset="-120"/>
+              </a:rPr>
+              <a:t>Tool 3: Equity Impact Assessment Checklist (Checklist) - Use this tool to complete or strengthen the practical exercise for the.</a:t>
+            </a:r>
+            <a:endParaRPr lang="en-US" sz="1460" dirty="0"/>
+          </a:p>
+          <a:p>
+            <a:r>
+              <a:rPr lang="en-US" sz="1460" dirty="0">
+                <a:solidFill>
+                  <a:srgbClr val="17364A"/>
+                </a:solidFill>
+                <a:latin typeface="Aptos" pitchFamily="34" charset="0"/>
+                <a:ea typeface="Aptos" pitchFamily="34" charset="-122"/>
+                <a:cs typeface="Aptos" pitchFamily="34" charset="-120"/>
+              </a:rPr>
+              <a:t>Tool 4: AI Policy Landscape Scan (Worksheet) - Use AI Policy Landscape Scan to translate this lesson into a documented public health.</a:t>
+            </a:r>
+            <a:endParaRPr lang="en-US" sz="1460" dirty="0"/>
+          </a:p>
+          <a:p>
+            <a:r>
+              <a:rPr lang="en-US" sz="1460" dirty="0">
+                <a:solidFill>
+                  <a:srgbClr val="17364A"/>
+                </a:solidFill>
+                <a:latin typeface="Aptos" pitchFamily="34" charset="0"/>
+                <a:ea typeface="Aptos" pitchFamily="34" charset="-122"/>
+                <a:cs typeface="Aptos" pitchFamily="34" charset="-120"/>
+              </a:rPr>
+              <a:t>Tool 5: AI Environmental and Resource Impact Review (Checklist) - Use AI Environmental and Resource Impact Review to translate this.</a:t>
+            </a:r>
+            <a:endParaRPr lang="en-US" sz="1460" dirty="0"/>
+          </a:p>
+          <a:p>
+            <a:r>
+              <a:rPr lang="en-US" sz="1460" dirty="0">
+                <a:solidFill>
+                  <a:srgbClr val="17364A"/>
+                </a:solidFill>
+                <a:latin typeface="Aptos" pitchFamily="34" charset="0"/>
+                <a:ea typeface="Aptos" pitchFamily="34" charset="-122"/>
+                <a:cs typeface="Aptos" pitchFamily="34" charset="-120"/>
+              </a:rPr>
+              <a:t>Tool 6: Human-Centered AI Decision Rule Checklist (Checklist) - Use Human-Centered AI Decision Rule Checklist to translate this.</a:t>
+            </a:r>
+            <a:endParaRPr lang="en-US" sz="1460" dirty="0"/>
+          </a:p>
+        </p:txBody>
+      </p:sp>
+      <p:sp>
+        <p:nvSpPr>
+          <p:cNvPr id="9" name="Shape 7"/>
+          <p:cNvSpPr/>
+          <p:nvPr/>
+        </p:nvSpPr>
+        <p:spPr>
+          <a:xfrm>
+            <a:off x="8046720" y="1417320"/>
+            <a:ext cx="3063240" cy="2103120"/>
+          </a:xfrm>
+          <a:prstGeom prst="roundRect">
+            <a:avLst>
+              <a:gd name="adj" fmla="val 5217"/>
+            </a:avLst>
+          </a:prstGeom>
+          <a:solidFill>
+            <a:srgbClr val="EAF6F8"/>
+          </a:solidFill>
+          <a:ln w="12700">
+            <a:solidFill>
+              <a:srgbClr val="B9D7E6"/>
+            </a:solidFill>
+            <a:prstDash val="solid"/>
+          </a:ln>
+        </p:spPr>
+      </p:sp>
+      <p:sp>
+        <p:nvSpPr>
+          <p:cNvPr id="10" name="Text 8"/>
+          <p:cNvSpPr/>
+          <p:nvPr/>
+        </p:nvSpPr>
+        <p:spPr>
+          <a:xfrm>
+            <a:off x="8211312" y="1563624"/>
+            <a:ext cx="2734056" cy="201168"/>
+          </a:xfrm>
+          <a:prstGeom prst="rect">
+            <a:avLst/>
+          </a:prstGeom>
+          <a:noFill/>
+          <a:ln/>
+        </p:spPr>
+        <p:txBody>
+          <a:bodyPr wrap="square" lIns="0" tIns="0" rIns="0" bIns="0" rtlCol="0" anchor="ctr"/>
+          <a:lstStyle/>
+          <a:p>
             <a:pPr indent="0" marL="0">
               <a:buNone/>
             </a:pPr>
             <a:r>
-              <a:rPr lang="en-US" sz="1420" dirty="0">
+              <a:rPr lang="en-US" sz="950" b="1" dirty="0">
+                <a:solidFill>
+                  <a:srgbClr val="0068B7"/>
+                </a:solidFill>
+                <a:latin typeface="Aptos" pitchFamily="34" charset="0"/>
+                <a:ea typeface="Aptos" pitchFamily="34" charset="-122"/>
+                <a:cs typeface="Aptos" pitchFamily="34" charset="-120"/>
+              </a:rPr>
+              <a:t>Use the tools</a:t>
+            </a:r>
+            <a:endParaRPr lang="en-US" sz="950" dirty="0"/>
+          </a:p>
+        </p:txBody>
+      </p:sp>
+      <p:sp>
+        <p:nvSpPr>
+          <p:cNvPr id="11" name="Text 9"/>
+          <p:cNvSpPr/>
+          <p:nvPr/>
+        </p:nvSpPr>
+        <p:spPr>
+          <a:xfrm>
+            <a:off x="8211312" y="1856232"/>
+            <a:ext cx="2734056" cy="1536192"/>
+          </a:xfrm>
+          <a:prstGeom prst="rect">
+            <a:avLst/>
+          </a:prstGeom>
+          <a:noFill/>
+          <a:ln/>
+        </p:spPr>
+        <p:txBody>
+          <a:bodyPr wrap="square" lIns="0" tIns="0" rIns="0" bIns="0" rtlCol="0" anchor="t">
+            <a:normAutofit/>
+          </a:bodyPr>
+          <a:lstStyle/>
+          <a:p>
+            <a:pPr indent="0" marL="0">
+              <a:buNone/>
+            </a:pPr>
+            <a:r>
+              <a:rPr lang="en-US" sz="1250" dirty="0">
                 <a:solidFill>
                   <a:srgbClr val="17364A"/>
                 </a:solidFill>
@@ -6267,9 +11275,116 @@
                 <a:ea typeface="Aptos" pitchFamily="34" charset="-122"/>
                 <a:cs typeface="Aptos" pitchFamily="34" charset="-120"/>
               </a:rPr>
-              <a:t>Leaders cannot manage AI risk effectively unless they define how much risk the agency is willing to accept for different types of use. Risk appetite describes the broad level of risk an organization is willing to take in pursuit of its mission. Risk tolerance translates that appetite into practical thresholds, conditions, and limits for specific AI uses. This module helps public health leaders define AI risk appetite in a way that reflects public health authority, community trust, legal obligations, health equity, privacy, safety, and operational needs. The goal is not to eliminate all risk. The goal is to make risk decisions explicit, proportionate, documented, and aligned with public health values.</a:t>
-            </a:r>
-            <a:endParaRPr lang="en-US" sz="1420" dirty="0"/>
+              <a:t>Use linked tools when your department needs a structured worksheet, template, checklist, review process, or documentation artifact.</a:t>
+            </a:r>
+            <a:endParaRPr lang="en-US" sz="1250" dirty="0"/>
+          </a:p>
+        </p:txBody>
+      </p:sp>
+      <p:sp>
+        <p:nvSpPr>
+          <p:cNvPr id="12" name="Shape 10"/>
+          <p:cNvSpPr/>
+          <p:nvPr/>
+        </p:nvSpPr>
+        <p:spPr>
+          <a:xfrm>
+            <a:off x="8046720" y="3794760"/>
+            <a:ext cx="3063240" cy="1508760"/>
+          </a:xfrm>
+          <a:prstGeom prst="roundRect">
+            <a:avLst>
+              <a:gd name="adj" fmla="val 7273"/>
+            </a:avLst>
+          </a:prstGeom>
+          <a:solidFill>
+            <a:srgbClr val="EEF8ED"/>
+          </a:solidFill>
+          <a:ln w="12700">
+            <a:solidFill>
+              <a:srgbClr val="B9D7E6"/>
+            </a:solidFill>
+            <a:prstDash val="solid"/>
+          </a:ln>
+        </p:spPr>
+      </p:sp>
+      <p:sp>
+        <p:nvSpPr>
+          <p:cNvPr id="13" name="Text 11"/>
+          <p:cNvSpPr/>
+          <p:nvPr/>
+        </p:nvSpPr>
+        <p:spPr>
+          <a:xfrm>
+            <a:off x="8211312" y="3941064"/>
+            <a:ext cx="2734056" cy="201168"/>
+          </a:xfrm>
+          <a:prstGeom prst="rect">
+            <a:avLst/>
+          </a:prstGeom>
+          <a:noFill/>
+          <a:ln/>
+        </p:spPr>
+        <p:txBody>
+          <a:bodyPr wrap="square" lIns="0" tIns="0" rIns="0" bIns="0" rtlCol="0" anchor="ctr"/>
+          <a:lstStyle/>
+          <a:p>
+            <a:pPr indent="0" marL="0">
+              <a:buNone/>
+            </a:pPr>
+            <a:r>
+              <a:rPr lang="en-US" sz="950" b="1" dirty="0">
+                <a:solidFill>
+                  <a:srgbClr val="0068B7"/>
+                </a:solidFill>
+                <a:latin typeface="Aptos" pitchFamily="34" charset="0"/>
+                <a:ea typeface="Aptos" pitchFamily="34" charset="-122"/>
+                <a:cs typeface="Aptos" pitchFamily="34" charset="-120"/>
+              </a:rPr>
+              <a:t>Avoid duplication</a:t>
+            </a:r>
+            <a:endParaRPr lang="en-US" sz="950" dirty="0"/>
+          </a:p>
+        </p:txBody>
+      </p:sp>
+      <p:sp>
+        <p:nvSpPr>
+          <p:cNvPr id="14" name="Text 12"/>
+          <p:cNvSpPr/>
+          <p:nvPr/>
+        </p:nvSpPr>
+        <p:spPr>
+          <a:xfrm>
+            <a:off x="8211312" y="4233672"/>
+            <a:ext cx="2734056" cy="941832"/>
+          </a:xfrm>
+          <a:prstGeom prst="rect">
+            <a:avLst/>
+          </a:prstGeom>
+          <a:noFill/>
+          <a:ln/>
+        </p:spPr>
+        <p:txBody>
+          <a:bodyPr wrap="square" lIns="0" tIns="0" rIns="0" bIns="0" rtlCol="0" anchor="t">
+            <a:normAutofit/>
+          </a:bodyPr>
+          <a:lstStyle/>
+          <a:p>
+            <a:pPr indent="0" marL="0">
+              <a:buNone/>
+            </a:pPr>
+            <a:r>
+              <a:rPr lang="en-US" sz="1250" dirty="0">
+                <a:solidFill>
+                  <a:srgbClr val="17364A"/>
+                </a:solidFill>
+                <a:latin typeface="Aptos" pitchFamily="34" charset="0"/>
+                <a:ea typeface="Aptos" pitchFamily="34" charset="-122"/>
+                <a:cs typeface="Aptos" pitchFamily="34" charset="-120"/>
+              </a:rPr>
+              <a:t>If your department already has a strong equivalent tool, adapt or use the existing process instead of recreating it.</a:t>
+            </a:r>
+            <a:endParaRPr lang="en-US" sz="1250" dirty="0"/>
           </a:p>
         </p:txBody>
       </p:sp>
@@ -6332,7 +11447,32 @@
       </p:sp>
       <p:sp>
         <p:nvSpPr>
-          <p:cNvPr id="3" name="Text 1"/>
+          <p:cNvPr id="3" name="Shape 1"/>
+          <p:cNvSpPr/>
+          <p:nvPr/>
+        </p:nvSpPr>
+        <p:spPr>
+          <a:xfrm>
+            <a:off x="0" y="164592"/>
+            <a:ext cx="146304" cy="6693408"/>
+          </a:xfrm>
+          <a:prstGeom prst="rect">
+            <a:avLst/>
+          </a:prstGeom>
+          <a:solidFill>
+            <a:srgbClr val="2F8A28"/>
+          </a:solidFill>
+          <a:ln w="12700">
+            <a:solidFill>
+              <a:srgbClr val="2F8A28"/>
+            </a:solidFill>
+            <a:prstDash val="solid"/>
+          </a:ln>
+        </p:spPr>
+      </p:sp>
+      <p:sp>
+        <p:nvSpPr>
+          <p:cNvPr id="4" name="Text 2"/>
           <p:cNvSpPr/>
           <p:nvPr/>
         </p:nvSpPr>
@@ -6371,7 +11511,7 @@
       </p:sp>
       <p:sp>
         <p:nvSpPr>
-          <p:cNvPr id="4" name="Text 2"/>
+          <p:cNvPr id="5" name="Text 3"/>
           <p:cNvSpPr/>
           <p:nvPr/>
         </p:nvSpPr>
@@ -6410,7 +11550,7 @@
       </p:sp>
       <p:sp>
         <p:nvSpPr>
-          <p:cNvPr id="5" name="Text 3"/>
+          <p:cNvPr id="6" name="Text 4"/>
           <p:cNvSpPr/>
           <p:nvPr/>
         </p:nvSpPr>
@@ -6449,13 +11589,77 @@
       </p:sp>
       <p:sp>
         <p:nvSpPr>
-          <p:cNvPr id="6" name="Text 4"/>
+          <p:cNvPr id="7" name="Shape 5"/>
           <p:cNvSpPr/>
           <p:nvPr/>
         </p:nvSpPr>
         <p:spPr>
           <a:xfrm>
             <a:off x="640080" y="658368"/>
+            <a:ext cx="420624" cy="420624"/>
+          </a:xfrm>
+          <a:prstGeom prst="ellipse">
+            <a:avLst/>
+          </a:prstGeom>
+          <a:solidFill>
+            <a:srgbClr val="0068B7"/>
+          </a:solidFill>
+          <a:ln w="12700">
+            <a:solidFill>
+              <a:srgbClr val="0068B7"/>
+            </a:solidFill>
+            <a:prstDash val="solid"/>
+          </a:ln>
+        </p:spPr>
+      </p:sp>
+      <p:sp>
+        <p:nvSpPr>
+          <p:cNvPr id="8" name="Text 6"/>
+          <p:cNvSpPr/>
+          <p:nvPr/>
+        </p:nvSpPr>
+        <p:spPr>
+          <a:xfrm>
+            <a:off x="640080" y="731520"/>
+            <a:ext cx="420624" cy="164592"/>
+          </a:xfrm>
+          <a:prstGeom prst="rect">
+            <a:avLst/>
+          </a:prstGeom>
+          <a:noFill/>
+          <a:ln/>
+        </p:spPr>
+        <p:txBody>
+          <a:bodyPr wrap="square" lIns="0" tIns="0" rIns="0" bIns="0" rtlCol="0" anchor="ctr"/>
+          <a:lstStyle/>
+          <a:p>
+            <a:pPr algn="ctr" indent="0" marL="0">
+              <a:buNone/>
+            </a:pPr>
+            <a:r>
+              <a:rPr lang="en-US" sz="1100" b="1" dirty="0">
+                <a:solidFill>
+                  <a:srgbClr val="FFFFFF"/>
+                </a:solidFill>
+                <a:latin typeface="Aptos" pitchFamily="34" charset="0"/>
+                <a:ea typeface="Aptos" pitchFamily="34" charset="-122"/>
+                <a:cs typeface="Aptos" pitchFamily="34" charset="-120"/>
+              </a:rPr>
+              <a:t>1</a:t>
+            </a:r>
+            <a:endParaRPr lang="en-US" sz="1100" dirty="0"/>
+          </a:p>
+        </p:txBody>
+      </p:sp>
+      <p:sp>
+        <p:nvSpPr>
+          <p:cNvPr id="9" name="Text 7"/>
+          <p:cNvSpPr/>
+          <p:nvPr/>
+        </p:nvSpPr>
+        <p:spPr>
+          <a:xfrm>
+            <a:off x="640080" y="621792"/>
             <a:ext cx="10881360" cy="566928"/>
           </a:xfrm>
           <a:prstGeom prst="rect">
@@ -6482,7 +11686,7 @@
                 <a:ea typeface="Aptos Display" pitchFamily="34" charset="-122"/>
                 <a:cs typeface="Aptos Display" pitchFamily="34" charset="-120"/>
               </a:rPr>
-              <a:t>Jurisdiction and Agency Policy Note</a:t>
+              <a:t>Learning Objectives</a:t>
             </a:r>
             <a:endParaRPr lang="en-US" sz="2700" dirty="0"/>
           </a:p>
@@ -6490,32 +11694,178 @@
       </p:sp>
       <p:sp>
         <p:nvSpPr>
-          <p:cNvPr id="7" name="Text 5"/>
-          <p:cNvSpPr/>
-          <p:nvPr/>
-        </p:nvSpPr>
-        <p:spPr>
-          <a:xfrm>
-            <a:off x="822960" y="1325880"/>
-            <a:ext cx="10378440" cy="4800600"/>
-          </a:xfrm>
-          <a:prstGeom prst="rect">
-            <a:avLst/>
-          </a:prstGeom>
-          <a:noFill/>
-          <a:ln/>
-        </p:spPr>
-        <p:txBody>
-          <a:bodyPr wrap="square" lIns="1016" tIns="1016" rIns="1016" bIns="1016" rtlCol="0" anchor="t">
+          <p:cNvPr id="10" name="Text 8"/>
+          <p:cNvSpPr/>
+          <p:nvPr/>
+        </p:nvSpPr>
+        <p:spPr>
+          <a:xfrm>
+            <a:off x="868680" y="1417320"/>
+            <a:ext cx="6675120" cy="4434840"/>
+          </a:xfrm>
+          <a:prstGeom prst="rect">
+            <a:avLst/>
+          </a:prstGeom>
+          <a:noFill/>
+          <a:ln/>
+        </p:spPr>
+        <p:txBody>
+          <a:bodyPr wrap="square" lIns="635" tIns="635" rIns="635" bIns="635" rtlCol="0" anchor="t">
             <a:normAutofit/>
           </a:bodyPr>
           <a:lstStyle/>
           <a:p>
+            <a:r>
+              <a:rPr lang="en-US" sz="1700" dirty="0">
+                <a:solidFill>
+                  <a:srgbClr val="17364A"/>
+                </a:solidFill>
+                <a:latin typeface="Aptos" pitchFamily="34" charset="0"/>
+                <a:ea typeface="Aptos" pitchFamily="34" charset="-122"/>
+                <a:cs typeface="Aptos" pitchFamily="34" charset="-120"/>
+              </a:rPr>
+              <a:t>Explain the difference between risk appetite, risk tolerance, and risk acceptance.</a:t>
+            </a:r>
+            <a:endParaRPr lang="en-US" sz="1700" dirty="0"/>
+          </a:p>
+          <a:p>
+            <a:r>
+              <a:rPr lang="en-US" sz="1700" dirty="0">
+                <a:solidFill>
+                  <a:srgbClr val="17364A"/>
+                </a:solidFill>
+                <a:latin typeface="Aptos" pitchFamily="34" charset="0"/>
+                <a:ea typeface="Aptos" pitchFamily="34" charset="-122"/>
+                <a:cs typeface="Aptos" pitchFamily="34" charset="-120"/>
+              </a:rPr>
+              <a:t>Identify AI uses that may be low, moderate, high, or unacceptable risk in a public health context.</a:t>
+            </a:r>
+            <a:endParaRPr lang="en-US" sz="1700" dirty="0"/>
+          </a:p>
+          <a:p>
+            <a:r>
+              <a:rPr lang="en-US" sz="1700" dirty="0">
+                <a:solidFill>
+                  <a:srgbClr val="17364A"/>
+                </a:solidFill>
+                <a:latin typeface="Aptos" pitchFamily="34" charset="0"/>
+                <a:ea typeface="Aptos" pitchFamily="34" charset="-122"/>
+                <a:cs typeface="Aptos" pitchFamily="34" charset="-120"/>
+              </a:rPr>
+              <a:t>Develop risk tolerance statements for different AI use categories.</a:t>
+            </a:r>
+            <a:endParaRPr lang="en-US" sz="1700" dirty="0"/>
+          </a:p>
+          <a:p>
+            <a:r>
+              <a:rPr lang="en-US" sz="1700" dirty="0">
+                <a:solidFill>
+                  <a:srgbClr val="17364A"/>
+                </a:solidFill>
+                <a:latin typeface="Aptos" pitchFamily="34" charset="0"/>
+                <a:ea typeface="Aptos" pitchFamily="34" charset="-122"/>
+                <a:cs typeface="Aptos" pitchFamily="34" charset="-120"/>
+              </a:rPr>
+              <a:t>Connect risk tolerance to review level, safeguards, monitoring, and escalation.</a:t>
+            </a:r>
+            <a:endParaRPr lang="en-US" sz="1700" dirty="0"/>
+          </a:p>
+        </p:txBody>
+      </p:sp>
+      <p:sp>
+        <p:nvSpPr>
+          <p:cNvPr id="11" name="Shape 9"/>
+          <p:cNvSpPr/>
+          <p:nvPr/>
+        </p:nvSpPr>
+        <p:spPr>
+          <a:xfrm>
+            <a:off x="7909560" y="1417320"/>
+            <a:ext cx="3154680" cy="1828800"/>
+          </a:xfrm>
+          <a:prstGeom prst="roundRect">
+            <a:avLst>
+              <a:gd name="adj" fmla="val 6000"/>
+            </a:avLst>
+          </a:prstGeom>
+          <a:solidFill>
+            <a:srgbClr val="EEF8ED"/>
+          </a:solidFill>
+          <a:ln w="12700">
+            <a:solidFill>
+              <a:srgbClr val="B9D7E6"/>
+            </a:solidFill>
+            <a:prstDash val="solid"/>
+          </a:ln>
+        </p:spPr>
+      </p:sp>
+      <p:sp>
+        <p:nvSpPr>
+          <p:cNvPr id="12" name="Text 10"/>
+          <p:cNvSpPr/>
+          <p:nvPr/>
+        </p:nvSpPr>
+        <p:spPr>
+          <a:xfrm>
+            <a:off x="8074152" y="1563624"/>
+            <a:ext cx="2825496" cy="201168"/>
+          </a:xfrm>
+          <a:prstGeom prst="rect">
+            <a:avLst/>
+          </a:prstGeom>
+          <a:noFill/>
+          <a:ln/>
+        </p:spPr>
+        <p:txBody>
+          <a:bodyPr wrap="square" lIns="0" tIns="0" rIns="0" bIns="0" rtlCol="0" anchor="ctr"/>
+          <a:lstStyle/>
+          <a:p>
             <a:pPr indent="0" marL="0">
               <a:buNone/>
             </a:pPr>
             <a:r>
-              <a:rPr lang="en-US" sz="1420" dirty="0">
+              <a:rPr lang="en-US" sz="950" b="1" dirty="0">
+                <a:solidFill>
+                  <a:srgbClr val="0068B7"/>
+                </a:solidFill>
+                <a:latin typeface="Aptos" pitchFamily="34" charset="0"/>
+                <a:ea typeface="Aptos" pitchFamily="34" charset="-122"/>
+                <a:cs typeface="Aptos" pitchFamily="34" charset="-120"/>
+              </a:rPr>
+              <a:t>Key idea</a:t>
+            </a:r>
+            <a:endParaRPr lang="en-US" sz="950" dirty="0"/>
+          </a:p>
+        </p:txBody>
+      </p:sp>
+      <p:sp>
+        <p:nvSpPr>
+          <p:cNvPr id="13" name="Text 11"/>
+          <p:cNvSpPr/>
+          <p:nvPr/>
+        </p:nvSpPr>
+        <p:spPr>
+          <a:xfrm>
+            <a:off x="8074152" y="1856232"/>
+            <a:ext cx="2825496" cy="1261872"/>
+          </a:xfrm>
+          <a:prstGeom prst="rect">
+            <a:avLst/>
+          </a:prstGeom>
+          <a:noFill/>
+          <a:ln/>
+        </p:spPr>
+        <p:txBody>
+          <a:bodyPr wrap="square" lIns="0" tIns="0" rIns="0" bIns="0" rtlCol="0" anchor="t">
+            <a:normAutofit/>
+          </a:bodyPr>
+          <a:lstStyle/>
+          <a:p>
+            <a:pPr indent="0" marL="0">
+              <a:buNone/>
+            </a:pPr>
+            <a:r>
+              <a:rPr lang="en-US" sz="1250" dirty="0">
                 <a:solidFill>
                   <a:srgbClr val="17364A"/>
                 </a:solidFill>
@@ -6523,9 +11873,116 @@
                 <a:ea typeface="Aptos" pitchFamily="34" charset="-122"/>
                 <a:cs typeface="Aptos" pitchFamily="34" charset="-120"/>
               </a:rPr>
-              <a:t>This module provides national-level training guidance for public health agencies and partners. It is not legal advice and does not replace review by agency legal counsel, privacy officers, procurement officials, civil rights staff, records officers, or other authorized decision-makers. Requirements may vary by state, locality, territory, Tribe, agency, funding source, data-sharing agreement, emergency authority, and organizational policy. Learners should use this module to identify the issues that require review and should confirm applicable requirements before approving, procuring, deploying, or publicly communicating about AI-supported work.</a:t>
-            </a:r>
-            <a:endParaRPr lang="en-US" sz="1420" dirty="0"/>
+              <a:t>Explain the difference between risk appetite, risk tolerance, and risk acceptance.</a:t>
+            </a:r>
+            <a:endParaRPr lang="en-US" sz="1250" dirty="0"/>
+          </a:p>
+        </p:txBody>
+      </p:sp>
+      <p:sp>
+        <p:nvSpPr>
+          <p:cNvPr id="14" name="Shape 12"/>
+          <p:cNvSpPr/>
+          <p:nvPr/>
+        </p:nvSpPr>
+        <p:spPr>
+          <a:xfrm>
+            <a:off x="7909560" y="3520440"/>
+            <a:ext cx="3154680" cy="1737360"/>
+          </a:xfrm>
+          <a:prstGeom prst="roundRect">
+            <a:avLst>
+              <a:gd name="adj" fmla="val 6316"/>
+            </a:avLst>
+          </a:prstGeom>
+          <a:solidFill>
+            <a:srgbClr val="EAF6F8"/>
+          </a:solidFill>
+          <a:ln w="12700">
+            <a:solidFill>
+              <a:srgbClr val="B9D7E6"/>
+            </a:solidFill>
+            <a:prstDash val="solid"/>
+          </a:ln>
+        </p:spPr>
+      </p:sp>
+      <p:sp>
+        <p:nvSpPr>
+          <p:cNvPr id="15" name="Text 13"/>
+          <p:cNvSpPr/>
+          <p:nvPr/>
+        </p:nvSpPr>
+        <p:spPr>
+          <a:xfrm>
+            <a:off x="8074152" y="3666744"/>
+            <a:ext cx="2825496" cy="201168"/>
+          </a:xfrm>
+          <a:prstGeom prst="rect">
+            <a:avLst/>
+          </a:prstGeom>
+          <a:noFill/>
+          <a:ln/>
+        </p:spPr>
+        <p:txBody>
+          <a:bodyPr wrap="square" lIns="0" tIns="0" rIns="0" bIns="0" rtlCol="0" anchor="ctr"/>
+          <a:lstStyle/>
+          <a:p>
+            <a:pPr indent="0" marL="0">
+              <a:buNone/>
+            </a:pPr>
+            <a:r>
+              <a:rPr lang="en-US" sz="950" b="1" dirty="0">
+                <a:solidFill>
+                  <a:srgbClr val="0068B7"/>
+                </a:solidFill>
+                <a:latin typeface="Aptos" pitchFamily="34" charset="0"/>
+                <a:ea typeface="Aptos" pitchFamily="34" charset="-122"/>
+                <a:cs typeface="Aptos" pitchFamily="34" charset="-120"/>
+              </a:rPr>
+              <a:t>Use this for</a:t>
+            </a:r>
+            <a:endParaRPr lang="en-US" sz="950" dirty="0"/>
+          </a:p>
+        </p:txBody>
+      </p:sp>
+      <p:sp>
+        <p:nvSpPr>
+          <p:cNvPr id="16" name="Text 14"/>
+          <p:cNvSpPr/>
+          <p:nvPr/>
+        </p:nvSpPr>
+        <p:spPr>
+          <a:xfrm>
+            <a:off x="8074152" y="3959352"/>
+            <a:ext cx="2825496" cy="1170432"/>
+          </a:xfrm>
+          <a:prstGeom prst="rect">
+            <a:avLst/>
+          </a:prstGeom>
+          <a:noFill/>
+          <a:ln/>
+        </p:spPr>
+        <p:txBody>
+          <a:bodyPr wrap="square" lIns="0" tIns="0" rIns="0" bIns="0" rtlCol="0" anchor="t">
+            <a:normAutofit/>
+          </a:bodyPr>
+          <a:lstStyle/>
+          <a:p>
+            <a:pPr indent="0" marL="0">
+              <a:buNone/>
+            </a:pPr>
+            <a:r>
+              <a:rPr lang="en-US" sz="1250" dirty="0">
+                <a:solidFill>
+                  <a:srgbClr val="17364A"/>
+                </a:solidFill>
+                <a:latin typeface="Aptos" pitchFamily="34" charset="0"/>
+                <a:ea typeface="Aptos" pitchFamily="34" charset="-122"/>
+                <a:cs typeface="Aptos" pitchFamily="34" charset="-120"/>
+              </a:rPr>
+              <a:t>Connect the concept to public health decisions, safeguards, documentation, or implementation work.</a:t>
+            </a:r>
+            <a:endParaRPr lang="en-US" sz="1250" dirty="0"/>
           </a:p>
         </p:txBody>
       </p:sp>
@@ -6588,7 +12045,32 @@
       </p:sp>
       <p:sp>
         <p:nvSpPr>
-          <p:cNvPr id="3" name="Text 1"/>
+          <p:cNvPr id="3" name="Shape 1"/>
+          <p:cNvSpPr/>
+          <p:nvPr/>
+        </p:nvSpPr>
+        <p:spPr>
+          <a:xfrm>
+            <a:off x="0" y="164592"/>
+            <a:ext cx="146304" cy="6693408"/>
+          </a:xfrm>
+          <a:prstGeom prst="rect">
+            <a:avLst/>
+          </a:prstGeom>
+          <a:solidFill>
+            <a:srgbClr val="2F8A28"/>
+          </a:solidFill>
+          <a:ln w="12700">
+            <a:solidFill>
+              <a:srgbClr val="2F8A28"/>
+            </a:solidFill>
+            <a:prstDash val="solid"/>
+          </a:ln>
+        </p:spPr>
+      </p:sp>
+      <p:sp>
+        <p:nvSpPr>
+          <p:cNvPr id="4" name="Text 2"/>
           <p:cNvSpPr/>
           <p:nvPr/>
         </p:nvSpPr>
@@ -6627,7 +12109,7 @@
       </p:sp>
       <p:sp>
         <p:nvSpPr>
-          <p:cNvPr id="4" name="Text 2"/>
+          <p:cNvPr id="5" name="Text 3"/>
           <p:cNvSpPr/>
           <p:nvPr/>
         </p:nvSpPr>
@@ -6666,7 +12148,7 @@
       </p:sp>
       <p:sp>
         <p:nvSpPr>
-          <p:cNvPr id="5" name="Text 3"/>
+          <p:cNvPr id="6" name="Text 4"/>
           <p:cNvSpPr/>
           <p:nvPr/>
         </p:nvSpPr>
@@ -6705,13 +12187,77 @@
       </p:sp>
       <p:sp>
         <p:nvSpPr>
-          <p:cNvPr id="6" name="Text 4"/>
+          <p:cNvPr id="7" name="Shape 5"/>
           <p:cNvSpPr/>
           <p:nvPr/>
         </p:nvSpPr>
         <p:spPr>
           <a:xfrm>
             <a:off x="640080" y="658368"/>
+            <a:ext cx="420624" cy="420624"/>
+          </a:xfrm>
+          <a:prstGeom prst="ellipse">
+            <a:avLst/>
+          </a:prstGeom>
+          <a:solidFill>
+            <a:srgbClr val="0068B7"/>
+          </a:solidFill>
+          <a:ln w="12700">
+            <a:solidFill>
+              <a:srgbClr val="0068B7"/>
+            </a:solidFill>
+            <a:prstDash val="solid"/>
+          </a:ln>
+        </p:spPr>
+      </p:sp>
+      <p:sp>
+        <p:nvSpPr>
+          <p:cNvPr id="8" name="Text 6"/>
+          <p:cNvSpPr/>
+          <p:nvPr/>
+        </p:nvSpPr>
+        <p:spPr>
+          <a:xfrm>
+            <a:off x="640080" y="731520"/>
+            <a:ext cx="420624" cy="164592"/>
+          </a:xfrm>
+          <a:prstGeom prst="rect">
+            <a:avLst/>
+          </a:prstGeom>
+          <a:noFill/>
+          <a:ln/>
+        </p:spPr>
+        <p:txBody>
+          <a:bodyPr wrap="square" lIns="0" tIns="0" rIns="0" bIns="0" rtlCol="0" anchor="ctr"/>
+          <a:lstStyle/>
+          <a:p>
+            <a:pPr algn="ctr" indent="0" marL="0">
+              <a:buNone/>
+            </a:pPr>
+            <a:r>
+              <a:rPr lang="en-US" sz="1100" b="1" dirty="0">
+                <a:solidFill>
+                  <a:srgbClr val="FFFFFF"/>
+                </a:solidFill>
+                <a:latin typeface="Aptos" pitchFamily="34" charset="0"/>
+                <a:ea typeface="Aptos" pitchFamily="34" charset="-122"/>
+                <a:cs typeface="Aptos" pitchFamily="34" charset="-120"/>
+              </a:rPr>
+              <a:t>2</a:t>
+            </a:r>
+            <a:endParaRPr lang="en-US" sz="1100" dirty="0"/>
+          </a:p>
+        </p:txBody>
+      </p:sp>
+      <p:sp>
+        <p:nvSpPr>
+          <p:cNvPr id="9" name="Text 7"/>
+          <p:cNvSpPr/>
+          <p:nvPr/>
+        </p:nvSpPr>
+        <p:spPr>
+          <a:xfrm>
+            <a:off x="640080" y="621792"/>
             <a:ext cx="10881360" cy="566928"/>
           </a:xfrm>
           <a:prstGeom prst="rect">
@@ -6738,7 +12284,7 @@
                 <a:ea typeface="Aptos Display" pitchFamily="34" charset="-122"/>
                 <a:cs typeface="Aptos Display" pitchFamily="34" charset="-120"/>
               </a:rPr>
-              <a:t>Why This Topic Matters for Public Health AI</a:t>
+              <a:t>Module Overview</a:t>
             </a:r>
             <a:endParaRPr lang="en-US" sz="2700" dirty="0"/>
           </a:p>
@@ -6746,32 +12292,178 @@
       </p:sp>
       <p:sp>
         <p:nvSpPr>
-          <p:cNvPr id="7" name="Text 5"/>
-          <p:cNvSpPr/>
-          <p:nvPr/>
-        </p:nvSpPr>
-        <p:spPr>
-          <a:xfrm>
-            <a:off x="822960" y="1325880"/>
-            <a:ext cx="10378440" cy="4800600"/>
-          </a:xfrm>
-          <a:prstGeom prst="rect">
-            <a:avLst/>
-          </a:prstGeom>
-          <a:noFill/>
-          <a:ln/>
-        </p:spPr>
-        <p:txBody>
-          <a:bodyPr wrap="square" lIns="1016" tIns="1016" rIns="1016" bIns="1016" rtlCol="0" anchor="t">
+          <p:cNvPr id="10" name="Text 8"/>
+          <p:cNvSpPr/>
+          <p:nvPr/>
+        </p:nvSpPr>
+        <p:spPr>
+          <a:xfrm>
+            <a:off x="868680" y="1417320"/>
+            <a:ext cx="6675120" cy="4434840"/>
+          </a:xfrm>
+          <a:prstGeom prst="rect">
+            <a:avLst/>
+          </a:prstGeom>
+          <a:noFill/>
+          <a:ln/>
+        </p:spPr>
+        <p:txBody>
+          <a:bodyPr wrap="square" lIns="635" tIns="635" rIns="635" bIns="635" rtlCol="0" anchor="t">
             <a:normAutofit/>
           </a:bodyPr>
           <a:lstStyle/>
           <a:p>
+            <a:r>
+              <a:rPr lang="en-US" sz="1700" dirty="0">
+                <a:solidFill>
+                  <a:srgbClr val="17364A"/>
+                </a:solidFill>
+                <a:latin typeface="Aptos" pitchFamily="34" charset="0"/>
+                <a:ea typeface="Aptos" pitchFamily="34" charset="-122"/>
+                <a:cs typeface="Aptos" pitchFamily="34" charset="-120"/>
+              </a:rPr>
+              <a:t>Leaders cannot manage AI risk effectively unless they define how much risk the agency is willing to accept for different.</a:t>
+            </a:r>
+            <a:endParaRPr lang="en-US" sz="1700" dirty="0"/>
+          </a:p>
+          <a:p>
+            <a:r>
+              <a:rPr lang="en-US" sz="1700" dirty="0">
+                <a:solidFill>
+                  <a:srgbClr val="17364A"/>
+                </a:solidFill>
+                <a:latin typeface="Aptos" pitchFamily="34" charset="0"/>
+                <a:ea typeface="Aptos" pitchFamily="34" charset="-122"/>
+                <a:cs typeface="Aptos" pitchFamily="34" charset="-120"/>
+              </a:rPr>
+              <a:t>Risk appetite describes the broad level of risk an organization is willing to take in pursuit of its mission.</a:t>
+            </a:r>
+            <a:endParaRPr lang="en-US" sz="1700" dirty="0"/>
+          </a:p>
+          <a:p>
+            <a:r>
+              <a:rPr lang="en-US" sz="1700" dirty="0">
+                <a:solidFill>
+                  <a:srgbClr val="17364A"/>
+                </a:solidFill>
+                <a:latin typeface="Aptos" pitchFamily="34" charset="0"/>
+                <a:ea typeface="Aptos" pitchFamily="34" charset="-122"/>
+                <a:cs typeface="Aptos" pitchFamily="34" charset="-120"/>
+              </a:rPr>
+              <a:t>Risk tolerance translates that appetite into practical thresholds, conditions, and limits for specific AI uses.</a:t>
+            </a:r>
+            <a:endParaRPr lang="en-US" sz="1700" dirty="0"/>
+          </a:p>
+          <a:p>
+            <a:r>
+              <a:rPr lang="en-US" sz="1700" dirty="0">
+                <a:solidFill>
+                  <a:srgbClr val="17364A"/>
+                </a:solidFill>
+                <a:latin typeface="Aptos" pitchFamily="34" charset="0"/>
+                <a:ea typeface="Aptos" pitchFamily="34" charset="-122"/>
+                <a:cs typeface="Aptos" pitchFamily="34" charset="-120"/>
+              </a:rPr>
+              <a:t>This module helps public health leaders define AI risk appetite in a way that reflects public health authority, community.</a:t>
+            </a:r>
+            <a:endParaRPr lang="en-US" sz="1700" dirty="0"/>
+          </a:p>
+        </p:txBody>
+      </p:sp>
+      <p:sp>
+        <p:nvSpPr>
+          <p:cNvPr id="11" name="Shape 9"/>
+          <p:cNvSpPr/>
+          <p:nvPr/>
+        </p:nvSpPr>
+        <p:spPr>
+          <a:xfrm>
+            <a:off x="7909560" y="1417320"/>
+            <a:ext cx="3154680" cy="1828800"/>
+          </a:xfrm>
+          <a:prstGeom prst="roundRect">
+            <a:avLst>
+              <a:gd name="adj" fmla="val 6000"/>
+            </a:avLst>
+          </a:prstGeom>
+          <a:solidFill>
+            <a:srgbClr val="EEF8ED"/>
+          </a:solidFill>
+          <a:ln w="12700">
+            <a:solidFill>
+              <a:srgbClr val="B9D7E6"/>
+            </a:solidFill>
+            <a:prstDash val="solid"/>
+          </a:ln>
+        </p:spPr>
+      </p:sp>
+      <p:sp>
+        <p:nvSpPr>
+          <p:cNvPr id="12" name="Text 10"/>
+          <p:cNvSpPr/>
+          <p:nvPr/>
+        </p:nvSpPr>
+        <p:spPr>
+          <a:xfrm>
+            <a:off x="8074152" y="1563624"/>
+            <a:ext cx="2825496" cy="201168"/>
+          </a:xfrm>
+          <a:prstGeom prst="rect">
+            <a:avLst/>
+          </a:prstGeom>
+          <a:noFill/>
+          <a:ln/>
+        </p:spPr>
+        <p:txBody>
+          <a:bodyPr wrap="square" lIns="0" tIns="0" rIns="0" bIns="0" rtlCol="0" anchor="ctr"/>
+          <a:lstStyle/>
+          <a:p>
             <a:pPr indent="0" marL="0">
               <a:buNone/>
             </a:pPr>
             <a:r>
-              <a:rPr lang="en-US" sz="1420" dirty="0">
+              <a:rPr lang="en-US" sz="950" b="1" dirty="0">
+                <a:solidFill>
+                  <a:srgbClr val="0068B7"/>
+                </a:solidFill>
+                <a:latin typeface="Aptos" pitchFamily="34" charset="0"/>
+                <a:ea typeface="Aptos" pitchFamily="34" charset="-122"/>
+                <a:cs typeface="Aptos" pitchFamily="34" charset="-120"/>
+              </a:rPr>
+              <a:t>Key idea</a:t>
+            </a:r>
+            <a:endParaRPr lang="en-US" sz="950" dirty="0"/>
+          </a:p>
+        </p:txBody>
+      </p:sp>
+      <p:sp>
+        <p:nvSpPr>
+          <p:cNvPr id="13" name="Text 11"/>
+          <p:cNvSpPr/>
+          <p:nvPr/>
+        </p:nvSpPr>
+        <p:spPr>
+          <a:xfrm>
+            <a:off x="8074152" y="1856232"/>
+            <a:ext cx="2825496" cy="1261872"/>
+          </a:xfrm>
+          <a:prstGeom prst="rect">
+            <a:avLst/>
+          </a:prstGeom>
+          <a:noFill/>
+          <a:ln/>
+        </p:spPr>
+        <p:txBody>
+          <a:bodyPr wrap="square" lIns="0" tIns="0" rIns="0" bIns="0" rtlCol="0" anchor="t">
+            <a:normAutofit/>
+          </a:bodyPr>
+          <a:lstStyle/>
+          <a:p>
+            <a:pPr indent="0" marL="0">
+              <a:buNone/>
+            </a:pPr>
+            <a:r>
+              <a:rPr lang="en-US" sz="1250" dirty="0">
                 <a:solidFill>
                   <a:srgbClr val="17364A"/>
                 </a:solidFill>
@@ -6779,9 +12471,116 @@
                 <a:ea typeface="Aptos" pitchFamily="34" charset="-122"/>
                 <a:cs typeface="Aptos" pitchFamily="34" charset="-120"/>
               </a:rPr>
-              <a:t>Public health agencies make risk decisions every day, but AI can make those decisions less visible. A generative AI tool might be acceptable for drafting internal meeting notes but not for producing unsupervised public health guidance. A predictive model might be acceptable for planning staffing levels but not for denying services. An agentic workflow might be acceptable for creating a draft task but not for sending an enforcement notice without human approval. Risk appetite helps agencies explain these distinctions. It provides a leadership-level statement of where the agency encourages innovation, where it requires caution, and where it prohibits use. It also helps staff understand that responsible AI is not a binary choice between adoption and avoidance. It is a disciplined process for matching safeguards to risk.</a:t>
-            </a:r>
-            <a:endParaRPr lang="en-US" sz="1420" dirty="0"/>
+              <a:t>Leaders cannot manage AI risk effectively unless they define how much risk the agency is willing to accept for different.</a:t>
+            </a:r>
+            <a:endParaRPr lang="en-US" sz="1250" dirty="0"/>
+          </a:p>
+        </p:txBody>
+      </p:sp>
+      <p:sp>
+        <p:nvSpPr>
+          <p:cNvPr id="14" name="Shape 12"/>
+          <p:cNvSpPr/>
+          <p:nvPr/>
+        </p:nvSpPr>
+        <p:spPr>
+          <a:xfrm>
+            <a:off x="7909560" y="3520440"/>
+            <a:ext cx="3154680" cy="1737360"/>
+          </a:xfrm>
+          <a:prstGeom prst="roundRect">
+            <a:avLst>
+              <a:gd name="adj" fmla="val 6316"/>
+            </a:avLst>
+          </a:prstGeom>
+          <a:solidFill>
+            <a:srgbClr val="EAF6F8"/>
+          </a:solidFill>
+          <a:ln w="12700">
+            <a:solidFill>
+              <a:srgbClr val="B9D7E6"/>
+            </a:solidFill>
+            <a:prstDash val="solid"/>
+          </a:ln>
+        </p:spPr>
+      </p:sp>
+      <p:sp>
+        <p:nvSpPr>
+          <p:cNvPr id="15" name="Text 13"/>
+          <p:cNvSpPr/>
+          <p:nvPr/>
+        </p:nvSpPr>
+        <p:spPr>
+          <a:xfrm>
+            <a:off x="8074152" y="3666744"/>
+            <a:ext cx="2825496" cy="201168"/>
+          </a:xfrm>
+          <a:prstGeom prst="rect">
+            <a:avLst/>
+          </a:prstGeom>
+          <a:noFill/>
+          <a:ln/>
+        </p:spPr>
+        <p:txBody>
+          <a:bodyPr wrap="square" lIns="0" tIns="0" rIns="0" bIns="0" rtlCol="0" anchor="ctr"/>
+          <a:lstStyle/>
+          <a:p>
+            <a:pPr indent="0" marL="0">
+              <a:buNone/>
+            </a:pPr>
+            <a:r>
+              <a:rPr lang="en-US" sz="950" b="1" dirty="0">
+                <a:solidFill>
+                  <a:srgbClr val="0068B7"/>
+                </a:solidFill>
+                <a:latin typeface="Aptos" pitchFamily="34" charset="0"/>
+                <a:ea typeface="Aptos" pitchFamily="34" charset="-122"/>
+                <a:cs typeface="Aptos" pitchFamily="34" charset="-120"/>
+              </a:rPr>
+              <a:t>Use this for</a:t>
+            </a:r>
+            <a:endParaRPr lang="en-US" sz="950" dirty="0"/>
+          </a:p>
+        </p:txBody>
+      </p:sp>
+      <p:sp>
+        <p:nvSpPr>
+          <p:cNvPr id="16" name="Text 14"/>
+          <p:cNvSpPr/>
+          <p:nvPr/>
+        </p:nvSpPr>
+        <p:spPr>
+          <a:xfrm>
+            <a:off x="8074152" y="3959352"/>
+            <a:ext cx="2825496" cy="1170432"/>
+          </a:xfrm>
+          <a:prstGeom prst="rect">
+            <a:avLst/>
+          </a:prstGeom>
+          <a:noFill/>
+          <a:ln/>
+        </p:spPr>
+        <p:txBody>
+          <a:bodyPr wrap="square" lIns="0" tIns="0" rIns="0" bIns="0" rtlCol="0" anchor="t">
+            <a:normAutofit/>
+          </a:bodyPr>
+          <a:lstStyle/>
+          <a:p>
+            <a:pPr indent="0" marL="0">
+              <a:buNone/>
+            </a:pPr>
+            <a:r>
+              <a:rPr lang="en-US" sz="1250" dirty="0">
+                <a:solidFill>
+                  <a:srgbClr val="17364A"/>
+                </a:solidFill>
+                <a:latin typeface="Aptos" pitchFamily="34" charset="0"/>
+                <a:ea typeface="Aptos" pitchFamily="34" charset="-122"/>
+                <a:cs typeface="Aptos" pitchFamily="34" charset="-120"/>
+              </a:rPr>
+              <a:t>Connect the concept to public health decisions, safeguards, documentation, or implementation work.</a:t>
+            </a:r>
+            <a:endParaRPr lang="en-US" sz="1250" dirty="0"/>
           </a:p>
         </p:txBody>
       </p:sp>
@@ -6844,7 +12643,32 @@
       </p:sp>
       <p:sp>
         <p:nvSpPr>
-          <p:cNvPr id="3" name="Text 1"/>
+          <p:cNvPr id="3" name="Shape 1"/>
+          <p:cNvSpPr/>
+          <p:nvPr/>
+        </p:nvSpPr>
+        <p:spPr>
+          <a:xfrm>
+            <a:off x="0" y="164592"/>
+            <a:ext cx="146304" cy="6693408"/>
+          </a:xfrm>
+          <a:prstGeom prst="rect">
+            <a:avLst/>
+          </a:prstGeom>
+          <a:solidFill>
+            <a:srgbClr val="2F8A28"/>
+          </a:solidFill>
+          <a:ln w="12700">
+            <a:solidFill>
+              <a:srgbClr val="2F8A28"/>
+            </a:solidFill>
+            <a:prstDash val="solid"/>
+          </a:ln>
+        </p:spPr>
+      </p:sp>
+      <p:sp>
+        <p:nvSpPr>
+          <p:cNvPr id="4" name="Text 2"/>
           <p:cNvSpPr/>
           <p:nvPr/>
         </p:nvSpPr>
@@ -6883,7 +12707,7 @@
       </p:sp>
       <p:sp>
         <p:nvSpPr>
-          <p:cNvPr id="4" name="Text 2"/>
+          <p:cNvPr id="5" name="Text 3"/>
           <p:cNvSpPr/>
           <p:nvPr/>
         </p:nvSpPr>
@@ -6922,7 +12746,7 @@
       </p:sp>
       <p:sp>
         <p:nvSpPr>
-          <p:cNvPr id="5" name="Text 3"/>
+          <p:cNvPr id="6" name="Text 4"/>
           <p:cNvSpPr/>
           <p:nvPr/>
         </p:nvSpPr>
@@ -6961,13 +12785,77 @@
       </p:sp>
       <p:sp>
         <p:nvSpPr>
-          <p:cNvPr id="6" name="Text 4"/>
+          <p:cNvPr id="7" name="Shape 5"/>
           <p:cNvSpPr/>
           <p:nvPr/>
         </p:nvSpPr>
         <p:spPr>
           <a:xfrm>
             <a:off x="640080" y="658368"/>
+            <a:ext cx="420624" cy="420624"/>
+          </a:xfrm>
+          <a:prstGeom prst="ellipse">
+            <a:avLst/>
+          </a:prstGeom>
+          <a:solidFill>
+            <a:srgbClr val="0068B7"/>
+          </a:solidFill>
+          <a:ln w="12700">
+            <a:solidFill>
+              <a:srgbClr val="0068B7"/>
+            </a:solidFill>
+            <a:prstDash val="solid"/>
+          </a:ln>
+        </p:spPr>
+      </p:sp>
+      <p:sp>
+        <p:nvSpPr>
+          <p:cNvPr id="8" name="Text 6"/>
+          <p:cNvSpPr/>
+          <p:nvPr/>
+        </p:nvSpPr>
+        <p:spPr>
+          <a:xfrm>
+            <a:off x="640080" y="731520"/>
+            <a:ext cx="420624" cy="164592"/>
+          </a:xfrm>
+          <a:prstGeom prst="rect">
+            <a:avLst/>
+          </a:prstGeom>
+          <a:noFill/>
+          <a:ln/>
+        </p:spPr>
+        <p:txBody>
+          <a:bodyPr wrap="square" lIns="0" tIns="0" rIns="0" bIns="0" rtlCol="0" anchor="ctr"/>
+          <a:lstStyle/>
+          <a:p>
+            <a:pPr algn="ctr" indent="0" marL="0">
+              <a:buNone/>
+            </a:pPr>
+            <a:r>
+              <a:rPr lang="en-US" sz="1100" b="1" dirty="0">
+                <a:solidFill>
+                  <a:srgbClr val="FFFFFF"/>
+                </a:solidFill>
+                <a:latin typeface="Aptos" pitchFamily="34" charset="0"/>
+                <a:ea typeface="Aptos" pitchFamily="34" charset="-122"/>
+                <a:cs typeface="Aptos" pitchFamily="34" charset="-120"/>
+              </a:rPr>
+              <a:t>3</a:t>
+            </a:r>
+            <a:endParaRPr lang="en-US" sz="1100" dirty="0"/>
+          </a:p>
+        </p:txBody>
+      </p:sp>
+      <p:sp>
+        <p:nvSpPr>
+          <p:cNvPr id="9" name="Text 7"/>
+          <p:cNvSpPr/>
+          <p:nvPr/>
+        </p:nvSpPr>
+        <p:spPr>
+          <a:xfrm>
+            <a:off x="640080" y="621792"/>
             <a:ext cx="10881360" cy="566928"/>
           </a:xfrm>
           <a:prstGeom prst="rect">
@@ -6994,7 +12882,7 @@
                 <a:ea typeface="Aptos Display" pitchFamily="34" charset="-122"/>
                 <a:cs typeface="Aptos Display" pitchFamily="34" charset="-120"/>
               </a:rPr>
-              <a:t>Public Health Example</a:t>
+              <a:t>Jurisdiction and Agency Policy Note</a:t>
             </a:r>
             <a:endParaRPr lang="en-US" sz="2700" dirty="0"/>
           </a:p>
@@ -7002,32 +12890,178 @@
       </p:sp>
       <p:sp>
         <p:nvSpPr>
-          <p:cNvPr id="7" name="Text 5"/>
-          <p:cNvSpPr/>
-          <p:nvPr/>
-        </p:nvSpPr>
-        <p:spPr>
-          <a:xfrm>
-            <a:off x="822960" y="1325880"/>
-            <a:ext cx="10378440" cy="4800600"/>
-          </a:xfrm>
-          <a:prstGeom prst="rect">
-            <a:avLst/>
-          </a:prstGeom>
-          <a:noFill/>
-          <a:ln/>
-        </p:spPr>
-        <p:txBody>
-          <a:bodyPr wrap="square" lIns="1016" tIns="1016" rIns="1016" bIns="1016" rtlCol="0" anchor="t">
+          <p:cNvPr id="10" name="Text 8"/>
+          <p:cNvSpPr/>
+          <p:nvPr/>
+        </p:nvSpPr>
+        <p:spPr>
+          <a:xfrm>
+            <a:off x="868680" y="1417320"/>
+            <a:ext cx="6675120" cy="4434840"/>
+          </a:xfrm>
+          <a:prstGeom prst="rect">
+            <a:avLst/>
+          </a:prstGeom>
+          <a:noFill/>
+          <a:ln/>
+        </p:spPr>
+        <p:txBody>
+          <a:bodyPr wrap="square" lIns="635" tIns="635" rIns="635" bIns="635" rtlCol="0" anchor="t">
             <a:normAutofit/>
           </a:bodyPr>
           <a:lstStyle/>
           <a:p>
+            <a:r>
+              <a:rPr lang="en-US" sz="1700" dirty="0">
+                <a:solidFill>
+                  <a:srgbClr val="17364A"/>
+                </a:solidFill>
+                <a:latin typeface="Aptos" pitchFamily="34" charset="0"/>
+                <a:ea typeface="Aptos" pitchFamily="34" charset="-122"/>
+                <a:cs typeface="Aptos" pitchFamily="34" charset="-120"/>
+              </a:rPr>
+              <a:t>This module provides national-level training guidance for public health agencies and partners.</a:t>
+            </a:r>
+            <a:endParaRPr lang="en-US" sz="1700" dirty="0"/>
+          </a:p>
+          <a:p>
+            <a:r>
+              <a:rPr lang="en-US" sz="1700" dirty="0">
+                <a:solidFill>
+                  <a:srgbClr val="17364A"/>
+                </a:solidFill>
+                <a:latin typeface="Aptos" pitchFamily="34" charset="0"/>
+                <a:ea typeface="Aptos" pitchFamily="34" charset="-122"/>
+                <a:cs typeface="Aptos" pitchFamily="34" charset="-120"/>
+              </a:rPr>
+              <a:t>It is not legal advice and does not replace review by agency legal counsel, privacy officers, procurement officials, civil.</a:t>
+            </a:r>
+            <a:endParaRPr lang="en-US" sz="1700" dirty="0"/>
+          </a:p>
+          <a:p>
+            <a:r>
+              <a:rPr lang="en-US" sz="1700" dirty="0">
+                <a:solidFill>
+                  <a:srgbClr val="17364A"/>
+                </a:solidFill>
+                <a:latin typeface="Aptos" pitchFamily="34" charset="0"/>
+                <a:ea typeface="Aptos" pitchFamily="34" charset="-122"/>
+                <a:cs typeface="Aptos" pitchFamily="34" charset="-120"/>
+              </a:rPr>
+              <a:t>Requirements may vary by state, locality, territory, Tribe, agency, funding source, data-sharing agreement, emergency.</a:t>
+            </a:r>
+            <a:endParaRPr lang="en-US" sz="1700" dirty="0"/>
+          </a:p>
+          <a:p>
+            <a:r>
+              <a:rPr lang="en-US" sz="1700" dirty="0">
+                <a:solidFill>
+                  <a:srgbClr val="17364A"/>
+                </a:solidFill>
+                <a:latin typeface="Aptos" pitchFamily="34" charset="0"/>
+                <a:ea typeface="Aptos" pitchFamily="34" charset="-122"/>
+                <a:cs typeface="Aptos" pitchFamily="34" charset="-120"/>
+              </a:rPr>
+              <a:t>Learners should use this module to identify the issues that require review and should confirm applicable requirements.</a:t>
+            </a:r>
+            <a:endParaRPr lang="en-US" sz="1700" dirty="0"/>
+          </a:p>
+        </p:txBody>
+      </p:sp>
+      <p:sp>
+        <p:nvSpPr>
+          <p:cNvPr id="11" name="Shape 9"/>
+          <p:cNvSpPr/>
+          <p:nvPr/>
+        </p:nvSpPr>
+        <p:spPr>
+          <a:xfrm>
+            <a:off x="7909560" y="1417320"/>
+            <a:ext cx="3154680" cy="1828800"/>
+          </a:xfrm>
+          <a:prstGeom prst="roundRect">
+            <a:avLst>
+              <a:gd name="adj" fmla="val 6000"/>
+            </a:avLst>
+          </a:prstGeom>
+          <a:solidFill>
+            <a:srgbClr val="EEF8ED"/>
+          </a:solidFill>
+          <a:ln w="12700">
+            <a:solidFill>
+              <a:srgbClr val="B9D7E6"/>
+            </a:solidFill>
+            <a:prstDash val="solid"/>
+          </a:ln>
+        </p:spPr>
+      </p:sp>
+      <p:sp>
+        <p:nvSpPr>
+          <p:cNvPr id="12" name="Text 10"/>
+          <p:cNvSpPr/>
+          <p:nvPr/>
+        </p:nvSpPr>
+        <p:spPr>
+          <a:xfrm>
+            <a:off x="8074152" y="1563624"/>
+            <a:ext cx="2825496" cy="201168"/>
+          </a:xfrm>
+          <a:prstGeom prst="rect">
+            <a:avLst/>
+          </a:prstGeom>
+          <a:noFill/>
+          <a:ln/>
+        </p:spPr>
+        <p:txBody>
+          <a:bodyPr wrap="square" lIns="0" tIns="0" rIns="0" bIns="0" rtlCol="0" anchor="ctr"/>
+          <a:lstStyle/>
+          <a:p>
             <a:pPr indent="0" marL="0">
               <a:buNone/>
             </a:pPr>
             <a:r>
-              <a:rPr lang="en-US" sz="1420" dirty="0">
+              <a:rPr lang="en-US" sz="950" b="1" dirty="0">
+                <a:solidFill>
+                  <a:srgbClr val="0068B7"/>
+                </a:solidFill>
+                <a:latin typeface="Aptos" pitchFamily="34" charset="0"/>
+                <a:ea typeface="Aptos" pitchFamily="34" charset="-122"/>
+                <a:cs typeface="Aptos" pitchFamily="34" charset="-120"/>
+              </a:rPr>
+              <a:t>Key idea</a:t>
+            </a:r>
+            <a:endParaRPr lang="en-US" sz="950" dirty="0"/>
+          </a:p>
+        </p:txBody>
+      </p:sp>
+      <p:sp>
+        <p:nvSpPr>
+          <p:cNvPr id="13" name="Text 11"/>
+          <p:cNvSpPr/>
+          <p:nvPr/>
+        </p:nvSpPr>
+        <p:spPr>
+          <a:xfrm>
+            <a:off x="8074152" y="1856232"/>
+            <a:ext cx="2825496" cy="1261872"/>
+          </a:xfrm>
+          <a:prstGeom prst="rect">
+            <a:avLst/>
+          </a:prstGeom>
+          <a:noFill/>
+          <a:ln/>
+        </p:spPr>
+        <p:txBody>
+          <a:bodyPr wrap="square" lIns="0" tIns="0" rIns="0" bIns="0" rtlCol="0" anchor="t">
+            <a:normAutofit/>
+          </a:bodyPr>
+          <a:lstStyle/>
+          <a:p>
+            <a:pPr indent="0" marL="0">
+              <a:buNone/>
+            </a:pPr>
+            <a:r>
+              <a:rPr lang="en-US" sz="1250" dirty="0">
                 <a:solidFill>
                   <a:srgbClr val="17364A"/>
                 </a:solidFill>
@@ -7035,9 +13069,116 @@
                 <a:ea typeface="Aptos" pitchFamily="34" charset="-122"/>
                 <a:cs typeface="Aptos" pitchFamily="34" charset="-120"/>
               </a:rPr>
-              <a:t>An agency may define a higher risk appetite for internal administrative uses that do not involve sensitive data, public communication, or public health action. It may define a moderate appetite for staff-facing decision support when human review, validation, and documentation are required. It may define a very low appetite for unsupervised public-facing advice, automated eligibility decisions, enforcement actions, or tools that process sensitive data without approved safeguards. These statements help governance reviewers make consistent decisions. Instead of debating each proposal from the beginning, reviewers can ask whether the proposed use fits the agency's defined risk category and whether required safeguards are present. The discussion becomes more disciplined and less dependent on individual comfort with AI.</a:t>
-            </a:r>
-            <a:endParaRPr lang="en-US" sz="1420" dirty="0"/>
+              <a:t>This module provides national-level training guidance for public health agencies and partners.</a:t>
+            </a:r>
+            <a:endParaRPr lang="en-US" sz="1250" dirty="0"/>
+          </a:p>
+        </p:txBody>
+      </p:sp>
+      <p:sp>
+        <p:nvSpPr>
+          <p:cNvPr id="14" name="Shape 12"/>
+          <p:cNvSpPr/>
+          <p:nvPr/>
+        </p:nvSpPr>
+        <p:spPr>
+          <a:xfrm>
+            <a:off x="7909560" y="3520440"/>
+            <a:ext cx="3154680" cy="1737360"/>
+          </a:xfrm>
+          <a:prstGeom prst="roundRect">
+            <a:avLst>
+              <a:gd name="adj" fmla="val 6316"/>
+            </a:avLst>
+          </a:prstGeom>
+          <a:solidFill>
+            <a:srgbClr val="EAF6F8"/>
+          </a:solidFill>
+          <a:ln w="12700">
+            <a:solidFill>
+              <a:srgbClr val="B9D7E6"/>
+            </a:solidFill>
+            <a:prstDash val="solid"/>
+          </a:ln>
+        </p:spPr>
+      </p:sp>
+      <p:sp>
+        <p:nvSpPr>
+          <p:cNvPr id="15" name="Text 13"/>
+          <p:cNvSpPr/>
+          <p:nvPr/>
+        </p:nvSpPr>
+        <p:spPr>
+          <a:xfrm>
+            <a:off x="8074152" y="3666744"/>
+            <a:ext cx="2825496" cy="201168"/>
+          </a:xfrm>
+          <a:prstGeom prst="rect">
+            <a:avLst/>
+          </a:prstGeom>
+          <a:noFill/>
+          <a:ln/>
+        </p:spPr>
+        <p:txBody>
+          <a:bodyPr wrap="square" lIns="0" tIns="0" rIns="0" bIns="0" rtlCol="0" anchor="ctr"/>
+          <a:lstStyle/>
+          <a:p>
+            <a:pPr indent="0" marL="0">
+              <a:buNone/>
+            </a:pPr>
+            <a:r>
+              <a:rPr lang="en-US" sz="950" b="1" dirty="0">
+                <a:solidFill>
+                  <a:srgbClr val="0068B7"/>
+                </a:solidFill>
+                <a:latin typeface="Aptos" pitchFamily="34" charset="0"/>
+                <a:ea typeface="Aptos" pitchFamily="34" charset="-122"/>
+                <a:cs typeface="Aptos" pitchFamily="34" charset="-120"/>
+              </a:rPr>
+              <a:t>Use this for</a:t>
+            </a:r>
+            <a:endParaRPr lang="en-US" sz="950" dirty="0"/>
+          </a:p>
+        </p:txBody>
+      </p:sp>
+      <p:sp>
+        <p:nvSpPr>
+          <p:cNvPr id="16" name="Text 14"/>
+          <p:cNvSpPr/>
+          <p:nvPr/>
+        </p:nvSpPr>
+        <p:spPr>
+          <a:xfrm>
+            <a:off x="8074152" y="3959352"/>
+            <a:ext cx="2825496" cy="1170432"/>
+          </a:xfrm>
+          <a:prstGeom prst="rect">
+            <a:avLst/>
+          </a:prstGeom>
+          <a:noFill/>
+          <a:ln/>
+        </p:spPr>
+        <p:txBody>
+          <a:bodyPr wrap="square" lIns="0" tIns="0" rIns="0" bIns="0" rtlCol="0" anchor="t">
+            <a:normAutofit/>
+          </a:bodyPr>
+          <a:lstStyle/>
+          <a:p>
+            <a:pPr indent="0" marL="0">
+              <a:buNone/>
+            </a:pPr>
+            <a:r>
+              <a:rPr lang="en-US" sz="1250" dirty="0">
+                <a:solidFill>
+                  <a:srgbClr val="17364A"/>
+                </a:solidFill>
+                <a:latin typeface="Aptos" pitchFamily="34" charset="0"/>
+                <a:ea typeface="Aptos" pitchFamily="34" charset="-122"/>
+                <a:cs typeface="Aptos" pitchFamily="34" charset="-120"/>
+              </a:rPr>
+              <a:t>Connect the concept to public health decisions, safeguards, documentation, or implementation work.</a:t>
+            </a:r>
+            <a:endParaRPr lang="en-US" sz="1250" dirty="0"/>
           </a:p>
         </p:txBody>
       </p:sp>
@@ -7100,7 +13241,32 @@
       </p:sp>
       <p:sp>
         <p:nvSpPr>
-          <p:cNvPr id="3" name="Text 1"/>
+          <p:cNvPr id="3" name="Shape 1"/>
+          <p:cNvSpPr/>
+          <p:nvPr/>
+        </p:nvSpPr>
+        <p:spPr>
+          <a:xfrm>
+            <a:off x="0" y="164592"/>
+            <a:ext cx="146304" cy="6693408"/>
+          </a:xfrm>
+          <a:prstGeom prst="rect">
+            <a:avLst/>
+          </a:prstGeom>
+          <a:solidFill>
+            <a:srgbClr val="2F8A28"/>
+          </a:solidFill>
+          <a:ln w="12700">
+            <a:solidFill>
+              <a:srgbClr val="2F8A28"/>
+            </a:solidFill>
+            <a:prstDash val="solid"/>
+          </a:ln>
+        </p:spPr>
+      </p:sp>
+      <p:sp>
+        <p:nvSpPr>
+          <p:cNvPr id="4" name="Text 2"/>
           <p:cNvSpPr/>
           <p:nvPr/>
         </p:nvSpPr>
@@ -7139,7 +13305,7 @@
       </p:sp>
       <p:sp>
         <p:nvSpPr>
-          <p:cNvPr id="4" name="Text 2"/>
+          <p:cNvPr id="5" name="Text 3"/>
           <p:cNvSpPr/>
           <p:nvPr/>
         </p:nvSpPr>
@@ -7178,7 +13344,7 @@
       </p:sp>
       <p:sp>
         <p:nvSpPr>
-          <p:cNvPr id="5" name="Text 3"/>
+          <p:cNvPr id="6" name="Text 4"/>
           <p:cNvSpPr/>
           <p:nvPr/>
         </p:nvSpPr>
@@ -7217,13 +13383,77 @@
       </p:sp>
       <p:sp>
         <p:nvSpPr>
-          <p:cNvPr id="6" name="Text 4"/>
+          <p:cNvPr id="7" name="Shape 5"/>
           <p:cNvSpPr/>
           <p:nvPr/>
         </p:nvSpPr>
         <p:spPr>
           <a:xfrm>
             <a:off x="640080" y="658368"/>
+            <a:ext cx="420624" cy="420624"/>
+          </a:xfrm>
+          <a:prstGeom prst="ellipse">
+            <a:avLst/>
+          </a:prstGeom>
+          <a:solidFill>
+            <a:srgbClr val="0068B7"/>
+          </a:solidFill>
+          <a:ln w="12700">
+            <a:solidFill>
+              <a:srgbClr val="0068B7"/>
+            </a:solidFill>
+            <a:prstDash val="solid"/>
+          </a:ln>
+        </p:spPr>
+      </p:sp>
+      <p:sp>
+        <p:nvSpPr>
+          <p:cNvPr id="8" name="Text 6"/>
+          <p:cNvSpPr/>
+          <p:nvPr/>
+        </p:nvSpPr>
+        <p:spPr>
+          <a:xfrm>
+            <a:off x="640080" y="731520"/>
+            <a:ext cx="420624" cy="164592"/>
+          </a:xfrm>
+          <a:prstGeom prst="rect">
+            <a:avLst/>
+          </a:prstGeom>
+          <a:noFill/>
+          <a:ln/>
+        </p:spPr>
+        <p:txBody>
+          <a:bodyPr wrap="square" lIns="0" tIns="0" rIns="0" bIns="0" rtlCol="0" anchor="ctr"/>
+          <a:lstStyle/>
+          <a:p>
+            <a:pPr algn="ctr" indent="0" marL="0">
+              <a:buNone/>
+            </a:pPr>
+            <a:r>
+              <a:rPr lang="en-US" sz="1100" b="1" dirty="0">
+                <a:solidFill>
+                  <a:srgbClr val="FFFFFF"/>
+                </a:solidFill>
+                <a:latin typeface="Aptos" pitchFamily="34" charset="0"/>
+                <a:ea typeface="Aptos" pitchFamily="34" charset="-122"/>
+                <a:cs typeface="Aptos" pitchFamily="34" charset="-120"/>
+              </a:rPr>
+              <a:t>4</a:t>
+            </a:r>
+            <a:endParaRPr lang="en-US" sz="1100" dirty="0"/>
+          </a:p>
+        </p:txBody>
+      </p:sp>
+      <p:sp>
+        <p:nvSpPr>
+          <p:cNvPr id="9" name="Text 7"/>
+          <p:cNvSpPr/>
+          <p:nvPr/>
+        </p:nvSpPr>
+        <p:spPr>
+          <a:xfrm>
+            <a:off x="640080" y="621792"/>
             <a:ext cx="10881360" cy="566928"/>
           </a:xfrm>
           <a:prstGeom prst="rect">
@@ -7250,7 +13480,7 @@
                 <a:ea typeface="Aptos Display" pitchFamily="34" charset="-122"/>
                 <a:cs typeface="Aptos Display" pitchFamily="34" charset="-120"/>
               </a:rPr>
-              <a:t>Technical and Governance Deep Dive</a:t>
+              <a:t>Why This Topic Matters for Public Health AI</a:t>
             </a:r>
             <a:endParaRPr lang="en-US" sz="2700" dirty="0"/>
           </a:p>
@@ -7258,32 +13488,178 @@
       </p:sp>
       <p:sp>
         <p:nvSpPr>
-          <p:cNvPr id="7" name="Text 5"/>
-          <p:cNvSpPr/>
-          <p:nvPr/>
-        </p:nvSpPr>
-        <p:spPr>
-          <a:xfrm>
-            <a:off x="822960" y="1325880"/>
-            <a:ext cx="10378440" cy="4800600"/>
-          </a:xfrm>
-          <a:prstGeom prst="rect">
-            <a:avLst/>
-          </a:prstGeom>
-          <a:noFill/>
-          <a:ln/>
-        </p:spPr>
-        <p:txBody>
-          <a:bodyPr wrap="square" lIns="1016" tIns="1016" rIns="1016" bIns="1016" rtlCol="0" anchor="t">
+          <p:cNvPr id="10" name="Text 8"/>
+          <p:cNvSpPr/>
+          <p:nvPr/>
+        </p:nvSpPr>
+        <p:spPr>
+          <a:xfrm>
+            <a:off x="868680" y="1417320"/>
+            <a:ext cx="6675120" cy="4434840"/>
+          </a:xfrm>
+          <a:prstGeom prst="rect">
+            <a:avLst/>
+          </a:prstGeom>
+          <a:noFill/>
+          <a:ln/>
+        </p:spPr>
+        <p:txBody>
+          <a:bodyPr wrap="square" lIns="635" tIns="635" rIns="635" bIns="635" rtlCol="0" anchor="t">
             <a:normAutofit/>
           </a:bodyPr>
           <a:lstStyle/>
           <a:p>
+            <a:r>
+              <a:rPr lang="en-US" sz="1700" dirty="0">
+                <a:solidFill>
+                  <a:srgbClr val="17364A"/>
+                </a:solidFill>
+                <a:latin typeface="Aptos" pitchFamily="34" charset="0"/>
+                <a:ea typeface="Aptos" pitchFamily="34" charset="-122"/>
+                <a:cs typeface="Aptos" pitchFamily="34" charset="-120"/>
+              </a:rPr>
+              <a:t>Public health agencies make risk decisions every day, but AI can make those decisions less visible.</a:t>
+            </a:r>
+            <a:endParaRPr lang="en-US" sz="1700" dirty="0"/>
+          </a:p>
+          <a:p>
+            <a:r>
+              <a:rPr lang="en-US" sz="1700" dirty="0">
+                <a:solidFill>
+                  <a:srgbClr val="17364A"/>
+                </a:solidFill>
+                <a:latin typeface="Aptos" pitchFamily="34" charset="0"/>
+                <a:ea typeface="Aptos" pitchFamily="34" charset="-122"/>
+                <a:cs typeface="Aptos" pitchFamily="34" charset="-120"/>
+              </a:rPr>
+              <a:t>A generative AI tool might be acceptable for drafting internal meeting notes but not for producing unsupervised public.</a:t>
+            </a:r>
+            <a:endParaRPr lang="en-US" sz="1700" dirty="0"/>
+          </a:p>
+          <a:p>
+            <a:r>
+              <a:rPr lang="en-US" sz="1700" dirty="0">
+                <a:solidFill>
+                  <a:srgbClr val="17364A"/>
+                </a:solidFill>
+                <a:latin typeface="Aptos" pitchFamily="34" charset="0"/>
+                <a:ea typeface="Aptos" pitchFamily="34" charset="-122"/>
+                <a:cs typeface="Aptos" pitchFamily="34" charset="-120"/>
+              </a:rPr>
+              <a:t>A predictive model might be acceptable for planning staffing levels but not for denying services.</a:t>
+            </a:r>
+            <a:endParaRPr lang="en-US" sz="1700" dirty="0"/>
+          </a:p>
+          <a:p>
+            <a:r>
+              <a:rPr lang="en-US" sz="1700" dirty="0">
+                <a:solidFill>
+                  <a:srgbClr val="17364A"/>
+                </a:solidFill>
+                <a:latin typeface="Aptos" pitchFamily="34" charset="0"/>
+                <a:ea typeface="Aptos" pitchFamily="34" charset="-122"/>
+                <a:cs typeface="Aptos" pitchFamily="34" charset="-120"/>
+              </a:rPr>
+              <a:t>An agentic workflow might be acceptable for creating a draft task but not for sending an enforcement notice without human.</a:t>
+            </a:r>
+            <a:endParaRPr lang="en-US" sz="1700" dirty="0"/>
+          </a:p>
+        </p:txBody>
+      </p:sp>
+      <p:sp>
+        <p:nvSpPr>
+          <p:cNvPr id="11" name="Shape 9"/>
+          <p:cNvSpPr/>
+          <p:nvPr/>
+        </p:nvSpPr>
+        <p:spPr>
+          <a:xfrm>
+            <a:off x="7909560" y="1417320"/>
+            <a:ext cx="3154680" cy="1828800"/>
+          </a:xfrm>
+          <a:prstGeom prst="roundRect">
+            <a:avLst>
+              <a:gd name="adj" fmla="val 6000"/>
+            </a:avLst>
+          </a:prstGeom>
+          <a:solidFill>
+            <a:srgbClr val="EEF8ED"/>
+          </a:solidFill>
+          <a:ln w="12700">
+            <a:solidFill>
+              <a:srgbClr val="B9D7E6"/>
+            </a:solidFill>
+            <a:prstDash val="solid"/>
+          </a:ln>
+        </p:spPr>
+      </p:sp>
+      <p:sp>
+        <p:nvSpPr>
+          <p:cNvPr id="12" name="Text 10"/>
+          <p:cNvSpPr/>
+          <p:nvPr/>
+        </p:nvSpPr>
+        <p:spPr>
+          <a:xfrm>
+            <a:off x="8074152" y="1563624"/>
+            <a:ext cx="2825496" cy="201168"/>
+          </a:xfrm>
+          <a:prstGeom prst="rect">
+            <a:avLst/>
+          </a:prstGeom>
+          <a:noFill/>
+          <a:ln/>
+        </p:spPr>
+        <p:txBody>
+          <a:bodyPr wrap="square" lIns="0" tIns="0" rIns="0" bIns="0" rtlCol="0" anchor="ctr"/>
+          <a:lstStyle/>
+          <a:p>
             <a:pPr indent="0" marL="0">
               <a:buNone/>
             </a:pPr>
             <a:r>
-              <a:rPr lang="en-US" sz="1420" dirty="0">
+              <a:rPr lang="en-US" sz="950" b="1" dirty="0">
+                <a:solidFill>
+                  <a:srgbClr val="0068B7"/>
+                </a:solidFill>
+                <a:latin typeface="Aptos" pitchFamily="34" charset="0"/>
+                <a:ea typeface="Aptos" pitchFamily="34" charset="-122"/>
+                <a:cs typeface="Aptos" pitchFamily="34" charset="-120"/>
+              </a:rPr>
+              <a:t>Key idea</a:t>
+            </a:r>
+            <a:endParaRPr lang="en-US" sz="950" dirty="0"/>
+          </a:p>
+        </p:txBody>
+      </p:sp>
+      <p:sp>
+        <p:nvSpPr>
+          <p:cNvPr id="13" name="Text 11"/>
+          <p:cNvSpPr/>
+          <p:nvPr/>
+        </p:nvSpPr>
+        <p:spPr>
+          <a:xfrm>
+            <a:off x="8074152" y="1856232"/>
+            <a:ext cx="2825496" cy="1261872"/>
+          </a:xfrm>
+          <a:prstGeom prst="rect">
+            <a:avLst/>
+          </a:prstGeom>
+          <a:noFill/>
+          <a:ln/>
+        </p:spPr>
+        <p:txBody>
+          <a:bodyPr wrap="square" lIns="0" tIns="0" rIns="0" bIns="0" rtlCol="0" anchor="t">
+            <a:normAutofit/>
+          </a:bodyPr>
+          <a:lstStyle/>
+          <a:p>
+            <a:pPr indent="0" marL="0">
+              <a:buNone/>
+            </a:pPr>
+            <a:r>
+              <a:rPr lang="en-US" sz="1250" dirty="0">
                 <a:solidFill>
                   <a:srgbClr val="17364A"/>
                 </a:solidFill>
@@ -7291,9 +13667,116 @@
                 <a:ea typeface="Aptos" pitchFamily="34" charset="-122"/>
                 <a:cs typeface="Aptos" pitchFamily="34" charset="-120"/>
               </a:rPr>
-              <a:t>Risk appetite should be expressed in plain language and translated into operating rules. For example, an agency might state that it encourages low-risk AI uses that reduce internal administrative burden when no sensitive data are used and outputs are reviewed by staff. It might state that it will consider moderate-risk uses involving operational data only with documented validation, access controls, human review, and monitoring. It might state that it does not permit AI to make final public health enforcement, eligibility, or legal decisions without authorized human review. Risk tolerance turns these statements into thresholds. A tolerance may specify that a tool cannot be launched if source traceability is absent, if subgroup performance cannot be assessed for a prioritization model, if the false negative rate exceeds a defined threshold, or if the vendor cannot provide adequate documentation. Tolerances should be appropriate to the use case. A lower threshold may be acceptable for internal drafting than for case triage. Risk appetite should be reviewed regularly. Public expectations, laws, model capabilities, agency experience, and technical safeguards change over time. A use that was too risky during the first year of AI adoption may become acceptable after better infrastructure, policies, and monitoring are in place. Conversely, a use may become unacceptable if incidents, evidence, or community concerns reveal new harms.</a:t>
-            </a:r>
-            <a:endParaRPr lang="en-US" sz="1420" dirty="0"/>
+              <a:t>Public health agencies make risk decisions every day, but AI can make those decisions less visible.</a:t>
+            </a:r>
+            <a:endParaRPr lang="en-US" sz="1250" dirty="0"/>
+          </a:p>
+        </p:txBody>
+      </p:sp>
+      <p:sp>
+        <p:nvSpPr>
+          <p:cNvPr id="14" name="Shape 12"/>
+          <p:cNvSpPr/>
+          <p:nvPr/>
+        </p:nvSpPr>
+        <p:spPr>
+          <a:xfrm>
+            <a:off x="7909560" y="3520440"/>
+            <a:ext cx="3154680" cy="1737360"/>
+          </a:xfrm>
+          <a:prstGeom prst="roundRect">
+            <a:avLst>
+              <a:gd name="adj" fmla="val 6316"/>
+            </a:avLst>
+          </a:prstGeom>
+          <a:solidFill>
+            <a:srgbClr val="EAF6F8"/>
+          </a:solidFill>
+          <a:ln w="12700">
+            <a:solidFill>
+              <a:srgbClr val="B9D7E6"/>
+            </a:solidFill>
+            <a:prstDash val="solid"/>
+          </a:ln>
+        </p:spPr>
+      </p:sp>
+      <p:sp>
+        <p:nvSpPr>
+          <p:cNvPr id="15" name="Text 13"/>
+          <p:cNvSpPr/>
+          <p:nvPr/>
+        </p:nvSpPr>
+        <p:spPr>
+          <a:xfrm>
+            <a:off x="8074152" y="3666744"/>
+            <a:ext cx="2825496" cy="201168"/>
+          </a:xfrm>
+          <a:prstGeom prst="rect">
+            <a:avLst/>
+          </a:prstGeom>
+          <a:noFill/>
+          <a:ln/>
+        </p:spPr>
+        <p:txBody>
+          <a:bodyPr wrap="square" lIns="0" tIns="0" rIns="0" bIns="0" rtlCol="0" anchor="ctr"/>
+          <a:lstStyle/>
+          <a:p>
+            <a:pPr indent="0" marL="0">
+              <a:buNone/>
+            </a:pPr>
+            <a:r>
+              <a:rPr lang="en-US" sz="950" b="1" dirty="0">
+                <a:solidFill>
+                  <a:srgbClr val="0068B7"/>
+                </a:solidFill>
+                <a:latin typeface="Aptos" pitchFamily="34" charset="0"/>
+                <a:ea typeface="Aptos" pitchFamily="34" charset="-122"/>
+                <a:cs typeface="Aptos" pitchFamily="34" charset="-120"/>
+              </a:rPr>
+              <a:t>Use this for</a:t>
+            </a:r>
+            <a:endParaRPr lang="en-US" sz="950" dirty="0"/>
+          </a:p>
+        </p:txBody>
+      </p:sp>
+      <p:sp>
+        <p:nvSpPr>
+          <p:cNvPr id="16" name="Text 14"/>
+          <p:cNvSpPr/>
+          <p:nvPr/>
+        </p:nvSpPr>
+        <p:spPr>
+          <a:xfrm>
+            <a:off x="8074152" y="3959352"/>
+            <a:ext cx="2825496" cy="1170432"/>
+          </a:xfrm>
+          <a:prstGeom prst="rect">
+            <a:avLst/>
+          </a:prstGeom>
+          <a:noFill/>
+          <a:ln/>
+        </p:spPr>
+        <p:txBody>
+          <a:bodyPr wrap="square" lIns="0" tIns="0" rIns="0" bIns="0" rtlCol="0" anchor="t">
+            <a:normAutofit/>
+          </a:bodyPr>
+          <a:lstStyle/>
+          <a:p>
+            <a:pPr indent="0" marL="0">
+              <a:buNone/>
+            </a:pPr>
+            <a:r>
+              <a:rPr lang="en-US" sz="1250" dirty="0">
+                <a:solidFill>
+                  <a:srgbClr val="17364A"/>
+                </a:solidFill>
+                <a:latin typeface="Aptos" pitchFamily="34" charset="0"/>
+                <a:ea typeface="Aptos" pitchFamily="34" charset="-122"/>
+                <a:cs typeface="Aptos" pitchFamily="34" charset="-120"/>
+              </a:rPr>
+              <a:t>Connect the concept to public health decisions, safeguards, documentation, or implementation work.</a:t>
+            </a:r>
+            <a:endParaRPr lang="en-US" sz="1250" dirty="0"/>
           </a:p>
         </p:txBody>
       </p:sp>
@@ -7356,7 +13839,32 @@
       </p:sp>
       <p:sp>
         <p:nvSpPr>
-          <p:cNvPr id="3" name="Text 1"/>
+          <p:cNvPr id="3" name="Shape 1"/>
+          <p:cNvSpPr/>
+          <p:nvPr/>
+        </p:nvSpPr>
+        <p:spPr>
+          <a:xfrm>
+            <a:off x="0" y="164592"/>
+            <a:ext cx="146304" cy="6693408"/>
+          </a:xfrm>
+          <a:prstGeom prst="rect">
+            <a:avLst/>
+          </a:prstGeom>
+          <a:solidFill>
+            <a:srgbClr val="2F8A28"/>
+          </a:solidFill>
+          <a:ln w="12700">
+            <a:solidFill>
+              <a:srgbClr val="2F8A28"/>
+            </a:solidFill>
+            <a:prstDash val="solid"/>
+          </a:ln>
+        </p:spPr>
+      </p:sp>
+      <p:sp>
+        <p:nvSpPr>
+          <p:cNvPr id="4" name="Text 2"/>
           <p:cNvSpPr/>
           <p:nvPr/>
         </p:nvSpPr>
@@ -7395,7 +13903,7 @@
       </p:sp>
       <p:sp>
         <p:nvSpPr>
-          <p:cNvPr id="4" name="Text 2"/>
+          <p:cNvPr id="5" name="Text 3"/>
           <p:cNvSpPr/>
           <p:nvPr/>
         </p:nvSpPr>
@@ -7434,7 +13942,7 @@
       </p:sp>
       <p:sp>
         <p:nvSpPr>
-          <p:cNvPr id="5" name="Text 3"/>
+          <p:cNvPr id="6" name="Text 4"/>
           <p:cNvSpPr/>
           <p:nvPr/>
         </p:nvSpPr>
@@ -7473,13 +13981,77 @@
       </p:sp>
       <p:sp>
         <p:nvSpPr>
-          <p:cNvPr id="6" name="Text 4"/>
+          <p:cNvPr id="7" name="Shape 5"/>
           <p:cNvSpPr/>
           <p:nvPr/>
         </p:nvSpPr>
         <p:spPr>
           <a:xfrm>
             <a:off x="640080" y="658368"/>
+            <a:ext cx="420624" cy="420624"/>
+          </a:xfrm>
+          <a:prstGeom prst="ellipse">
+            <a:avLst/>
+          </a:prstGeom>
+          <a:solidFill>
+            <a:srgbClr val="0068B7"/>
+          </a:solidFill>
+          <a:ln w="12700">
+            <a:solidFill>
+              <a:srgbClr val="0068B7"/>
+            </a:solidFill>
+            <a:prstDash val="solid"/>
+          </a:ln>
+        </p:spPr>
+      </p:sp>
+      <p:sp>
+        <p:nvSpPr>
+          <p:cNvPr id="8" name="Text 6"/>
+          <p:cNvSpPr/>
+          <p:nvPr/>
+        </p:nvSpPr>
+        <p:spPr>
+          <a:xfrm>
+            <a:off x="640080" y="731520"/>
+            <a:ext cx="420624" cy="164592"/>
+          </a:xfrm>
+          <a:prstGeom prst="rect">
+            <a:avLst/>
+          </a:prstGeom>
+          <a:noFill/>
+          <a:ln/>
+        </p:spPr>
+        <p:txBody>
+          <a:bodyPr wrap="square" lIns="0" tIns="0" rIns="0" bIns="0" rtlCol="0" anchor="ctr"/>
+          <a:lstStyle/>
+          <a:p>
+            <a:pPr algn="ctr" indent="0" marL="0">
+              <a:buNone/>
+            </a:pPr>
+            <a:r>
+              <a:rPr lang="en-US" sz="1100" b="1" dirty="0">
+                <a:solidFill>
+                  <a:srgbClr val="FFFFFF"/>
+                </a:solidFill>
+                <a:latin typeface="Aptos" pitchFamily="34" charset="0"/>
+                <a:ea typeface="Aptos" pitchFamily="34" charset="-122"/>
+                <a:cs typeface="Aptos" pitchFamily="34" charset="-120"/>
+              </a:rPr>
+              <a:t>5</a:t>
+            </a:r>
+            <a:endParaRPr lang="en-US" sz="1100" dirty="0"/>
+          </a:p>
+        </p:txBody>
+      </p:sp>
+      <p:sp>
+        <p:nvSpPr>
+          <p:cNvPr id="9" name="Text 7"/>
+          <p:cNvSpPr/>
+          <p:nvPr/>
+        </p:nvSpPr>
+        <p:spPr>
+          <a:xfrm>
+            <a:off x="640080" y="621792"/>
             <a:ext cx="10881360" cy="566928"/>
           </a:xfrm>
           <a:prstGeom prst="rect">
@@ -7506,7 +14078,7 @@
                 <a:ea typeface="Aptos Display" pitchFamily="34" charset="-122"/>
                 <a:cs typeface="Aptos Display" pitchFamily="34" charset="-120"/>
               </a:rPr>
-              <a:t>Risks, Failure Modes, and Guardrails</a:t>
+              <a:t>Public Health Example</a:t>
             </a:r>
             <a:endParaRPr lang="en-US" sz="2700" dirty="0"/>
           </a:p>
@@ -7514,32 +14086,178 @@
       </p:sp>
       <p:sp>
         <p:nvSpPr>
-          <p:cNvPr id="7" name="Text 5"/>
-          <p:cNvSpPr/>
-          <p:nvPr/>
-        </p:nvSpPr>
-        <p:spPr>
-          <a:xfrm>
-            <a:off x="822960" y="1325880"/>
-            <a:ext cx="10378440" cy="4800600"/>
-          </a:xfrm>
-          <a:prstGeom prst="rect">
-            <a:avLst/>
-          </a:prstGeom>
-          <a:noFill/>
-          <a:ln/>
-        </p:spPr>
-        <p:txBody>
-          <a:bodyPr wrap="square" lIns="1016" tIns="1016" rIns="1016" bIns="1016" rtlCol="0" anchor="t">
+          <p:cNvPr id="10" name="Text 8"/>
+          <p:cNvSpPr/>
+          <p:nvPr/>
+        </p:nvSpPr>
+        <p:spPr>
+          <a:xfrm>
+            <a:off x="868680" y="1417320"/>
+            <a:ext cx="6675120" cy="4434840"/>
+          </a:xfrm>
+          <a:prstGeom prst="rect">
+            <a:avLst/>
+          </a:prstGeom>
+          <a:noFill/>
+          <a:ln/>
+        </p:spPr>
+        <p:txBody>
+          <a:bodyPr wrap="square" lIns="635" tIns="635" rIns="635" bIns="635" rtlCol="0" anchor="t">
             <a:normAutofit/>
           </a:bodyPr>
           <a:lstStyle/>
           <a:p>
+            <a:r>
+              <a:rPr lang="en-US" sz="1700" dirty="0">
+                <a:solidFill>
+                  <a:srgbClr val="17364A"/>
+                </a:solidFill>
+                <a:latin typeface="Aptos" pitchFamily="34" charset="0"/>
+                <a:ea typeface="Aptos" pitchFamily="34" charset="-122"/>
+                <a:cs typeface="Aptos" pitchFamily="34" charset="-120"/>
+              </a:rPr>
+              <a:t>An agency may define a higher risk appetite for internal administrative uses that do not involve sensitive data, public.</a:t>
+            </a:r>
+            <a:endParaRPr lang="en-US" sz="1700" dirty="0"/>
+          </a:p>
+          <a:p>
+            <a:r>
+              <a:rPr lang="en-US" sz="1700" dirty="0">
+                <a:solidFill>
+                  <a:srgbClr val="17364A"/>
+                </a:solidFill>
+                <a:latin typeface="Aptos" pitchFamily="34" charset="0"/>
+                <a:ea typeface="Aptos" pitchFamily="34" charset="-122"/>
+                <a:cs typeface="Aptos" pitchFamily="34" charset="-120"/>
+              </a:rPr>
+              <a:t>It may define a moderate appetite for staff-facing decision support when human review, validation, and documentation are.</a:t>
+            </a:r>
+            <a:endParaRPr lang="en-US" sz="1700" dirty="0"/>
+          </a:p>
+          <a:p>
+            <a:r>
+              <a:rPr lang="en-US" sz="1700" dirty="0">
+                <a:solidFill>
+                  <a:srgbClr val="17364A"/>
+                </a:solidFill>
+                <a:latin typeface="Aptos" pitchFamily="34" charset="0"/>
+                <a:ea typeface="Aptos" pitchFamily="34" charset="-122"/>
+                <a:cs typeface="Aptos" pitchFamily="34" charset="-120"/>
+              </a:rPr>
+              <a:t>It may define a very low appetite for unsupervised public-facing advice, automated eligibility decisions, enforcement.</a:t>
+            </a:r>
+            <a:endParaRPr lang="en-US" sz="1700" dirty="0"/>
+          </a:p>
+          <a:p>
+            <a:r>
+              <a:rPr lang="en-US" sz="1700" dirty="0">
+                <a:solidFill>
+                  <a:srgbClr val="17364A"/>
+                </a:solidFill>
+                <a:latin typeface="Aptos" pitchFamily="34" charset="0"/>
+                <a:ea typeface="Aptos" pitchFamily="34" charset="-122"/>
+                <a:cs typeface="Aptos" pitchFamily="34" charset="-120"/>
+              </a:rPr>
+              <a:t>These statements help governance reviewers make consistent decisions.</a:t>
+            </a:r>
+            <a:endParaRPr lang="en-US" sz="1700" dirty="0"/>
+          </a:p>
+        </p:txBody>
+      </p:sp>
+      <p:sp>
+        <p:nvSpPr>
+          <p:cNvPr id="11" name="Shape 9"/>
+          <p:cNvSpPr/>
+          <p:nvPr/>
+        </p:nvSpPr>
+        <p:spPr>
+          <a:xfrm>
+            <a:off x="7909560" y="1417320"/>
+            <a:ext cx="3154680" cy="1828800"/>
+          </a:xfrm>
+          <a:prstGeom prst="roundRect">
+            <a:avLst>
+              <a:gd name="adj" fmla="val 6000"/>
+            </a:avLst>
+          </a:prstGeom>
+          <a:solidFill>
+            <a:srgbClr val="EEF8ED"/>
+          </a:solidFill>
+          <a:ln w="12700">
+            <a:solidFill>
+              <a:srgbClr val="B9D7E6"/>
+            </a:solidFill>
+            <a:prstDash val="solid"/>
+          </a:ln>
+        </p:spPr>
+      </p:sp>
+      <p:sp>
+        <p:nvSpPr>
+          <p:cNvPr id="12" name="Text 10"/>
+          <p:cNvSpPr/>
+          <p:nvPr/>
+        </p:nvSpPr>
+        <p:spPr>
+          <a:xfrm>
+            <a:off x="8074152" y="1563624"/>
+            <a:ext cx="2825496" cy="201168"/>
+          </a:xfrm>
+          <a:prstGeom prst="rect">
+            <a:avLst/>
+          </a:prstGeom>
+          <a:noFill/>
+          <a:ln/>
+        </p:spPr>
+        <p:txBody>
+          <a:bodyPr wrap="square" lIns="0" tIns="0" rIns="0" bIns="0" rtlCol="0" anchor="ctr"/>
+          <a:lstStyle/>
+          <a:p>
             <a:pPr indent="0" marL="0">
               <a:buNone/>
             </a:pPr>
             <a:r>
-              <a:rPr lang="en-US" sz="1420" dirty="0">
+              <a:rPr lang="en-US" sz="950" b="1" dirty="0">
+                <a:solidFill>
+                  <a:srgbClr val="0068B7"/>
+                </a:solidFill>
+                <a:latin typeface="Aptos" pitchFamily="34" charset="0"/>
+                <a:ea typeface="Aptos" pitchFamily="34" charset="-122"/>
+                <a:cs typeface="Aptos" pitchFamily="34" charset="-120"/>
+              </a:rPr>
+              <a:t>Key idea</a:t>
+            </a:r>
+            <a:endParaRPr lang="en-US" sz="950" dirty="0"/>
+          </a:p>
+        </p:txBody>
+      </p:sp>
+      <p:sp>
+        <p:nvSpPr>
+          <p:cNvPr id="13" name="Text 11"/>
+          <p:cNvSpPr/>
+          <p:nvPr/>
+        </p:nvSpPr>
+        <p:spPr>
+          <a:xfrm>
+            <a:off x="8074152" y="1856232"/>
+            <a:ext cx="2825496" cy="1261872"/>
+          </a:xfrm>
+          <a:prstGeom prst="rect">
+            <a:avLst/>
+          </a:prstGeom>
+          <a:noFill/>
+          <a:ln/>
+        </p:spPr>
+        <p:txBody>
+          <a:bodyPr wrap="square" lIns="0" tIns="0" rIns="0" bIns="0" rtlCol="0" anchor="t">
+            <a:normAutofit/>
+          </a:bodyPr>
+          <a:lstStyle/>
+          <a:p>
+            <a:pPr indent="0" marL="0">
+              <a:buNone/>
+            </a:pPr>
+            <a:r>
+              <a:rPr lang="en-US" sz="1250" dirty="0">
                 <a:solidFill>
                   <a:srgbClr val="17364A"/>
                 </a:solidFill>
@@ -7547,9 +14265,116 @@
                 <a:ea typeface="Aptos" pitchFamily="34" charset="-122"/>
                 <a:cs typeface="Aptos" pitchFamily="34" charset="-120"/>
               </a:rPr>
-              <a:t>A common failure mode is vague risk language. Phrases like 'use AI responsibly' do not help staff decide what is allowed. A guardrail is to define concrete examples of encouraged, conditional, restricted, and prohibited uses. Another risk is risk appetite that ignores equity. A tool may appear operationally useful while shifting burden to communities that are already underrepresented or over-surveilled. A guardrail is to require equity impact review for uses that affect prioritization, access, enforcement, communication, or resource allocation.</a:t>
-            </a:r>
-            <a:endParaRPr lang="en-US" sz="1420" dirty="0"/>
+              <a:t>An agency may define a higher risk appetite for internal administrative uses that do not involve sensitive data, public.</a:t>
+            </a:r>
+            <a:endParaRPr lang="en-US" sz="1250" dirty="0"/>
+          </a:p>
+        </p:txBody>
+      </p:sp>
+      <p:sp>
+        <p:nvSpPr>
+          <p:cNvPr id="14" name="Shape 12"/>
+          <p:cNvSpPr/>
+          <p:nvPr/>
+        </p:nvSpPr>
+        <p:spPr>
+          <a:xfrm>
+            <a:off x="7909560" y="3520440"/>
+            <a:ext cx="3154680" cy="1737360"/>
+          </a:xfrm>
+          <a:prstGeom prst="roundRect">
+            <a:avLst>
+              <a:gd name="adj" fmla="val 6316"/>
+            </a:avLst>
+          </a:prstGeom>
+          <a:solidFill>
+            <a:srgbClr val="EAF6F8"/>
+          </a:solidFill>
+          <a:ln w="12700">
+            <a:solidFill>
+              <a:srgbClr val="B9D7E6"/>
+            </a:solidFill>
+            <a:prstDash val="solid"/>
+          </a:ln>
+        </p:spPr>
+      </p:sp>
+      <p:sp>
+        <p:nvSpPr>
+          <p:cNvPr id="15" name="Text 13"/>
+          <p:cNvSpPr/>
+          <p:nvPr/>
+        </p:nvSpPr>
+        <p:spPr>
+          <a:xfrm>
+            <a:off x="8074152" y="3666744"/>
+            <a:ext cx="2825496" cy="201168"/>
+          </a:xfrm>
+          <a:prstGeom prst="rect">
+            <a:avLst/>
+          </a:prstGeom>
+          <a:noFill/>
+          <a:ln/>
+        </p:spPr>
+        <p:txBody>
+          <a:bodyPr wrap="square" lIns="0" tIns="0" rIns="0" bIns="0" rtlCol="0" anchor="ctr"/>
+          <a:lstStyle/>
+          <a:p>
+            <a:pPr indent="0" marL="0">
+              <a:buNone/>
+            </a:pPr>
+            <a:r>
+              <a:rPr lang="en-US" sz="950" b="1" dirty="0">
+                <a:solidFill>
+                  <a:srgbClr val="0068B7"/>
+                </a:solidFill>
+                <a:latin typeface="Aptos" pitchFamily="34" charset="0"/>
+                <a:ea typeface="Aptos" pitchFamily="34" charset="-122"/>
+                <a:cs typeface="Aptos" pitchFamily="34" charset="-120"/>
+              </a:rPr>
+              <a:t>Use this for</a:t>
+            </a:r>
+            <a:endParaRPr lang="en-US" sz="950" dirty="0"/>
+          </a:p>
+        </p:txBody>
+      </p:sp>
+      <p:sp>
+        <p:nvSpPr>
+          <p:cNvPr id="16" name="Text 14"/>
+          <p:cNvSpPr/>
+          <p:nvPr/>
+        </p:nvSpPr>
+        <p:spPr>
+          <a:xfrm>
+            <a:off x="8074152" y="3959352"/>
+            <a:ext cx="2825496" cy="1170432"/>
+          </a:xfrm>
+          <a:prstGeom prst="rect">
+            <a:avLst/>
+          </a:prstGeom>
+          <a:noFill/>
+          <a:ln/>
+        </p:spPr>
+        <p:txBody>
+          <a:bodyPr wrap="square" lIns="0" tIns="0" rIns="0" bIns="0" rtlCol="0" anchor="t">
+            <a:normAutofit/>
+          </a:bodyPr>
+          <a:lstStyle/>
+          <a:p>
+            <a:pPr indent="0" marL="0">
+              <a:buNone/>
+            </a:pPr>
+            <a:r>
+              <a:rPr lang="en-US" sz="1250" dirty="0">
+                <a:solidFill>
+                  <a:srgbClr val="17364A"/>
+                </a:solidFill>
+                <a:latin typeface="Aptos" pitchFamily="34" charset="0"/>
+                <a:ea typeface="Aptos" pitchFamily="34" charset="-122"/>
+                <a:cs typeface="Aptos" pitchFamily="34" charset="-120"/>
+              </a:rPr>
+              <a:t>Connect the concept to public health decisions, safeguards, documentation, or implementation work.</a:t>
+            </a:r>
+            <a:endParaRPr lang="en-US" sz="1250" dirty="0"/>
           </a:p>
         </p:txBody>
       </p:sp>

--- a/downloads/presentations/modules/lesson-48-ai-risk-appetite-and-risk-tolerance-for-public-health.pptx
+++ b/downloads/presentations/modules/lesson-48-ai-risk-appetite-and-risk-tolerance-for-public-health.pptx
@@ -2900,6 +2900,45 @@
           </a:p>
         </p:txBody>
       </p:sp>
+      <p:sp>
+        <p:nvSpPr>
+          <p:cNvPr id="8" name="Text 5"/>
+          <p:cNvSpPr/>
+          <p:nvPr/>
+        </p:nvSpPr>
+        <p:spPr>
+          <a:xfrm>
+            <a:off x="11137392" y="6510528"/>
+            <a:ext cx="411480" cy="201168"/>
+          </a:xfrm>
+          <a:prstGeom prst="rect">
+            <a:avLst/>
+          </a:prstGeom>
+          <a:noFill/>
+          <a:ln/>
+        </p:spPr>
+        <p:txBody>
+          <a:bodyPr wrap="square" lIns="0" tIns="0" rIns="0" bIns="0" rtlCol="0" anchor="ctr"/>
+          <a:lstStyle/>
+          <a:p>
+            <a:pPr algn="r" indent="0" marL="0">
+              <a:buNone/>
+            </a:pPr>
+            <a:r>
+              <a:rPr lang="en-US" sz="900" dirty="0">
+                <a:solidFill>
+                  <a:srgbClr val="5F7181"/>
+                </a:solidFill>
+                <a:latin typeface="Aptos" pitchFamily="34" charset="0"/>
+                <a:ea typeface="Aptos" pitchFamily="34" charset="-122"/>
+                <a:cs typeface="Aptos" pitchFamily="34" charset="-120"/>
+              </a:rPr>
+              <a:t>1</a:t>
+            </a:r>
+            <a:endParaRPr lang="en-US" sz="900" dirty="0"/>
+          </a:p>
+        </p:txBody>
+      </p:sp>
     </p:spTree>
   </p:cSld>
   <p:clrMapOvr>
@@ -3093,7 +3132,7 @@
                 <a:ea typeface="Aptos" pitchFamily="34" charset="-122"/>
                 <a:cs typeface="Aptos" pitchFamily="34" charset="-120"/>
               </a:rPr>
-              <a:t>© Paula Soper</a:t>
+              <a:t>Â© Paula Soper</a:t>
             </a:r>
             <a:endParaRPr lang="en-US" sz="800" dirty="0"/>
           </a:p>
@@ -3101,7 +3140,46 @@
       </p:sp>
       <p:sp>
         <p:nvSpPr>
-          <p:cNvPr id="7" name="Shape 5"/>
+          <p:cNvPr id="7" name="Text 5"/>
+          <p:cNvSpPr/>
+          <p:nvPr/>
+        </p:nvSpPr>
+        <p:spPr>
+          <a:xfrm>
+            <a:off x="11137392" y="6510528"/>
+            <a:ext cx="411480" cy="201168"/>
+          </a:xfrm>
+          <a:prstGeom prst="rect">
+            <a:avLst/>
+          </a:prstGeom>
+          <a:noFill/>
+          <a:ln/>
+        </p:spPr>
+        <p:txBody>
+          <a:bodyPr wrap="square" lIns="0" tIns="0" rIns="0" bIns="0" rtlCol="0" anchor="ctr"/>
+          <a:lstStyle/>
+          <a:p>
+            <a:pPr algn="r" indent="0" marL="0">
+              <a:buNone/>
+            </a:pPr>
+            <a:r>
+              <a:rPr lang="en-US" sz="900" dirty="0">
+                <a:solidFill>
+                  <a:srgbClr val="5F7181"/>
+                </a:solidFill>
+                <a:latin typeface="Aptos" pitchFamily="34" charset="0"/>
+                <a:ea typeface="Aptos" pitchFamily="34" charset="-122"/>
+                <a:cs typeface="Aptos" pitchFamily="34" charset="-120"/>
+              </a:rPr>
+              <a:t>10</a:t>
+            </a:r>
+            <a:endParaRPr lang="en-US" sz="900" dirty="0"/>
+          </a:p>
+        </p:txBody>
+      </p:sp>
+      <p:sp>
+        <p:nvSpPr>
+          <p:cNvPr id="8" name="Shape 6"/>
           <p:cNvSpPr/>
           <p:nvPr/>
         </p:nvSpPr>
@@ -3126,7 +3204,7 @@
       </p:sp>
       <p:sp>
         <p:nvSpPr>
-          <p:cNvPr id="8" name="Text 6"/>
+          <p:cNvPr id="9" name="Text 7"/>
           <p:cNvSpPr/>
           <p:nvPr/>
         </p:nvSpPr>
@@ -3165,14 +3243,14 @@
       </p:sp>
       <p:sp>
         <p:nvSpPr>
-          <p:cNvPr id="9" name="Text 7"/>
+          <p:cNvPr id="10" name="Text 8"/>
           <p:cNvSpPr/>
           <p:nvPr/>
         </p:nvSpPr>
         <p:spPr>
           <a:xfrm>
             <a:off x="640080" y="621792"/>
-            <a:ext cx="10881360" cy="566928"/>
+            <a:ext cx="10881360" cy="713232"/>
           </a:xfrm>
           <a:prstGeom prst="rect">
             <a:avLst/>
@@ -3190,7 +3268,7 @@
               <a:buNone/>
             </a:pPr>
             <a:r>
-              <a:rPr lang="en-US" sz="2700" b="1" dirty="0">
+              <a:rPr lang="en-US" sz="3400" b="1" dirty="0">
                 <a:solidFill>
                   <a:srgbClr val="003A63"/>
                 </a:solidFill>
@@ -3200,20 +3278,20 @@
               </a:rPr>
               <a:t>Technical and Governance Deep Dive</a:t>
             </a:r>
-            <a:endParaRPr lang="en-US" sz="2700" dirty="0"/>
-          </a:p>
-        </p:txBody>
-      </p:sp>
-      <p:sp>
-        <p:nvSpPr>
-          <p:cNvPr id="10" name="Text 8"/>
-          <p:cNvSpPr/>
-          <p:nvPr/>
-        </p:nvSpPr>
-        <p:spPr>
-          <a:xfrm>
-            <a:off x="868680" y="1417320"/>
-            <a:ext cx="6675120" cy="4434840"/>
+            <a:endParaRPr lang="en-US" sz="3400" dirty="0"/>
+          </a:p>
+        </p:txBody>
+      </p:sp>
+      <p:sp>
+        <p:nvSpPr>
+          <p:cNvPr id="11" name="Text 9"/>
+          <p:cNvSpPr/>
+          <p:nvPr/>
+        </p:nvSpPr>
+        <p:spPr>
+          <a:xfrm>
+            <a:off x="868680" y="1508760"/>
+            <a:ext cx="6537960" cy="4160520"/>
           </a:xfrm>
           <a:prstGeom prst="rect">
             <a:avLst/>
@@ -3228,7 +3306,7 @@
           <a:lstStyle/>
           <a:p>
             <a:r>
-              <a:rPr lang="en-US" sz="1700" dirty="0">
+              <a:rPr lang="en-US" sz="2100" dirty="0">
                 <a:solidFill>
                   <a:srgbClr val="17364A"/>
                 </a:solidFill>
@@ -3238,11 +3316,11 @@
               </a:rPr>
               <a:t>Risk appetite should be expressed in plain language and translated into operating rules.</a:t>
             </a:r>
-            <a:endParaRPr lang="en-US" sz="1700" dirty="0"/>
-          </a:p>
-          <a:p>
-            <a:r>
-              <a:rPr lang="en-US" sz="1700" dirty="0">
+            <a:endParaRPr lang="en-US" sz="2100" dirty="0"/>
+          </a:p>
+          <a:p>
+            <a:r>
+              <a:rPr lang="en-US" sz="2100" dirty="0">
                 <a:solidFill>
                   <a:srgbClr val="17364A"/>
                 </a:solidFill>
@@ -3250,13 +3328,13 @@
                 <a:ea typeface="Aptos" pitchFamily="34" charset="-122"/>
                 <a:cs typeface="Aptos" pitchFamily="34" charset="-120"/>
               </a:rPr>
-              <a:t>For example, an agency might state that it encourages low-risk AI uses that reduce internal administrative burden when no.</a:t>
-            </a:r>
-            <a:endParaRPr lang="en-US" sz="1700" dirty="0"/>
-          </a:p>
-          <a:p>
-            <a:r>
-              <a:rPr lang="en-US" sz="1700" dirty="0">
+              <a:t>For example, an agency might state that it encourages low-risk AI uses that reduce internal.</a:t>
+            </a:r>
+            <a:endParaRPr lang="en-US" sz="2100" dirty="0"/>
+          </a:p>
+          <a:p>
+            <a:r>
+              <a:rPr lang="en-US" sz="2100" dirty="0">
                 <a:solidFill>
                   <a:srgbClr val="17364A"/>
                 </a:solidFill>
@@ -3264,29 +3342,15 @@
                 <a:ea typeface="Aptos" pitchFamily="34" charset="-122"/>
                 <a:cs typeface="Aptos" pitchFamily="34" charset="-120"/>
               </a:rPr>
-              <a:t>It might state that it will consider moderate-risk uses involving operational data only with documented validation, access.</a:t>
-            </a:r>
-            <a:endParaRPr lang="en-US" sz="1700" dirty="0"/>
-          </a:p>
-          <a:p>
-            <a:r>
-              <a:rPr lang="en-US" sz="1700" dirty="0">
-                <a:solidFill>
-                  <a:srgbClr val="17364A"/>
-                </a:solidFill>
-                <a:latin typeface="Aptos" pitchFamily="34" charset="0"/>
-                <a:ea typeface="Aptos" pitchFamily="34" charset="-122"/>
-                <a:cs typeface="Aptos" pitchFamily="34" charset="-120"/>
-              </a:rPr>
-              <a:t>It might state that it does not permit AI to make final public health enforcement, eligibility, or legal decisions without.</a:t>
-            </a:r>
-            <a:endParaRPr lang="en-US" sz="1700" dirty="0"/>
-          </a:p>
-        </p:txBody>
-      </p:sp>
-      <p:sp>
-        <p:nvSpPr>
-          <p:cNvPr id="11" name="Shape 9"/>
+              <a:t>It might state that it will consider moderate-risk uses involving operational data only with documented.</a:t>
+            </a:r>
+            <a:endParaRPr lang="en-US" sz="2100" dirty="0"/>
+          </a:p>
+        </p:txBody>
+      </p:sp>
+      <p:sp>
+        <p:nvSpPr>
+          <p:cNvPr id="12" name="Shape 10"/>
           <p:cNvSpPr/>
           <p:nvPr/>
         </p:nvSpPr>
@@ -3313,14 +3377,14 @@
       </p:sp>
       <p:sp>
         <p:nvSpPr>
-          <p:cNvPr id="12" name="Text 10"/>
+          <p:cNvPr id="13" name="Text 11"/>
           <p:cNvSpPr/>
           <p:nvPr/>
         </p:nvSpPr>
         <p:spPr>
           <a:xfrm>
             <a:off x="8074152" y="1563624"/>
-            <a:ext cx="2825496" cy="201168"/>
+            <a:ext cx="2825496" cy="256032"/>
           </a:xfrm>
           <a:prstGeom prst="rect">
             <a:avLst/>
@@ -3336,7 +3400,7 @@
               <a:buNone/>
             </a:pPr>
             <a:r>
-              <a:rPr lang="en-US" sz="950" b="1" dirty="0">
+              <a:rPr lang="en-US" sz="1300" b="1" dirty="0">
                 <a:solidFill>
                   <a:srgbClr val="0068B7"/>
                 </a:solidFill>
@@ -3346,20 +3410,20 @@
               </a:rPr>
               <a:t>Key idea</a:t>
             </a:r>
-            <a:endParaRPr lang="en-US" sz="950" dirty="0"/>
-          </a:p>
-        </p:txBody>
-      </p:sp>
-      <p:sp>
-        <p:nvSpPr>
-          <p:cNvPr id="13" name="Text 11"/>
-          <p:cNvSpPr/>
-          <p:nvPr/>
-        </p:nvSpPr>
-        <p:spPr>
-          <a:xfrm>
-            <a:off x="8074152" y="1856232"/>
-            <a:ext cx="2825496" cy="1261872"/>
+            <a:endParaRPr lang="en-US" sz="1300" dirty="0"/>
+          </a:p>
+        </p:txBody>
+      </p:sp>
+      <p:sp>
+        <p:nvSpPr>
+          <p:cNvPr id="14" name="Text 12"/>
+          <p:cNvSpPr/>
+          <p:nvPr/>
+        </p:nvSpPr>
+        <p:spPr>
+          <a:xfrm>
+            <a:off x="8074152" y="1920240"/>
+            <a:ext cx="2825496" cy="1188720"/>
           </a:xfrm>
           <a:prstGeom prst="rect">
             <a:avLst/>
@@ -3377,7 +3441,7 @@
               <a:buNone/>
             </a:pPr>
             <a:r>
-              <a:rPr lang="en-US" sz="1250" dirty="0">
+              <a:rPr lang="en-US" sz="1550" dirty="0">
                 <a:solidFill>
                   <a:srgbClr val="17364A"/>
                 </a:solidFill>
@@ -3387,13 +3451,13 @@
               </a:rPr>
               <a:t>Risk appetite should be expressed in plain language and translated into operating rules.</a:t>
             </a:r>
-            <a:endParaRPr lang="en-US" sz="1250" dirty="0"/>
-          </a:p>
-        </p:txBody>
-      </p:sp>
-      <p:sp>
-        <p:nvSpPr>
-          <p:cNvPr id="14" name="Shape 12"/>
+            <a:endParaRPr lang="en-US" sz="1550" dirty="0"/>
+          </a:p>
+        </p:txBody>
+      </p:sp>
+      <p:sp>
+        <p:nvSpPr>
+          <p:cNvPr id="15" name="Shape 13"/>
           <p:cNvSpPr/>
           <p:nvPr/>
         </p:nvSpPr>
@@ -3420,14 +3484,14 @@
       </p:sp>
       <p:sp>
         <p:nvSpPr>
-          <p:cNvPr id="15" name="Text 13"/>
+          <p:cNvPr id="16" name="Text 14"/>
           <p:cNvSpPr/>
           <p:nvPr/>
         </p:nvSpPr>
         <p:spPr>
           <a:xfrm>
             <a:off x="8074152" y="3666744"/>
-            <a:ext cx="2825496" cy="201168"/>
+            <a:ext cx="2825496" cy="256032"/>
           </a:xfrm>
           <a:prstGeom prst="rect">
             <a:avLst/>
@@ -3443,7 +3507,7 @@
               <a:buNone/>
             </a:pPr>
             <a:r>
-              <a:rPr lang="en-US" sz="950" b="1" dirty="0">
+              <a:rPr lang="en-US" sz="1300" b="1" dirty="0">
                 <a:solidFill>
                   <a:srgbClr val="0068B7"/>
                 </a:solidFill>
@@ -3453,20 +3517,20 @@
               </a:rPr>
               <a:t>Use this for</a:t>
             </a:r>
-            <a:endParaRPr lang="en-US" sz="950" dirty="0"/>
-          </a:p>
-        </p:txBody>
-      </p:sp>
-      <p:sp>
-        <p:nvSpPr>
-          <p:cNvPr id="16" name="Text 14"/>
-          <p:cNvSpPr/>
-          <p:nvPr/>
-        </p:nvSpPr>
-        <p:spPr>
-          <a:xfrm>
-            <a:off x="8074152" y="3959352"/>
-            <a:ext cx="2825496" cy="1170432"/>
+            <a:endParaRPr lang="en-US" sz="1300" dirty="0"/>
+          </a:p>
+        </p:txBody>
+      </p:sp>
+      <p:sp>
+        <p:nvSpPr>
+          <p:cNvPr id="17" name="Text 15"/>
+          <p:cNvSpPr/>
+          <p:nvPr/>
+        </p:nvSpPr>
+        <p:spPr>
+          <a:xfrm>
+            <a:off x="8074152" y="4023360"/>
+            <a:ext cx="2825496" cy="1097280"/>
           </a:xfrm>
           <a:prstGeom prst="rect">
             <a:avLst/>
@@ -3484,7 +3548,7 @@
               <a:buNone/>
             </a:pPr>
             <a:r>
-              <a:rPr lang="en-US" sz="1250" dirty="0">
+              <a:rPr lang="en-US" sz="1550" dirty="0">
                 <a:solidFill>
                   <a:srgbClr val="17364A"/>
                 </a:solidFill>
@@ -3494,7 +3558,7 @@
               </a:rPr>
               <a:t>Connect the concept to public health decisions, safeguards, documentation, or implementation work.</a:t>
             </a:r>
-            <a:endParaRPr lang="en-US" sz="1250" dirty="0"/>
+            <a:endParaRPr lang="en-US" sz="1550" dirty="0"/>
           </a:p>
         </p:txBody>
       </p:sp>
@@ -3691,7 +3755,7 @@
                 <a:ea typeface="Aptos" pitchFamily="34" charset="-122"/>
                 <a:cs typeface="Aptos" pitchFamily="34" charset="-120"/>
               </a:rPr>
-              <a:t>© Paula Soper</a:t>
+              <a:t>Â© Paula Soper</a:t>
             </a:r>
             <a:endParaRPr lang="en-US" sz="800" dirty="0"/>
           </a:p>
@@ -3699,7 +3763,46 @@
       </p:sp>
       <p:sp>
         <p:nvSpPr>
-          <p:cNvPr id="7" name="Shape 5"/>
+          <p:cNvPr id="7" name="Text 5"/>
+          <p:cNvSpPr/>
+          <p:nvPr/>
+        </p:nvSpPr>
+        <p:spPr>
+          <a:xfrm>
+            <a:off x="11137392" y="6510528"/>
+            <a:ext cx="411480" cy="201168"/>
+          </a:xfrm>
+          <a:prstGeom prst="rect">
+            <a:avLst/>
+          </a:prstGeom>
+          <a:noFill/>
+          <a:ln/>
+        </p:spPr>
+        <p:txBody>
+          <a:bodyPr wrap="square" lIns="0" tIns="0" rIns="0" bIns="0" rtlCol="0" anchor="ctr"/>
+          <a:lstStyle/>
+          <a:p>
+            <a:pPr algn="r" indent="0" marL="0">
+              <a:buNone/>
+            </a:pPr>
+            <a:r>
+              <a:rPr lang="en-US" sz="900" dirty="0">
+                <a:solidFill>
+                  <a:srgbClr val="5F7181"/>
+                </a:solidFill>
+                <a:latin typeface="Aptos" pitchFamily="34" charset="0"/>
+                <a:ea typeface="Aptos" pitchFamily="34" charset="-122"/>
+                <a:cs typeface="Aptos" pitchFamily="34" charset="-120"/>
+              </a:rPr>
+              <a:t>11</a:t>
+            </a:r>
+            <a:endParaRPr lang="en-US" sz="900" dirty="0"/>
+          </a:p>
+        </p:txBody>
+      </p:sp>
+      <p:sp>
+        <p:nvSpPr>
+          <p:cNvPr id="8" name="Shape 6"/>
           <p:cNvSpPr/>
           <p:nvPr/>
         </p:nvSpPr>
@@ -3724,7 +3827,7 @@
       </p:sp>
       <p:sp>
         <p:nvSpPr>
-          <p:cNvPr id="8" name="Text 6"/>
+          <p:cNvPr id="9" name="Text 7"/>
           <p:cNvSpPr/>
           <p:nvPr/>
         </p:nvSpPr>
@@ -3763,14 +3866,14 @@
       </p:sp>
       <p:sp>
         <p:nvSpPr>
-          <p:cNvPr id="9" name="Text 7"/>
+          <p:cNvPr id="10" name="Text 8"/>
           <p:cNvSpPr/>
           <p:nvPr/>
         </p:nvSpPr>
         <p:spPr>
           <a:xfrm>
             <a:off x="640080" y="621792"/>
-            <a:ext cx="10881360" cy="566928"/>
+            <a:ext cx="10881360" cy="713232"/>
           </a:xfrm>
           <a:prstGeom prst="rect">
             <a:avLst/>
@@ -3788,7 +3891,7 @@
               <a:buNone/>
             </a:pPr>
             <a:r>
-              <a:rPr lang="en-US" sz="2700" b="1" dirty="0">
+              <a:rPr lang="en-US" sz="3400" b="1" dirty="0">
                 <a:solidFill>
                   <a:srgbClr val="003A63"/>
                 </a:solidFill>
@@ -3798,20 +3901,20 @@
               </a:rPr>
               <a:t>Risks, Failure Modes, and Guardrails</a:t>
             </a:r>
-            <a:endParaRPr lang="en-US" sz="2700" dirty="0"/>
-          </a:p>
-        </p:txBody>
-      </p:sp>
-      <p:sp>
-        <p:nvSpPr>
-          <p:cNvPr id="10" name="Text 8"/>
-          <p:cNvSpPr/>
-          <p:nvPr/>
-        </p:nvSpPr>
-        <p:spPr>
-          <a:xfrm>
-            <a:off x="868680" y="1417320"/>
-            <a:ext cx="6675120" cy="4434840"/>
+            <a:endParaRPr lang="en-US" sz="3400" dirty="0"/>
+          </a:p>
+        </p:txBody>
+      </p:sp>
+      <p:sp>
+        <p:nvSpPr>
+          <p:cNvPr id="11" name="Text 9"/>
+          <p:cNvSpPr/>
+          <p:nvPr/>
+        </p:nvSpPr>
+        <p:spPr>
+          <a:xfrm>
+            <a:off x="868680" y="1508760"/>
+            <a:ext cx="6537960" cy="4160520"/>
           </a:xfrm>
           <a:prstGeom prst="rect">
             <a:avLst/>
@@ -3826,7 +3929,7 @@
           <a:lstStyle/>
           <a:p>
             <a:r>
-              <a:rPr lang="en-US" sz="1700" dirty="0">
+              <a:rPr lang="en-US" sz="2100" dirty="0">
                 <a:solidFill>
                   <a:srgbClr val="17364A"/>
                 </a:solidFill>
@@ -3836,11 +3939,11 @@
               </a:rPr>
               <a:t>A common failure mode is vague risk language.</a:t>
             </a:r>
-            <a:endParaRPr lang="en-US" sz="1700" dirty="0"/>
-          </a:p>
-          <a:p>
-            <a:r>
-              <a:rPr lang="en-US" sz="1700" dirty="0">
+            <a:endParaRPr lang="en-US" sz="2100" dirty="0"/>
+          </a:p>
+          <a:p>
+            <a:r>
+              <a:rPr lang="en-US" sz="2100" dirty="0">
                 <a:solidFill>
                   <a:srgbClr val="17364A"/>
                 </a:solidFill>
@@ -3850,11 +3953,11 @@
               </a:rPr>
               <a:t>Phrases like 'use AI responsibly' do not help staff decide what is allowed.</a:t>
             </a:r>
-            <a:endParaRPr lang="en-US" sz="1700" dirty="0"/>
-          </a:p>
-          <a:p>
-            <a:r>
-              <a:rPr lang="en-US" sz="1700" dirty="0">
+            <a:endParaRPr lang="en-US" sz="2100" dirty="0"/>
+          </a:p>
+          <a:p>
+            <a:r>
+              <a:rPr lang="en-US" sz="2100" dirty="0">
                 <a:solidFill>
                   <a:srgbClr val="17364A"/>
                 </a:solidFill>
@@ -3864,27 +3967,13 @@
               </a:rPr>
               <a:t>A guardrail is to define concrete examples of encouraged, conditional, restricted, and prohibited uses.</a:t>
             </a:r>
-            <a:endParaRPr lang="en-US" sz="1700" dirty="0"/>
-          </a:p>
-          <a:p>
-            <a:r>
-              <a:rPr lang="en-US" sz="1700" dirty="0">
-                <a:solidFill>
-                  <a:srgbClr val="17364A"/>
-                </a:solidFill>
-                <a:latin typeface="Aptos" pitchFamily="34" charset="0"/>
-                <a:ea typeface="Aptos" pitchFamily="34" charset="-122"/>
-                <a:cs typeface="Aptos" pitchFamily="34" charset="-120"/>
-              </a:rPr>
-              <a:t>Another risk is risk appetite that ignores equity.</a:t>
-            </a:r>
-            <a:endParaRPr lang="en-US" sz="1700" dirty="0"/>
-          </a:p>
-        </p:txBody>
-      </p:sp>
-      <p:sp>
-        <p:nvSpPr>
-          <p:cNvPr id="11" name="Shape 9"/>
+            <a:endParaRPr lang="en-US" sz="2100" dirty="0"/>
+          </a:p>
+        </p:txBody>
+      </p:sp>
+      <p:sp>
+        <p:nvSpPr>
+          <p:cNvPr id="12" name="Shape 10"/>
           <p:cNvSpPr/>
           <p:nvPr/>
         </p:nvSpPr>
@@ -3911,14 +4000,14 @@
       </p:sp>
       <p:sp>
         <p:nvSpPr>
-          <p:cNvPr id="12" name="Text 10"/>
+          <p:cNvPr id="13" name="Text 11"/>
           <p:cNvSpPr/>
           <p:nvPr/>
         </p:nvSpPr>
         <p:spPr>
           <a:xfrm>
             <a:off x="8074152" y="1563624"/>
-            <a:ext cx="2825496" cy="201168"/>
+            <a:ext cx="2825496" cy="256032"/>
           </a:xfrm>
           <a:prstGeom prst="rect">
             <a:avLst/>
@@ -3934,7 +4023,7 @@
               <a:buNone/>
             </a:pPr>
             <a:r>
-              <a:rPr lang="en-US" sz="950" b="1" dirty="0">
+              <a:rPr lang="en-US" sz="1300" b="1" dirty="0">
                 <a:solidFill>
                   <a:srgbClr val="0068B7"/>
                 </a:solidFill>
@@ -3944,20 +4033,20 @@
               </a:rPr>
               <a:t>Key idea</a:t>
             </a:r>
-            <a:endParaRPr lang="en-US" sz="950" dirty="0"/>
-          </a:p>
-        </p:txBody>
-      </p:sp>
-      <p:sp>
-        <p:nvSpPr>
-          <p:cNvPr id="13" name="Text 11"/>
-          <p:cNvSpPr/>
-          <p:nvPr/>
-        </p:nvSpPr>
-        <p:spPr>
-          <a:xfrm>
-            <a:off x="8074152" y="1856232"/>
-            <a:ext cx="2825496" cy="1261872"/>
+            <a:endParaRPr lang="en-US" sz="1300" dirty="0"/>
+          </a:p>
+        </p:txBody>
+      </p:sp>
+      <p:sp>
+        <p:nvSpPr>
+          <p:cNvPr id="14" name="Text 12"/>
+          <p:cNvSpPr/>
+          <p:nvPr/>
+        </p:nvSpPr>
+        <p:spPr>
+          <a:xfrm>
+            <a:off x="8074152" y="1920240"/>
+            <a:ext cx="2825496" cy="1188720"/>
           </a:xfrm>
           <a:prstGeom prst="rect">
             <a:avLst/>
@@ -3975,7 +4064,7 @@
               <a:buNone/>
             </a:pPr>
             <a:r>
-              <a:rPr lang="en-US" sz="1250" dirty="0">
+              <a:rPr lang="en-US" sz="1550" dirty="0">
                 <a:solidFill>
                   <a:srgbClr val="17364A"/>
                 </a:solidFill>
@@ -3985,13 +4074,13 @@
               </a:rPr>
               <a:t>A common failure mode is vague risk language.</a:t>
             </a:r>
-            <a:endParaRPr lang="en-US" sz="1250" dirty="0"/>
-          </a:p>
-        </p:txBody>
-      </p:sp>
-      <p:sp>
-        <p:nvSpPr>
-          <p:cNvPr id="14" name="Shape 12"/>
+            <a:endParaRPr lang="en-US" sz="1550" dirty="0"/>
+          </a:p>
+        </p:txBody>
+      </p:sp>
+      <p:sp>
+        <p:nvSpPr>
+          <p:cNvPr id="15" name="Shape 13"/>
           <p:cNvSpPr/>
           <p:nvPr/>
         </p:nvSpPr>
@@ -4018,14 +4107,14 @@
       </p:sp>
       <p:sp>
         <p:nvSpPr>
-          <p:cNvPr id="15" name="Text 13"/>
+          <p:cNvPr id="16" name="Text 14"/>
           <p:cNvSpPr/>
           <p:nvPr/>
         </p:nvSpPr>
         <p:spPr>
           <a:xfrm>
             <a:off x="8074152" y="3666744"/>
-            <a:ext cx="2825496" cy="201168"/>
+            <a:ext cx="2825496" cy="256032"/>
           </a:xfrm>
           <a:prstGeom prst="rect">
             <a:avLst/>
@@ -4041,7 +4130,7 @@
               <a:buNone/>
             </a:pPr>
             <a:r>
-              <a:rPr lang="en-US" sz="950" b="1" dirty="0">
+              <a:rPr lang="en-US" sz="1300" b="1" dirty="0">
                 <a:solidFill>
                   <a:srgbClr val="0068B7"/>
                 </a:solidFill>
@@ -4051,20 +4140,20 @@
               </a:rPr>
               <a:t>Use this for</a:t>
             </a:r>
-            <a:endParaRPr lang="en-US" sz="950" dirty="0"/>
-          </a:p>
-        </p:txBody>
-      </p:sp>
-      <p:sp>
-        <p:nvSpPr>
-          <p:cNvPr id="16" name="Text 14"/>
-          <p:cNvSpPr/>
-          <p:nvPr/>
-        </p:nvSpPr>
-        <p:spPr>
-          <a:xfrm>
-            <a:off x="8074152" y="3959352"/>
-            <a:ext cx="2825496" cy="1170432"/>
+            <a:endParaRPr lang="en-US" sz="1300" dirty="0"/>
+          </a:p>
+        </p:txBody>
+      </p:sp>
+      <p:sp>
+        <p:nvSpPr>
+          <p:cNvPr id="17" name="Text 15"/>
+          <p:cNvSpPr/>
+          <p:nvPr/>
+        </p:nvSpPr>
+        <p:spPr>
+          <a:xfrm>
+            <a:off x="8074152" y="4023360"/>
+            <a:ext cx="2825496" cy="1097280"/>
           </a:xfrm>
           <a:prstGeom prst="rect">
             <a:avLst/>
@@ -4082,7 +4171,7 @@
               <a:buNone/>
             </a:pPr>
             <a:r>
-              <a:rPr lang="en-US" sz="1250" dirty="0">
+              <a:rPr lang="en-US" sz="1550" dirty="0">
                 <a:solidFill>
                   <a:srgbClr val="17364A"/>
                 </a:solidFill>
@@ -4092,7 +4181,7 @@
               </a:rPr>
               <a:t>Connect the concept to public health decisions, safeguards, documentation, or implementation work.</a:t>
             </a:r>
-            <a:endParaRPr lang="en-US" sz="1250" dirty="0"/>
+            <a:endParaRPr lang="en-US" sz="1550" dirty="0"/>
           </a:p>
         </p:txBody>
       </p:sp>
@@ -4289,7 +4378,7 @@
                 <a:ea typeface="Aptos" pitchFamily="34" charset="-122"/>
                 <a:cs typeface="Aptos" pitchFamily="34" charset="-120"/>
               </a:rPr>
-              <a:t>© Paula Soper</a:t>
+              <a:t>Â© Paula Soper</a:t>
             </a:r>
             <a:endParaRPr lang="en-US" sz="800" dirty="0"/>
           </a:p>
@@ -4297,7 +4386,46 @@
       </p:sp>
       <p:sp>
         <p:nvSpPr>
-          <p:cNvPr id="7" name="Shape 5"/>
+          <p:cNvPr id="7" name="Text 5"/>
+          <p:cNvSpPr/>
+          <p:nvPr/>
+        </p:nvSpPr>
+        <p:spPr>
+          <a:xfrm>
+            <a:off x="11137392" y="6510528"/>
+            <a:ext cx="411480" cy="201168"/>
+          </a:xfrm>
+          <a:prstGeom prst="rect">
+            <a:avLst/>
+          </a:prstGeom>
+          <a:noFill/>
+          <a:ln/>
+        </p:spPr>
+        <p:txBody>
+          <a:bodyPr wrap="square" lIns="0" tIns="0" rIns="0" bIns="0" rtlCol="0" anchor="ctr"/>
+          <a:lstStyle/>
+          <a:p>
+            <a:pPr algn="r" indent="0" marL="0">
+              <a:buNone/>
+            </a:pPr>
+            <a:r>
+              <a:rPr lang="en-US" sz="900" dirty="0">
+                <a:solidFill>
+                  <a:srgbClr val="5F7181"/>
+                </a:solidFill>
+                <a:latin typeface="Aptos" pitchFamily="34" charset="0"/>
+                <a:ea typeface="Aptos" pitchFamily="34" charset="-122"/>
+                <a:cs typeface="Aptos" pitchFamily="34" charset="-120"/>
+              </a:rPr>
+              <a:t>12</a:t>
+            </a:r>
+            <a:endParaRPr lang="en-US" sz="900" dirty="0"/>
+          </a:p>
+        </p:txBody>
+      </p:sp>
+      <p:sp>
+        <p:nvSpPr>
+          <p:cNvPr id="8" name="Shape 6"/>
           <p:cNvSpPr/>
           <p:nvPr/>
         </p:nvSpPr>
@@ -4322,7 +4450,7 @@
       </p:sp>
       <p:sp>
         <p:nvSpPr>
-          <p:cNvPr id="8" name="Text 6"/>
+          <p:cNvPr id="9" name="Text 7"/>
           <p:cNvSpPr/>
           <p:nvPr/>
         </p:nvSpPr>
@@ -4361,14 +4489,14 @@
       </p:sp>
       <p:sp>
         <p:nvSpPr>
-          <p:cNvPr id="9" name="Text 7"/>
+          <p:cNvPr id="10" name="Text 8"/>
           <p:cNvSpPr/>
           <p:nvPr/>
         </p:nvSpPr>
         <p:spPr>
           <a:xfrm>
             <a:off x="640080" y="621792"/>
-            <a:ext cx="10881360" cy="566928"/>
+            <a:ext cx="10881360" cy="713232"/>
           </a:xfrm>
           <a:prstGeom prst="rect">
             <a:avLst/>
@@ -4386,7 +4514,7 @@
               <a:buNone/>
             </a:pPr>
             <a:r>
-              <a:rPr lang="en-US" sz="2700" b="1" dirty="0">
+              <a:rPr lang="en-US" sz="3400" b="1" dirty="0">
                 <a:solidFill>
                   <a:srgbClr val="003A63"/>
                 </a:solidFill>
@@ -4396,20 +4524,20 @@
               </a:rPr>
               <a:t>Application to AI-Supported Workflows</a:t>
             </a:r>
-            <a:endParaRPr lang="en-US" sz="2700" dirty="0"/>
-          </a:p>
-        </p:txBody>
-      </p:sp>
-      <p:sp>
-        <p:nvSpPr>
-          <p:cNvPr id="10" name="Text 8"/>
-          <p:cNvSpPr/>
-          <p:nvPr/>
-        </p:nvSpPr>
-        <p:spPr>
-          <a:xfrm>
-            <a:off x="868680" y="1417320"/>
-            <a:ext cx="6675120" cy="4434840"/>
+            <a:endParaRPr lang="en-US" sz="3400" dirty="0"/>
+          </a:p>
+        </p:txBody>
+      </p:sp>
+      <p:sp>
+        <p:nvSpPr>
+          <p:cNvPr id="11" name="Text 9"/>
+          <p:cNvSpPr/>
+          <p:nvPr/>
+        </p:nvSpPr>
+        <p:spPr>
+          <a:xfrm>
+            <a:off x="868680" y="1508760"/>
+            <a:ext cx="6537960" cy="4160520"/>
           </a:xfrm>
           <a:prstGeom prst="rect">
             <a:avLst/>
@@ -4424,7 +4552,7 @@
           <a:lstStyle/>
           <a:p>
             <a:r>
-              <a:rPr lang="en-US" sz="1700" dirty="0">
+              <a:rPr lang="en-US" sz="2100" dirty="0">
                 <a:solidFill>
                   <a:srgbClr val="17364A"/>
                 </a:solidFill>
@@ -4434,11 +4562,11 @@
               </a:rPr>
               <a:t>Risk appetite applies differently across AI types.</a:t>
             </a:r>
-            <a:endParaRPr lang="en-US" sz="1700" dirty="0"/>
-          </a:p>
-          <a:p>
-            <a:r>
-              <a:rPr lang="en-US" sz="1700" dirty="0">
+            <a:endParaRPr lang="en-US" sz="2100" dirty="0"/>
+          </a:p>
+          <a:p>
+            <a:r>
+              <a:rPr lang="en-US" sz="2100" dirty="0">
                 <a:solidFill>
                   <a:srgbClr val="17364A"/>
                 </a:solidFill>
@@ -4448,11 +4576,11 @@
               </a:rPr>
               <a:t>Generative AI for internal drafting may fall into a lower-risk category when reviewed by humans.</a:t>
             </a:r>
-            <a:endParaRPr lang="en-US" sz="1700" dirty="0"/>
-          </a:p>
-          <a:p>
-            <a:r>
-              <a:rPr lang="en-US" sz="1700" dirty="0">
+            <a:endParaRPr lang="en-US" sz="2100" dirty="0"/>
+          </a:p>
+          <a:p>
+            <a:r>
+              <a:rPr lang="en-US" sz="2100" dirty="0">
                 <a:solidFill>
                   <a:srgbClr val="17364A"/>
                 </a:solidFill>
@@ -4462,27 +4590,13 @@
               </a:rPr>
               <a:t>Predictive models used for prioritization require stronger validation and monitoring.</a:t>
             </a:r>
-            <a:endParaRPr lang="en-US" sz="1700" dirty="0"/>
-          </a:p>
-          <a:p>
-            <a:r>
-              <a:rPr lang="en-US" sz="1700" dirty="0">
-                <a:solidFill>
-                  <a:srgbClr val="17364A"/>
-                </a:solidFill>
-                <a:latin typeface="Aptos" pitchFamily="34" charset="0"/>
-                <a:ea typeface="Aptos" pitchFamily="34" charset="-122"/>
-                <a:cs typeface="Aptos" pitchFamily="34" charset="-120"/>
-              </a:rPr>
-              <a:t>Agentic tools that can take system actions require strict limits, stop authority, and auditability.</a:t>
-            </a:r>
-            <a:endParaRPr lang="en-US" sz="1700" dirty="0"/>
-          </a:p>
-        </p:txBody>
-      </p:sp>
-      <p:sp>
-        <p:nvSpPr>
-          <p:cNvPr id="11" name="Shape 9"/>
+            <a:endParaRPr lang="en-US" sz="2100" dirty="0"/>
+          </a:p>
+        </p:txBody>
+      </p:sp>
+      <p:sp>
+        <p:nvSpPr>
+          <p:cNvPr id="12" name="Shape 10"/>
           <p:cNvSpPr/>
           <p:nvPr/>
         </p:nvSpPr>
@@ -4509,14 +4623,14 @@
       </p:sp>
       <p:sp>
         <p:nvSpPr>
-          <p:cNvPr id="12" name="Text 10"/>
+          <p:cNvPr id="13" name="Text 11"/>
           <p:cNvSpPr/>
           <p:nvPr/>
         </p:nvSpPr>
         <p:spPr>
           <a:xfrm>
             <a:off x="8074152" y="1563624"/>
-            <a:ext cx="2825496" cy="201168"/>
+            <a:ext cx="2825496" cy="256032"/>
           </a:xfrm>
           <a:prstGeom prst="rect">
             <a:avLst/>
@@ -4532,7 +4646,7 @@
               <a:buNone/>
             </a:pPr>
             <a:r>
-              <a:rPr lang="en-US" sz="950" b="1" dirty="0">
+              <a:rPr lang="en-US" sz="1300" b="1" dirty="0">
                 <a:solidFill>
                   <a:srgbClr val="0068B7"/>
                 </a:solidFill>
@@ -4542,20 +4656,20 @@
               </a:rPr>
               <a:t>Key idea</a:t>
             </a:r>
-            <a:endParaRPr lang="en-US" sz="950" dirty="0"/>
-          </a:p>
-        </p:txBody>
-      </p:sp>
-      <p:sp>
-        <p:nvSpPr>
-          <p:cNvPr id="13" name="Text 11"/>
-          <p:cNvSpPr/>
-          <p:nvPr/>
-        </p:nvSpPr>
-        <p:spPr>
-          <a:xfrm>
-            <a:off x="8074152" y="1856232"/>
-            <a:ext cx="2825496" cy="1261872"/>
+            <a:endParaRPr lang="en-US" sz="1300" dirty="0"/>
+          </a:p>
+        </p:txBody>
+      </p:sp>
+      <p:sp>
+        <p:nvSpPr>
+          <p:cNvPr id="14" name="Text 12"/>
+          <p:cNvSpPr/>
+          <p:nvPr/>
+        </p:nvSpPr>
+        <p:spPr>
+          <a:xfrm>
+            <a:off x="8074152" y="1920240"/>
+            <a:ext cx="2825496" cy="1188720"/>
           </a:xfrm>
           <a:prstGeom prst="rect">
             <a:avLst/>
@@ -4573,7 +4687,7 @@
               <a:buNone/>
             </a:pPr>
             <a:r>
-              <a:rPr lang="en-US" sz="1250" dirty="0">
+              <a:rPr lang="en-US" sz="1550" dirty="0">
                 <a:solidFill>
                   <a:srgbClr val="17364A"/>
                 </a:solidFill>
@@ -4583,13 +4697,13 @@
               </a:rPr>
               <a:t>Risk appetite applies differently across AI types.</a:t>
             </a:r>
-            <a:endParaRPr lang="en-US" sz="1250" dirty="0"/>
-          </a:p>
-        </p:txBody>
-      </p:sp>
-      <p:sp>
-        <p:nvSpPr>
-          <p:cNvPr id="14" name="Shape 12"/>
+            <a:endParaRPr lang="en-US" sz="1550" dirty="0"/>
+          </a:p>
+        </p:txBody>
+      </p:sp>
+      <p:sp>
+        <p:nvSpPr>
+          <p:cNvPr id="15" name="Shape 13"/>
           <p:cNvSpPr/>
           <p:nvPr/>
         </p:nvSpPr>
@@ -4616,14 +4730,14 @@
       </p:sp>
       <p:sp>
         <p:nvSpPr>
-          <p:cNvPr id="15" name="Text 13"/>
+          <p:cNvPr id="16" name="Text 14"/>
           <p:cNvSpPr/>
           <p:nvPr/>
         </p:nvSpPr>
         <p:spPr>
           <a:xfrm>
             <a:off x="8074152" y="3666744"/>
-            <a:ext cx="2825496" cy="201168"/>
+            <a:ext cx="2825496" cy="256032"/>
           </a:xfrm>
           <a:prstGeom prst="rect">
             <a:avLst/>
@@ -4639,7 +4753,7 @@
               <a:buNone/>
             </a:pPr>
             <a:r>
-              <a:rPr lang="en-US" sz="950" b="1" dirty="0">
+              <a:rPr lang="en-US" sz="1300" b="1" dirty="0">
                 <a:solidFill>
                   <a:srgbClr val="0068B7"/>
                 </a:solidFill>
@@ -4649,20 +4763,20 @@
               </a:rPr>
               <a:t>Use this for</a:t>
             </a:r>
-            <a:endParaRPr lang="en-US" sz="950" dirty="0"/>
-          </a:p>
-        </p:txBody>
-      </p:sp>
-      <p:sp>
-        <p:nvSpPr>
-          <p:cNvPr id="16" name="Text 14"/>
-          <p:cNvSpPr/>
-          <p:nvPr/>
-        </p:nvSpPr>
-        <p:spPr>
-          <a:xfrm>
-            <a:off x="8074152" y="3959352"/>
-            <a:ext cx="2825496" cy="1170432"/>
+            <a:endParaRPr lang="en-US" sz="1300" dirty="0"/>
+          </a:p>
+        </p:txBody>
+      </p:sp>
+      <p:sp>
+        <p:nvSpPr>
+          <p:cNvPr id="17" name="Text 15"/>
+          <p:cNvSpPr/>
+          <p:nvPr/>
+        </p:nvSpPr>
+        <p:spPr>
+          <a:xfrm>
+            <a:off x="8074152" y="4023360"/>
+            <a:ext cx="2825496" cy="1097280"/>
           </a:xfrm>
           <a:prstGeom prst="rect">
             <a:avLst/>
@@ -4680,7 +4794,7 @@
               <a:buNone/>
             </a:pPr>
             <a:r>
-              <a:rPr lang="en-US" sz="1250" dirty="0">
+              <a:rPr lang="en-US" sz="1550" dirty="0">
                 <a:solidFill>
                   <a:srgbClr val="17364A"/>
                 </a:solidFill>
@@ -4690,7 +4804,7 @@
               </a:rPr>
               <a:t>Connect the concept to public health decisions, safeguards, documentation, or implementation work.</a:t>
             </a:r>
-            <a:endParaRPr lang="en-US" sz="1250" dirty="0"/>
+            <a:endParaRPr lang="en-US" sz="1550" dirty="0"/>
           </a:p>
         </p:txBody>
       </p:sp>
@@ -4887,7 +5001,7 @@
                 <a:ea typeface="Aptos" pitchFamily="34" charset="-122"/>
                 <a:cs typeface="Aptos" pitchFamily="34" charset="-120"/>
               </a:rPr>
-              <a:t>© Paula Soper</a:t>
+              <a:t>Â© Paula Soper</a:t>
             </a:r>
             <a:endParaRPr lang="en-US" sz="800" dirty="0"/>
           </a:p>
@@ -4895,7 +5009,46 @@
       </p:sp>
       <p:sp>
         <p:nvSpPr>
-          <p:cNvPr id="7" name="Shape 5"/>
+          <p:cNvPr id="7" name="Text 5"/>
+          <p:cNvSpPr/>
+          <p:nvPr/>
+        </p:nvSpPr>
+        <p:spPr>
+          <a:xfrm>
+            <a:off x="11137392" y="6510528"/>
+            <a:ext cx="411480" cy="201168"/>
+          </a:xfrm>
+          <a:prstGeom prst="rect">
+            <a:avLst/>
+          </a:prstGeom>
+          <a:noFill/>
+          <a:ln/>
+        </p:spPr>
+        <p:txBody>
+          <a:bodyPr wrap="square" lIns="0" tIns="0" rIns="0" bIns="0" rtlCol="0" anchor="ctr"/>
+          <a:lstStyle/>
+          <a:p>
+            <a:pPr algn="r" indent="0" marL="0">
+              <a:buNone/>
+            </a:pPr>
+            <a:r>
+              <a:rPr lang="en-US" sz="900" dirty="0">
+                <a:solidFill>
+                  <a:srgbClr val="5F7181"/>
+                </a:solidFill>
+                <a:latin typeface="Aptos" pitchFamily="34" charset="0"/>
+                <a:ea typeface="Aptos" pitchFamily="34" charset="-122"/>
+                <a:cs typeface="Aptos" pitchFamily="34" charset="-120"/>
+              </a:rPr>
+              <a:t>13</a:t>
+            </a:r>
+            <a:endParaRPr lang="en-US" sz="900" dirty="0"/>
+          </a:p>
+        </p:txBody>
+      </p:sp>
+      <p:sp>
+        <p:nvSpPr>
+          <p:cNvPr id="8" name="Shape 6"/>
           <p:cNvSpPr/>
           <p:nvPr/>
         </p:nvSpPr>
@@ -4920,7 +5073,7 @@
       </p:sp>
       <p:sp>
         <p:nvSpPr>
-          <p:cNvPr id="8" name="Text 6"/>
+          <p:cNvPr id="9" name="Text 7"/>
           <p:cNvSpPr/>
           <p:nvPr/>
         </p:nvSpPr>
@@ -4959,14 +5112,14 @@
       </p:sp>
       <p:sp>
         <p:nvSpPr>
-          <p:cNvPr id="9" name="Text 7"/>
+          <p:cNvPr id="10" name="Text 8"/>
           <p:cNvSpPr/>
           <p:nvPr/>
         </p:nvSpPr>
         <p:spPr>
           <a:xfrm>
             <a:off x="640080" y="621792"/>
-            <a:ext cx="10881360" cy="566928"/>
+            <a:ext cx="10881360" cy="713232"/>
           </a:xfrm>
           <a:prstGeom prst="rect">
             <a:avLst/>
@@ -4984,7 +5137,7 @@
               <a:buNone/>
             </a:pPr>
             <a:r>
-              <a:rPr lang="en-US" sz="2700" b="1" dirty="0">
+              <a:rPr lang="en-US" sz="3400" b="1" dirty="0">
                 <a:solidFill>
                   <a:srgbClr val="003A63"/>
                 </a:solidFill>
@@ -4994,20 +5147,20 @@
               </a:rPr>
               <a:t>Reflection Questions</a:t>
             </a:r>
-            <a:endParaRPr lang="en-US" sz="2700" dirty="0"/>
-          </a:p>
-        </p:txBody>
-      </p:sp>
-      <p:sp>
-        <p:nvSpPr>
-          <p:cNvPr id="10" name="Text 8"/>
-          <p:cNvSpPr/>
-          <p:nvPr/>
-        </p:nvSpPr>
-        <p:spPr>
-          <a:xfrm>
-            <a:off x="868680" y="1417320"/>
-            <a:ext cx="6675120" cy="4434840"/>
+            <a:endParaRPr lang="en-US" sz="3400" dirty="0"/>
+          </a:p>
+        </p:txBody>
+      </p:sp>
+      <p:sp>
+        <p:nvSpPr>
+          <p:cNvPr id="11" name="Text 9"/>
+          <p:cNvSpPr/>
+          <p:nvPr/>
+        </p:nvSpPr>
+        <p:spPr>
+          <a:xfrm>
+            <a:off x="868680" y="1508760"/>
+            <a:ext cx="6537960" cy="4160520"/>
           </a:xfrm>
           <a:prstGeom prst="rect">
             <a:avLst/>
@@ -5022,7 +5175,7 @@
           <a:lstStyle/>
           <a:p>
             <a:r>
-              <a:rPr lang="en-US" sz="1700" dirty="0">
+              <a:rPr lang="en-US" sz="2100" dirty="0">
                 <a:solidFill>
                   <a:srgbClr val="17364A"/>
                 </a:solidFill>
@@ -5030,13 +5183,13 @@
                 <a:ea typeface="Aptos" pitchFamily="34" charset="-122"/>
                 <a:cs typeface="Aptos" pitchFamily="34" charset="-120"/>
               </a:rPr>
-              <a:t>Which current or proposed AI use case in your agency raises this leadership or governance issue most clearly?</a:t>
-            </a:r>
-            <a:endParaRPr lang="en-US" sz="1700" dirty="0"/>
-          </a:p>
-          <a:p>
-            <a:r>
-              <a:rPr lang="en-US" sz="1700" dirty="0">
+              <a:t>Which current or proposed AI use case in your agency raises this leadership or governance issue most.</a:t>
+            </a:r>
+            <a:endParaRPr lang="en-US" sz="2100" dirty="0"/>
+          </a:p>
+          <a:p>
+            <a:r>
+              <a:rPr lang="en-US" sz="2100" dirty="0">
                 <a:solidFill>
                   <a:srgbClr val="17364A"/>
                 </a:solidFill>
@@ -5046,11 +5199,11 @@
               </a:rPr>
               <a:t>Who currently has authority to make decisions about this issue, and is that authority documented?</a:t>
             </a:r>
-            <a:endParaRPr lang="en-US" sz="1700" dirty="0"/>
-          </a:p>
-          <a:p>
-            <a:r>
-              <a:rPr lang="en-US" sz="1700" dirty="0">
+            <a:endParaRPr lang="en-US" sz="2100" dirty="0"/>
+          </a:p>
+          <a:p>
+            <a:r>
+              <a:rPr lang="en-US" sz="2100" dirty="0">
                 <a:solidFill>
                   <a:srgbClr val="17364A"/>
                 </a:solidFill>
@@ -5060,13 +5213,13 @@
               </a:rPr>
               <a:t>What evidence would governance or leadership need before approving the use case?</a:t>
             </a:r>
-            <a:endParaRPr lang="en-US" sz="1700" dirty="0"/>
-          </a:p>
-        </p:txBody>
-      </p:sp>
-      <p:sp>
-        <p:nvSpPr>
-          <p:cNvPr id="11" name="Shape 9"/>
+            <a:endParaRPr lang="en-US" sz="2100" dirty="0"/>
+          </a:p>
+        </p:txBody>
+      </p:sp>
+      <p:sp>
+        <p:nvSpPr>
+          <p:cNvPr id="12" name="Shape 10"/>
           <p:cNvSpPr/>
           <p:nvPr/>
         </p:nvSpPr>
@@ -5093,14 +5246,14 @@
       </p:sp>
       <p:sp>
         <p:nvSpPr>
-          <p:cNvPr id="12" name="Text 10"/>
+          <p:cNvPr id="13" name="Text 11"/>
           <p:cNvSpPr/>
           <p:nvPr/>
         </p:nvSpPr>
         <p:spPr>
           <a:xfrm>
             <a:off x="8074152" y="1563624"/>
-            <a:ext cx="2825496" cy="201168"/>
+            <a:ext cx="2825496" cy="256032"/>
           </a:xfrm>
           <a:prstGeom prst="rect">
             <a:avLst/>
@@ -5116,7 +5269,7 @@
               <a:buNone/>
             </a:pPr>
             <a:r>
-              <a:rPr lang="en-US" sz="950" b="1" dirty="0">
+              <a:rPr lang="en-US" sz="1300" b="1" dirty="0">
                 <a:solidFill>
                   <a:srgbClr val="0068B7"/>
                 </a:solidFill>
@@ -5126,20 +5279,20 @@
               </a:rPr>
               <a:t>Key idea</a:t>
             </a:r>
-            <a:endParaRPr lang="en-US" sz="950" dirty="0"/>
-          </a:p>
-        </p:txBody>
-      </p:sp>
-      <p:sp>
-        <p:nvSpPr>
-          <p:cNvPr id="13" name="Text 11"/>
-          <p:cNvSpPr/>
-          <p:nvPr/>
-        </p:nvSpPr>
-        <p:spPr>
-          <a:xfrm>
-            <a:off x="8074152" y="1856232"/>
-            <a:ext cx="2825496" cy="1261872"/>
+            <a:endParaRPr lang="en-US" sz="1300" dirty="0"/>
+          </a:p>
+        </p:txBody>
+      </p:sp>
+      <p:sp>
+        <p:nvSpPr>
+          <p:cNvPr id="14" name="Text 12"/>
+          <p:cNvSpPr/>
+          <p:nvPr/>
+        </p:nvSpPr>
+        <p:spPr>
+          <a:xfrm>
+            <a:off x="8074152" y="1920240"/>
+            <a:ext cx="2825496" cy="1188720"/>
           </a:xfrm>
           <a:prstGeom prst="rect">
             <a:avLst/>
@@ -5157,7 +5310,7 @@
               <a:buNone/>
             </a:pPr>
             <a:r>
-              <a:rPr lang="en-US" sz="1250" dirty="0">
+              <a:rPr lang="en-US" sz="1550" dirty="0">
                 <a:solidFill>
                   <a:srgbClr val="17364A"/>
                 </a:solidFill>
@@ -5165,15 +5318,15 @@
                 <a:ea typeface="Aptos" pitchFamily="34" charset="-122"/>
                 <a:cs typeface="Aptos" pitchFamily="34" charset="-120"/>
               </a:rPr>
-              <a:t>Which current or proposed AI use case in your agency raises this leadership or governance issue most clearly?</a:t>
-            </a:r>
-            <a:endParaRPr lang="en-US" sz="1250" dirty="0"/>
-          </a:p>
-        </p:txBody>
-      </p:sp>
-      <p:sp>
-        <p:nvSpPr>
-          <p:cNvPr id="14" name="Shape 12"/>
+              <a:t>Which current or proposed AI use case in your agency raises this leadership or governance issue most.</a:t>
+            </a:r>
+            <a:endParaRPr lang="en-US" sz="1550" dirty="0"/>
+          </a:p>
+        </p:txBody>
+      </p:sp>
+      <p:sp>
+        <p:nvSpPr>
+          <p:cNvPr id="15" name="Shape 13"/>
           <p:cNvSpPr/>
           <p:nvPr/>
         </p:nvSpPr>
@@ -5200,14 +5353,14 @@
       </p:sp>
       <p:sp>
         <p:nvSpPr>
-          <p:cNvPr id="15" name="Text 13"/>
+          <p:cNvPr id="16" name="Text 14"/>
           <p:cNvSpPr/>
           <p:nvPr/>
         </p:nvSpPr>
         <p:spPr>
           <a:xfrm>
             <a:off x="8074152" y="3666744"/>
-            <a:ext cx="2825496" cy="201168"/>
+            <a:ext cx="2825496" cy="256032"/>
           </a:xfrm>
           <a:prstGeom prst="rect">
             <a:avLst/>
@@ -5223,7 +5376,7 @@
               <a:buNone/>
             </a:pPr>
             <a:r>
-              <a:rPr lang="en-US" sz="950" b="1" dirty="0">
+              <a:rPr lang="en-US" sz="1300" b="1" dirty="0">
                 <a:solidFill>
                   <a:srgbClr val="0068B7"/>
                 </a:solidFill>
@@ -5233,20 +5386,20 @@
               </a:rPr>
               <a:t>Use this for</a:t>
             </a:r>
-            <a:endParaRPr lang="en-US" sz="950" dirty="0"/>
-          </a:p>
-        </p:txBody>
-      </p:sp>
-      <p:sp>
-        <p:nvSpPr>
-          <p:cNvPr id="16" name="Text 14"/>
-          <p:cNvSpPr/>
-          <p:nvPr/>
-        </p:nvSpPr>
-        <p:spPr>
-          <a:xfrm>
-            <a:off x="8074152" y="3959352"/>
-            <a:ext cx="2825496" cy="1170432"/>
+            <a:endParaRPr lang="en-US" sz="1300" dirty="0"/>
+          </a:p>
+        </p:txBody>
+      </p:sp>
+      <p:sp>
+        <p:nvSpPr>
+          <p:cNvPr id="17" name="Text 15"/>
+          <p:cNvSpPr/>
+          <p:nvPr/>
+        </p:nvSpPr>
+        <p:spPr>
+          <a:xfrm>
+            <a:off x="8074152" y="4023360"/>
+            <a:ext cx="2825496" cy="1097280"/>
           </a:xfrm>
           <a:prstGeom prst="rect">
             <a:avLst/>
@@ -5264,7 +5417,7 @@
               <a:buNone/>
             </a:pPr>
             <a:r>
-              <a:rPr lang="en-US" sz="1250" dirty="0">
+              <a:rPr lang="en-US" sz="1550" dirty="0">
                 <a:solidFill>
                   <a:srgbClr val="17364A"/>
                 </a:solidFill>
@@ -5274,7 +5427,7 @@
               </a:rPr>
               <a:t>Connect the concept to public health decisions, safeguards, documentation, or implementation work.</a:t>
             </a:r>
-            <a:endParaRPr lang="en-US" sz="1250" dirty="0"/>
+            <a:endParaRPr lang="en-US" sz="1550" dirty="0"/>
           </a:p>
         </p:txBody>
       </p:sp>
@@ -5471,7 +5624,7 @@
                 <a:ea typeface="Aptos" pitchFamily="34" charset="-122"/>
                 <a:cs typeface="Aptos" pitchFamily="34" charset="-120"/>
               </a:rPr>
-              <a:t>© Paula Soper</a:t>
+              <a:t>Â© Paula Soper</a:t>
             </a:r>
             <a:endParaRPr lang="en-US" sz="800" dirty="0"/>
           </a:p>
@@ -5485,8 +5638,47 @@
         </p:nvSpPr>
         <p:spPr>
           <a:xfrm>
+            <a:off x="11137392" y="6510528"/>
+            <a:ext cx="411480" cy="201168"/>
+          </a:xfrm>
+          <a:prstGeom prst="rect">
+            <a:avLst/>
+          </a:prstGeom>
+          <a:noFill/>
+          <a:ln/>
+        </p:spPr>
+        <p:txBody>
+          <a:bodyPr wrap="square" lIns="0" tIns="0" rIns="0" bIns="0" rtlCol="0" anchor="ctr"/>
+          <a:lstStyle/>
+          <a:p>
+            <a:pPr algn="r" indent="0" marL="0">
+              <a:buNone/>
+            </a:pPr>
+            <a:r>
+              <a:rPr lang="en-US" sz="900" dirty="0">
+                <a:solidFill>
+                  <a:srgbClr val="5F7181"/>
+                </a:solidFill>
+                <a:latin typeface="Aptos" pitchFamily="34" charset="0"/>
+                <a:ea typeface="Aptos" pitchFamily="34" charset="-122"/>
+                <a:cs typeface="Aptos" pitchFamily="34" charset="-120"/>
+              </a:rPr>
+              <a:t>14</a:t>
+            </a:r>
+            <a:endParaRPr lang="en-US" sz="900" dirty="0"/>
+          </a:p>
+        </p:txBody>
+      </p:sp>
+      <p:sp>
+        <p:nvSpPr>
+          <p:cNvPr id="8" name="Text 6"/>
+          <p:cNvSpPr/>
+          <p:nvPr/>
+        </p:nvSpPr>
+        <p:spPr>
+          <a:xfrm>
             <a:off x="640080" y="658368"/>
-            <a:ext cx="10881360" cy="566928"/>
+            <a:ext cx="10881360" cy="713232"/>
           </a:xfrm>
           <a:prstGeom prst="rect">
             <a:avLst/>
@@ -5504,7 +5696,7 @@
               <a:buNone/>
             </a:pPr>
             <a:r>
-              <a:rPr lang="en-US" sz="2700" b="1" dirty="0">
+              <a:rPr lang="en-US" sz="3400" b="1" dirty="0">
                 <a:solidFill>
                   <a:srgbClr val="003A63"/>
                 </a:solidFill>
@@ -5514,20 +5706,20 @@
               </a:rPr>
               <a:t>Reflection Questions Continued</a:t>
             </a:r>
-            <a:endParaRPr lang="en-US" sz="2700" dirty="0"/>
-          </a:p>
-        </p:txBody>
-      </p:sp>
-      <p:sp>
-        <p:nvSpPr>
-          <p:cNvPr id="8" name="Text 6"/>
-          <p:cNvSpPr/>
-          <p:nvPr/>
-        </p:nvSpPr>
-        <p:spPr>
-          <a:xfrm>
-            <a:off x="868680" y="1417320"/>
-            <a:ext cx="6675120" cy="4434840"/>
+            <a:endParaRPr lang="en-US" sz="3400" dirty="0"/>
+          </a:p>
+        </p:txBody>
+      </p:sp>
+      <p:sp>
+        <p:nvSpPr>
+          <p:cNvPr id="9" name="Text 7"/>
+          <p:cNvSpPr/>
+          <p:nvPr/>
+        </p:nvSpPr>
+        <p:spPr>
+          <a:xfrm>
+            <a:off x="868680" y="1508760"/>
+            <a:ext cx="6537960" cy="4160520"/>
           </a:xfrm>
           <a:prstGeom prst="rect">
             <a:avLst/>
@@ -5542,7 +5734,7 @@
           <a:lstStyle/>
           <a:p>
             <a:r>
-              <a:rPr lang="en-US" sz="1700" dirty="0">
+              <a:rPr lang="en-US" sz="2100" dirty="0">
                 <a:solidFill>
                   <a:srgbClr val="17364A"/>
                 </a:solidFill>
@@ -5552,11 +5744,11 @@
               </a:rPr>
               <a:t>Which staff, partners, or communities would be affected if this issue were handled poorly?</a:t>
             </a:r>
-            <a:endParaRPr lang="en-US" sz="1700" dirty="0"/>
-          </a:p>
-          <a:p>
-            <a:r>
-              <a:rPr lang="en-US" sz="1700" dirty="0">
+            <a:endParaRPr lang="en-US" sz="2100" dirty="0"/>
+          </a:p>
+          <a:p>
+            <a:r>
+              <a:rPr lang="en-US" sz="2100" dirty="0">
                 <a:solidFill>
                   <a:srgbClr val="17364A"/>
                 </a:solidFill>
@@ -5566,13 +5758,13 @@
               </a:rPr>
               <a:t>What policy, process, or artifact should be created or updated after this module?</a:t>
             </a:r>
-            <a:endParaRPr lang="en-US" sz="1700" dirty="0"/>
-          </a:p>
-        </p:txBody>
-      </p:sp>
-      <p:sp>
-        <p:nvSpPr>
-          <p:cNvPr id="9" name="Shape 7"/>
+            <a:endParaRPr lang="en-US" sz="2100" dirty="0"/>
+          </a:p>
+        </p:txBody>
+      </p:sp>
+      <p:sp>
+        <p:nvSpPr>
+          <p:cNvPr id="10" name="Shape 8"/>
           <p:cNvSpPr/>
           <p:nvPr/>
         </p:nvSpPr>
@@ -5599,14 +5791,14 @@
       </p:sp>
       <p:sp>
         <p:nvSpPr>
-          <p:cNvPr id="10" name="Text 8"/>
+          <p:cNvPr id="11" name="Text 9"/>
           <p:cNvSpPr/>
           <p:nvPr/>
         </p:nvSpPr>
         <p:spPr>
           <a:xfrm>
             <a:off x="8074152" y="1563624"/>
-            <a:ext cx="2825496" cy="201168"/>
+            <a:ext cx="2825496" cy="256032"/>
           </a:xfrm>
           <a:prstGeom prst="rect">
             <a:avLst/>
@@ -5622,7 +5814,7 @@
               <a:buNone/>
             </a:pPr>
             <a:r>
-              <a:rPr lang="en-US" sz="950" b="1" dirty="0">
+              <a:rPr lang="en-US" sz="1300" b="1" dirty="0">
                 <a:solidFill>
                   <a:srgbClr val="0068B7"/>
                 </a:solidFill>
@@ -5632,20 +5824,20 @@
               </a:rPr>
               <a:t>Key idea</a:t>
             </a:r>
-            <a:endParaRPr lang="en-US" sz="950" dirty="0"/>
-          </a:p>
-        </p:txBody>
-      </p:sp>
-      <p:sp>
-        <p:nvSpPr>
-          <p:cNvPr id="11" name="Text 9"/>
-          <p:cNvSpPr/>
-          <p:nvPr/>
-        </p:nvSpPr>
-        <p:spPr>
-          <a:xfrm>
-            <a:off x="8074152" y="1856232"/>
-            <a:ext cx="2825496" cy="1261872"/>
+            <a:endParaRPr lang="en-US" sz="1300" dirty="0"/>
+          </a:p>
+        </p:txBody>
+      </p:sp>
+      <p:sp>
+        <p:nvSpPr>
+          <p:cNvPr id="12" name="Text 10"/>
+          <p:cNvSpPr/>
+          <p:nvPr/>
+        </p:nvSpPr>
+        <p:spPr>
+          <a:xfrm>
+            <a:off x="8074152" y="1920240"/>
+            <a:ext cx="2825496" cy="1188720"/>
           </a:xfrm>
           <a:prstGeom prst="rect">
             <a:avLst/>
@@ -5663,7 +5855,7 @@
               <a:buNone/>
             </a:pPr>
             <a:r>
-              <a:rPr lang="en-US" sz="1250" dirty="0">
+              <a:rPr lang="en-US" sz="1550" dirty="0">
                 <a:solidFill>
                   <a:srgbClr val="17364A"/>
                 </a:solidFill>
@@ -5673,13 +5865,13 @@
               </a:rPr>
               <a:t>Which staff, partners, or communities would be affected if this issue were handled poorly?</a:t>
             </a:r>
-            <a:endParaRPr lang="en-US" sz="1250" dirty="0"/>
-          </a:p>
-        </p:txBody>
-      </p:sp>
-      <p:sp>
-        <p:nvSpPr>
-          <p:cNvPr id="12" name="Shape 10"/>
+            <a:endParaRPr lang="en-US" sz="1550" dirty="0"/>
+          </a:p>
+        </p:txBody>
+      </p:sp>
+      <p:sp>
+        <p:nvSpPr>
+          <p:cNvPr id="13" name="Shape 11"/>
           <p:cNvSpPr/>
           <p:nvPr/>
         </p:nvSpPr>
@@ -5706,14 +5898,14 @@
       </p:sp>
       <p:sp>
         <p:nvSpPr>
-          <p:cNvPr id="13" name="Text 11"/>
+          <p:cNvPr id="14" name="Text 12"/>
           <p:cNvSpPr/>
           <p:nvPr/>
         </p:nvSpPr>
         <p:spPr>
           <a:xfrm>
             <a:off x="8074152" y="3666744"/>
-            <a:ext cx="2825496" cy="201168"/>
+            <a:ext cx="2825496" cy="256032"/>
           </a:xfrm>
           <a:prstGeom prst="rect">
             <a:avLst/>
@@ -5729,7 +5921,7 @@
               <a:buNone/>
             </a:pPr>
             <a:r>
-              <a:rPr lang="en-US" sz="950" b="1" dirty="0">
+              <a:rPr lang="en-US" sz="1300" b="1" dirty="0">
                 <a:solidFill>
                   <a:srgbClr val="0068B7"/>
                 </a:solidFill>
@@ -5739,20 +5931,20 @@
               </a:rPr>
               <a:t>Use this for</a:t>
             </a:r>
-            <a:endParaRPr lang="en-US" sz="950" dirty="0"/>
-          </a:p>
-        </p:txBody>
-      </p:sp>
-      <p:sp>
-        <p:nvSpPr>
-          <p:cNvPr id="14" name="Text 12"/>
-          <p:cNvSpPr/>
-          <p:nvPr/>
-        </p:nvSpPr>
-        <p:spPr>
-          <a:xfrm>
-            <a:off x="8074152" y="3959352"/>
-            <a:ext cx="2825496" cy="1170432"/>
+            <a:endParaRPr lang="en-US" sz="1300" dirty="0"/>
+          </a:p>
+        </p:txBody>
+      </p:sp>
+      <p:sp>
+        <p:nvSpPr>
+          <p:cNvPr id="15" name="Text 13"/>
+          <p:cNvSpPr/>
+          <p:nvPr/>
+        </p:nvSpPr>
+        <p:spPr>
+          <a:xfrm>
+            <a:off x="8074152" y="4023360"/>
+            <a:ext cx="2825496" cy="1097280"/>
           </a:xfrm>
           <a:prstGeom prst="rect">
             <a:avLst/>
@@ -5770,7 +5962,7 @@
               <a:buNone/>
             </a:pPr>
             <a:r>
-              <a:rPr lang="en-US" sz="1250" dirty="0">
+              <a:rPr lang="en-US" sz="1550" dirty="0">
                 <a:solidFill>
                   <a:srgbClr val="17364A"/>
                 </a:solidFill>
@@ -5780,7 +5972,7 @@
               </a:rPr>
               <a:t>Connect the concept to public health decisions, safeguards, documentation, or implementation work.</a:t>
             </a:r>
-            <a:endParaRPr lang="en-US" sz="1250" dirty="0"/>
+            <a:endParaRPr lang="en-US" sz="1550" dirty="0"/>
           </a:p>
         </p:txBody>
       </p:sp>
@@ -5977,7 +6169,7 @@
                 <a:ea typeface="Aptos" pitchFamily="34" charset="-122"/>
                 <a:cs typeface="Aptos" pitchFamily="34" charset="-120"/>
               </a:rPr>
-              <a:t>© Paula Soper</a:t>
+              <a:t>Â© Paula Soper</a:t>
             </a:r>
             <a:endParaRPr lang="en-US" sz="800" dirty="0"/>
           </a:p>
@@ -5985,7 +6177,46 @@
       </p:sp>
       <p:sp>
         <p:nvSpPr>
-          <p:cNvPr id="7" name="Shape 5"/>
+          <p:cNvPr id="7" name="Text 5"/>
+          <p:cNvSpPr/>
+          <p:nvPr/>
+        </p:nvSpPr>
+        <p:spPr>
+          <a:xfrm>
+            <a:off x="11137392" y="6510528"/>
+            <a:ext cx="411480" cy="201168"/>
+          </a:xfrm>
+          <a:prstGeom prst="rect">
+            <a:avLst/>
+          </a:prstGeom>
+          <a:noFill/>
+          <a:ln/>
+        </p:spPr>
+        <p:txBody>
+          <a:bodyPr wrap="square" lIns="0" tIns="0" rIns="0" bIns="0" rtlCol="0" anchor="ctr"/>
+          <a:lstStyle/>
+          <a:p>
+            <a:pPr algn="r" indent="0" marL="0">
+              <a:buNone/>
+            </a:pPr>
+            <a:r>
+              <a:rPr lang="en-US" sz="900" dirty="0">
+                <a:solidFill>
+                  <a:srgbClr val="5F7181"/>
+                </a:solidFill>
+                <a:latin typeface="Aptos" pitchFamily="34" charset="0"/>
+                <a:ea typeface="Aptos" pitchFamily="34" charset="-122"/>
+                <a:cs typeface="Aptos" pitchFamily="34" charset="-120"/>
+              </a:rPr>
+              <a:t>15</a:t>
+            </a:r>
+            <a:endParaRPr lang="en-US" sz="900" dirty="0"/>
+          </a:p>
+        </p:txBody>
+      </p:sp>
+      <p:sp>
+        <p:nvSpPr>
+          <p:cNvPr id="8" name="Shape 6"/>
           <p:cNvSpPr/>
           <p:nvPr/>
         </p:nvSpPr>
@@ -6010,7 +6241,7 @@
       </p:sp>
       <p:sp>
         <p:nvSpPr>
-          <p:cNvPr id="8" name="Text 6"/>
+          <p:cNvPr id="9" name="Text 7"/>
           <p:cNvSpPr/>
           <p:nvPr/>
         </p:nvSpPr>
@@ -6049,14 +6280,14 @@
       </p:sp>
       <p:sp>
         <p:nvSpPr>
-          <p:cNvPr id="9" name="Text 7"/>
+          <p:cNvPr id="10" name="Text 8"/>
           <p:cNvSpPr/>
           <p:nvPr/>
         </p:nvSpPr>
         <p:spPr>
           <a:xfrm>
             <a:off x="640080" y="621792"/>
-            <a:ext cx="10881360" cy="566928"/>
+            <a:ext cx="10881360" cy="713232"/>
           </a:xfrm>
           <a:prstGeom prst="rect">
             <a:avLst/>
@@ -6074,7 +6305,7 @@
               <a:buNone/>
             </a:pPr>
             <a:r>
-              <a:rPr lang="en-US" sz="2700" b="1" dirty="0">
+              <a:rPr lang="en-US" sz="3400" b="1" dirty="0">
                 <a:solidFill>
                   <a:srgbClr val="003A63"/>
                 </a:solidFill>
@@ -6084,20 +6315,20 @@
               </a:rPr>
               <a:t>Practical Exercise</a:t>
             </a:r>
-            <a:endParaRPr lang="en-US" sz="2700" dirty="0"/>
-          </a:p>
-        </p:txBody>
-      </p:sp>
-      <p:sp>
-        <p:nvSpPr>
-          <p:cNvPr id="10" name="Text 8"/>
-          <p:cNvSpPr/>
-          <p:nvPr/>
-        </p:nvSpPr>
-        <p:spPr>
-          <a:xfrm>
-            <a:off x="868680" y="1417320"/>
-            <a:ext cx="6675120" cy="4434840"/>
+            <a:endParaRPr lang="en-US" sz="3400" dirty="0"/>
+          </a:p>
+        </p:txBody>
+      </p:sp>
+      <p:sp>
+        <p:nvSpPr>
+          <p:cNvPr id="11" name="Text 9"/>
+          <p:cNvSpPr/>
+          <p:nvPr/>
+        </p:nvSpPr>
+        <p:spPr>
+          <a:xfrm>
+            <a:off x="868680" y="1508760"/>
+            <a:ext cx="6537960" cy="4160520"/>
           </a:xfrm>
           <a:prstGeom prst="rect">
             <a:avLst/>
@@ -6112,7 +6343,7 @@
           <a:lstStyle/>
           <a:p>
             <a:r>
-              <a:rPr lang="en-US" sz="1700" dirty="0">
+              <a:rPr lang="en-US" sz="2100" dirty="0">
                 <a:solidFill>
                   <a:srgbClr val="17364A"/>
                 </a:solidFill>
@@ -6120,15 +6351,15 @@
                 <a:ea typeface="Aptos" pitchFamily="34" charset="-122"/>
                 <a:cs typeface="Aptos" pitchFamily="34" charset="-120"/>
               </a:rPr>
-              <a:t>Draft a risk appetite statement and a risk tolerance table for at least four AI use categories: internal productivity,.</a:t>
-            </a:r>
-            <a:endParaRPr lang="en-US" sz="1700" dirty="0"/>
-          </a:p>
-        </p:txBody>
-      </p:sp>
-      <p:sp>
-        <p:nvSpPr>
-          <p:cNvPr id="11" name="Shape 9"/>
+              <a:t>Draft a risk appetite statement and a risk tolerance table for at least four AI use categories:.</a:t>
+            </a:r>
+            <a:endParaRPr lang="en-US" sz="2100" dirty="0"/>
+          </a:p>
+        </p:txBody>
+      </p:sp>
+      <p:sp>
+        <p:nvSpPr>
+          <p:cNvPr id="12" name="Shape 10"/>
           <p:cNvSpPr/>
           <p:nvPr/>
         </p:nvSpPr>
@@ -6155,14 +6386,14 @@
       </p:sp>
       <p:sp>
         <p:nvSpPr>
-          <p:cNvPr id="12" name="Text 10"/>
+          <p:cNvPr id="13" name="Text 11"/>
           <p:cNvSpPr/>
           <p:nvPr/>
         </p:nvSpPr>
         <p:spPr>
           <a:xfrm>
             <a:off x="8074152" y="1563624"/>
-            <a:ext cx="2825496" cy="201168"/>
+            <a:ext cx="2825496" cy="256032"/>
           </a:xfrm>
           <a:prstGeom prst="rect">
             <a:avLst/>
@@ -6178,7 +6409,7 @@
               <a:buNone/>
             </a:pPr>
             <a:r>
-              <a:rPr lang="en-US" sz="950" b="1" dirty="0">
+              <a:rPr lang="en-US" sz="1300" b="1" dirty="0">
                 <a:solidFill>
                   <a:srgbClr val="0068B7"/>
                 </a:solidFill>
@@ -6188,20 +6419,20 @@
               </a:rPr>
               <a:t>Key idea</a:t>
             </a:r>
-            <a:endParaRPr lang="en-US" sz="950" dirty="0"/>
-          </a:p>
-        </p:txBody>
-      </p:sp>
-      <p:sp>
-        <p:nvSpPr>
-          <p:cNvPr id="13" name="Text 11"/>
-          <p:cNvSpPr/>
-          <p:nvPr/>
-        </p:nvSpPr>
-        <p:spPr>
-          <a:xfrm>
-            <a:off x="8074152" y="1856232"/>
-            <a:ext cx="2825496" cy="1261872"/>
+            <a:endParaRPr lang="en-US" sz="1300" dirty="0"/>
+          </a:p>
+        </p:txBody>
+      </p:sp>
+      <p:sp>
+        <p:nvSpPr>
+          <p:cNvPr id="14" name="Text 12"/>
+          <p:cNvSpPr/>
+          <p:nvPr/>
+        </p:nvSpPr>
+        <p:spPr>
+          <a:xfrm>
+            <a:off x="8074152" y="1920240"/>
+            <a:ext cx="2825496" cy="1188720"/>
           </a:xfrm>
           <a:prstGeom prst="rect">
             <a:avLst/>
@@ -6219,7 +6450,7 @@
               <a:buNone/>
             </a:pPr>
             <a:r>
-              <a:rPr lang="en-US" sz="1250" dirty="0">
+              <a:rPr lang="en-US" sz="1550" dirty="0">
                 <a:solidFill>
                   <a:srgbClr val="17364A"/>
                 </a:solidFill>
@@ -6227,15 +6458,15 @@
                 <a:ea typeface="Aptos" pitchFamily="34" charset="-122"/>
                 <a:cs typeface="Aptos" pitchFamily="34" charset="-120"/>
               </a:rPr>
-              <a:t>Draft a risk appetite statement and a risk tolerance table for at least four AI use categories: internal productivity,.</a:t>
-            </a:r>
-            <a:endParaRPr lang="en-US" sz="1250" dirty="0"/>
-          </a:p>
-        </p:txBody>
-      </p:sp>
-      <p:sp>
-        <p:nvSpPr>
-          <p:cNvPr id="14" name="Shape 12"/>
+              <a:t>Draft a risk appetite statement and a risk tolerance table for at least four AI use categories:.</a:t>
+            </a:r>
+            <a:endParaRPr lang="en-US" sz="1550" dirty="0"/>
+          </a:p>
+        </p:txBody>
+      </p:sp>
+      <p:sp>
+        <p:nvSpPr>
+          <p:cNvPr id="15" name="Shape 13"/>
           <p:cNvSpPr/>
           <p:nvPr/>
         </p:nvSpPr>
@@ -6262,14 +6493,14 @@
       </p:sp>
       <p:sp>
         <p:nvSpPr>
-          <p:cNvPr id="15" name="Text 13"/>
+          <p:cNvPr id="16" name="Text 14"/>
           <p:cNvSpPr/>
           <p:nvPr/>
         </p:nvSpPr>
         <p:spPr>
           <a:xfrm>
             <a:off x="8074152" y="3666744"/>
-            <a:ext cx="2825496" cy="201168"/>
+            <a:ext cx="2825496" cy="256032"/>
           </a:xfrm>
           <a:prstGeom prst="rect">
             <a:avLst/>
@@ -6285,7 +6516,7 @@
               <a:buNone/>
             </a:pPr>
             <a:r>
-              <a:rPr lang="en-US" sz="950" b="1" dirty="0">
+              <a:rPr lang="en-US" sz="1300" b="1" dirty="0">
                 <a:solidFill>
                   <a:srgbClr val="0068B7"/>
                 </a:solidFill>
@@ -6295,20 +6526,20 @@
               </a:rPr>
               <a:t>Use this for</a:t>
             </a:r>
-            <a:endParaRPr lang="en-US" sz="950" dirty="0"/>
-          </a:p>
-        </p:txBody>
-      </p:sp>
-      <p:sp>
-        <p:nvSpPr>
-          <p:cNvPr id="16" name="Text 14"/>
-          <p:cNvSpPr/>
-          <p:nvPr/>
-        </p:nvSpPr>
-        <p:spPr>
-          <a:xfrm>
-            <a:off x="8074152" y="3959352"/>
-            <a:ext cx="2825496" cy="1170432"/>
+            <a:endParaRPr lang="en-US" sz="1300" dirty="0"/>
+          </a:p>
+        </p:txBody>
+      </p:sp>
+      <p:sp>
+        <p:nvSpPr>
+          <p:cNvPr id="17" name="Text 15"/>
+          <p:cNvSpPr/>
+          <p:nvPr/>
+        </p:nvSpPr>
+        <p:spPr>
+          <a:xfrm>
+            <a:off x="8074152" y="4023360"/>
+            <a:ext cx="2825496" cy="1097280"/>
           </a:xfrm>
           <a:prstGeom prst="rect">
             <a:avLst/>
@@ -6326,7 +6557,7 @@
               <a:buNone/>
             </a:pPr>
             <a:r>
-              <a:rPr lang="en-US" sz="1250" dirty="0">
+              <a:rPr lang="en-US" sz="1550" dirty="0">
                 <a:solidFill>
                   <a:srgbClr val="17364A"/>
                 </a:solidFill>
@@ -6336,7 +6567,7 @@
               </a:rPr>
               <a:t>Connect the concept to public health decisions, safeguards, documentation, or implementation work.</a:t>
             </a:r>
-            <a:endParaRPr lang="en-US" sz="1250" dirty="0"/>
+            <a:endParaRPr lang="en-US" sz="1550" dirty="0"/>
           </a:p>
         </p:txBody>
       </p:sp>
@@ -6533,7 +6764,7 @@
                 <a:ea typeface="Aptos" pitchFamily="34" charset="-122"/>
                 <a:cs typeface="Aptos" pitchFamily="34" charset="-120"/>
               </a:rPr>
-              <a:t>© Paula Soper</a:t>
+              <a:t>Â© Paula Soper</a:t>
             </a:r>
             <a:endParaRPr lang="en-US" sz="800" dirty="0"/>
           </a:p>
@@ -6541,7 +6772,46 @@
       </p:sp>
       <p:sp>
         <p:nvSpPr>
-          <p:cNvPr id="7" name="Shape 5"/>
+          <p:cNvPr id="7" name="Text 5"/>
+          <p:cNvSpPr/>
+          <p:nvPr/>
+        </p:nvSpPr>
+        <p:spPr>
+          <a:xfrm>
+            <a:off x="11137392" y="6510528"/>
+            <a:ext cx="411480" cy="201168"/>
+          </a:xfrm>
+          <a:prstGeom prst="rect">
+            <a:avLst/>
+          </a:prstGeom>
+          <a:noFill/>
+          <a:ln/>
+        </p:spPr>
+        <p:txBody>
+          <a:bodyPr wrap="square" lIns="0" tIns="0" rIns="0" bIns="0" rtlCol="0" anchor="ctr"/>
+          <a:lstStyle/>
+          <a:p>
+            <a:pPr algn="r" indent="0" marL="0">
+              <a:buNone/>
+            </a:pPr>
+            <a:r>
+              <a:rPr lang="en-US" sz="900" dirty="0">
+                <a:solidFill>
+                  <a:srgbClr val="5F7181"/>
+                </a:solidFill>
+                <a:latin typeface="Aptos" pitchFamily="34" charset="0"/>
+                <a:ea typeface="Aptos" pitchFamily="34" charset="-122"/>
+                <a:cs typeface="Aptos" pitchFamily="34" charset="-120"/>
+              </a:rPr>
+              <a:t>16</a:t>
+            </a:r>
+            <a:endParaRPr lang="en-US" sz="900" dirty="0"/>
+          </a:p>
+        </p:txBody>
+      </p:sp>
+      <p:sp>
+        <p:nvSpPr>
+          <p:cNvPr id="8" name="Shape 6"/>
           <p:cNvSpPr/>
           <p:nvPr/>
         </p:nvSpPr>
@@ -6566,7 +6836,7 @@
       </p:sp>
       <p:sp>
         <p:nvSpPr>
-          <p:cNvPr id="8" name="Text 6"/>
+          <p:cNvPr id="9" name="Text 7"/>
           <p:cNvSpPr/>
           <p:nvPr/>
         </p:nvSpPr>
@@ -6605,14 +6875,14 @@
       </p:sp>
       <p:sp>
         <p:nvSpPr>
-          <p:cNvPr id="9" name="Text 7"/>
+          <p:cNvPr id="10" name="Text 8"/>
           <p:cNvSpPr/>
           <p:nvPr/>
         </p:nvSpPr>
         <p:spPr>
           <a:xfrm>
             <a:off x="640080" y="621792"/>
-            <a:ext cx="10881360" cy="566928"/>
+            <a:ext cx="10881360" cy="713232"/>
           </a:xfrm>
           <a:prstGeom prst="rect">
             <a:avLst/>
@@ -6630,7 +6900,7 @@
               <a:buNone/>
             </a:pPr>
             <a:r>
-              <a:rPr lang="en-US" sz="2700" b="1" dirty="0">
+              <a:rPr lang="en-US" sz="3400" b="1" dirty="0">
                 <a:solidFill>
                   <a:srgbClr val="003A63"/>
                 </a:solidFill>
@@ -6640,20 +6910,20 @@
               </a:rPr>
               <a:t>Before You Begin</a:t>
             </a:r>
-            <a:endParaRPr lang="en-US" sz="2700" dirty="0"/>
-          </a:p>
-        </p:txBody>
-      </p:sp>
-      <p:sp>
-        <p:nvSpPr>
-          <p:cNvPr id="10" name="Text 8"/>
-          <p:cNvSpPr/>
-          <p:nvPr/>
-        </p:nvSpPr>
-        <p:spPr>
-          <a:xfrm>
-            <a:off x="868680" y="1417320"/>
-            <a:ext cx="6675120" cy="4434840"/>
+            <a:endParaRPr lang="en-US" sz="3400" dirty="0"/>
+          </a:p>
+        </p:txBody>
+      </p:sp>
+      <p:sp>
+        <p:nvSpPr>
+          <p:cNvPr id="11" name="Text 9"/>
+          <p:cNvSpPr/>
+          <p:nvPr/>
+        </p:nvSpPr>
+        <p:spPr>
+          <a:xfrm>
+            <a:off x="868680" y="1508760"/>
+            <a:ext cx="6537960" cy="4160520"/>
           </a:xfrm>
           <a:prstGeom prst="rect">
             <a:avLst/>
@@ -6668,7 +6938,7 @@
           <a:lstStyle/>
           <a:p>
             <a:r>
-              <a:rPr lang="en-US" sz="1700" dirty="0">
+              <a:rPr lang="en-US" sz="2100" dirty="0">
                 <a:solidFill>
                   <a:srgbClr val="17364A"/>
                 </a:solidFill>
@@ -6678,11 +6948,11 @@
               </a:rPr>
               <a:t>Choose a real or realistic public health AI use case.</a:t>
             </a:r>
-            <a:endParaRPr lang="en-US" sz="1700" dirty="0"/>
-          </a:p>
-          <a:p>
-            <a:r>
-              <a:rPr lang="en-US" sz="1700" dirty="0">
+            <a:endParaRPr lang="en-US" sz="2100" dirty="0"/>
+          </a:p>
+          <a:p>
+            <a:r>
+              <a:rPr lang="en-US" sz="2100" dirty="0">
                 <a:solidFill>
                   <a:srgbClr val="17364A"/>
                 </a:solidFill>
@@ -6690,13 +6960,13 @@
                 <a:ea typeface="Aptos" pitchFamily="34" charset="-122"/>
                 <a:cs typeface="Aptos" pitchFamily="34" charset="-120"/>
               </a:rPr>
-              <a:t>Document assumptions, unresolved questions, and which agency roles would need to review the artifact before it is adopted.</a:t>
-            </a:r>
-            <a:endParaRPr lang="en-US" sz="1700" dirty="0"/>
-          </a:p>
-          <a:p>
-            <a:r>
-              <a:rPr lang="en-US" sz="1700" dirty="0">
+              <a:t>Document assumptions, unresolved questions, and which agency roles would need to review the artifact.</a:t>
+            </a:r>
+            <a:endParaRPr lang="en-US" sz="2100" dirty="0"/>
+          </a:p>
+          <a:p>
+            <a:r>
+              <a:rPr lang="en-US" sz="2100" dirty="0">
                 <a:solidFill>
                   <a:srgbClr val="17364A"/>
                 </a:solidFill>
@@ -6704,15 +6974,15 @@
                 <a:ea typeface="Aptos" pitchFamily="34" charset="-122"/>
                 <a:cs typeface="Aptos" pitchFamily="34" charset="-120"/>
               </a:rPr>
-              <a:t>The exercise should produce a work product that could support governance review, leadership discussion, implementation.</a:t>
-            </a:r>
-            <a:endParaRPr lang="en-US" sz="1700" dirty="0"/>
-          </a:p>
-        </p:txBody>
-      </p:sp>
-      <p:sp>
-        <p:nvSpPr>
-          <p:cNvPr id="11" name="Shape 9"/>
+              <a:t>The exercise should produce a work product that could support governance review, leadership discussion,.</a:t>
+            </a:r>
+            <a:endParaRPr lang="en-US" sz="2100" dirty="0"/>
+          </a:p>
+        </p:txBody>
+      </p:sp>
+      <p:sp>
+        <p:nvSpPr>
+          <p:cNvPr id="12" name="Shape 10"/>
           <p:cNvSpPr/>
           <p:nvPr/>
         </p:nvSpPr>
@@ -6739,14 +7009,14 @@
       </p:sp>
       <p:sp>
         <p:nvSpPr>
-          <p:cNvPr id="12" name="Text 10"/>
+          <p:cNvPr id="13" name="Text 11"/>
           <p:cNvSpPr/>
           <p:nvPr/>
         </p:nvSpPr>
         <p:spPr>
           <a:xfrm>
             <a:off x="8074152" y="1563624"/>
-            <a:ext cx="2825496" cy="201168"/>
+            <a:ext cx="2825496" cy="256032"/>
           </a:xfrm>
           <a:prstGeom prst="rect">
             <a:avLst/>
@@ -6762,7 +7032,7 @@
               <a:buNone/>
             </a:pPr>
             <a:r>
-              <a:rPr lang="en-US" sz="950" b="1" dirty="0">
+              <a:rPr lang="en-US" sz="1300" b="1" dirty="0">
                 <a:solidFill>
                   <a:srgbClr val="0068B7"/>
                 </a:solidFill>
@@ -6772,20 +7042,20 @@
               </a:rPr>
               <a:t>Key idea</a:t>
             </a:r>
-            <a:endParaRPr lang="en-US" sz="950" dirty="0"/>
-          </a:p>
-        </p:txBody>
-      </p:sp>
-      <p:sp>
-        <p:nvSpPr>
-          <p:cNvPr id="13" name="Text 11"/>
-          <p:cNvSpPr/>
-          <p:nvPr/>
-        </p:nvSpPr>
-        <p:spPr>
-          <a:xfrm>
-            <a:off x="8074152" y="1856232"/>
-            <a:ext cx="2825496" cy="1261872"/>
+            <a:endParaRPr lang="en-US" sz="1300" dirty="0"/>
+          </a:p>
+        </p:txBody>
+      </p:sp>
+      <p:sp>
+        <p:nvSpPr>
+          <p:cNvPr id="14" name="Text 12"/>
+          <p:cNvSpPr/>
+          <p:nvPr/>
+        </p:nvSpPr>
+        <p:spPr>
+          <a:xfrm>
+            <a:off x="8074152" y="1920240"/>
+            <a:ext cx="2825496" cy="1188720"/>
           </a:xfrm>
           <a:prstGeom prst="rect">
             <a:avLst/>
@@ -6803,7 +7073,7 @@
               <a:buNone/>
             </a:pPr>
             <a:r>
-              <a:rPr lang="en-US" sz="1250" dirty="0">
+              <a:rPr lang="en-US" sz="1550" dirty="0">
                 <a:solidFill>
                   <a:srgbClr val="17364A"/>
                 </a:solidFill>
@@ -6813,13 +7083,13 @@
               </a:rPr>
               <a:t>Choose a real or realistic public health AI use case.</a:t>
             </a:r>
-            <a:endParaRPr lang="en-US" sz="1250" dirty="0"/>
-          </a:p>
-        </p:txBody>
-      </p:sp>
-      <p:sp>
-        <p:nvSpPr>
-          <p:cNvPr id="14" name="Shape 12"/>
+            <a:endParaRPr lang="en-US" sz="1550" dirty="0"/>
+          </a:p>
+        </p:txBody>
+      </p:sp>
+      <p:sp>
+        <p:nvSpPr>
+          <p:cNvPr id="15" name="Shape 13"/>
           <p:cNvSpPr/>
           <p:nvPr/>
         </p:nvSpPr>
@@ -6846,14 +7116,14 @@
       </p:sp>
       <p:sp>
         <p:nvSpPr>
-          <p:cNvPr id="15" name="Text 13"/>
+          <p:cNvPr id="16" name="Text 14"/>
           <p:cNvSpPr/>
           <p:nvPr/>
         </p:nvSpPr>
         <p:spPr>
           <a:xfrm>
             <a:off x="8074152" y="3666744"/>
-            <a:ext cx="2825496" cy="201168"/>
+            <a:ext cx="2825496" cy="256032"/>
           </a:xfrm>
           <a:prstGeom prst="rect">
             <a:avLst/>
@@ -6869,7 +7139,7 @@
               <a:buNone/>
             </a:pPr>
             <a:r>
-              <a:rPr lang="en-US" sz="950" b="1" dirty="0">
+              <a:rPr lang="en-US" sz="1300" b="1" dirty="0">
                 <a:solidFill>
                   <a:srgbClr val="0068B7"/>
                 </a:solidFill>
@@ -6879,20 +7149,20 @@
               </a:rPr>
               <a:t>Use this for</a:t>
             </a:r>
-            <a:endParaRPr lang="en-US" sz="950" dirty="0"/>
-          </a:p>
-        </p:txBody>
-      </p:sp>
-      <p:sp>
-        <p:nvSpPr>
-          <p:cNvPr id="16" name="Text 14"/>
-          <p:cNvSpPr/>
-          <p:nvPr/>
-        </p:nvSpPr>
-        <p:spPr>
-          <a:xfrm>
-            <a:off x="8074152" y="3959352"/>
-            <a:ext cx="2825496" cy="1170432"/>
+            <a:endParaRPr lang="en-US" sz="1300" dirty="0"/>
+          </a:p>
+        </p:txBody>
+      </p:sp>
+      <p:sp>
+        <p:nvSpPr>
+          <p:cNvPr id="17" name="Text 15"/>
+          <p:cNvSpPr/>
+          <p:nvPr/>
+        </p:nvSpPr>
+        <p:spPr>
+          <a:xfrm>
+            <a:off x="8074152" y="4023360"/>
+            <a:ext cx="2825496" cy="1097280"/>
           </a:xfrm>
           <a:prstGeom prst="rect">
             <a:avLst/>
@@ -6910,7 +7180,7 @@
               <a:buNone/>
             </a:pPr>
             <a:r>
-              <a:rPr lang="en-US" sz="1250" dirty="0">
+              <a:rPr lang="en-US" sz="1550" dirty="0">
                 <a:solidFill>
                   <a:srgbClr val="17364A"/>
                 </a:solidFill>
@@ -6920,7 +7190,7 @@
               </a:rPr>
               <a:t>Connect the concept to public health decisions, safeguards, documentation, or implementation work.</a:t>
             </a:r>
-            <a:endParaRPr lang="en-US" sz="1250" dirty="0"/>
+            <a:endParaRPr lang="en-US" sz="1550" dirty="0"/>
           </a:p>
         </p:txBody>
       </p:sp>
@@ -7117,7 +7387,7 @@
                 <a:ea typeface="Aptos" pitchFamily="34" charset="-122"/>
                 <a:cs typeface="Aptos" pitchFamily="34" charset="-120"/>
               </a:rPr>
-              <a:t>© Paula Soper</a:t>
+              <a:t>Â© Paula Soper</a:t>
             </a:r>
             <a:endParaRPr lang="en-US" sz="800" dirty="0"/>
           </a:p>
@@ -7125,7 +7395,46 @@
       </p:sp>
       <p:sp>
         <p:nvSpPr>
-          <p:cNvPr id="7" name="Shape 5"/>
+          <p:cNvPr id="7" name="Text 5"/>
+          <p:cNvSpPr/>
+          <p:nvPr/>
+        </p:nvSpPr>
+        <p:spPr>
+          <a:xfrm>
+            <a:off x="11137392" y="6510528"/>
+            <a:ext cx="411480" cy="201168"/>
+          </a:xfrm>
+          <a:prstGeom prst="rect">
+            <a:avLst/>
+          </a:prstGeom>
+          <a:noFill/>
+          <a:ln/>
+        </p:spPr>
+        <p:txBody>
+          <a:bodyPr wrap="square" lIns="0" tIns="0" rIns="0" bIns="0" rtlCol="0" anchor="ctr"/>
+          <a:lstStyle/>
+          <a:p>
+            <a:pPr algn="r" indent="0" marL="0">
+              <a:buNone/>
+            </a:pPr>
+            <a:r>
+              <a:rPr lang="en-US" sz="900" dirty="0">
+                <a:solidFill>
+                  <a:srgbClr val="5F7181"/>
+                </a:solidFill>
+                <a:latin typeface="Aptos" pitchFamily="34" charset="0"/>
+                <a:ea typeface="Aptos" pitchFamily="34" charset="-122"/>
+                <a:cs typeface="Aptos" pitchFamily="34" charset="-120"/>
+              </a:rPr>
+              <a:t>17</a:t>
+            </a:r>
+            <a:endParaRPr lang="en-US" sz="900" dirty="0"/>
+          </a:p>
+        </p:txBody>
+      </p:sp>
+      <p:sp>
+        <p:nvSpPr>
+          <p:cNvPr id="8" name="Shape 6"/>
           <p:cNvSpPr/>
           <p:nvPr/>
         </p:nvSpPr>
@@ -7150,7 +7459,7 @@
       </p:sp>
       <p:sp>
         <p:nvSpPr>
-          <p:cNvPr id="8" name="Text 6"/>
+          <p:cNvPr id="9" name="Text 7"/>
           <p:cNvSpPr/>
           <p:nvPr/>
         </p:nvSpPr>
@@ -7189,14 +7498,14 @@
       </p:sp>
       <p:sp>
         <p:nvSpPr>
-          <p:cNvPr id="9" name="Text 7"/>
+          <p:cNvPr id="10" name="Text 8"/>
           <p:cNvSpPr/>
           <p:nvPr/>
         </p:nvSpPr>
         <p:spPr>
           <a:xfrm>
             <a:off x="640080" y="621792"/>
-            <a:ext cx="10881360" cy="566928"/>
+            <a:ext cx="10881360" cy="713232"/>
           </a:xfrm>
           <a:prstGeom prst="rect">
             <a:avLst/>
@@ -7214,7 +7523,7 @@
               <a:buNone/>
             </a:pPr>
             <a:r>
-              <a:rPr lang="en-US" sz="2700" b="1" dirty="0">
+              <a:rPr lang="en-US" sz="3400" b="1" dirty="0">
                 <a:solidFill>
                   <a:srgbClr val="003A63"/>
                 </a:solidFill>
@@ -7224,20 +7533,20 @@
               </a:rPr>
               <a:t>Expected Artifact or Evidence</a:t>
             </a:r>
-            <a:endParaRPr lang="en-US" sz="2700" dirty="0"/>
-          </a:p>
-        </p:txBody>
-      </p:sp>
-      <p:sp>
-        <p:nvSpPr>
-          <p:cNvPr id="10" name="Text 8"/>
-          <p:cNvSpPr/>
-          <p:nvPr/>
-        </p:nvSpPr>
-        <p:spPr>
-          <a:xfrm>
-            <a:off x="868680" y="1417320"/>
-            <a:ext cx="6675120" cy="4434840"/>
+            <a:endParaRPr lang="en-US" sz="3400" dirty="0"/>
+          </a:p>
+        </p:txBody>
+      </p:sp>
+      <p:sp>
+        <p:nvSpPr>
+          <p:cNvPr id="11" name="Text 9"/>
+          <p:cNvSpPr/>
+          <p:nvPr/>
+        </p:nvSpPr>
+        <p:spPr>
+          <a:xfrm>
+            <a:off x="868680" y="1508760"/>
+            <a:ext cx="6537960" cy="4160520"/>
           </a:xfrm>
           <a:prstGeom prst="rect">
             <a:avLst/>
@@ -7252,7 +7561,7 @@
           <a:lstStyle/>
           <a:p>
             <a:r>
-              <a:rPr lang="en-US" sz="1700" dirty="0">
+              <a:rPr lang="en-US" sz="2100" dirty="0">
                 <a:solidFill>
                   <a:srgbClr val="17364A"/>
                 </a:solidFill>
@@ -7260,15 +7569,15 @@
                 <a:ea typeface="Aptos" pitchFamily="34" charset="-122"/>
                 <a:cs typeface="Aptos" pitchFamily="34" charset="-120"/>
               </a:rPr>
-              <a:t>AI risk appetite statement; risk tolerance table; prohibited-use examples; mitigation and escalation conditions.</a:t>
-            </a:r>
-            <a:endParaRPr lang="en-US" sz="1700" dirty="0"/>
-          </a:p>
-        </p:txBody>
-      </p:sp>
-      <p:sp>
-        <p:nvSpPr>
-          <p:cNvPr id="11" name="Shape 9"/>
+              <a:t>AI risk appetite statement; risk tolerance table; prohibited-use examples; mitigation and escalation.</a:t>
+            </a:r>
+            <a:endParaRPr lang="en-US" sz="2100" dirty="0"/>
+          </a:p>
+        </p:txBody>
+      </p:sp>
+      <p:sp>
+        <p:nvSpPr>
+          <p:cNvPr id="12" name="Shape 10"/>
           <p:cNvSpPr/>
           <p:nvPr/>
         </p:nvSpPr>
@@ -7295,14 +7604,14 @@
       </p:sp>
       <p:sp>
         <p:nvSpPr>
-          <p:cNvPr id="12" name="Text 10"/>
+          <p:cNvPr id="13" name="Text 11"/>
           <p:cNvSpPr/>
           <p:nvPr/>
         </p:nvSpPr>
         <p:spPr>
           <a:xfrm>
             <a:off x="8074152" y="1563624"/>
-            <a:ext cx="2825496" cy="201168"/>
+            <a:ext cx="2825496" cy="256032"/>
           </a:xfrm>
           <a:prstGeom prst="rect">
             <a:avLst/>
@@ -7318,7 +7627,7 @@
               <a:buNone/>
             </a:pPr>
             <a:r>
-              <a:rPr lang="en-US" sz="950" b="1" dirty="0">
+              <a:rPr lang="en-US" sz="1300" b="1" dirty="0">
                 <a:solidFill>
                   <a:srgbClr val="0068B7"/>
                 </a:solidFill>
@@ -7328,20 +7637,20 @@
               </a:rPr>
               <a:t>Key idea</a:t>
             </a:r>
-            <a:endParaRPr lang="en-US" sz="950" dirty="0"/>
-          </a:p>
-        </p:txBody>
-      </p:sp>
-      <p:sp>
-        <p:nvSpPr>
-          <p:cNvPr id="13" name="Text 11"/>
-          <p:cNvSpPr/>
-          <p:nvPr/>
-        </p:nvSpPr>
-        <p:spPr>
-          <a:xfrm>
-            <a:off x="8074152" y="1856232"/>
-            <a:ext cx="2825496" cy="1261872"/>
+            <a:endParaRPr lang="en-US" sz="1300" dirty="0"/>
+          </a:p>
+        </p:txBody>
+      </p:sp>
+      <p:sp>
+        <p:nvSpPr>
+          <p:cNvPr id="14" name="Text 12"/>
+          <p:cNvSpPr/>
+          <p:nvPr/>
+        </p:nvSpPr>
+        <p:spPr>
+          <a:xfrm>
+            <a:off x="8074152" y="1920240"/>
+            <a:ext cx="2825496" cy="1188720"/>
           </a:xfrm>
           <a:prstGeom prst="rect">
             <a:avLst/>
@@ -7359,7 +7668,7 @@
               <a:buNone/>
             </a:pPr>
             <a:r>
-              <a:rPr lang="en-US" sz="1250" dirty="0">
+              <a:rPr lang="en-US" sz="1550" dirty="0">
                 <a:solidFill>
                   <a:srgbClr val="17364A"/>
                 </a:solidFill>
@@ -7367,15 +7676,15 @@
                 <a:ea typeface="Aptos" pitchFamily="34" charset="-122"/>
                 <a:cs typeface="Aptos" pitchFamily="34" charset="-120"/>
               </a:rPr>
-              <a:t>AI risk appetite statement; risk tolerance table; prohibited-use examples; mitigation and escalation conditions.</a:t>
-            </a:r>
-            <a:endParaRPr lang="en-US" sz="1250" dirty="0"/>
-          </a:p>
-        </p:txBody>
-      </p:sp>
-      <p:sp>
-        <p:nvSpPr>
-          <p:cNvPr id="14" name="Shape 12"/>
+              <a:t>AI risk appetite statement; risk tolerance table; prohibited-use examples; mitigation and escalation.</a:t>
+            </a:r>
+            <a:endParaRPr lang="en-US" sz="1550" dirty="0"/>
+          </a:p>
+        </p:txBody>
+      </p:sp>
+      <p:sp>
+        <p:nvSpPr>
+          <p:cNvPr id="15" name="Shape 13"/>
           <p:cNvSpPr/>
           <p:nvPr/>
         </p:nvSpPr>
@@ -7402,14 +7711,14 @@
       </p:sp>
       <p:sp>
         <p:nvSpPr>
-          <p:cNvPr id="15" name="Text 13"/>
+          <p:cNvPr id="16" name="Text 14"/>
           <p:cNvSpPr/>
           <p:nvPr/>
         </p:nvSpPr>
         <p:spPr>
           <a:xfrm>
             <a:off x="8074152" y="3666744"/>
-            <a:ext cx="2825496" cy="201168"/>
+            <a:ext cx="2825496" cy="256032"/>
           </a:xfrm>
           <a:prstGeom prst="rect">
             <a:avLst/>
@@ -7425,7 +7734,7 @@
               <a:buNone/>
             </a:pPr>
             <a:r>
-              <a:rPr lang="en-US" sz="950" b="1" dirty="0">
+              <a:rPr lang="en-US" sz="1300" b="1" dirty="0">
                 <a:solidFill>
                   <a:srgbClr val="0068B7"/>
                 </a:solidFill>
@@ -7435,20 +7744,20 @@
               </a:rPr>
               <a:t>Use this for</a:t>
             </a:r>
-            <a:endParaRPr lang="en-US" sz="950" dirty="0"/>
-          </a:p>
-        </p:txBody>
-      </p:sp>
-      <p:sp>
-        <p:nvSpPr>
-          <p:cNvPr id="16" name="Text 14"/>
-          <p:cNvSpPr/>
-          <p:nvPr/>
-        </p:nvSpPr>
-        <p:spPr>
-          <a:xfrm>
-            <a:off x="8074152" y="3959352"/>
-            <a:ext cx="2825496" cy="1170432"/>
+            <a:endParaRPr lang="en-US" sz="1300" dirty="0"/>
+          </a:p>
+        </p:txBody>
+      </p:sp>
+      <p:sp>
+        <p:nvSpPr>
+          <p:cNvPr id="17" name="Text 15"/>
+          <p:cNvSpPr/>
+          <p:nvPr/>
+        </p:nvSpPr>
+        <p:spPr>
+          <a:xfrm>
+            <a:off x="8074152" y="4023360"/>
+            <a:ext cx="2825496" cy="1097280"/>
           </a:xfrm>
           <a:prstGeom prst="rect">
             <a:avLst/>
@@ -7466,7 +7775,7 @@
               <a:buNone/>
             </a:pPr>
             <a:r>
-              <a:rPr lang="en-US" sz="1250" dirty="0">
+              <a:rPr lang="en-US" sz="1550" dirty="0">
                 <a:solidFill>
                   <a:srgbClr val="17364A"/>
                 </a:solidFill>
@@ -7476,7 +7785,7 @@
               </a:rPr>
               <a:t>Connect the concept to public health decisions, safeguards, documentation, or implementation work.</a:t>
             </a:r>
-            <a:endParaRPr lang="en-US" sz="1250" dirty="0"/>
+            <a:endParaRPr lang="en-US" sz="1550" dirty="0"/>
           </a:p>
         </p:txBody>
       </p:sp>
@@ -7673,7 +7982,7 @@
                 <a:ea typeface="Aptos" pitchFamily="34" charset="-122"/>
                 <a:cs typeface="Aptos" pitchFamily="34" charset="-120"/>
               </a:rPr>
-              <a:t>© Paula Soper</a:t>
+              <a:t>Â© Paula Soper</a:t>
             </a:r>
             <a:endParaRPr lang="en-US" sz="800" dirty="0"/>
           </a:p>
@@ -7681,7 +7990,46 @@
       </p:sp>
       <p:sp>
         <p:nvSpPr>
-          <p:cNvPr id="7" name="Shape 5"/>
+          <p:cNvPr id="7" name="Text 5"/>
+          <p:cNvSpPr/>
+          <p:nvPr/>
+        </p:nvSpPr>
+        <p:spPr>
+          <a:xfrm>
+            <a:off x="11137392" y="6510528"/>
+            <a:ext cx="411480" cy="201168"/>
+          </a:xfrm>
+          <a:prstGeom prst="rect">
+            <a:avLst/>
+          </a:prstGeom>
+          <a:noFill/>
+          <a:ln/>
+        </p:spPr>
+        <p:txBody>
+          <a:bodyPr wrap="square" lIns="0" tIns="0" rIns="0" bIns="0" rtlCol="0" anchor="ctr"/>
+          <a:lstStyle/>
+          <a:p>
+            <a:pPr algn="r" indent="0" marL="0">
+              <a:buNone/>
+            </a:pPr>
+            <a:r>
+              <a:rPr lang="en-US" sz="900" dirty="0">
+                <a:solidFill>
+                  <a:srgbClr val="5F7181"/>
+                </a:solidFill>
+                <a:latin typeface="Aptos" pitchFamily="34" charset="0"/>
+                <a:ea typeface="Aptos" pitchFamily="34" charset="-122"/>
+                <a:cs typeface="Aptos" pitchFamily="34" charset="-120"/>
+              </a:rPr>
+              <a:t>18</a:t>
+            </a:r>
+            <a:endParaRPr lang="en-US" sz="900" dirty="0"/>
+          </a:p>
+        </p:txBody>
+      </p:sp>
+      <p:sp>
+        <p:nvSpPr>
+          <p:cNvPr id="8" name="Shape 6"/>
           <p:cNvSpPr/>
           <p:nvPr/>
         </p:nvSpPr>
@@ -7706,7 +8054,7 @@
       </p:sp>
       <p:sp>
         <p:nvSpPr>
-          <p:cNvPr id="8" name="Text 6"/>
+          <p:cNvPr id="9" name="Text 7"/>
           <p:cNvSpPr/>
           <p:nvPr/>
         </p:nvSpPr>
@@ -7745,14 +8093,14 @@
       </p:sp>
       <p:sp>
         <p:nvSpPr>
-          <p:cNvPr id="9" name="Text 7"/>
+          <p:cNvPr id="10" name="Text 8"/>
           <p:cNvSpPr/>
           <p:nvPr/>
         </p:nvSpPr>
         <p:spPr>
           <a:xfrm>
             <a:off x="640080" y="621792"/>
-            <a:ext cx="10881360" cy="566928"/>
+            <a:ext cx="10881360" cy="713232"/>
           </a:xfrm>
           <a:prstGeom prst="rect">
             <a:avLst/>
@@ -7770,7 +8118,7 @@
               <a:buNone/>
             </a:pPr>
             <a:r>
-              <a:rPr lang="en-US" sz="2700" b="1" dirty="0">
+              <a:rPr lang="en-US" sz="3400" b="1" dirty="0">
                 <a:solidFill>
                   <a:srgbClr val="003A63"/>
                 </a:solidFill>
@@ -7780,20 +8128,20 @@
               </a:rPr>
               <a:t>Expected Assignment</a:t>
             </a:r>
-            <a:endParaRPr lang="en-US" sz="2700" dirty="0"/>
-          </a:p>
-        </p:txBody>
-      </p:sp>
-      <p:sp>
-        <p:nvSpPr>
-          <p:cNvPr id="10" name="Text 8"/>
-          <p:cNvSpPr/>
-          <p:nvPr/>
-        </p:nvSpPr>
-        <p:spPr>
-          <a:xfrm>
-            <a:off x="868680" y="1417320"/>
-            <a:ext cx="6675120" cy="4434840"/>
+            <a:endParaRPr lang="en-US" sz="3400" dirty="0"/>
+          </a:p>
+        </p:txBody>
+      </p:sp>
+      <p:sp>
+        <p:nvSpPr>
+          <p:cNvPr id="11" name="Text 9"/>
+          <p:cNvSpPr/>
+          <p:nvPr/>
+        </p:nvSpPr>
+        <p:spPr>
+          <a:xfrm>
+            <a:off x="868680" y="1508760"/>
+            <a:ext cx="6537960" cy="4160520"/>
           </a:xfrm>
           <a:prstGeom prst="rect">
             <a:avLst/>
@@ -7808,7 +8156,7 @@
           <a:lstStyle/>
           <a:p>
             <a:r>
-              <a:rPr lang="en-US" sz="1700" dirty="0">
+              <a:rPr lang="en-US" sz="2100" dirty="0">
                 <a:solidFill>
                   <a:srgbClr val="17364A"/>
                 </a:solidFill>
@@ -7816,15 +8164,15 @@
                 <a:ea typeface="Aptos" pitchFamily="34" charset="-122"/>
                 <a:cs typeface="Aptos" pitchFamily="34" charset="-120"/>
               </a:rPr>
-              <a:t>AI risk appetite statement; risk tolerance table; prohibited-use examples; mitigation and escalation conditions.</a:t>
-            </a:r>
-            <a:endParaRPr lang="en-US" sz="1700" dirty="0"/>
-          </a:p>
-        </p:txBody>
-      </p:sp>
-      <p:sp>
-        <p:nvSpPr>
-          <p:cNvPr id="11" name="Shape 9"/>
+              <a:t>AI risk appetite statement; risk tolerance table; prohibited-use examples; mitigation and escalation.</a:t>
+            </a:r>
+            <a:endParaRPr lang="en-US" sz="2100" dirty="0"/>
+          </a:p>
+        </p:txBody>
+      </p:sp>
+      <p:sp>
+        <p:nvSpPr>
+          <p:cNvPr id="12" name="Shape 10"/>
           <p:cNvSpPr/>
           <p:nvPr/>
         </p:nvSpPr>
@@ -7851,14 +8199,14 @@
       </p:sp>
       <p:sp>
         <p:nvSpPr>
-          <p:cNvPr id="12" name="Text 10"/>
+          <p:cNvPr id="13" name="Text 11"/>
           <p:cNvSpPr/>
           <p:nvPr/>
         </p:nvSpPr>
         <p:spPr>
           <a:xfrm>
             <a:off x="8074152" y="1563624"/>
-            <a:ext cx="2825496" cy="201168"/>
+            <a:ext cx="2825496" cy="256032"/>
           </a:xfrm>
           <a:prstGeom prst="rect">
             <a:avLst/>
@@ -7874,7 +8222,7 @@
               <a:buNone/>
             </a:pPr>
             <a:r>
-              <a:rPr lang="en-US" sz="950" b="1" dirty="0">
+              <a:rPr lang="en-US" sz="1300" b="1" dirty="0">
                 <a:solidFill>
                   <a:srgbClr val="0068B7"/>
                 </a:solidFill>
@@ -7884,20 +8232,20 @@
               </a:rPr>
               <a:t>Key idea</a:t>
             </a:r>
-            <a:endParaRPr lang="en-US" sz="950" dirty="0"/>
-          </a:p>
-        </p:txBody>
-      </p:sp>
-      <p:sp>
-        <p:nvSpPr>
-          <p:cNvPr id="13" name="Text 11"/>
-          <p:cNvSpPr/>
-          <p:nvPr/>
-        </p:nvSpPr>
-        <p:spPr>
-          <a:xfrm>
-            <a:off x="8074152" y="1856232"/>
-            <a:ext cx="2825496" cy="1261872"/>
+            <a:endParaRPr lang="en-US" sz="1300" dirty="0"/>
+          </a:p>
+        </p:txBody>
+      </p:sp>
+      <p:sp>
+        <p:nvSpPr>
+          <p:cNvPr id="14" name="Text 12"/>
+          <p:cNvSpPr/>
+          <p:nvPr/>
+        </p:nvSpPr>
+        <p:spPr>
+          <a:xfrm>
+            <a:off x="8074152" y="1920240"/>
+            <a:ext cx="2825496" cy="1188720"/>
           </a:xfrm>
           <a:prstGeom prst="rect">
             <a:avLst/>
@@ -7915,7 +8263,7 @@
               <a:buNone/>
             </a:pPr>
             <a:r>
-              <a:rPr lang="en-US" sz="1250" dirty="0">
+              <a:rPr lang="en-US" sz="1550" dirty="0">
                 <a:solidFill>
                   <a:srgbClr val="17364A"/>
                 </a:solidFill>
@@ -7923,15 +8271,15 @@
                 <a:ea typeface="Aptos" pitchFamily="34" charset="-122"/>
                 <a:cs typeface="Aptos" pitchFamily="34" charset="-120"/>
               </a:rPr>
-              <a:t>AI risk appetite statement; risk tolerance table; prohibited-use examples; mitigation and escalation conditions.</a:t>
-            </a:r>
-            <a:endParaRPr lang="en-US" sz="1250" dirty="0"/>
-          </a:p>
-        </p:txBody>
-      </p:sp>
-      <p:sp>
-        <p:nvSpPr>
-          <p:cNvPr id="14" name="Shape 12"/>
+              <a:t>AI risk appetite statement; risk tolerance table; prohibited-use examples; mitigation and escalation.</a:t>
+            </a:r>
+            <a:endParaRPr lang="en-US" sz="1550" dirty="0"/>
+          </a:p>
+        </p:txBody>
+      </p:sp>
+      <p:sp>
+        <p:nvSpPr>
+          <p:cNvPr id="15" name="Shape 13"/>
           <p:cNvSpPr/>
           <p:nvPr/>
         </p:nvSpPr>
@@ -7958,14 +8306,14 @@
       </p:sp>
       <p:sp>
         <p:nvSpPr>
-          <p:cNvPr id="15" name="Text 13"/>
+          <p:cNvPr id="16" name="Text 14"/>
           <p:cNvSpPr/>
           <p:nvPr/>
         </p:nvSpPr>
         <p:spPr>
           <a:xfrm>
             <a:off x="8074152" y="3666744"/>
-            <a:ext cx="2825496" cy="201168"/>
+            <a:ext cx="2825496" cy="256032"/>
           </a:xfrm>
           <a:prstGeom prst="rect">
             <a:avLst/>
@@ -7981,7 +8329,7 @@
               <a:buNone/>
             </a:pPr>
             <a:r>
-              <a:rPr lang="en-US" sz="950" b="1" dirty="0">
+              <a:rPr lang="en-US" sz="1300" b="1" dirty="0">
                 <a:solidFill>
                   <a:srgbClr val="0068B7"/>
                 </a:solidFill>
@@ -7991,20 +8339,20 @@
               </a:rPr>
               <a:t>Use this for</a:t>
             </a:r>
-            <a:endParaRPr lang="en-US" sz="950" dirty="0"/>
-          </a:p>
-        </p:txBody>
-      </p:sp>
-      <p:sp>
-        <p:nvSpPr>
-          <p:cNvPr id="16" name="Text 14"/>
-          <p:cNvSpPr/>
-          <p:nvPr/>
-        </p:nvSpPr>
-        <p:spPr>
-          <a:xfrm>
-            <a:off x="8074152" y="3959352"/>
-            <a:ext cx="2825496" cy="1170432"/>
+            <a:endParaRPr lang="en-US" sz="1300" dirty="0"/>
+          </a:p>
+        </p:txBody>
+      </p:sp>
+      <p:sp>
+        <p:nvSpPr>
+          <p:cNvPr id="17" name="Text 15"/>
+          <p:cNvSpPr/>
+          <p:nvPr/>
+        </p:nvSpPr>
+        <p:spPr>
+          <a:xfrm>
+            <a:off x="8074152" y="4023360"/>
+            <a:ext cx="2825496" cy="1097280"/>
           </a:xfrm>
           <a:prstGeom prst="rect">
             <a:avLst/>
@@ -8022,7 +8370,7 @@
               <a:buNone/>
             </a:pPr>
             <a:r>
-              <a:rPr lang="en-US" sz="1250" dirty="0">
+              <a:rPr lang="en-US" sz="1550" dirty="0">
                 <a:solidFill>
                   <a:srgbClr val="17364A"/>
                 </a:solidFill>
@@ -8032,7 +8380,7 @@
               </a:rPr>
               <a:t>Connect the concept to public health decisions, safeguards, documentation, or implementation work.</a:t>
             </a:r>
-            <a:endParaRPr lang="en-US" sz="1250" dirty="0"/>
+            <a:endParaRPr lang="en-US" sz="1550" dirty="0"/>
           </a:p>
         </p:txBody>
       </p:sp>
@@ -8229,7 +8577,7 @@
                 <a:ea typeface="Aptos" pitchFamily="34" charset="-122"/>
                 <a:cs typeface="Aptos" pitchFamily="34" charset="-120"/>
               </a:rPr>
-              <a:t>© Paula Soper</a:t>
+              <a:t>Â© Paula Soper</a:t>
             </a:r>
             <a:endParaRPr lang="en-US" sz="800" dirty="0"/>
           </a:p>
@@ -8237,7 +8585,46 @@
       </p:sp>
       <p:sp>
         <p:nvSpPr>
-          <p:cNvPr id="7" name="Shape 5"/>
+          <p:cNvPr id="7" name="Text 5"/>
+          <p:cNvSpPr/>
+          <p:nvPr/>
+        </p:nvSpPr>
+        <p:spPr>
+          <a:xfrm>
+            <a:off x="11137392" y="6510528"/>
+            <a:ext cx="411480" cy="201168"/>
+          </a:xfrm>
+          <a:prstGeom prst="rect">
+            <a:avLst/>
+          </a:prstGeom>
+          <a:noFill/>
+          <a:ln/>
+        </p:spPr>
+        <p:txBody>
+          <a:bodyPr wrap="square" lIns="0" tIns="0" rIns="0" bIns="0" rtlCol="0" anchor="ctr"/>
+          <a:lstStyle/>
+          <a:p>
+            <a:pPr algn="r" indent="0" marL="0">
+              <a:buNone/>
+            </a:pPr>
+            <a:r>
+              <a:rPr lang="en-US" sz="900" dirty="0">
+                <a:solidFill>
+                  <a:srgbClr val="5F7181"/>
+                </a:solidFill>
+                <a:latin typeface="Aptos" pitchFamily="34" charset="0"/>
+                <a:ea typeface="Aptos" pitchFamily="34" charset="-122"/>
+                <a:cs typeface="Aptos" pitchFamily="34" charset="-120"/>
+              </a:rPr>
+              <a:t>19</a:t>
+            </a:r>
+            <a:endParaRPr lang="en-US" sz="900" dirty="0"/>
+          </a:p>
+        </p:txBody>
+      </p:sp>
+      <p:sp>
+        <p:nvSpPr>
+          <p:cNvPr id="8" name="Shape 6"/>
           <p:cNvSpPr/>
           <p:nvPr/>
         </p:nvSpPr>
@@ -8262,7 +8649,7 @@
       </p:sp>
       <p:sp>
         <p:nvSpPr>
-          <p:cNvPr id="8" name="Text 6"/>
+          <p:cNvPr id="9" name="Text 7"/>
           <p:cNvSpPr/>
           <p:nvPr/>
         </p:nvSpPr>
@@ -8301,14 +8688,14 @@
       </p:sp>
       <p:sp>
         <p:nvSpPr>
-          <p:cNvPr id="9" name="Text 7"/>
+          <p:cNvPr id="10" name="Text 8"/>
           <p:cNvSpPr/>
           <p:nvPr/>
         </p:nvSpPr>
         <p:spPr>
           <a:xfrm>
             <a:off x="640080" y="621792"/>
-            <a:ext cx="10881360" cy="566928"/>
+            <a:ext cx="10881360" cy="713232"/>
           </a:xfrm>
           <a:prstGeom prst="rect">
             <a:avLst/>
@@ -8326,7 +8713,7 @@
               <a:buNone/>
             </a:pPr>
             <a:r>
-              <a:rPr lang="en-US" sz="2700" b="1" dirty="0">
+              <a:rPr lang="en-US" sz="3400" b="1" dirty="0">
                 <a:solidFill>
                   <a:srgbClr val="003A63"/>
                 </a:solidFill>
@@ -8336,20 +8723,20 @@
               </a:rPr>
               <a:t>Knowledge Check</a:t>
             </a:r>
-            <a:endParaRPr lang="en-US" sz="2700" dirty="0"/>
-          </a:p>
-        </p:txBody>
-      </p:sp>
-      <p:sp>
-        <p:nvSpPr>
-          <p:cNvPr id="10" name="Text 8"/>
-          <p:cNvSpPr/>
-          <p:nvPr/>
-        </p:nvSpPr>
-        <p:spPr>
-          <a:xfrm>
-            <a:off x="868680" y="1417320"/>
-            <a:ext cx="6675120" cy="4434840"/>
+            <a:endParaRPr lang="en-US" sz="3400" dirty="0"/>
+          </a:p>
+        </p:txBody>
+      </p:sp>
+      <p:sp>
+        <p:nvSpPr>
+          <p:cNvPr id="11" name="Text 9"/>
+          <p:cNvSpPr/>
+          <p:nvPr/>
+        </p:nvSpPr>
+        <p:spPr>
+          <a:xfrm>
+            <a:off x="868680" y="1508760"/>
+            <a:ext cx="6537960" cy="4160520"/>
           </a:xfrm>
           <a:prstGeom prst="rect">
             <a:avLst/>
@@ -8364,7 +8751,7 @@
           <a:lstStyle/>
           <a:p>
             <a:r>
-              <a:rPr lang="en-US" sz="1700" dirty="0">
+              <a:rPr lang="en-US" sz="2100" dirty="0">
                 <a:solidFill>
                   <a:srgbClr val="17364A"/>
                 </a:solidFill>
@@ -8374,11 +8761,11 @@
               </a:rPr>
               <a:t>1. What is the strongest reason this module topic belongs in AI leadership and governance training?</a:t>
             </a:r>
-            <a:endParaRPr lang="en-US" sz="1700" dirty="0"/>
-          </a:p>
-          <a:p>
-            <a:r>
-              <a:rPr lang="en-US" sz="1700" dirty="0">
+            <a:endParaRPr lang="en-US" sz="2100" dirty="0"/>
+          </a:p>
+          <a:p>
+            <a:r>
+              <a:rPr lang="en-US" sz="2100" dirty="0">
                 <a:solidFill>
                   <a:srgbClr val="17364A"/>
                 </a:solidFill>
@@ -8388,11 +8775,11 @@
               </a:rPr>
               <a:t>2. Which practice best supports accountable public health AI governance?</a:t>
             </a:r>
-            <a:endParaRPr lang="en-US" sz="1700" dirty="0"/>
-          </a:p>
-          <a:p>
-            <a:r>
-              <a:rPr lang="en-US" sz="1700" dirty="0">
+            <a:endParaRPr lang="en-US" sz="2100" dirty="0"/>
+          </a:p>
+          <a:p>
+            <a:r>
+              <a:rPr lang="en-US" sz="2100" dirty="0">
                 <a:solidFill>
                   <a:srgbClr val="17364A"/>
                 </a:solidFill>
@@ -8402,27 +8789,13 @@
               </a:rPr>
               <a:t>3. When should an AI use case be escalated for leadership or governance review?</a:t>
             </a:r>
-            <a:endParaRPr lang="en-US" sz="1700" dirty="0"/>
-          </a:p>
-          <a:p>
-            <a:r>
-              <a:rPr lang="en-US" sz="1700" dirty="0">
-                <a:solidFill>
-                  <a:srgbClr val="17364A"/>
-                </a:solidFill>
-                <a:latin typeface="Aptos" pitchFamily="34" charset="0"/>
-                <a:ea typeface="Aptos" pitchFamily="34" charset="-122"/>
-                <a:cs typeface="Aptos" pitchFamily="34" charset="-120"/>
-              </a:rPr>
-              <a:t>4. What is weak evidence of completion for a leadership and governance module?</a:t>
-            </a:r>
-            <a:endParaRPr lang="en-US" sz="1700" dirty="0"/>
-          </a:p>
-        </p:txBody>
-      </p:sp>
-      <p:sp>
-        <p:nvSpPr>
-          <p:cNvPr id="11" name="Shape 9"/>
+            <a:endParaRPr lang="en-US" sz="2100" dirty="0"/>
+          </a:p>
+        </p:txBody>
+      </p:sp>
+      <p:sp>
+        <p:nvSpPr>
+          <p:cNvPr id="12" name="Shape 10"/>
           <p:cNvSpPr/>
           <p:nvPr/>
         </p:nvSpPr>
@@ -8449,14 +8822,14 @@
       </p:sp>
       <p:sp>
         <p:nvSpPr>
-          <p:cNvPr id="12" name="Text 10"/>
+          <p:cNvPr id="13" name="Text 11"/>
           <p:cNvSpPr/>
           <p:nvPr/>
         </p:nvSpPr>
         <p:spPr>
           <a:xfrm>
             <a:off x="8074152" y="1563624"/>
-            <a:ext cx="2825496" cy="201168"/>
+            <a:ext cx="2825496" cy="256032"/>
           </a:xfrm>
           <a:prstGeom prst="rect">
             <a:avLst/>
@@ -8472,7 +8845,7 @@
               <a:buNone/>
             </a:pPr>
             <a:r>
-              <a:rPr lang="en-US" sz="950" b="1" dirty="0">
+              <a:rPr lang="en-US" sz="1300" b="1" dirty="0">
                 <a:solidFill>
                   <a:srgbClr val="0068B7"/>
                 </a:solidFill>
@@ -8482,20 +8855,20 @@
               </a:rPr>
               <a:t>Key idea</a:t>
             </a:r>
-            <a:endParaRPr lang="en-US" sz="950" dirty="0"/>
-          </a:p>
-        </p:txBody>
-      </p:sp>
-      <p:sp>
-        <p:nvSpPr>
-          <p:cNvPr id="13" name="Text 11"/>
-          <p:cNvSpPr/>
-          <p:nvPr/>
-        </p:nvSpPr>
-        <p:spPr>
-          <a:xfrm>
-            <a:off x="8074152" y="1856232"/>
-            <a:ext cx="2825496" cy="1261872"/>
+            <a:endParaRPr lang="en-US" sz="1300" dirty="0"/>
+          </a:p>
+        </p:txBody>
+      </p:sp>
+      <p:sp>
+        <p:nvSpPr>
+          <p:cNvPr id="14" name="Text 12"/>
+          <p:cNvSpPr/>
+          <p:nvPr/>
+        </p:nvSpPr>
+        <p:spPr>
+          <a:xfrm>
+            <a:off x="8074152" y="1920240"/>
+            <a:ext cx="2825496" cy="1188720"/>
           </a:xfrm>
           <a:prstGeom prst="rect">
             <a:avLst/>
@@ -8513,7 +8886,7 @@
               <a:buNone/>
             </a:pPr>
             <a:r>
-              <a:rPr lang="en-US" sz="1250" dirty="0">
+              <a:rPr lang="en-US" sz="1550" dirty="0">
                 <a:solidFill>
                   <a:srgbClr val="17364A"/>
                 </a:solidFill>
@@ -8523,13 +8896,13 @@
               </a:rPr>
               <a:t>1. What is the strongest reason this module topic belongs in AI leadership and governance training?</a:t>
             </a:r>
-            <a:endParaRPr lang="en-US" sz="1250" dirty="0"/>
-          </a:p>
-        </p:txBody>
-      </p:sp>
-      <p:sp>
-        <p:nvSpPr>
-          <p:cNvPr id="14" name="Shape 12"/>
+            <a:endParaRPr lang="en-US" sz="1550" dirty="0"/>
+          </a:p>
+        </p:txBody>
+      </p:sp>
+      <p:sp>
+        <p:nvSpPr>
+          <p:cNvPr id="15" name="Shape 13"/>
           <p:cNvSpPr/>
           <p:nvPr/>
         </p:nvSpPr>
@@ -8556,14 +8929,14 @@
       </p:sp>
       <p:sp>
         <p:nvSpPr>
-          <p:cNvPr id="15" name="Text 13"/>
+          <p:cNvPr id="16" name="Text 14"/>
           <p:cNvSpPr/>
           <p:nvPr/>
         </p:nvSpPr>
         <p:spPr>
           <a:xfrm>
             <a:off x="8074152" y="3666744"/>
-            <a:ext cx="2825496" cy="201168"/>
+            <a:ext cx="2825496" cy="256032"/>
           </a:xfrm>
           <a:prstGeom prst="rect">
             <a:avLst/>
@@ -8579,7 +8952,7 @@
               <a:buNone/>
             </a:pPr>
             <a:r>
-              <a:rPr lang="en-US" sz="950" b="1" dirty="0">
+              <a:rPr lang="en-US" sz="1300" b="1" dirty="0">
                 <a:solidFill>
                   <a:srgbClr val="0068B7"/>
                 </a:solidFill>
@@ -8589,20 +8962,20 @@
               </a:rPr>
               <a:t>Use this for</a:t>
             </a:r>
-            <a:endParaRPr lang="en-US" sz="950" dirty="0"/>
-          </a:p>
-        </p:txBody>
-      </p:sp>
-      <p:sp>
-        <p:nvSpPr>
-          <p:cNvPr id="16" name="Text 14"/>
-          <p:cNvSpPr/>
-          <p:nvPr/>
-        </p:nvSpPr>
-        <p:spPr>
-          <a:xfrm>
-            <a:off x="8074152" y="3959352"/>
-            <a:ext cx="2825496" cy="1170432"/>
+            <a:endParaRPr lang="en-US" sz="1300" dirty="0"/>
+          </a:p>
+        </p:txBody>
+      </p:sp>
+      <p:sp>
+        <p:nvSpPr>
+          <p:cNvPr id="17" name="Text 15"/>
+          <p:cNvSpPr/>
+          <p:nvPr/>
+        </p:nvSpPr>
+        <p:spPr>
+          <a:xfrm>
+            <a:off x="8074152" y="4023360"/>
+            <a:ext cx="2825496" cy="1097280"/>
           </a:xfrm>
           <a:prstGeom prst="rect">
             <a:avLst/>
@@ -8620,7 +8993,7 @@
               <a:buNone/>
             </a:pPr>
             <a:r>
-              <a:rPr lang="en-US" sz="1250" dirty="0">
+              <a:rPr lang="en-US" sz="1550" dirty="0">
                 <a:solidFill>
                   <a:srgbClr val="17364A"/>
                 </a:solidFill>
@@ -8630,7 +9003,7 @@
               </a:rPr>
               <a:t>Connect the concept to public health decisions, safeguards, documentation, or implementation work.</a:t>
             </a:r>
-            <a:endParaRPr lang="en-US" sz="1250" dirty="0"/>
+            <a:endParaRPr lang="en-US" sz="1550" dirty="0"/>
           </a:p>
         </p:txBody>
       </p:sp>
@@ -8827,7 +9200,7 @@
                 <a:ea typeface="Aptos" pitchFamily="34" charset="-122"/>
                 <a:cs typeface="Aptos" pitchFamily="34" charset="-120"/>
               </a:rPr>
-              <a:t>© Paula Soper</a:t>
+              <a:t>Â© Paula Soper</a:t>
             </a:r>
             <a:endParaRPr lang="en-US" sz="800" dirty="0"/>
           </a:p>
@@ -8841,8 +9214,47 @@
         </p:nvSpPr>
         <p:spPr>
           <a:xfrm>
+            <a:off x="11137392" y="6510528"/>
+            <a:ext cx="411480" cy="201168"/>
+          </a:xfrm>
+          <a:prstGeom prst="rect">
+            <a:avLst/>
+          </a:prstGeom>
+          <a:noFill/>
+          <a:ln/>
+        </p:spPr>
+        <p:txBody>
+          <a:bodyPr wrap="square" lIns="0" tIns="0" rIns="0" bIns="0" rtlCol="0" anchor="ctr"/>
+          <a:lstStyle/>
+          <a:p>
+            <a:pPr algn="r" indent="0" marL="0">
+              <a:buNone/>
+            </a:pPr>
+            <a:r>
+              <a:rPr lang="en-US" sz="900" dirty="0">
+                <a:solidFill>
+                  <a:srgbClr val="5F7181"/>
+                </a:solidFill>
+                <a:latin typeface="Aptos" pitchFamily="34" charset="0"/>
+                <a:ea typeface="Aptos" pitchFamily="34" charset="-122"/>
+                <a:cs typeface="Aptos" pitchFamily="34" charset="-120"/>
+              </a:rPr>
+              <a:t>2</a:t>
+            </a:r>
+            <a:endParaRPr lang="en-US" sz="900" dirty="0"/>
+          </a:p>
+        </p:txBody>
+      </p:sp>
+      <p:sp>
+        <p:nvSpPr>
+          <p:cNvPr id="8" name="Text 6"/>
+          <p:cNvSpPr/>
+          <p:nvPr/>
+        </p:nvSpPr>
+        <p:spPr>
+          <a:xfrm>
             <a:off x="640080" y="658368"/>
-            <a:ext cx="10881360" cy="566928"/>
+            <a:ext cx="10881360" cy="713232"/>
           </a:xfrm>
           <a:prstGeom prst="rect">
             <a:avLst/>
@@ -8860,7 +9272,7 @@
               <a:buNone/>
             </a:pPr>
             <a:r>
-              <a:rPr lang="en-US" sz="2700" b="1" dirty="0">
+              <a:rPr lang="en-US" sz="3400" b="1" dirty="0">
                 <a:solidFill>
                   <a:srgbClr val="003A63"/>
                 </a:solidFill>
@@ -8870,20 +9282,20 @@
               </a:rPr>
               <a:t>What this module helps you do</a:t>
             </a:r>
-            <a:endParaRPr lang="en-US" sz="2700" dirty="0"/>
-          </a:p>
-        </p:txBody>
-      </p:sp>
-      <p:sp>
-        <p:nvSpPr>
-          <p:cNvPr id="8" name="Text 6"/>
-          <p:cNvSpPr/>
-          <p:nvPr/>
-        </p:nvSpPr>
-        <p:spPr>
-          <a:xfrm>
-            <a:off x="868680" y="1417320"/>
-            <a:ext cx="6675120" cy="3291840"/>
+            <a:endParaRPr lang="en-US" sz="3400" dirty="0"/>
+          </a:p>
+        </p:txBody>
+      </p:sp>
+      <p:sp>
+        <p:nvSpPr>
+          <p:cNvPr id="9" name="Text 7"/>
+          <p:cNvSpPr/>
+          <p:nvPr/>
+        </p:nvSpPr>
+        <p:spPr>
+          <a:xfrm>
+            <a:off x="868680" y="1508760"/>
+            <a:ext cx="6446520" cy="2926080"/>
           </a:xfrm>
           <a:prstGeom prst="rect">
             <a:avLst/>
@@ -8898,7 +9310,7 @@
           <a:lstStyle/>
           <a:p>
             <a:r>
-              <a:rPr lang="en-US" sz="1700" dirty="0">
+              <a:rPr lang="en-US" sz="2100" dirty="0">
                 <a:solidFill>
                   <a:srgbClr val="17364A"/>
                 </a:solidFill>
@@ -8906,13 +9318,13 @@
                 <a:ea typeface="Aptos" pitchFamily="34" charset="-122"/>
                 <a:cs typeface="Aptos" pitchFamily="34" charset="-120"/>
               </a:rPr>
-              <a:t>Leaders cannot manage AI risk effectively unless they define how much risk the agency is willing to accept for different types of use.</a:t>
-            </a:r>
-            <a:endParaRPr lang="en-US" sz="1700" dirty="0"/>
-          </a:p>
-          <a:p>
-            <a:r>
-              <a:rPr lang="en-US" sz="1700" dirty="0">
+              <a:t>Leaders cannot manage AI risk effectively unless they define how much risk the agency is willing to accept for.</a:t>
+            </a:r>
+            <a:endParaRPr lang="en-US" sz="2100" dirty="0"/>
+          </a:p>
+          <a:p>
+            <a:r>
+              <a:rPr lang="en-US" sz="2100" dirty="0">
                 <a:solidFill>
                   <a:srgbClr val="17364A"/>
                 </a:solidFill>
@@ -8922,11 +9334,11 @@
               </a:rPr>
               <a:t>Risk appetite describes the broad level of risk an organization is willing to take in pursuit of its mission.</a:t>
             </a:r>
-            <a:endParaRPr lang="en-US" sz="1700" dirty="0"/>
-          </a:p>
-          <a:p>
-            <a:r>
-              <a:rPr lang="en-US" sz="1700" dirty="0">
+            <a:endParaRPr lang="en-US" sz="2100" dirty="0"/>
+          </a:p>
+          <a:p>
+            <a:r>
+              <a:rPr lang="en-US" sz="2100" dirty="0">
                 <a:solidFill>
                   <a:srgbClr val="17364A"/>
                 </a:solidFill>
@@ -8936,27 +9348,13 @@
               </a:rPr>
               <a:t>Risk tolerance translates that appetite into practical thresholds, conditions, and limits for specific AI uses.</a:t>
             </a:r>
-            <a:endParaRPr lang="en-US" sz="1700" dirty="0"/>
-          </a:p>
-          <a:p>
-            <a:r>
-              <a:rPr lang="en-US" sz="1700" dirty="0">
-                <a:solidFill>
-                  <a:srgbClr val="17364A"/>
-                </a:solidFill>
-                <a:latin typeface="Aptos" pitchFamily="34" charset="0"/>
-                <a:ea typeface="Aptos" pitchFamily="34" charset="-122"/>
-                <a:cs typeface="Aptos" pitchFamily="34" charset="-120"/>
-              </a:rPr>
-              <a:t>This module helps public health leaders define AI risk appetite in a way that reflects public health authority, community trust, legal obligations,.</a:t>
-            </a:r>
-            <a:endParaRPr lang="en-US" sz="1700" dirty="0"/>
-          </a:p>
-        </p:txBody>
-      </p:sp>
-      <p:sp>
-        <p:nvSpPr>
-          <p:cNvPr id="9" name="Shape 7"/>
+            <a:endParaRPr lang="en-US" sz="2100" dirty="0"/>
+          </a:p>
+        </p:txBody>
+      </p:sp>
+      <p:sp>
+        <p:nvSpPr>
+          <p:cNvPr id="10" name="Shape 8"/>
           <p:cNvSpPr/>
           <p:nvPr/>
         </p:nvSpPr>
@@ -8983,14 +9381,14 @@
       </p:sp>
       <p:sp>
         <p:nvSpPr>
-          <p:cNvPr id="10" name="Text 8"/>
+          <p:cNvPr id="11" name="Text 9"/>
           <p:cNvSpPr/>
           <p:nvPr/>
         </p:nvSpPr>
         <p:spPr>
           <a:xfrm>
             <a:off x="8074152" y="1563624"/>
-            <a:ext cx="2825496" cy="201168"/>
+            <a:ext cx="2825496" cy="256032"/>
           </a:xfrm>
           <a:prstGeom prst="rect">
             <a:avLst/>
@@ -9006,7 +9404,7 @@
               <a:buNone/>
             </a:pPr>
             <a:r>
-              <a:rPr lang="en-US" sz="950" b="1" dirty="0">
+              <a:rPr lang="en-US" sz="1300" b="1" dirty="0">
                 <a:solidFill>
                   <a:srgbClr val="0068B7"/>
                 </a:solidFill>
@@ -9016,20 +9414,20 @@
               </a:rPr>
               <a:t>Module details</a:t>
             </a:r>
-            <a:endParaRPr lang="en-US" sz="950" dirty="0"/>
-          </a:p>
-        </p:txBody>
-      </p:sp>
-      <p:sp>
-        <p:nvSpPr>
-          <p:cNvPr id="11" name="Text 9"/>
-          <p:cNvSpPr/>
-          <p:nvPr/>
-        </p:nvSpPr>
-        <p:spPr>
-          <a:xfrm>
-            <a:off x="8074152" y="1856232"/>
-            <a:ext cx="2825496" cy="1353312"/>
+            <a:endParaRPr lang="en-US" sz="1300" dirty="0"/>
+          </a:p>
+        </p:txBody>
+      </p:sp>
+      <p:sp>
+        <p:nvSpPr>
+          <p:cNvPr id="12" name="Text 10"/>
+          <p:cNvSpPr/>
+          <p:nvPr/>
+        </p:nvSpPr>
+        <p:spPr>
+          <a:xfrm>
+            <a:off x="8074152" y="1920240"/>
+            <a:ext cx="2825496" cy="1280160"/>
           </a:xfrm>
           <a:prstGeom prst="rect">
             <a:avLst/>
@@ -9047,7 +9445,7 @@
               <a:buNone/>
             </a:pPr>
             <a:r>
-              <a:rPr lang="en-US" sz="1250" dirty="0">
+              <a:rPr lang="en-US" sz="1550" dirty="0">
                 <a:solidFill>
                   <a:srgbClr val="17364A"/>
                 </a:solidFill>
@@ -9057,14 +9455,14 @@
               </a:rPr>
               <a:t>Level: advanced/leadership</a:t>
             </a:r>
-            <a:endParaRPr lang="en-US" sz="1250" dirty="0"/>
+            <a:endParaRPr lang="en-US" sz="1550" dirty="0"/>
           </a:p>
           <a:p>
             <a:pPr indent="0" marL="0">
               <a:buNone/>
             </a:pPr>
             <a:r>
-              <a:rPr lang="en-US" sz="1250" dirty="0">
+              <a:rPr lang="en-US" sz="1550" dirty="0">
                 <a:solidFill>
                   <a:srgbClr val="17364A"/>
                 </a:solidFill>
@@ -9074,14 +9472,14 @@
               </a:rPr>
               <a:t>Primary track: Governance and Security Track</a:t>
             </a:r>
-            <a:endParaRPr lang="en-US" sz="1250" dirty="0"/>
+            <a:endParaRPr lang="en-US" sz="1550" dirty="0"/>
           </a:p>
           <a:p>
             <a:pPr indent="0" marL="0">
               <a:buNone/>
             </a:pPr>
             <a:r>
-              <a:rPr lang="en-US" sz="1250" dirty="0">
+              <a:rPr lang="en-US" sz="1550" dirty="0">
                 <a:solidFill>
                   <a:srgbClr val="17364A"/>
                 </a:solidFill>
@@ -9091,32 +9489,32 @@
               </a:rPr>
               <a:t>Appears in tracks: governance-security</a:t>
             </a:r>
-            <a:endParaRPr lang="en-US" sz="1250" dirty="0"/>
-          </a:p>
-        </p:txBody>
-      </p:sp>
-      <p:sp>
-        <p:nvSpPr>
-          <p:cNvPr id="12" name="Shape 10"/>
-          <p:cNvSpPr/>
-          <p:nvPr/>
-        </p:nvSpPr>
-        <p:spPr>
-          <a:xfrm>
-            <a:off x="7909560" y="3611880"/>
-            <a:ext cx="3154680" cy="1783080"/>
+            <a:endParaRPr lang="en-US" sz="1550" dirty="0"/>
+          </a:p>
+        </p:txBody>
+      </p:sp>
+      <p:sp>
+        <p:nvSpPr>
+          <p:cNvPr id="13" name="Shape 11"/>
+          <p:cNvSpPr/>
+          <p:nvPr/>
+        </p:nvSpPr>
+        <p:spPr>
+          <a:xfrm>
+            <a:off x="7635240" y="3730752"/>
+            <a:ext cx="1033272" cy="749808"/>
           </a:xfrm>
           <a:prstGeom prst="roundRect">
             <a:avLst>
-              <a:gd name="adj" fmla="val 6154"/>
+              <a:gd name="adj" fmla="val 14634"/>
             </a:avLst>
           </a:prstGeom>
           <a:solidFill>
-            <a:srgbClr val="EEF8ED"/>
+            <a:srgbClr val="0068B7"/>
           </a:solidFill>
           <a:ln w="12700">
             <a:solidFill>
-              <a:srgbClr val="B9D7E6"/>
+              <a:srgbClr val="0068B7"/>
             </a:solidFill>
             <a:prstDash val="solid"/>
           </a:ln>
@@ -9124,81 +9522,256 @@
       </p:sp>
       <p:sp>
         <p:nvSpPr>
-          <p:cNvPr id="13" name="Text 11"/>
-          <p:cNvSpPr/>
-          <p:nvPr/>
-        </p:nvSpPr>
-        <p:spPr>
-          <a:xfrm>
-            <a:off x="8074152" y="3758184"/>
-            <a:ext cx="2825496" cy="201168"/>
-          </a:xfrm>
-          <a:prstGeom prst="rect">
-            <a:avLst/>
-          </a:prstGeom>
-          <a:noFill/>
-          <a:ln/>
-        </p:spPr>
-        <p:txBody>
-          <a:bodyPr wrap="square" lIns="0" tIns="0" rIns="0" bIns="0" rtlCol="0" anchor="ctr"/>
-          <a:lstStyle/>
-          <a:p>
-            <a:pPr indent="0" marL="0">
-              <a:buNone/>
-            </a:pPr>
-            <a:r>
-              <a:rPr lang="en-US" sz="950" b="1" dirty="0">
-                <a:solidFill>
-                  <a:srgbClr val="0068B7"/>
-                </a:solidFill>
-                <a:latin typeface="Aptos" pitchFamily="34" charset="0"/>
-                <a:ea typeface="Aptos" pitchFamily="34" charset="-122"/>
-                <a:cs typeface="Aptos" pitchFamily="34" charset="-120"/>
-              </a:rPr>
-              <a:t>Learning approach</a:t>
-            </a:r>
-            <a:endParaRPr lang="en-US" sz="950" dirty="0"/>
-          </a:p>
-        </p:txBody>
-      </p:sp>
-      <p:sp>
-        <p:nvSpPr>
           <p:cNvPr id="14" name="Text 12"/>
           <p:cNvSpPr/>
           <p:nvPr/>
         </p:nvSpPr>
         <p:spPr>
           <a:xfrm>
-            <a:off x="8074152" y="4050792"/>
-            <a:ext cx="2825496" cy="1216152"/>
-          </a:xfrm>
-          <a:prstGeom prst="rect">
-            <a:avLst/>
-          </a:prstGeom>
-          <a:noFill/>
-          <a:ln/>
-        </p:spPr>
-        <p:txBody>
-          <a:bodyPr wrap="square" lIns="0" tIns="0" rIns="0" bIns="0" rtlCol="0" anchor="t">
+            <a:off x="7708392" y="3922776"/>
+            <a:ext cx="886968" cy="310896"/>
+          </a:xfrm>
+          <a:prstGeom prst="rect">
+            <a:avLst/>
+          </a:prstGeom>
+          <a:noFill/>
+          <a:ln/>
+        </p:spPr>
+        <p:txBody>
+          <a:bodyPr wrap="square" lIns="0" tIns="0" rIns="0" bIns="0" rtlCol="0" anchor="ctr">
             <a:normAutofit/>
           </a:bodyPr>
           <a:lstStyle/>
           <a:p>
-            <a:pPr indent="0" marL="0">
-              <a:buNone/>
-            </a:pPr>
-            <a:r>
-              <a:rPr lang="en-US" sz="1250" dirty="0">
-                <a:solidFill>
-                  <a:srgbClr val="17364A"/>
-                </a:solidFill>
-                <a:latin typeface="Aptos" pitchFamily="34" charset="0"/>
-                <a:ea typeface="Aptos" pitchFamily="34" charset="-122"/>
-                <a:cs typeface="Aptos" pitchFamily="34" charset="-120"/>
-              </a:rPr>
-              <a:t>Review the core ideas, complete the practical exercise, check your understanding, and use the related plays and tools to apply the lesson.</a:t>
-            </a:r>
-            <a:endParaRPr lang="en-US" sz="1250" dirty="0"/>
+            <a:pPr algn="ctr" indent="0" marL="0">
+              <a:buNone/>
+            </a:pPr>
+            <a:r>
+              <a:rPr lang="en-US" sz="1500" b="1" dirty="0">
+                <a:solidFill>
+                  <a:srgbClr val="FFFFFF"/>
+                </a:solidFill>
+                <a:latin typeface="Aptos" pitchFamily="34" charset="0"/>
+                <a:ea typeface="Aptos" pitchFamily="34" charset="-122"/>
+                <a:cs typeface="Aptos" pitchFamily="34" charset="-120"/>
+              </a:rPr>
+              <a:t>Learn</a:t>
+            </a:r>
+            <a:endParaRPr lang="en-US" sz="1500" dirty="0"/>
+          </a:p>
+        </p:txBody>
+      </p:sp>
+      <p:sp>
+        <p:nvSpPr>
+          <p:cNvPr id="15" name="Text 13"/>
+          <p:cNvSpPr/>
+          <p:nvPr/>
+        </p:nvSpPr>
+        <p:spPr>
+          <a:xfrm>
+            <a:off x="8695944" y="3941064"/>
+            <a:ext cx="201168" cy="256032"/>
+          </a:xfrm>
+          <a:prstGeom prst="rect">
+            <a:avLst/>
+          </a:prstGeom>
+          <a:noFill/>
+          <a:ln/>
+        </p:spPr>
+        <p:txBody>
+          <a:bodyPr wrap="square" lIns="0" tIns="0" rIns="0" bIns="0" rtlCol="0" anchor="ctr"/>
+          <a:lstStyle/>
+          <a:p>
+            <a:pPr algn="ctr" indent="0" marL="0">
+              <a:buNone/>
+            </a:pPr>
+            <a:r>
+              <a:rPr lang="en-US" sz="1800" b="1" dirty="0">
+                <a:solidFill>
+                  <a:srgbClr val="0068B7"/>
+                </a:solidFill>
+                <a:latin typeface="Aptos" pitchFamily="34" charset="0"/>
+                <a:ea typeface="Aptos" pitchFamily="34" charset="-122"/>
+                <a:cs typeface="Aptos" pitchFamily="34" charset="-120"/>
+              </a:rPr>
+              <a:t>â†’</a:t>
+            </a:r>
+            <a:endParaRPr lang="en-US" sz="1800" dirty="0"/>
+          </a:p>
+        </p:txBody>
+      </p:sp>
+      <p:sp>
+        <p:nvSpPr>
+          <p:cNvPr id="16" name="Shape 14"/>
+          <p:cNvSpPr/>
+          <p:nvPr/>
+        </p:nvSpPr>
+        <p:spPr>
+          <a:xfrm>
+            <a:off x="8924544" y="3730752"/>
+            <a:ext cx="1033272" cy="749808"/>
+          </a:xfrm>
+          <a:prstGeom prst="roundRect">
+            <a:avLst>
+              <a:gd name="adj" fmla="val 14634"/>
+            </a:avLst>
+          </a:prstGeom>
+          <a:solidFill>
+            <a:srgbClr val="2F8A28"/>
+          </a:solidFill>
+          <a:ln w="12700">
+            <a:solidFill>
+              <a:srgbClr val="2F8A28"/>
+            </a:solidFill>
+            <a:prstDash val="solid"/>
+          </a:ln>
+        </p:spPr>
+      </p:sp>
+      <p:sp>
+        <p:nvSpPr>
+          <p:cNvPr id="17" name="Text 15"/>
+          <p:cNvSpPr/>
+          <p:nvPr/>
+        </p:nvSpPr>
+        <p:spPr>
+          <a:xfrm>
+            <a:off x="8997696" y="3922776"/>
+            <a:ext cx="886968" cy="310896"/>
+          </a:xfrm>
+          <a:prstGeom prst="rect">
+            <a:avLst/>
+          </a:prstGeom>
+          <a:noFill/>
+          <a:ln/>
+        </p:spPr>
+        <p:txBody>
+          <a:bodyPr wrap="square" lIns="0" tIns="0" rIns="0" bIns="0" rtlCol="0" anchor="ctr">
+            <a:normAutofit/>
+          </a:bodyPr>
+          <a:lstStyle/>
+          <a:p>
+            <a:pPr algn="ctr" indent="0" marL="0">
+              <a:buNone/>
+            </a:pPr>
+            <a:r>
+              <a:rPr lang="en-US" sz="1500" b="1" dirty="0">
+                <a:solidFill>
+                  <a:srgbClr val="FFFFFF"/>
+                </a:solidFill>
+                <a:latin typeface="Aptos" pitchFamily="34" charset="0"/>
+                <a:ea typeface="Aptos" pitchFamily="34" charset="-122"/>
+                <a:cs typeface="Aptos" pitchFamily="34" charset="-120"/>
+              </a:rPr>
+              <a:t>Apply</a:t>
+            </a:r>
+            <a:endParaRPr lang="en-US" sz="1500" dirty="0"/>
+          </a:p>
+        </p:txBody>
+      </p:sp>
+      <p:sp>
+        <p:nvSpPr>
+          <p:cNvPr id="18" name="Text 16"/>
+          <p:cNvSpPr/>
+          <p:nvPr/>
+        </p:nvSpPr>
+        <p:spPr>
+          <a:xfrm>
+            <a:off x="9985248" y="3941064"/>
+            <a:ext cx="201168" cy="256032"/>
+          </a:xfrm>
+          <a:prstGeom prst="rect">
+            <a:avLst/>
+          </a:prstGeom>
+          <a:noFill/>
+          <a:ln/>
+        </p:spPr>
+        <p:txBody>
+          <a:bodyPr wrap="square" lIns="0" tIns="0" rIns="0" bIns="0" rtlCol="0" anchor="ctr"/>
+          <a:lstStyle/>
+          <a:p>
+            <a:pPr algn="ctr" indent="0" marL="0">
+              <a:buNone/>
+            </a:pPr>
+            <a:r>
+              <a:rPr lang="en-US" sz="1800" b="1" dirty="0">
+                <a:solidFill>
+                  <a:srgbClr val="0068B7"/>
+                </a:solidFill>
+                <a:latin typeface="Aptos" pitchFamily="34" charset="0"/>
+                <a:ea typeface="Aptos" pitchFamily="34" charset="-122"/>
+                <a:cs typeface="Aptos" pitchFamily="34" charset="-120"/>
+              </a:rPr>
+              <a:t>â†’</a:t>
+            </a:r>
+            <a:endParaRPr lang="en-US" sz="1800" dirty="0"/>
+          </a:p>
+        </p:txBody>
+      </p:sp>
+      <p:sp>
+        <p:nvSpPr>
+          <p:cNvPr id="19" name="Shape 17"/>
+          <p:cNvSpPr/>
+          <p:nvPr/>
+        </p:nvSpPr>
+        <p:spPr>
+          <a:xfrm>
+            <a:off x="10213848" y="3730752"/>
+            <a:ext cx="1033272" cy="749808"/>
+          </a:xfrm>
+          <a:prstGeom prst="roundRect">
+            <a:avLst>
+              <a:gd name="adj" fmla="val 14634"/>
+            </a:avLst>
+          </a:prstGeom>
+          <a:solidFill>
+            <a:srgbClr val="6A4CA3"/>
+          </a:solidFill>
+          <a:ln w="12700">
+            <a:solidFill>
+              <a:srgbClr val="6A4CA3"/>
+            </a:solidFill>
+            <a:prstDash val="solid"/>
+          </a:ln>
+        </p:spPr>
+      </p:sp>
+      <p:sp>
+        <p:nvSpPr>
+          <p:cNvPr id="20" name="Text 18"/>
+          <p:cNvSpPr/>
+          <p:nvPr/>
+        </p:nvSpPr>
+        <p:spPr>
+          <a:xfrm>
+            <a:off x="10287000" y="3922776"/>
+            <a:ext cx="886968" cy="310896"/>
+          </a:xfrm>
+          <a:prstGeom prst="rect">
+            <a:avLst/>
+          </a:prstGeom>
+          <a:noFill/>
+          <a:ln/>
+        </p:spPr>
+        <p:txBody>
+          <a:bodyPr wrap="square" lIns="0" tIns="0" rIns="0" bIns="0" rtlCol="0" anchor="ctr">
+            <a:normAutofit/>
+          </a:bodyPr>
+          <a:lstStyle/>
+          <a:p>
+            <a:pPr algn="ctr" indent="0" marL="0">
+              <a:buNone/>
+            </a:pPr>
+            <a:r>
+              <a:rPr lang="en-US" sz="1500" b="1" dirty="0">
+                <a:solidFill>
+                  <a:srgbClr val="FFFFFF"/>
+                </a:solidFill>
+                <a:latin typeface="Aptos" pitchFamily="34" charset="0"/>
+                <a:ea typeface="Aptos" pitchFamily="34" charset="-122"/>
+                <a:cs typeface="Aptos" pitchFamily="34" charset="-120"/>
+              </a:rPr>
+              <a:t>Document</a:t>
+            </a:r>
+            <a:endParaRPr lang="en-US" sz="1500" dirty="0"/>
           </a:p>
         </p:txBody>
       </p:sp>
@@ -9395,7 +9968,7 @@
                 <a:ea typeface="Aptos" pitchFamily="34" charset="-122"/>
                 <a:cs typeface="Aptos" pitchFamily="34" charset="-120"/>
               </a:rPr>
-              <a:t>© Paula Soper</a:t>
+              <a:t>Â© Paula Soper</a:t>
             </a:r>
             <a:endParaRPr lang="en-US" sz="800" dirty="0"/>
           </a:p>
@@ -9403,7 +9976,46 @@
       </p:sp>
       <p:sp>
         <p:nvSpPr>
-          <p:cNvPr id="7" name="Shape 5"/>
+          <p:cNvPr id="7" name="Text 5"/>
+          <p:cNvSpPr/>
+          <p:nvPr/>
+        </p:nvSpPr>
+        <p:spPr>
+          <a:xfrm>
+            <a:off x="11137392" y="6510528"/>
+            <a:ext cx="411480" cy="201168"/>
+          </a:xfrm>
+          <a:prstGeom prst="rect">
+            <a:avLst/>
+          </a:prstGeom>
+          <a:noFill/>
+          <a:ln/>
+        </p:spPr>
+        <p:txBody>
+          <a:bodyPr wrap="square" lIns="0" tIns="0" rIns="0" bIns="0" rtlCol="0" anchor="ctr"/>
+          <a:lstStyle/>
+          <a:p>
+            <a:pPr algn="r" indent="0" marL="0">
+              <a:buNone/>
+            </a:pPr>
+            <a:r>
+              <a:rPr lang="en-US" sz="900" dirty="0">
+                <a:solidFill>
+                  <a:srgbClr val="5F7181"/>
+                </a:solidFill>
+                <a:latin typeface="Aptos" pitchFamily="34" charset="0"/>
+                <a:ea typeface="Aptos" pitchFamily="34" charset="-122"/>
+                <a:cs typeface="Aptos" pitchFamily="34" charset="-120"/>
+              </a:rPr>
+              <a:t>20</a:t>
+            </a:r>
+            <a:endParaRPr lang="en-US" sz="900" dirty="0"/>
+          </a:p>
+        </p:txBody>
+      </p:sp>
+      <p:sp>
+        <p:nvSpPr>
+          <p:cNvPr id="8" name="Shape 6"/>
           <p:cNvSpPr/>
           <p:nvPr/>
         </p:nvSpPr>
@@ -9428,7 +10040,7 @@
       </p:sp>
       <p:sp>
         <p:nvSpPr>
-          <p:cNvPr id="8" name="Text 6"/>
+          <p:cNvPr id="9" name="Text 7"/>
           <p:cNvSpPr/>
           <p:nvPr/>
         </p:nvSpPr>
@@ -9467,14 +10079,14 @@
       </p:sp>
       <p:sp>
         <p:nvSpPr>
-          <p:cNvPr id="9" name="Text 7"/>
+          <p:cNvPr id="10" name="Text 8"/>
           <p:cNvSpPr/>
           <p:nvPr/>
         </p:nvSpPr>
         <p:spPr>
           <a:xfrm>
             <a:off x="640080" y="621792"/>
-            <a:ext cx="10881360" cy="566928"/>
+            <a:ext cx="10881360" cy="713232"/>
           </a:xfrm>
           <a:prstGeom prst="rect">
             <a:avLst/>
@@ -9492,7 +10104,7 @@
               <a:buNone/>
             </a:pPr>
             <a:r>
-              <a:rPr lang="en-US" sz="2700" b="1" dirty="0">
+              <a:rPr lang="en-US" sz="3400" b="1" dirty="0">
                 <a:solidFill>
                   <a:srgbClr val="003A63"/>
                 </a:solidFill>
@@ -9502,20 +10114,20 @@
               </a:rPr>
               <a:t>References and Resources</a:t>
             </a:r>
-            <a:endParaRPr lang="en-US" sz="2700" dirty="0"/>
-          </a:p>
-        </p:txBody>
-      </p:sp>
-      <p:sp>
-        <p:nvSpPr>
-          <p:cNvPr id="10" name="Text 8"/>
-          <p:cNvSpPr/>
-          <p:nvPr/>
-        </p:nvSpPr>
-        <p:spPr>
-          <a:xfrm>
-            <a:off x="868680" y="1417320"/>
-            <a:ext cx="6675120" cy="4434840"/>
+            <a:endParaRPr lang="en-US" sz="3400" dirty="0"/>
+          </a:p>
+        </p:txBody>
+      </p:sp>
+      <p:sp>
+        <p:nvSpPr>
+          <p:cNvPr id="11" name="Text 9"/>
+          <p:cNvSpPr/>
+          <p:nvPr/>
+        </p:nvSpPr>
+        <p:spPr>
+          <a:xfrm>
+            <a:off x="868680" y="1508760"/>
+            <a:ext cx="6537960" cy="4160520"/>
           </a:xfrm>
           <a:prstGeom prst="rect">
             <a:avLst/>
@@ -9530,7 +10142,7 @@
           <a:lstStyle/>
           <a:p>
             <a:r>
-              <a:rPr lang="en-US" sz="1700" dirty="0">
+              <a:rPr lang="en-US" sz="2100" dirty="0">
                 <a:solidFill>
                   <a:srgbClr val="17364A"/>
                 </a:solidFill>
@@ -9538,13 +10150,13 @@
                 <a:ea typeface="Aptos" pitchFamily="34" charset="-122"/>
                 <a:cs typeface="Aptos" pitchFamily="34" charset="-120"/>
               </a:rPr>
-              <a:t>NIST Artificial Intelligence Risk Management Framework (AI RMF 1.0): https://www.nist.gov/itl/ai-risk-management-framework</a:t>
-            </a:r>
-            <a:endParaRPr lang="en-US" sz="1700" dirty="0"/>
-          </a:p>
-          <a:p>
-            <a:r>
-              <a:rPr lang="en-US" sz="1700" dirty="0">
+              <a:t>NIST Artificial Intelligence Risk Management Framework (AI RMF 1.0):.</a:t>
+            </a:r>
+            <a:endParaRPr lang="en-US" sz="2100" dirty="0"/>
+          </a:p>
+          <a:p>
+            <a:r>
+              <a:rPr lang="en-US" sz="2100" dirty="0">
                 <a:solidFill>
                   <a:srgbClr val="17364A"/>
                 </a:solidFill>
@@ -9554,11 +10166,11 @@
               </a:rPr>
               <a:t>NIST Generative AI Profile:.</a:t>
             </a:r>
-            <a:endParaRPr lang="en-US" sz="1700" dirty="0"/>
-          </a:p>
-          <a:p>
-            <a:r>
-              <a:rPr lang="en-US" sz="1700" dirty="0">
+            <a:endParaRPr lang="en-US" sz="2100" dirty="0"/>
+          </a:p>
+          <a:p>
+            <a:r>
+              <a:rPr lang="en-US" sz="2100" dirty="0">
                 <a:solidFill>
                   <a:srgbClr val="17364A"/>
                 </a:solidFill>
@@ -9568,27 +10180,13 @@
               </a:rPr>
               <a:t>NIST Privacy Framework</a:t>
             </a:r>
-            <a:endParaRPr lang="en-US" sz="1700" dirty="0"/>
-          </a:p>
-          <a:p>
-            <a:r>
-              <a:rPr lang="en-US" sz="1700" dirty="0">
-                <a:solidFill>
-                  <a:srgbClr val="17364A"/>
-                </a:solidFill>
-                <a:latin typeface="Aptos" pitchFamily="34" charset="0"/>
-                <a:ea typeface="Aptos" pitchFamily="34" charset="-122"/>
-                <a:cs typeface="Aptos" pitchFamily="34" charset="-120"/>
-              </a:rPr>
-              <a:t>CDC Public Health Data Strategy and Data Modernization resources:.</a:t>
-            </a:r>
-            <a:endParaRPr lang="en-US" sz="1700" dirty="0"/>
-          </a:p>
-        </p:txBody>
-      </p:sp>
-      <p:sp>
-        <p:nvSpPr>
-          <p:cNvPr id="11" name="Shape 9"/>
+            <a:endParaRPr lang="en-US" sz="2100" dirty="0"/>
+          </a:p>
+        </p:txBody>
+      </p:sp>
+      <p:sp>
+        <p:nvSpPr>
+          <p:cNvPr id="12" name="Shape 10"/>
           <p:cNvSpPr/>
           <p:nvPr/>
         </p:nvSpPr>
@@ -9615,14 +10213,14 @@
       </p:sp>
       <p:sp>
         <p:nvSpPr>
-          <p:cNvPr id="12" name="Text 10"/>
+          <p:cNvPr id="13" name="Text 11"/>
           <p:cNvSpPr/>
           <p:nvPr/>
         </p:nvSpPr>
         <p:spPr>
           <a:xfrm>
             <a:off x="8074152" y="1563624"/>
-            <a:ext cx="2825496" cy="201168"/>
+            <a:ext cx="2825496" cy="256032"/>
           </a:xfrm>
           <a:prstGeom prst="rect">
             <a:avLst/>
@@ -9638,7 +10236,7 @@
               <a:buNone/>
             </a:pPr>
             <a:r>
-              <a:rPr lang="en-US" sz="950" b="1" dirty="0">
+              <a:rPr lang="en-US" sz="1300" b="1" dirty="0">
                 <a:solidFill>
                   <a:srgbClr val="0068B7"/>
                 </a:solidFill>
@@ -9648,20 +10246,20 @@
               </a:rPr>
               <a:t>Key idea</a:t>
             </a:r>
-            <a:endParaRPr lang="en-US" sz="950" dirty="0"/>
-          </a:p>
-        </p:txBody>
-      </p:sp>
-      <p:sp>
-        <p:nvSpPr>
-          <p:cNvPr id="13" name="Text 11"/>
-          <p:cNvSpPr/>
-          <p:nvPr/>
-        </p:nvSpPr>
-        <p:spPr>
-          <a:xfrm>
-            <a:off x="8074152" y="1856232"/>
-            <a:ext cx="2825496" cy="1261872"/>
+            <a:endParaRPr lang="en-US" sz="1300" dirty="0"/>
+          </a:p>
+        </p:txBody>
+      </p:sp>
+      <p:sp>
+        <p:nvSpPr>
+          <p:cNvPr id="14" name="Text 12"/>
+          <p:cNvSpPr/>
+          <p:nvPr/>
+        </p:nvSpPr>
+        <p:spPr>
+          <a:xfrm>
+            <a:off x="8074152" y="1920240"/>
+            <a:ext cx="2825496" cy="1188720"/>
           </a:xfrm>
           <a:prstGeom prst="rect">
             <a:avLst/>
@@ -9679,7 +10277,7 @@
               <a:buNone/>
             </a:pPr>
             <a:r>
-              <a:rPr lang="en-US" sz="1250" dirty="0">
+              <a:rPr lang="en-US" sz="1550" dirty="0">
                 <a:solidFill>
                   <a:srgbClr val="17364A"/>
                 </a:solidFill>
@@ -9687,15 +10285,15 @@
                 <a:ea typeface="Aptos" pitchFamily="34" charset="-122"/>
                 <a:cs typeface="Aptos" pitchFamily="34" charset="-120"/>
               </a:rPr>
-              <a:t>NIST Artificial Intelligence Risk Management Framework (AI RMF 1.0): https://www.nist.gov/itl/ai-risk-management-framework</a:t>
-            </a:r>
-            <a:endParaRPr lang="en-US" sz="1250" dirty="0"/>
-          </a:p>
-        </p:txBody>
-      </p:sp>
-      <p:sp>
-        <p:nvSpPr>
-          <p:cNvPr id="14" name="Shape 12"/>
+              <a:t>NIST Artificial Intelligence Risk Management Framework (AI RMF 1.0):.</a:t>
+            </a:r>
+            <a:endParaRPr lang="en-US" sz="1550" dirty="0"/>
+          </a:p>
+        </p:txBody>
+      </p:sp>
+      <p:sp>
+        <p:nvSpPr>
+          <p:cNvPr id="15" name="Shape 13"/>
           <p:cNvSpPr/>
           <p:nvPr/>
         </p:nvSpPr>
@@ -9722,14 +10320,14 @@
       </p:sp>
       <p:sp>
         <p:nvSpPr>
-          <p:cNvPr id="15" name="Text 13"/>
+          <p:cNvPr id="16" name="Text 14"/>
           <p:cNvSpPr/>
           <p:nvPr/>
         </p:nvSpPr>
         <p:spPr>
           <a:xfrm>
             <a:off x="8074152" y="3666744"/>
-            <a:ext cx="2825496" cy="201168"/>
+            <a:ext cx="2825496" cy="256032"/>
           </a:xfrm>
           <a:prstGeom prst="rect">
             <a:avLst/>
@@ -9745,7 +10343,7 @@
               <a:buNone/>
             </a:pPr>
             <a:r>
-              <a:rPr lang="en-US" sz="950" b="1" dirty="0">
+              <a:rPr lang="en-US" sz="1300" b="1" dirty="0">
                 <a:solidFill>
                   <a:srgbClr val="0068B7"/>
                 </a:solidFill>
@@ -9755,20 +10353,20 @@
               </a:rPr>
               <a:t>Use this for</a:t>
             </a:r>
-            <a:endParaRPr lang="en-US" sz="950" dirty="0"/>
-          </a:p>
-        </p:txBody>
-      </p:sp>
-      <p:sp>
-        <p:nvSpPr>
-          <p:cNvPr id="16" name="Text 14"/>
-          <p:cNvSpPr/>
-          <p:nvPr/>
-        </p:nvSpPr>
-        <p:spPr>
-          <a:xfrm>
-            <a:off x="8074152" y="3959352"/>
-            <a:ext cx="2825496" cy="1170432"/>
+            <a:endParaRPr lang="en-US" sz="1300" dirty="0"/>
+          </a:p>
+        </p:txBody>
+      </p:sp>
+      <p:sp>
+        <p:nvSpPr>
+          <p:cNvPr id="17" name="Text 15"/>
+          <p:cNvSpPr/>
+          <p:nvPr/>
+        </p:nvSpPr>
+        <p:spPr>
+          <a:xfrm>
+            <a:off x="8074152" y="4023360"/>
+            <a:ext cx="2825496" cy="1097280"/>
           </a:xfrm>
           <a:prstGeom prst="rect">
             <a:avLst/>
@@ -9786,7 +10384,7 @@
               <a:buNone/>
             </a:pPr>
             <a:r>
-              <a:rPr lang="en-US" sz="1250" dirty="0">
+              <a:rPr lang="en-US" sz="1550" dirty="0">
                 <a:solidFill>
                   <a:srgbClr val="17364A"/>
                 </a:solidFill>
@@ -9796,7 +10394,7 @@
               </a:rPr>
               <a:t>Connect the concept to public health decisions, safeguards, documentation, or implementation work.</a:t>
             </a:r>
-            <a:endParaRPr lang="en-US" sz="1250" dirty="0"/>
+            <a:endParaRPr lang="en-US" sz="1550" dirty="0"/>
           </a:p>
         </p:txBody>
       </p:sp>
@@ -9993,7 +10591,7 @@
                 <a:ea typeface="Aptos" pitchFamily="34" charset="-122"/>
                 <a:cs typeface="Aptos" pitchFamily="34" charset="-120"/>
               </a:rPr>
-              <a:t>© Paula Soper</a:t>
+              <a:t>Â© Paula Soper</a:t>
             </a:r>
             <a:endParaRPr lang="en-US" sz="800" dirty="0"/>
           </a:p>
@@ -10007,8 +10605,47 @@
         </p:nvSpPr>
         <p:spPr>
           <a:xfrm>
+            <a:off x="11137392" y="6510528"/>
+            <a:ext cx="411480" cy="201168"/>
+          </a:xfrm>
+          <a:prstGeom prst="rect">
+            <a:avLst/>
+          </a:prstGeom>
+          <a:noFill/>
+          <a:ln/>
+        </p:spPr>
+        <p:txBody>
+          <a:bodyPr wrap="square" lIns="0" tIns="0" rIns="0" bIns="0" rtlCol="0" anchor="ctr"/>
+          <a:lstStyle/>
+          <a:p>
+            <a:pPr algn="r" indent="0" marL="0">
+              <a:buNone/>
+            </a:pPr>
+            <a:r>
+              <a:rPr lang="en-US" sz="900" dirty="0">
+                <a:solidFill>
+                  <a:srgbClr val="5F7181"/>
+                </a:solidFill>
+                <a:latin typeface="Aptos" pitchFamily="34" charset="0"/>
+                <a:ea typeface="Aptos" pitchFamily="34" charset="-122"/>
+                <a:cs typeface="Aptos" pitchFamily="34" charset="-120"/>
+              </a:rPr>
+              <a:t>21</a:t>
+            </a:r>
+            <a:endParaRPr lang="en-US" sz="900" dirty="0"/>
+          </a:p>
+        </p:txBody>
+      </p:sp>
+      <p:sp>
+        <p:nvSpPr>
+          <p:cNvPr id="8" name="Text 6"/>
+          <p:cNvSpPr/>
+          <p:nvPr/>
+        </p:nvSpPr>
+        <p:spPr>
+          <a:xfrm>
             <a:off x="640080" y="658368"/>
-            <a:ext cx="10881360" cy="566928"/>
+            <a:ext cx="10881360" cy="713232"/>
           </a:xfrm>
           <a:prstGeom prst="rect">
             <a:avLst/>
@@ -10026,7 +10663,7 @@
               <a:buNone/>
             </a:pPr>
             <a:r>
-              <a:rPr lang="en-US" sz="2700" b="1" dirty="0">
+              <a:rPr lang="en-US" sz="3400" b="1" dirty="0">
                 <a:solidFill>
                   <a:srgbClr val="003A63"/>
                 </a:solidFill>
@@ -10036,20 +10673,20 @@
               </a:rPr>
               <a:t>References and Resources Continued</a:t>
             </a:r>
-            <a:endParaRPr lang="en-US" sz="2700" dirty="0"/>
-          </a:p>
-        </p:txBody>
-      </p:sp>
-      <p:sp>
-        <p:nvSpPr>
-          <p:cNvPr id="8" name="Text 6"/>
-          <p:cNvSpPr/>
-          <p:nvPr/>
-        </p:nvSpPr>
-        <p:spPr>
-          <a:xfrm>
-            <a:off x="868680" y="1417320"/>
-            <a:ext cx="6675120" cy="4434840"/>
+            <a:endParaRPr lang="en-US" sz="3400" dirty="0"/>
+          </a:p>
+        </p:txBody>
+      </p:sp>
+      <p:sp>
+        <p:nvSpPr>
+          <p:cNvPr id="9" name="Text 7"/>
+          <p:cNvSpPr/>
+          <p:nvPr/>
+        </p:nvSpPr>
+        <p:spPr>
+          <a:xfrm>
+            <a:off x="868680" y="1508760"/>
+            <a:ext cx="6537960" cy="4160520"/>
           </a:xfrm>
           <a:prstGeom prst="rect">
             <a:avLst/>
@@ -10064,7 +10701,7 @@
           <a:lstStyle/>
           <a:p>
             <a:r>
-              <a:rPr lang="en-US" sz="1700" dirty="0">
+              <a:rPr lang="en-US" sz="2100" dirty="0">
                 <a:solidFill>
                   <a:srgbClr val="17364A"/>
                 </a:solidFill>
@@ -10072,13 +10709,13 @@
                 <a:ea typeface="Aptos" pitchFamily="34" charset="-122"/>
                 <a:cs typeface="Aptos" pitchFamily="34" charset="-120"/>
               </a:rPr>
-              <a:t>OMB Memorandum M-24-10 on federal AI governance, risk management, and innovation, where relevant to public-sector governance.</a:t>
-            </a:r>
-            <a:endParaRPr lang="en-US" sz="1700" dirty="0"/>
-          </a:p>
-          <a:p>
-            <a:r>
-              <a:rPr lang="en-US" sz="1700" dirty="0">
+              <a:t>OMB Memorandum M-24-10 on federal AI governance, risk management, and innovation, where relevant to.</a:t>
+            </a:r>
+            <a:endParaRPr lang="en-US" sz="2100" dirty="0"/>
+          </a:p>
+          <a:p>
+            <a:r>
+              <a:rPr lang="en-US" sz="2100" dirty="0">
                 <a:solidFill>
                   <a:srgbClr val="17364A"/>
                 </a:solidFill>
@@ -10086,15 +10723,15 @@
                 <a:ea typeface="Aptos" pitchFamily="34" charset="-122"/>
                 <a:cs typeface="Aptos" pitchFamily="34" charset="-120"/>
               </a:rPr>
-              <a:t>Agency strategic plans, procurement policies, privacy policies, cybersecurity policies, records policies, and equity plans</a:t>
-            </a:r>
-            <a:endParaRPr lang="en-US" sz="1700" dirty="0"/>
-          </a:p>
-        </p:txBody>
-      </p:sp>
-      <p:sp>
-        <p:nvSpPr>
-          <p:cNvPr id="9" name="Shape 7"/>
+              <a:t>Agency strategic plans, procurement policies, privacy policies, cybersecurity policies, records.</a:t>
+            </a:r>
+            <a:endParaRPr lang="en-US" sz="2100" dirty="0"/>
+          </a:p>
+        </p:txBody>
+      </p:sp>
+      <p:sp>
+        <p:nvSpPr>
+          <p:cNvPr id="10" name="Shape 8"/>
           <p:cNvSpPr/>
           <p:nvPr/>
         </p:nvSpPr>
@@ -10121,14 +10758,14 @@
       </p:sp>
       <p:sp>
         <p:nvSpPr>
-          <p:cNvPr id="10" name="Text 8"/>
+          <p:cNvPr id="11" name="Text 9"/>
           <p:cNvSpPr/>
           <p:nvPr/>
         </p:nvSpPr>
         <p:spPr>
           <a:xfrm>
             <a:off x="8074152" y="1563624"/>
-            <a:ext cx="2825496" cy="201168"/>
+            <a:ext cx="2825496" cy="256032"/>
           </a:xfrm>
           <a:prstGeom prst="rect">
             <a:avLst/>
@@ -10144,7 +10781,7 @@
               <a:buNone/>
             </a:pPr>
             <a:r>
-              <a:rPr lang="en-US" sz="950" b="1" dirty="0">
+              <a:rPr lang="en-US" sz="1300" b="1" dirty="0">
                 <a:solidFill>
                   <a:srgbClr val="0068B7"/>
                 </a:solidFill>
@@ -10154,20 +10791,20 @@
               </a:rPr>
               <a:t>Key idea</a:t>
             </a:r>
-            <a:endParaRPr lang="en-US" sz="950" dirty="0"/>
-          </a:p>
-        </p:txBody>
-      </p:sp>
-      <p:sp>
-        <p:nvSpPr>
-          <p:cNvPr id="11" name="Text 9"/>
-          <p:cNvSpPr/>
-          <p:nvPr/>
-        </p:nvSpPr>
-        <p:spPr>
-          <a:xfrm>
-            <a:off x="8074152" y="1856232"/>
-            <a:ext cx="2825496" cy="1261872"/>
+            <a:endParaRPr lang="en-US" sz="1300" dirty="0"/>
+          </a:p>
+        </p:txBody>
+      </p:sp>
+      <p:sp>
+        <p:nvSpPr>
+          <p:cNvPr id="12" name="Text 10"/>
+          <p:cNvSpPr/>
+          <p:nvPr/>
+        </p:nvSpPr>
+        <p:spPr>
+          <a:xfrm>
+            <a:off x="8074152" y="1920240"/>
+            <a:ext cx="2825496" cy="1188720"/>
           </a:xfrm>
           <a:prstGeom prst="rect">
             <a:avLst/>
@@ -10185,7 +10822,7 @@
               <a:buNone/>
             </a:pPr>
             <a:r>
-              <a:rPr lang="en-US" sz="1250" dirty="0">
+              <a:rPr lang="en-US" sz="1550" dirty="0">
                 <a:solidFill>
                   <a:srgbClr val="17364A"/>
                 </a:solidFill>
@@ -10193,15 +10830,15 @@
                 <a:ea typeface="Aptos" pitchFamily="34" charset="-122"/>
                 <a:cs typeface="Aptos" pitchFamily="34" charset="-120"/>
               </a:rPr>
-              <a:t>OMB Memorandum M-24-10 on federal AI governance, risk management, and innovation, where relevant to public-sector governance.</a:t>
-            </a:r>
-            <a:endParaRPr lang="en-US" sz="1250" dirty="0"/>
-          </a:p>
-        </p:txBody>
-      </p:sp>
-      <p:sp>
-        <p:nvSpPr>
-          <p:cNvPr id="12" name="Shape 10"/>
+              <a:t>OMB Memorandum M-24-10 on federal AI governance, risk management, and innovation, where relevant to.</a:t>
+            </a:r>
+            <a:endParaRPr lang="en-US" sz="1550" dirty="0"/>
+          </a:p>
+        </p:txBody>
+      </p:sp>
+      <p:sp>
+        <p:nvSpPr>
+          <p:cNvPr id="13" name="Shape 11"/>
           <p:cNvSpPr/>
           <p:nvPr/>
         </p:nvSpPr>
@@ -10228,14 +10865,14 @@
       </p:sp>
       <p:sp>
         <p:nvSpPr>
-          <p:cNvPr id="13" name="Text 11"/>
+          <p:cNvPr id="14" name="Text 12"/>
           <p:cNvSpPr/>
           <p:nvPr/>
         </p:nvSpPr>
         <p:spPr>
           <a:xfrm>
             <a:off x="8074152" y="3666744"/>
-            <a:ext cx="2825496" cy="201168"/>
+            <a:ext cx="2825496" cy="256032"/>
           </a:xfrm>
           <a:prstGeom prst="rect">
             <a:avLst/>
@@ -10251,7 +10888,7 @@
               <a:buNone/>
             </a:pPr>
             <a:r>
-              <a:rPr lang="en-US" sz="950" b="1" dirty="0">
+              <a:rPr lang="en-US" sz="1300" b="1" dirty="0">
                 <a:solidFill>
                   <a:srgbClr val="0068B7"/>
                 </a:solidFill>
@@ -10261,20 +10898,20 @@
               </a:rPr>
               <a:t>Use this for</a:t>
             </a:r>
-            <a:endParaRPr lang="en-US" sz="950" dirty="0"/>
-          </a:p>
-        </p:txBody>
-      </p:sp>
-      <p:sp>
-        <p:nvSpPr>
-          <p:cNvPr id="14" name="Text 12"/>
-          <p:cNvSpPr/>
-          <p:nvPr/>
-        </p:nvSpPr>
-        <p:spPr>
-          <a:xfrm>
-            <a:off x="8074152" y="3959352"/>
-            <a:ext cx="2825496" cy="1170432"/>
+            <a:endParaRPr lang="en-US" sz="1300" dirty="0"/>
+          </a:p>
+        </p:txBody>
+      </p:sp>
+      <p:sp>
+        <p:nvSpPr>
+          <p:cNvPr id="15" name="Text 13"/>
+          <p:cNvSpPr/>
+          <p:nvPr/>
+        </p:nvSpPr>
+        <p:spPr>
+          <a:xfrm>
+            <a:off x="8074152" y="4023360"/>
+            <a:ext cx="2825496" cy="1097280"/>
           </a:xfrm>
           <a:prstGeom prst="rect">
             <a:avLst/>
@@ -10292,7 +10929,7 @@
               <a:buNone/>
             </a:pPr>
             <a:r>
-              <a:rPr lang="en-US" sz="1250" dirty="0">
+              <a:rPr lang="en-US" sz="1550" dirty="0">
                 <a:solidFill>
                   <a:srgbClr val="17364A"/>
                 </a:solidFill>
@@ -10302,7 +10939,7 @@
               </a:rPr>
               <a:t>Connect the concept to public health decisions, safeguards, documentation, or implementation work.</a:t>
             </a:r>
-            <a:endParaRPr lang="en-US" sz="1250" dirty="0"/>
+            <a:endParaRPr lang="en-US" sz="1550" dirty="0"/>
           </a:p>
         </p:txBody>
       </p:sp>
@@ -10499,7 +11136,7 @@
                 <a:ea typeface="Aptos" pitchFamily="34" charset="-122"/>
                 <a:cs typeface="Aptos" pitchFamily="34" charset="-120"/>
               </a:rPr>
-              <a:t>© Paula Soper</a:t>
+              <a:t>Â© Paula Soper</a:t>
             </a:r>
             <a:endParaRPr lang="en-US" sz="800" dirty="0"/>
           </a:p>
@@ -10513,8 +11150,47 @@
         </p:nvSpPr>
         <p:spPr>
           <a:xfrm>
+            <a:off x="11137392" y="6510528"/>
+            <a:ext cx="411480" cy="201168"/>
+          </a:xfrm>
+          <a:prstGeom prst="rect">
+            <a:avLst/>
+          </a:prstGeom>
+          <a:noFill/>
+          <a:ln/>
+        </p:spPr>
+        <p:txBody>
+          <a:bodyPr wrap="square" lIns="0" tIns="0" rIns="0" bIns="0" rtlCol="0" anchor="ctr"/>
+          <a:lstStyle/>
+          <a:p>
+            <a:pPr algn="r" indent="0" marL="0">
+              <a:buNone/>
+            </a:pPr>
+            <a:r>
+              <a:rPr lang="en-US" sz="900" dirty="0">
+                <a:solidFill>
+                  <a:srgbClr val="5F7181"/>
+                </a:solidFill>
+                <a:latin typeface="Aptos" pitchFamily="34" charset="0"/>
+                <a:ea typeface="Aptos" pitchFamily="34" charset="-122"/>
+                <a:cs typeface="Aptos" pitchFamily="34" charset="-120"/>
+              </a:rPr>
+              <a:t>3</a:t>
+            </a:r>
+            <a:endParaRPr lang="en-US" sz="900" dirty="0"/>
+          </a:p>
+        </p:txBody>
+      </p:sp>
+      <p:sp>
+        <p:nvSpPr>
+          <p:cNvPr id="8" name="Text 6"/>
+          <p:cNvSpPr/>
+          <p:nvPr/>
+        </p:nvSpPr>
+        <p:spPr>
+          <a:xfrm>
             <a:off x="640080" y="658368"/>
-            <a:ext cx="10881360" cy="566928"/>
+            <a:ext cx="10881360" cy="713232"/>
           </a:xfrm>
           <a:prstGeom prst="rect">
             <a:avLst/>
@@ -10532,7 +11208,7 @@
               <a:buNone/>
             </a:pPr>
             <a:r>
-              <a:rPr lang="en-US" sz="2700" b="1" dirty="0">
+              <a:rPr lang="en-US" sz="3400" b="1" dirty="0">
                 <a:solidFill>
                   <a:srgbClr val="003A63"/>
                 </a:solidFill>
@@ -10542,20 +11218,20 @@
               </a:rPr>
               <a:t>How this module connects to the playbook</a:t>
             </a:r>
-            <a:endParaRPr lang="en-US" sz="2700" dirty="0"/>
-          </a:p>
-        </p:txBody>
-      </p:sp>
-      <p:sp>
-        <p:nvSpPr>
-          <p:cNvPr id="8" name="Text 6"/>
-          <p:cNvSpPr/>
-          <p:nvPr/>
-        </p:nvSpPr>
-        <p:spPr>
-          <a:xfrm>
-            <a:off x="868680" y="1417320"/>
-            <a:ext cx="6903720" cy="4480560"/>
+            <a:endParaRPr lang="en-US" sz="3400" dirty="0"/>
+          </a:p>
+        </p:txBody>
+      </p:sp>
+      <p:sp>
+        <p:nvSpPr>
+          <p:cNvPr id="9" name="Text 7"/>
+          <p:cNvSpPr/>
+          <p:nvPr/>
+        </p:nvSpPr>
+        <p:spPr>
+          <a:xfrm>
+            <a:off x="868680" y="1508760"/>
+            <a:ext cx="6812280" cy="3977640"/>
           </a:xfrm>
           <a:prstGeom prst="rect">
             <a:avLst/>
@@ -10570,7 +11246,7 @@
           <a:lstStyle/>
           <a:p>
             <a:r>
-              <a:rPr lang="en-US" sz="1540" dirty="0">
+              <a:rPr lang="en-US" sz="1900" dirty="0">
                 <a:solidFill>
                   <a:srgbClr val="17364A"/>
                 </a:solidFill>
@@ -10578,13 +11254,13 @@
                 <a:ea typeface="Aptos" pitchFamily="34" charset="-122"/>
                 <a:cs typeface="Aptos" pitchFamily="34" charset="-120"/>
               </a:rPr>
-              <a:t>Play 11: Build and Deploy AI Solutions - This lesson informs Play 11 by helping learners connect the lesson topic to build and deploy.</a:t>
-            </a:r>
-            <a:endParaRPr lang="en-US" sz="1540" dirty="0"/>
-          </a:p>
-          <a:p>
-            <a:r>
-              <a:rPr lang="en-US" sz="1540" dirty="0">
+              <a:t>Play 11: Build and Deploy AI Solutions - This lesson informs Play 11 by helping learners connect the lesson.</a:t>
+            </a:r>
+            <a:endParaRPr lang="en-US" sz="1900" dirty="0"/>
+          </a:p>
+          <a:p>
+            <a:r>
+              <a:rPr lang="en-US" sz="1900" dirty="0">
                 <a:solidFill>
                   <a:srgbClr val="17364A"/>
                 </a:solidFill>
@@ -10592,13 +11268,13 @@
                 <a:ea typeface="Aptos" pitchFamily="34" charset="-122"/>
                 <a:cs typeface="Aptos" pitchFamily="34" charset="-120"/>
               </a:rPr>
-              <a:t>Play 7: Prioritize Use Cases - This lesson informs Play 7 by helping learners connect the lesson topic to prioritize use cases work.</a:t>
-            </a:r>
-            <a:endParaRPr lang="en-US" sz="1540" dirty="0"/>
-          </a:p>
-          <a:p>
-            <a:r>
-              <a:rPr lang="en-US" sz="1540" dirty="0">
+              <a:t>Play 7: Prioritize Use Cases - This lesson informs Play 7 by helping learners connect the lesson topic to.</a:t>
+            </a:r>
+            <a:endParaRPr lang="en-US" sz="1900" dirty="0"/>
+          </a:p>
+          <a:p>
+            <a:r>
+              <a:rPr lang="en-US" sz="1900" dirty="0">
                 <a:solidFill>
                   <a:srgbClr val="17364A"/>
                 </a:solidFill>
@@ -10606,13 +11282,13 @@
                 <a:ea typeface="Aptos" pitchFamily="34" charset="-122"/>
                 <a:cs typeface="Aptos" pitchFamily="34" charset="-120"/>
               </a:rPr>
-              <a:t>Play 1: Vision &amp; Guardrails - This lesson informs Play 1 by helping learners connect the lesson topic to vision &amp; guardrails work in.</a:t>
-            </a:r>
-            <a:endParaRPr lang="en-US" sz="1540" dirty="0"/>
-          </a:p>
-          <a:p>
-            <a:r>
-              <a:rPr lang="en-US" sz="1540" dirty="0">
+              <a:t>Play 1: Vision &amp; Guardrails - This lesson informs Play 1 by helping learners connect the lesson topic to.</a:t>
+            </a:r>
+            <a:endParaRPr lang="en-US" sz="1900" dirty="0"/>
+          </a:p>
+          <a:p>
+            <a:r>
+              <a:rPr lang="en-US" sz="1900" dirty="0">
                 <a:solidFill>
                   <a:srgbClr val="17364A"/>
                 </a:solidFill>
@@ -10620,15 +11296,15 @@
                 <a:ea typeface="Aptos" pitchFamily="34" charset="-122"/>
                 <a:cs typeface="Aptos" pitchFamily="34" charset="-120"/>
               </a:rPr>
-              <a:t>Play 3: Establish AI Governance - This lesson informs Play 3 by helping learners connect the lesson topic to establish ai governance.</a:t>
-            </a:r>
-            <a:endParaRPr lang="en-US" sz="1540" dirty="0"/>
-          </a:p>
-        </p:txBody>
-      </p:sp>
-      <p:sp>
-        <p:nvSpPr>
-          <p:cNvPr id="9" name="Shape 7"/>
+              <a:t>Play 3: Establish AI Governance - This lesson informs Play 3 by helping learners connect the lesson topic to.</a:t>
+            </a:r>
+            <a:endParaRPr lang="en-US" sz="1900" dirty="0"/>
+          </a:p>
+        </p:txBody>
+      </p:sp>
+      <p:sp>
+        <p:nvSpPr>
+          <p:cNvPr id="10" name="Shape 8"/>
           <p:cNvSpPr/>
           <p:nvPr/>
         </p:nvSpPr>
@@ -10655,14 +11331,14 @@
       </p:sp>
       <p:sp>
         <p:nvSpPr>
-          <p:cNvPr id="10" name="Text 8"/>
+          <p:cNvPr id="11" name="Text 9"/>
           <p:cNvSpPr/>
           <p:nvPr/>
         </p:nvSpPr>
         <p:spPr>
           <a:xfrm>
             <a:off x="8211312" y="1563624"/>
-            <a:ext cx="2734056" cy="201168"/>
+            <a:ext cx="2734056" cy="256032"/>
           </a:xfrm>
           <a:prstGeom prst="rect">
             <a:avLst/>
@@ -10678,7 +11354,7 @@
               <a:buNone/>
             </a:pPr>
             <a:r>
-              <a:rPr lang="en-US" sz="950" b="1" dirty="0">
+              <a:rPr lang="en-US" sz="1300" b="1" dirty="0">
                 <a:solidFill>
                   <a:srgbClr val="0068B7"/>
                 </a:solidFill>
@@ -10688,20 +11364,20 @@
               </a:rPr>
               <a:t>Apply the lesson</a:t>
             </a:r>
-            <a:endParaRPr lang="en-US" sz="950" dirty="0"/>
-          </a:p>
-        </p:txBody>
-      </p:sp>
-      <p:sp>
-        <p:nvSpPr>
-          <p:cNvPr id="11" name="Text 9"/>
-          <p:cNvSpPr/>
-          <p:nvPr/>
-        </p:nvSpPr>
-        <p:spPr>
-          <a:xfrm>
-            <a:off x="8211312" y="1856232"/>
-            <a:ext cx="2734056" cy="1536192"/>
+            <a:endParaRPr lang="en-US" sz="1300" dirty="0"/>
+          </a:p>
+        </p:txBody>
+      </p:sp>
+      <p:sp>
+        <p:nvSpPr>
+          <p:cNvPr id="12" name="Text 10"/>
+          <p:cNvSpPr/>
+          <p:nvPr/>
+        </p:nvSpPr>
+        <p:spPr>
+          <a:xfrm>
+            <a:off x="8211312" y="1920240"/>
+            <a:ext cx="2734056" cy="1463040"/>
           </a:xfrm>
           <a:prstGeom prst="rect">
             <a:avLst/>
@@ -10719,7 +11395,7 @@
               <a:buNone/>
             </a:pPr>
             <a:r>
-              <a:rPr lang="en-US" sz="1250" dirty="0">
+              <a:rPr lang="en-US" sz="1550" dirty="0">
                 <a:solidFill>
                   <a:srgbClr val="17364A"/>
                 </a:solidFill>
@@ -10729,32 +11405,32 @@
               </a:rPr>
               <a:t>Use the related plays to identify decisions, participants, timing, approvals, and documentation needed for responsible implementation.</a:t>
             </a:r>
-            <a:endParaRPr lang="en-US" sz="1250" dirty="0"/>
-          </a:p>
-        </p:txBody>
-      </p:sp>
-      <p:sp>
-        <p:nvSpPr>
-          <p:cNvPr id="12" name="Shape 10"/>
-          <p:cNvSpPr/>
-          <p:nvPr/>
-        </p:nvSpPr>
-        <p:spPr>
-          <a:xfrm>
-            <a:off x="8046720" y="3794760"/>
-            <a:ext cx="3063240" cy="1508760"/>
+            <a:endParaRPr lang="en-US" sz="1550" dirty="0"/>
+          </a:p>
+        </p:txBody>
+      </p:sp>
+      <p:sp>
+        <p:nvSpPr>
+          <p:cNvPr id="13" name="Shape 11"/>
+          <p:cNvSpPr/>
+          <p:nvPr/>
+        </p:nvSpPr>
+        <p:spPr>
+          <a:xfrm>
+            <a:off x="7818120" y="3977640"/>
+            <a:ext cx="972312" cy="749808"/>
           </a:xfrm>
           <a:prstGeom prst="roundRect">
             <a:avLst>
-              <a:gd name="adj" fmla="val 7273"/>
+              <a:gd name="adj" fmla="val 14634"/>
             </a:avLst>
           </a:prstGeom>
           <a:solidFill>
-            <a:srgbClr val="FFF4D9"/>
+            <a:srgbClr val="0068B7"/>
           </a:solidFill>
           <a:ln w="12700">
             <a:solidFill>
-              <a:srgbClr val="B9D7E6"/>
+              <a:srgbClr val="0068B7"/>
             </a:solidFill>
             <a:prstDash val="solid"/>
           </a:ln>
@@ -10762,81 +11438,256 @@
       </p:sp>
       <p:sp>
         <p:nvSpPr>
-          <p:cNvPr id="13" name="Text 11"/>
-          <p:cNvSpPr/>
-          <p:nvPr/>
-        </p:nvSpPr>
-        <p:spPr>
-          <a:xfrm>
-            <a:off x="8211312" y="3941064"/>
-            <a:ext cx="2734056" cy="201168"/>
-          </a:xfrm>
-          <a:prstGeom prst="rect">
-            <a:avLst/>
-          </a:prstGeom>
-          <a:noFill/>
-          <a:ln/>
-        </p:spPr>
-        <p:txBody>
-          <a:bodyPr wrap="square" lIns="0" tIns="0" rIns="0" bIns="0" rtlCol="0" anchor="ctr"/>
-          <a:lstStyle/>
-          <a:p>
-            <a:pPr indent="0" marL="0">
-              <a:buNone/>
-            </a:pPr>
-            <a:r>
-              <a:rPr lang="en-US" sz="950" b="1" dirty="0">
-                <a:solidFill>
-                  <a:srgbClr val="0068B7"/>
-                </a:solidFill>
-                <a:latin typeface="Aptos" pitchFamily="34" charset="0"/>
-                <a:ea typeface="Aptos" pitchFamily="34" charset="-122"/>
-                <a:cs typeface="Aptos" pitchFamily="34" charset="-120"/>
-              </a:rPr>
-              <a:t>Keep in mind</a:t>
-            </a:r>
-            <a:endParaRPr lang="en-US" sz="950" dirty="0"/>
-          </a:p>
-        </p:txBody>
-      </p:sp>
-      <p:sp>
-        <p:nvSpPr>
           <p:cNvPr id="14" name="Text 12"/>
           <p:cNvSpPr/>
           <p:nvPr/>
         </p:nvSpPr>
         <p:spPr>
           <a:xfrm>
-            <a:off x="8211312" y="4233672"/>
-            <a:ext cx="2734056" cy="941832"/>
-          </a:xfrm>
-          <a:prstGeom prst="rect">
-            <a:avLst/>
-          </a:prstGeom>
-          <a:noFill/>
-          <a:ln/>
-        </p:spPr>
-        <p:txBody>
-          <a:bodyPr wrap="square" lIns="0" tIns="0" rIns="0" bIns="0" rtlCol="0" anchor="t">
+            <a:off x="7891272" y="4169664"/>
+            <a:ext cx="826008" cy="310896"/>
+          </a:xfrm>
+          <a:prstGeom prst="rect">
+            <a:avLst/>
+          </a:prstGeom>
+          <a:noFill/>
+          <a:ln/>
+        </p:spPr>
+        <p:txBody>
+          <a:bodyPr wrap="square" lIns="0" tIns="0" rIns="0" bIns="0" rtlCol="0" anchor="ctr">
             <a:normAutofit/>
           </a:bodyPr>
           <a:lstStyle/>
           <a:p>
-            <a:pPr indent="0" marL="0">
-              <a:buNone/>
-            </a:pPr>
-            <a:r>
-              <a:rPr lang="en-US" sz="1250" dirty="0">
-                <a:solidFill>
-                  <a:srgbClr val="17364A"/>
-                </a:solidFill>
-                <a:latin typeface="Aptos" pitchFamily="34" charset="0"/>
-                <a:ea typeface="Aptos" pitchFamily="34" charset="-122"/>
-                <a:cs typeface="Aptos" pitchFamily="34" charset="-120"/>
-              </a:rPr>
-              <a:t>The playbook connection helps turn training into agency work, not just individual knowledge.</a:t>
-            </a:r>
-            <a:endParaRPr lang="en-US" sz="1250" dirty="0"/>
+            <a:pPr algn="ctr" indent="0" marL="0">
+              <a:buNone/>
+            </a:pPr>
+            <a:r>
+              <a:rPr lang="en-US" sz="1500" b="1" dirty="0">
+                <a:solidFill>
+                  <a:srgbClr val="FFFFFF"/>
+                </a:solidFill>
+                <a:latin typeface="Aptos" pitchFamily="34" charset="0"/>
+                <a:ea typeface="Aptos" pitchFamily="34" charset="-122"/>
+                <a:cs typeface="Aptos" pitchFamily="34" charset="-120"/>
+              </a:rPr>
+              <a:t>Lesson</a:t>
+            </a:r>
+            <a:endParaRPr lang="en-US" sz="1500" dirty="0"/>
+          </a:p>
+        </p:txBody>
+      </p:sp>
+      <p:sp>
+        <p:nvSpPr>
+          <p:cNvPr id="15" name="Text 13"/>
+          <p:cNvSpPr/>
+          <p:nvPr/>
+        </p:nvSpPr>
+        <p:spPr>
+          <a:xfrm>
+            <a:off x="8817864" y="4187952"/>
+            <a:ext cx="201168" cy="256032"/>
+          </a:xfrm>
+          <a:prstGeom prst="rect">
+            <a:avLst/>
+          </a:prstGeom>
+          <a:noFill/>
+          <a:ln/>
+        </p:spPr>
+        <p:txBody>
+          <a:bodyPr wrap="square" lIns="0" tIns="0" rIns="0" bIns="0" rtlCol="0" anchor="ctr"/>
+          <a:lstStyle/>
+          <a:p>
+            <a:pPr algn="ctr" indent="0" marL="0">
+              <a:buNone/>
+            </a:pPr>
+            <a:r>
+              <a:rPr lang="en-US" sz="1800" b="1" dirty="0">
+                <a:solidFill>
+                  <a:srgbClr val="0068B7"/>
+                </a:solidFill>
+                <a:latin typeface="Aptos" pitchFamily="34" charset="0"/>
+                <a:ea typeface="Aptos" pitchFamily="34" charset="-122"/>
+                <a:cs typeface="Aptos" pitchFamily="34" charset="-120"/>
+              </a:rPr>
+              <a:t>â†’</a:t>
+            </a:r>
+            <a:endParaRPr lang="en-US" sz="1800" dirty="0"/>
+          </a:p>
+        </p:txBody>
+      </p:sp>
+      <p:sp>
+        <p:nvSpPr>
+          <p:cNvPr id="16" name="Shape 14"/>
+          <p:cNvSpPr/>
+          <p:nvPr/>
+        </p:nvSpPr>
+        <p:spPr>
+          <a:xfrm>
+            <a:off x="9046464" y="3977640"/>
+            <a:ext cx="972312" cy="749808"/>
+          </a:xfrm>
+          <a:prstGeom prst="roundRect">
+            <a:avLst>
+              <a:gd name="adj" fmla="val 14634"/>
+            </a:avLst>
+          </a:prstGeom>
+          <a:solidFill>
+            <a:srgbClr val="2F8A28"/>
+          </a:solidFill>
+          <a:ln w="12700">
+            <a:solidFill>
+              <a:srgbClr val="2F8A28"/>
+            </a:solidFill>
+            <a:prstDash val="solid"/>
+          </a:ln>
+        </p:spPr>
+      </p:sp>
+      <p:sp>
+        <p:nvSpPr>
+          <p:cNvPr id="17" name="Text 15"/>
+          <p:cNvSpPr/>
+          <p:nvPr/>
+        </p:nvSpPr>
+        <p:spPr>
+          <a:xfrm>
+            <a:off x="9119616" y="4169664"/>
+            <a:ext cx="826008" cy="310896"/>
+          </a:xfrm>
+          <a:prstGeom prst="rect">
+            <a:avLst/>
+          </a:prstGeom>
+          <a:noFill/>
+          <a:ln/>
+        </p:spPr>
+        <p:txBody>
+          <a:bodyPr wrap="square" lIns="0" tIns="0" rIns="0" bIns="0" rtlCol="0" anchor="ctr">
+            <a:normAutofit/>
+          </a:bodyPr>
+          <a:lstStyle/>
+          <a:p>
+            <a:pPr algn="ctr" indent="0" marL="0">
+              <a:buNone/>
+            </a:pPr>
+            <a:r>
+              <a:rPr lang="en-US" sz="1500" b="1" dirty="0">
+                <a:solidFill>
+                  <a:srgbClr val="FFFFFF"/>
+                </a:solidFill>
+                <a:latin typeface="Aptos" pitchFamily="34" charset="0"/>
+                <a:ea typeface="Aptos" pitchFamily="34" charset="-122"/>
+                <a:cs typeface="Aptos" pitchFamily="34" charset="-120"/>
+              </a:rPr>
+              <a:t>Plays</a:t>
+            </a:r>
+            <a:endParaRPr lang="en-US" sz="1500" dirty="0"/>
+          </a:p>
+        </p:txBody>
+      </p:sp>
+      <p:sp>
+        <p:nvSpPr>
+          <p:cNvPr id="18" name="Text 16"/>
+          <p:cNvSpPr/>
+          <p:nvPr/>
+        </p:nvSpPr>
+        <p:spPr>
+          <a:xfrm>
+            <a:off x="10046208" y="4187952"/>
+            <a:ext cx="201168" cy="256032"/>
+          </a:xfrm>
+          <a:prstGeom prst="rect">
+            <a:avLst/>
+          </a:prstGeom>
+          <a:noFill/>
+          <a:ln/>
+        </p:spPr>
+        <p:txBody>
+          <a:bodyPr wrap="square" lIns="0" tIns="0" rIns="0" bIns="0" rtlCol="0" anchor="ctr"/>
+          <a:lstStyle/>
+          <a:p>
+            <a:pPr algn="ctr" indent="0" marL="0">
+              <a:buNone/>
+            </a:pPr>
+            <a:r>
+              <a:rPr lang="en-US" sz="1800" b="1" dirty="0">
+                <a:solidFill>
+                  <a:srgbClr val="0068B7"/>
+                </a:solidFill>
+                <a:latin typeface="Aptos" pitchFamily="34" charset="0"/>
+                <a:ea typeface="Aptos" pitchFamily="34" charset="-122"/>
+                <a:cs typeface="Aptos" pitchFamily="34" charset="-120"/>
+              </a:rPr>
+              <a:t>â†’</a:t>
+            </a:r>
+            <a:endParaRPr lang="en-US" sz="1800" dirty="0"/>
+          </a:p>
+        </p:txBody>
+      </p:sp>
+      <p:sp>
+        <p:nvSpPr>
+          <p:cNvPr id="19" name="Shape 17"/>
+          <p:cNvSpPr/>
+          <p:nvPr/>
+        </p:nvSpPr>
+        <p:spPr>
+          <a:xfrm>
+            <a:off x="10274808" y="3977640"/>
+            <a:ext cx="972312" cy="749808"/>
+          </a:xfrm>
+          <a:prstGeom prst="roundRect">
+            <a:avLst>
+              <a:gd name="adj" fmla="val 14634"/>
+            </a:avLst>
+          </a:prstGeom>
+          <a:solidFill>
+            <a:srgbClr val="6A4CA3"/>
+          </a:solidFill>
+          <a:ln w="12700">
+            <a:solidFill>
+              <a:srgbClr val="6A4CA3"/>
+            </a:solidFill>
+            <a:prstDash val="solid"/>
+          </a:ln>
+        </p:spPr>
+      </p:sp>
+      <p:sp>
+        <p:nvSpPr>
+          <p:cNvPr id="20" name="Text 18"/>
+          <p:cNvSpPr/>
+          <p:nvPr/>
+        </p:nvSpPr>
+        <p:spPr>
+          <a:xfrm>
+            <a:off x="10347960" y="4169664"/>
+            <a:ext cx="826008" cy="310896"/>
+          </a:xfrm>
+          <a:prstGeom prst="rect">
+            <a:avLst/>
+          </a:prstGeom>
+          <a:noFill/>
+          <a:ln/>
+        </p:spPr>
+        <p:txBody>
+          <a:bodyPr wrap="square" lIns="0" tIns="0" rIns="0" bIns="0" rtlCol="0" anchor="ctr">
+            <a:normAutofit/>
+          </a:bodyPr>
+          <a:lstStyle/>
+          <a:p>
+            <a:pPr algn="ctr" indent="0" marL="0">
+              <a:buNone/>
+            </a:pPr>
+            <a:r>
+              <a:rPr lang="en-US" sz="1500" b="1" dirty="0">
+                <a:solidFill>
+                  <a:srgbClr val="FFFFFF"/>
+                </a:solidFill>
+                <a:latin typeface="Aptos" pitchFamily="34" charset="0"/>
+                <a:ea typeface="Aptos" pitchFamily="34" charset="-122"/>
+                <a:cs typeface="Aptos" pitchFamily="34" charset="-120"/>
+              </a:rPr>
+              <a:t>Action</a:t>
+            </a:r>
+            <a:endParaRPr lang="en-US" sz="1500" dirty="0"/>
           </a:p>
         </p:txBody>
       </p:sp>
@@ -11033,7 +11884,7 @@
                 <a:ea typeface="Aptos" pitchFamily="34" charset="-122"/>
                 <a:cs typeface="Aptos" pitchFamily="34" charset="-120"/>
               </a:rPr>
-              <a:t>© Paula Soper</a:t>
+              <a:t>Â© Paula Soper</a:t>
             </a:r>
             <a:endParaRPr lang="en-US" sz="800" dirty="0"/>
           </a:p>
@@ -11047,8 +11898,47 @@
         </p:nvSpPr>
         <p:spPr>
           <a:xfrm>
+            <a:off x="11137392" y="6510528"/>
+            <a:ext cx="411480" cy="201168"/>
+          </a:xfrm>
+          <a:prstGeom prst="rect">
+            <a:avLst/>
+          </a:prstGeom>
+          <a:noFill/>
+          <a:ln/>
+        </p:spPr>
+        <p:txBody>
+          <a:bodyPr wrap="square" lIns="0" tIns="0" rIns="0" bIns="0" rtlCol="0" anchor="ctr"/>
+          <a:lstStyle/>
+          <a:p>
+            <a:pPr algn="r" indent="0" marL="0">
+              <a:buNone/>
+            </a:pPr>
+            <a:r>
+              <a:rPr lang="en-US" sz="900" dirty="0">
+                <a:solidFill>
+                  <a:srgbClr val="5F7181"/>
+                </a:solidFill>
+                <a:latin typeface="Aptos" pitchFamily="34" charset="0"/>
+                <a:ea typeface="Aptos" pitchFamily="34" charset="-122"/>
+                <a:cs typeface="Aptos" pitchFamily="34" charset="-120"/>
+              </a:rPr>
+              <a:t>4</a:t>
+            </a:r>
+            <a:endParaRPr lang="en-US" sz="900" dirty="0"/>
+          </a:p>
+        </p:txBody>
+      </p:sp>
+      <p:sp>
+        <p:nvSpPr>
+          <p:cNvPr id="8" name="Text 6"/>
+          <p:cNvSpPr/>
+          <p:nvPr/>
+        </p:nvSpPr>
+        <p:spPr>
+          <a:xfrm>
             <a:off x="640080" y="658368"/>
-            <a:ext cx="10881360" cy="566928"/>
+            <a:ext cx="10881360" cy="713232"/>
           </a:xfrm>
           <a:prstGeom prst="rect">
             <a:avLst/>
@@ -11066,7 +11956,7 @@
               <a:buNone/>
             </a:pPr>
             <a:r>
-              <a:rPr lang="en-US" sz="2700" b="1" dirty="0">
+              <a:rPr lang="en-US" sz="3400" b="1" dirty="0">
                 <a:solidFill>
                   <a:srgbClr val="003A63"/>
                 </a:solidFill>
@@ -11076,20 +11966,20 @@
               </a:rPr>
               <a:t>Related toolkit resources</a:t>
             </a:r>
-            <a:endParaRPr lang="en-US" sz="2700" dirty="0"/>
-          </a:p>
-        </p:txBody>
-      </p:sp>
-      <p:sp>
-        <p:nvSpPr>
-          <p:cNvPr id="8" name="Text 6"/>
-          <p:cNvSpPr/>
-          <p:nvPr/>
-        </p:nvSpPr>
-        <p:spPr>
-          <a:xfrm>
-            <a:off x="868680" y="1417320"/>
-            <a:ext cx="6903720" cy="4480560"/>
+            <a:endParaRPr lang="en-US" sz="3400" dirty="0"/>
+          </a:p>
+        </p:txBody>
+      </p:sp>
+      <p:sp>
+        <p:nvSpPr>
+          <p:cNvPr id="9" name="Text 7"/>
+          <p:cNvSpPr/>
+          <p:nvPr/>
+        </p:nvSpPr>
+        <p:spPr>
+          <a:xfrm>
+            <a:off x="868680" y="1508760"/>
+            <a:ext cx="6812280" cy="3977640"/>
           </a:xfrm>
           <a:prstGeom prst="rect">
             <a:avLst/>
@@ -11104,7 +11994,7 @@
           <a:lstStyle/>
           <a:p>
             <a:r>
-              <a:rPr lang="en-US" sz="1460" dirty="0">
+              <a:rPr lang="en-US" sz="1850" dirty="0">
                 <a:solidFill>
                   <a:srgbClr val="17364A"/>
                 </a:solidFill>
@@ -11112,13 +12002,13 @@
                 <a:ea typeface="Aptos" pitchFamily="34" charset="-122"/>
                 <a:cs typeface="Aptos" pitchFamily="34" charset="-120"/>
               </a:rPr>
-              <a:t>Tool 1: AI Vision &amp; Principles Workshop (Workshop) - Use AI Vision &amp; Principles Workshop to translate this lesson into a documented.</a:t>
-            </a:r>
-            <a:endParaRPr lang="en-US" sz="1460" dirty="0"/>
-          </a:p>
-          <a:p>
-            <a:r>
-              <a:rPr lang="en-US" sz="1460" dirty="0">
+              <a:t>Tool 1: AI Vision &amp; Principles Workshop (Workshop) - Use AI Vision &amp; Principles Workshop to translate this.</a:t>
+            </a:r>
+            <a:endParaRPr lang="en-US" sz="1850" dirty="0"/>
+          </a:p>
+          <a:p>
+            <a:r>
+              <a:rPr lang="en-US" sz="1850" dirty="0">
                 <a:solidFill>
                   <a:srgbClr val="17364A"/>
                 </a:solidFill>
@@ -11126,13 +12016,13 @@
                 <a:ea typeface="Aptos" pitchFamily="34" charset="-122"/>
                 <a:cs typeface="Aptos" pitchFamily="34" charset="-120"/>
               </a:rPr>
-              <a:t>Tool 3: Equity Impact Assessment Checklist (Checklist) - Use this tool to complete or strengthen the practical exercise for the.</a:t>
-            </a:r>
-            <a:endParaRPr lang="en-US" sz="1460" dirty="0"/>
-          </a:p>
-          <a:p>
-            <a:r>
-              <a:rPr lang="en-US" sz="1460" dirty="0">
+              <a:t>Tool 3: Equity Impact Assessment Checklist (Checklist) - Use this tool to complete or strengthen the.</a:t>
+            </a:r>
+            <a:endParaRPr lang="en-US" sz="1850" dirty="0"/>
+          </a:p>
+          <a:p>
+            <a:r>
+              <a:rPr lang="en-US" sz="1850" dirty="0">
                 <a:solidFill>
                   <a:srgbClr val="17364A"/>
                 </a:solidFill>
@@ -11140,13 +12030,13 @@
                 <a:ea typeface="Aptos" pitchFamily="34" charset="-122"/>
                 <a:cs typeface="Aptos" pitchFamily="34" charset="-120"/>
               </a:rPr>
-              <a:t>Tool 4: AI Policy Landscape Scan (Worksheet) - Use AI Policy Landscape Scan to translate this lesson into a documented public health.</a:t>
-            </a:r>
-            <a:endParaRPr lang="en-US" sz="1460" dirty="0"/>
-          </a:p>
-          <a:p>
-            <a:r>
-              <a:rPr lang="en-US" sz="1460" dirty="0">
+              <a:t>Tool 4: AI Policy Landscape Scan (Worksheet) - Use AI Policy Landscape Scan to translate this lesson into a.</a:t>
+            </a:r>
+            <a:endParaRPr lang="en-US" sz="1850" dirty="0"/>
+          </a:p>
+          <a:p>
+            <a:r>
+              <a:rPr lang="en-US" sz="1850" dirty="0">
                 <a:solidFill>
                   <a:srgbClr val="17364A"/>
                 </a:solidFill>
@@ -11154,29 +12044,15 @@
                 <a:ea typeface="Aptos" pitchFamily="34" charset="-122"/>
                 <a:cs typeface="Aptos" pitchFamily="34" charset="-120"/>
               </a:rPr>
-              <a:t>Tool 5: AI Environmental and Resource Impact Review (Checklist) - Use AI Environmental and Resource Impact Review to translate this.</a:t>
-            </a:r>
-            <a:endParaRPr lang="en-US" sz="1460" dirty="0"/>
-          </a:p>
-          <a:p>
-            <a:r>
-              <a:rPr lang="en-US" sz="1460" dirty="0">
-                <a:solidFill>
-                  <a:srgbClr val="17364A"/>
-                </a:solidFill>
-                <a:latin typeface="Aptos" pitchFamily="34" charset="0"/>
-                <a:ea typeface="Aptos" pitchFamily="34" charset="-122"/>
-                <a:cs typeface="Aptos" pitchFamily="34" charset="-120"/>
-              </a:rPr>
-              <a:t>Tool 6: Human-Centered AI Decision Rule Checklist (Checklist) - Use Human-Centered AI Decision Rule Checklist to translate this.</a:t>
-            </a:r>
-            <a:endParaRPr lang="en-US" sz="1460" dirty="0"/>
-          </a:p>
-        </p:txBody>
-      </p:sp>
-      <p:sp>
-        <p:nvSpPr>
-          <p:cNvPr id="9" name="Shape 7"/>
+              <a:t>Tool 5: AI Environmental and Resource Impact Review (Checklist) - Use AI Environmental and Resource Impact.</a:t>
+            </a:r>
+            <a:endParaRPr lang="en-US" sz="1850" dirty="0"/>
+          </a:p>
+        </p:txBody>
+      </p:sp>
+      <p:sp>
+        <p:nvSpPr>
+          <p:cNvPr id="10" name="Shape 8"/>
           <p:cNvSpPr/>
           <p:nvPr/>
         </p:nvSpPr>
@@ -11203,14 +12079,14 @@
       </p:sp>
       <p:sp>
         <p:nvSpPr>
-          <p:cNvPr id="10" name="Text 8"/>
+          <p:cNvPr id="11" name="Text 9"/>
           <p:cNvSpPr/>
           <p:nvPr/>
         </p:nvSpPr>
         <p:spPr>
           <a:xfrm>
             <a:off x="8211312" y="1563624"/>
-            <a:ext cx="2734056" cy="201168"/>
+            <a:ext cx="2734056" cy="256032"/>
           </a:xfrm>
           <a:prstGeom prst="rect">
             <a:avLst/>
@@ -11226,7 +12102,7 @@
               <a:buNone/>
             </a:pPr>
             <a:r>
-              <a:rPr lang="en-US" sz="950" b="1" dirty="0">
+              <a:rPr lang="en-US" sz="1300" b="1" dirty="0">
                 <a:solidFill>
                   <a:srgbClr val="0068B7"/>
                 </a:solidFill>
@@ -11236,20 +12112,20 @@
               </a:rPr>
               <a:t>Use the tools</a:t>
             </a:r>
-            <a:endParaRPr lang="en-US" sz="950" dirty="0"/>
-          </a:p>
-        </p:txBody>
-      </p:sp>
-      <p:sp>
-        <p:nvSpPr>
-          <p:cNvPr id="11" name="Text 9"/>
-          <p:cNvSpPr/>
-          <p:nvPr/>
-        </p:nvSpPr>
-        <p:spPr>
-          <a:xfrm>
-            <a:off x="8211312" y="1856232"/>
-            <a:ext cx="2734056" cy="1536192"/>
+            <a:endParaRPr lang="en-US" sz="1300" dirty="0"/>
+          </a:p>
+        </p:txBody>
+      </p:sp>
+      <p:sp>
+        <p:nvSpPr>
+          <p:cNvPr id="12" name="Text 10"/>
+          <p:cNvSpPr/>
+          <p:nvPr/>
+        </p:nvSpPr>
+        <p:spPr>
+          <a:xfrm>
+            <a:off x="8211312" y="1920240"/>
+            <a:ext cx="2734056" cy="1463040"/>
           </a:xfrm>
           <a:prstGeom prst="rect">
             <a:avLst/>
@@ -11267,7 +12143,7 @@
               <a:buNone/>
             </a:pPr>
             <a:r>
-              <a:rPr lang="en-US" sz="1250" dirty="0">
+              <a:rPr lang="en-US" sz="1550" dirty="0">
                 <a:solidFill>
                   <a:srgbClr val="17364A"/>
                 </a:solidFill>
@@ -11277,32 +12153,32 @@
               </a:rPr>
               <a:t>Use linked tools when your department needs a structured worksheet, template, checklist, review process, or documentation artifact.</a:t>
             </a:r>
-            <a:endParaRPr lang="en-US" sz="1250" dirty="0"/>
-          </a:p>
-        </p:txBody>
-      </p:sp>
-      <p:sp>
-        <p:nvSpPr>
-          <p:cNvPr id="12" name="Shape 10"/>
-          <p:cNvSpPr/>
-          <p:nvPr/>
-        </p:nvSpPr>
-        <p:spPr>
-          <a:xfrm>
-            <a:off x="8046720" y="3794760"/>
-            <a:ext cx="3063240" cy="1508760"/>
+            <a:endParaRPr lang="en-US" sz="1550" dirty="0"/>
+          </a:p>
+        </p:txBody>
+      </p:sp>
+      <p:sp>
+        <p:nvSpPr>
+          <p:cNvPr id="13" name="Shape 11"/>
+          <p:cNvSpPr/>
+          <p:nvPr/>
+        </p:nvSpPr>
+        <p:spPr>
+          <a:xfrm>
+            <a:off x="7818120" y="3977640"/>
+            <a:ext cx="972312" cy="749808"/>
           </a:xfrm>
           <a:prstGeom prst="roundRect">
             <a:avLst>
-              <a:gd name="adj" fmla="val 7273"/>
+              <a:gd name="adj" fmla="val 14634"/>
             </a:avLst>
           </a:prstGeom>
           <a:solidFill>
-            <a:srgbClr val="EEF8ED"/>
+            <a:srgbClr val="0068B7"/>
           </a:solidFill>
           <a:ln w="12700">
             <a:solidFill>
-              <a:srgbClr val="B9D7E6"/>
+              <a:srgbClr val="0068B7"/>
             </a:solidFill>
             <a:prstDash val="solid"/>
           </a:ln>
@@ -11310,81 +12186,256 @@
       </p:sp>
       <p:sp>
         <p:nvSpPr>
-          <p:cNvPr id="13" name="Text 11"/>
-          <p:cNvSpPr/>
-          <p:nvPr/>
-        </p:nvSpPr>
-        <p:spPr>
-          <a:xfrm>
-            <a:off x="8211312" y="3941064"/>
-            <a:ext cx="2734056" cy="201168"/>
-          </a:xfrm>
-          <a:prstGeom prst="rect">
-            <a:avLst/>
-          </a:prstGeom>
-          <a:noFill/>
-          <a:ln/>
-        </p:spPr>
-        <p:txBody>
-          <a:bodyPr wrap="square" lIns="0" tIns="0" rIns="0" bIns="0" rtlCol="0" anchor="ctr"/>
-          <a:lstStyle/>
-          <a:p>
-            <a:pPr indent="0" marL="0">
-              <a:buNone/>
-            </a:pPr>
-            <a:r>
-              <a:rPr lang="en-US" sz="950" b="1" dirty="0">
-                <a:solidFill>
-                  <a:srgbClr val="0068B7"/>
-                </a:solidFill>
-                <a:latin typeface="Aptos" pitchFamily="34" charset="0"/>
-                <a:ea typeface="Aptos" pitchFamily="34" charset="-122"/>
-                <a:cs typeface="Aptos" pitchFamily="34" charset="-120"/>
-              </a:rPr>
-              <a:t>Avoid duplication</a:t>
-            </a:r>
-            <a:endParaRPr lang="en-US" sz="950" dirty="0"/>
-          </a:p>
-        </p:txBody>
-      </p:sp>
-      <p:sp>
-        <p:nvSpPr>
           <p:cNvPr id="14" name="Text 12"/>
           <p:cNvSpPr/>
           <p:nvPr/>
         </p:nvSpPr>
         <p:spPr>
           <a:xfrm>
-            <a:off x="8211312" y="4233672"/>
-            <a:ext cx="2734056" cy="941832"/>
-          </a:xfrm>
-          <a:prstGeom prst="rect">
-            <a:avLst/>
-          </a:prstGeom>
-          <a:noFill/>
-          <a:ln/>
-        </p:spPr>
-        <p:txBody>
-          <a:bodyPr wrap="square" lIns="0" tIns="0" rIns="0" bIns="0" rtlCol="0" anchor="t">
+            <a:off x="7891272" y="4169664"/>
+            <a:ext cx="826008" cy="310896"/>
+          </a:xfrm>
+          <a:prstGeom prst="rect">
+            <a:avLst/>
+          </a:prstGeom>
+          <a:noFill/>
+          <a:ln/>
+        </p:spPr>
+        <p:txBody>
+          <a:bodyPr wrap="square" lIns="0" tIns="0" rIns="0" bIns="0" rtlCol="0" anchor="ctr">
             <a:normAutofit/>
           </a:bodyPr>
           <a:lstStyle/>
           <a:p>
-            <a:pPr indent="0" marL="0">
-              <a:buNone/>
-            </a:pPr>
-            <a:r>
-              <a:rPr lang="en-US" sz="1250" dirty="0">
-                <a:solidFill>
-                  <a:srgbClr val="17364A"/>
-                </a:solidFill>
-                <a:latin typeface="Aptos" pitchFamily="34" charset="0"/>
-                <a:ea typeface="Aptos" pitchFamily="34" charset="-122"/>
-                <a:cs typeface="Aptos" pitchFamily="34" charset="-120"/>
-              </a:rPr>
-              <a:t>If your department already has a strong equivalent tool, adapt or use the existing process instead of recreating it.</a:t>
-            </a:r>
-            <a:endParaRPr lang="en-US" sz="1250" dirty="0"/>
+            <a:pPr algn="ctr" indent="0" marL="0">
+              <a:buNone/>
+            </a:pPr>
+            <a:r>
+              <a:rPr lang="en-US" sz="1500" b="1" dirty="0">
+                <a:solidFill>
+                  <a:srgbClr val="FFFFFF"/>
+                </a:solidFill>
+                <a:latin typeface="Aptos" pitchFamily="34" charset="0"/>
+                <a:ea typeface="Aptos" pitchFamily="34" charset="-122"/>
+                <a:cs typeface="Aptos" pitchFamily="34" charset="-120"/>
+              </a:rPr>
+              <a:t>Concept</a:t>
+            </a:r>
+            <a:endParaRPr lang="en-US" sz="1500" dirty="0"/>
+          </a:p>
+        </p:txBody>
+      </p:sp>
+      <p:sp>
+        <p:nvSpPr>
+          <p:cNvPr id="15" name="Text 13"/>
+          <p:cNvSpPr/>
+          <p:nvPr/>
+        </p:nvSpPr>
+        <p:spPr>
+          <a:xfrm>
+            <a:off x="8817864" y="4187952"/>
+            <a:ext cx="201168" cy="256032"/>
+          </a:xfrm>
+          <a:prstGeom prst="rect">
+            <a:avLst/>
+          </a:prstGeom>
+          <a:noFill/>
+          <a:ln/>
+        </p:spPr>
+        <p:txBody>
+          <a:bodyPr wrap="square" lIns="0" tIns="0" rIns="0" bIns="0" rtlCol="0" anchor="ctr"/>
+          <a:lstStyle/>
+          <a:p>
+            <a:pPr algn="ctr" indent="0" marL="0">
+              <a:buNone/>
+            </a:pPr>
+            <a:r>
+              <a:rPr lang="en-US" sz="1800" b="1" dirty="0">
+                <a:solidFill>
+                  <a:srgbClr val="0068B7"/>
+                </a:solidFill>
+                <a:latin typeface="Aptos" pitchFamily="34" charset="0"/>
+                <a:ea typeface="Aptos" pitchFamily="34" charset="-122"/>
+                <a:cs typeface="Aptos" pitchFamily="34" charset="-120"/>
+              </a:rPr>
+              <a:t>â†’</a:t>
+            </a:r>
+            <a:endParaRPr lang="en-US" sz="1800" dirty="0"/>
+          </a:p>
+        </p:txBody>
+      </p:sp>
+      <p:sp>
+        <p:nvSpPr>
+          <p:cNvPr id="16" name="Shape 14"/>
+          <p:cNvSpPr/>
+          <p:nvPr/>
+        </p:nvSpPr>
+        <p:spPr>
+          <a:xfrm>
+            <a:off x="9046464" y="3977640"/>
+            <a:ext cx="972312" cy="749808"/>
+          </a:xfrm>
+          <a:prstGeom prst="roundRect">
+            <a:avLst>
+              <a:gd name="adj" fmla="val 14634"/>
+            </a:avLst>
+          </a:prstGeom>
+          <a:solidFill>
+            <a:srgbClr val="2F8A28"/>
+          </a:solidFill>
+          <a:ln w="12700">
+            <a:solidFill>
+              <a:srgbClr val="2F8A28"/>
+            </a:solidFill>
+            <a:prstDash val="solid"/>
+          </a:ln>
+        </p:spPr>
+      </p:sp>
+      <p:sp>
+        <p:nvSpPr>
+          <p:cNvPr id="17" name="Text 15"/>
+          <p:cNvSpPr/>
+          <p:nvPr/>
+        </p:nvSpPr>
+        <p:spPr>
+          <a:xfrm>
+            <a:off x="9119616" y="4169664"/>
+            <a:ext cx="826008" cy="310896"/>
+          </a:xfrm>
+          <a:prstGeom prst="rect">
+            <a:avLst/>
+          </a:prstGeom>
+          <a:noFill/>
+          <a:ln/>
+        </p:spPr>
+        <p:txBody>
+          <a:bodyPr wrap="square" lIns="0" tIns="0" rIns="0" bIns="0" rtlCol="0" anchor="ctr">
+            <a:normAutofit/>
+          </a:bodyPr>
+          <a:lstStyle/>
+          <a:p>
+            <a:pPr algn="ctr" indent="0" marL="0">
+              <a:buNone/>
+            </a:pPr>
+            <a:r>
+              <a:rPr lang="en-US" sz="1500" b="1" dirty="0">
+                <a:solidFill>
+                  <a:srgbClr val="FFFFFF"/>
+                </a:solidFill>
+                <a:latin typeface="Aptos" pitchFamily="34" charset="0"/>
+                <a:ea typeface="Aptos" pitchFamily="34" charset="-122"/>
+                <a:cs typeface="Aptos" pitchFamily="34" charset="-120"/>
+              </a:rPr>
+              <a:t>Tool</a:t>
+            </a:r>
+            <a:endParaRPr lang="en-US" sz="1500" dirty="0"/>
+          </a:p>
+        </p:txBody>
+      </p:sp>
+      <p:sp>
+        <p:nvSpPr>
+          <p:cNvPr id="18" name="Text 16"/>
+          <p:cNvSpPr/>
+          <p:nvPr/>
+        </p:nvSpPr>
+        <p:spPr>
+          <a:xfrm>
+            <a:off x="10046208" y="4187952"/>
+            <a:ext cx="201168" cy="256032"/>
+          </a:xfrm>
+          <a:prstGeom prst="rect">
+            <a:avLst/>
+          </a:prstGeom>
+          <a:noFill/>
+          <a:ln/>
+        </p:spPr>
+        <p:txBody>
+          <a:bodyPr wrap="square" lIns="0" tIns="0" rIns="0" bIns="0" rtlCol="0" anchor="ctr"/>
+          <a:lstStyle/>
+          <a:p>
+            <a:pPr algn="ctr" indent="0" marL="0">
+              <a:buNone/>
+            </a:pPr>
+            <a:r>
+              <a:rPr lang="en-US" sz="1800" b="1" dirty="0">
+                <a:solidFill>
+                  <a:srgbClr val="0068B7"/>
+                </a:solidFill>
+                <a:latin typeface="Aptos" pitchFamily="34" charset="0"/>
+                <a:ea typeface="Aptos" pitchFamily="34" charset="-122"/>
+                <a:cs typeface="Aptos" pitchFamily="34" charset="-120"/>
+              </a:rPr>
+              <a:t>â†’</a:t>
+            </a:r>
+            <a:endParaRPr lang="en-US" sz="1800" dirty="0"/>
+          </a:p>
+        </p:txBody>
+      </p:sp>
+      <p:sp>
+        <p:nvSpPr>
+          <p:cNvPr id="19" name="Shape 17"/>
+          <p:cNvSpPr/>
+          <p:nvPr/>
+        </p:nvSpPr>
+        <p:spPr>
+          <a:xfrm>
+            <a:off x="10274808" y="3977640"/>
+            <a:ext cx="972312" cy="749808"/>
+          </a:xfrm>
+          <a:prstGeom prst="roundRect">
+            <a:avLst>
+              <a:gd name="adj" fmla="val 14634"/>
+            </a:avLst>
+          </a:prstGeom>
+          <a:solidFill>
+            <a:srgbClr val="D69A2D"/>
+          </a:solidFill>
+          <a:ln w="12700">
+            <a:solidFill>
+              <a:srgbClr val="D69A2D"/>
+            </a:solidFill>
+            <a:prstDash val="solid"/>
+          </a:ln>
+        </p:spPr>
+      </p:sp>
+      <p:sp>
+        <p:nvSpPr>
+          <p:cNvPr id="20" name="Text 18"/>
+          <p:cNvSpPr/>
+          <p:nvPr/>
+        </p:nvSpPr>
+        <p:spPr>
+          <a:xfrm>
+            <a:off x="10347960" y="4169664"/>
+            <a:ext cx="826008" cy="310896"/>
+          </a:xfrm>
+          <a:prstGeom prst="rect">
+            <a:avLst/>
+          </a:prstGeom>
+          <a:noFill/>
+          <a:ln/>
+        </p:spPr>
+        <p:txBody>
+          <a:bodyPr wrap="square" lIns="0" tIns="0" rIns="0" bIns="0" rtlCol="0" anchor="ctr">
+            <a:normAutofit/>
+          </a:bodyPr>
+          <a:lstStyle/>
+          <a:p>
+            <a:pPr algn="ctr" indent="0" marL="0">
+              <a:buNone/>
+            </a:pPr>
+            <a:r>
+              <a:rPr lang="en-US" sz="1500" b="1" dirty="0">
+                <a:solidFill>
+                  <a:srgbClr val="FFFFFF"/>
+                </a:solidFill>
+                <a:latin typeface="Aptos" pitchFamily="34" charset="0"/>
+                <a:ea typeface="Aptos" pitchFamily="34" charset="-122"/>
+                <a:cs typeface="Aptos" pitchFamily="34" charset="-120"/>
+              </a:rPr>
+              <a:t>Artifact</a:t>
+            </a:r>
+            <a:endParaRPr lang="en-US" sz="1500" dirty="0"/>
           </a:p>
         </p:txBody>
       </p:sp>
@@ -11581,7 +12632,7 @@
                 <a:ea typeface="Aptos" pitchFamily="34" charset="-122"/>
                 <a:cs typeface="Aptos" pitchFamily="34" charset="-120"/>
               </a:rPr>
-              <a:t>© Paula Soper</a:t>
+              <a:t>Â© Paula Soper</a:t>
             </a:r>
             <a:endParaRPr lang="en-US" sz="800" dirty="0"/>
           </a:p>
@@ -11589,7 +12640,46 @@
       </p:sp>
       <p:sp>
         <p:nvSpPr>
-          <p:cNvPr id="7" name="Shape 5"/>
+          <p:cNvPr id="7" name="Text 5"/>
+          <p:cNvSpPr/>
+          <p:nvPr/>
+        </p:nvSpPr>
+        <p:spPr>
+          <a:xfrm>
+            <a:off x="11137392" y="6510528"/>
+            <a:ext cx="411480" cy="201168"/>
+          </a:xfrm>
+          <a:prstGeom prst="rect">
+            <a:avLst/>
+          </a:prstGeom>
+          <a:noFill/>
+          <a:ln/>
+        </p:spPr>
+        <p:txBody>
+          <a:bodyPr wrap="square" lIns="0" tIns="0" rIns="0" bIns="0" rtlCol="0" anchor="ctr"/>
+          <a:lstStyle/>
+          <a:p>
+            <a:pPr algn="r" indent="0" marL="0">
+              <a:buNone/>
+            </a:pPr>
+            <a:r>
+              <a:rPr lang="en-US" sz="900" dirty="0">
+                <a:solidFill>
+                  <a:srgbClr val="5F7181"/>
+                </a:solidFill>
+                <a:latin typeface="Aptos" pitchFamily="34" charset="0"/>
+                <a:ea typeface="Aptos" pitchFamily="34" charset="-122"/>
+                <a:cs typeface="Aptos" pitchFamily="34" charset="-120"/>
+              </a:rPr>
+              <a:t>5</a:t>
+            </a:r>
+            <a:endParaRPr lang="en-US" sz="900" dirty="0"/>
+          </a:p>
+        </p:txBody>
+      </p:sp>
+      <p:sp>
+        <p:nvSpPr>
+          <p:cNvPr id="8" name="Shape 6"/>
           <p:cNvSpPr/>
           <p:nvPr/>
         </p:nvSpPr>
@@ -11614,7 +12704,7 @@
       </p:sp>
       <p:sp>
         <p:nvSpPr>
-          <p:cNvPr id="8" name="Text 6"/>
+          <p:cNvPr id="9" name="Text 7"/>
           <p:cNvSpPr/>
           <p:nvPr/>
         </p:nvSpPr>
@@ -11653,14 +12743,14 @@
       </p:sp>
       <p:sp>
         <p:nvSpPr>
-          <p:cNvPr id="9" name="Text 7"/>
+          <p:cNvPr id="10" name="Text 8"/>
           <p:cNvSpPr/>
           <p:nvPr/>
         </p:nvSpPr>
         <p:spPr>
           <a:xfrm>
             <a:off x="640080" y="621792"/>
-            <a:ext cx="10881360" cy="566928"/>
+            <a:ext cx="10881360" cy="713232"/>
           </a:xfrm>
           <a:prstGeom prst="rect">
             <a:avLst/>
@@ -11678,7 +12768,7 @@
               <a:buNone/>
             </a:pPr>
             <a:r>
-              <a:rPr lang="en-US" sz="2700" b="1" dirty="0">
+              <a:rPr lang="en-US" sz="3400" b="1" dirty="0">
                 <a:solidFill>
                   <a:srgbClr val="003A63"/>
                 </a:solidFill>
@@ -11688,20 +12778,20 @@
               </a:rPr>
               <a:t>Learning Objectives</a:t>
             </a:r>
-            <a:endParaRPr lang="en-US" sz="2700" dirty="0"/>
-          </a:p>
-        </p:txBody>
-      </p:sp>
-      <p:sp>
-        <p:nvSpPr>
-          <p:cNvPr id="10" name="Text 8"/>
-          <p:cNvSpPr/>
-          <p:nvPr/>
-        </p:nvSpPr>
-        <p:spPr>
-          <a:xfrm>
-            <a:off x="868680" y="1417320"/>
-            <a:ext cx="6675120" cy="4434840"/>
+            <a:endParaRPr lang="en-US" sz="3400" dirty="0"/>
+          </a:p>
+        </p:txBody>
+      </p:sp>
+      <p:sp>
+        <p:nvSpPr>
+          <p:cNvPr id="11" name="Text 9"/>
+          <p:cNvSpPr/>
+          <p:nvPr/>
+        </p:nvSpPr>
+        <p:spPr>
+          <a:xfrm>
+            <a:off x="868680" y="1508760"/>
+            <a:ext cx="6537960" cy="4160520"/>
           </a:xfrm>
           <a:prstGeom prst="rect">
             <a:avLst/>
@@ -11716,7 +12806,7 @@
           <a:lstStyle/>
           <a:p>
             <a:r>
-              <a:rPr lang="en-US" sz="1700" dirty="0">
+              <a:rPr lang="en-US" sz="2100" dirty="0">
                 <a:solidFill>
                   <a:srgbClr val="17364A"/>
                 </a:solidFill>
@@ -11726,11 +12816,11 @@
               </a:rPr>
               <a:t>Explain the difference between risk appetite, risk tolerance, and risk acceptance.</a:t>
             </a:r>
-            <a:endParaRPr lang="en-US" sz="1700" dirty="0"/>
-          </a:p>
-          <a:p>
-            <a:r>
-              <a:rPr lang="en-US" sz="1700" dirty="0">
+            <a:endParaRPr lang="en-US" sz="2100" dirty="0"/>
+          </a:p>
+          <a:p>
+            <a:r>
+              <a:rPr lang="en-US" sz="2100" dirty="0">
                 <a:solidFill>
                   <a:srgbClr val="17364A"/>
                 </a:solidFill>
@@ -11740,11 +12830,11 @@
               </a:rPr>
               <a:t>Identify AI uses that may be low, moderate, high, or unacceptable risk in a public health context.</a:t>
             </a:r>
-            <a:endParaRPr lang="en-US" sz="1700" dirty="0"/>
-          </a:p>
-          <a:p>
-            <a:r>
-              <a:rPr lang="en-US" sz="1700" dirty="0">
+            <a:endParaRPr lang="en-US" sz="2100" dirty="0"/>
+          </a:p>
+          <a:p>
+            <a:r>
+              <a:rPr lang="en-US" sz="2100" dirty="0">
                 <a:solidFill>
                   <a:srgbClr val="17364A"/>
                 </a:solidFill>
@@ -11754,27 +12844,13 @@
               </a:rPr>
               <a:t>Develop risk tolerance statements for different AI use categories.</a:t>
             </a:r>
-            <a:endParaRPr lang="en-US" sz="1700" dirty="0"/>
-          </a:p>
-          <a:p>
-            <a:r>
-              <a:rPr lang="en-US" sz="1700" dirty="0">
-                <a:solidFill>
-                  <a:srgbClr val="17364A"/>
-                </a:solidFill>
-                <a:latin typeface="Aptos" pitchFamily="34" charset="0"/>
-                <a:ea typeface="Aptos" pitchFamily="34" charset="-122"/>
-                <a:cs typeface="Aptos" pitchFamily="34" charset="-120"/>
-              </a:rPr>
-              <a:t>Connect risk tolerance to review level, safeguards, monitoring, and escalation.</a:t>
-            </a:r>
-            <a:endParaRPr lang="en-US" sz="1700" dirty="0"/>
-          </a:p>
-        </p:txBody>
-      </p:sp>
-      <p:sp>
-        <p:nvSpPr>
-          <p:cNvPr id="11" name="Shape 9"/>
+            <a:endParaRPr lang="en-US" sz="2100" dirty="0"/>
+          </a:p>
+        </p:txBody>
+      </p:sp>
+      <p:sp>
+        <p:nvSpPr>
+          <p:cNvPr id="12" name="Shape 10"/>
           <p:cNvSpPr/>
           <p:nvPr/>
         </p:nvSpPr>
@@ -11801,14 +12877,14 @@
       </p:sp>
       <p:sp>
         <p:nvSpPr>
-          <p:cNvPr id="12" name="Text 10"/>
+          <p:cNvPr id="13" name="Text 11"/>
           <p:cNvSpPr/>
           <p:nvPr/>
         </p:nvSpPr>
         <p:spPr>
           <a:xfrm>
             <a:off x="8074152" y="1563624"/>
-            <a:ext cx="2825496" cy="201168"/>
+            <a:ext cx="2825496" cy="256032"/>
           </a:xfrm>
           <a:prstGeom prst="rect">
             <a:avLst/>
@@ -11824,7 +12900,7 @@
               <a:buNone/>
             </a:pPr>
             <a:r>
-              <a:rPr lang="en-US" sz="950" b="1" dirty="0">
+              <a:rPr lang="en-US" sz="1300" b="1" dirty="0">
                 <a:solidFill>
                   <a:srgbClr val="0068B7"/>
                 </a:solidFill>
@@ -11834,20 +12910,20 @@
               </a:rPr>
               <a:t>Key idea</a:t>
             </a:r>
-            <a:endParaRPr lang="en-US" sz="950" dirty="0"/>
-          </a:p>
-        </p:txBody>
-      </p:sp>
-      <p:sp>
-        <p:nvSpPr>
-          <p:cNvPr id="13" name="Text 11"/>
-          <p:cNvSpPr/>
-          <p:nvPr/>
-        </p:nvSpPr>
-        <p:spPr>
-          <a:xfrm>
-            <a:off x="8074152" y="1856232"/>
-            <a:ext cx="2825496" cy="1261872"/>
+            <a:endParaRPr lang="en-US" sz="1300" dirty="0"/>
+          </a:p>
+        </p:txBody>
+      </p:sp>
+      <p:sp>
+        <p:nvSpPr>
+          <p:cNvPr id="14" name="Text 12"/>
+          <p:cNvSpPr/>
+          <p:nvPr/>
+        </p:nvSpPr>
+        <p:spPr>
+          <a:xfrm>
+            <a:off x="8074152" y="1920240"/>
+            <a:ext cx="2825496" cy="1188720"/>
           </a:xfrm>
           <a:prstGeom prst="rect">
             <a:avLst/>
@@ -11865,7 +12941,7 @@
               <a:buNone/>
             </a:pPr>
             <a:r>
-              <a:rPr lang="en-US" sz="1250" dirty="0">
+              <a:rPr lang="en-US" sz="1550" dirty="0">
                 <a:solidFill>
                   <a:srgbClr val="17364A"/>
                 </a:solidFill>
@@ -11875,13 +12951,13 @@
               </a:rPr>
               <a:t>Explain the difference between risk appetite, risk tolerance, and risk acceptance.</a:t>
             </a:r>
-            <a:endParaRPr lang="en-US" sz="1250" dirty="0"/>
-          </a:p>
-        </p:txBody>
-      </p:sp>
-      <p:sp>
-        <p:nvSpPr>
-          <p:cNvPr id="14" name="Shape 12"/>
+            <a:endParaRPr lang="en-US" sz="1550" dirty="0"/>
+          </a:p>
+        </p:txBody>
+      </p:sp>
+      <p:sp>
+        <p:nvSpPr>
+          <p:cNvPr id="15" name="Shape 13"/>
           <p:cNvSpPr/>
           <p:nvPr/>
         </p:nvSpPr>
@@ -11908,14 +12984,14 @@
       </p:sp>
       <p:sp>
         <p:nvSpPr>
-          <p:cNvPr id="15" name="Text 13"/>
+          <p:cNvPr id="16" name="Text 14"/>
           <p:cNvSpPr/>
           <p:nvPr/>
         </p:nvSpPr>
         <p:spPr>
           <a:xfrm>
             <a:off x="8074152" y="3666744"/>
-            <a:ext cx="2825496" cy="201168"/>
+            <a:ext cx="2825496" cy="256032"/>
           </a:xfrm>
           <a:prstGeom prst="rect">
             <a:avLst/>
@@ -11931,7 +13007,7 @@
               <a:buNone/>
             </a:pPr>
             <a:r>
-              <a:rPr lang="en-US" sz="950" b="1" dirty="0">
+              <a:rPr lang="en-US" sz="1300" b="1" dirty="0">
                 <a:solidFill>
                   <a:srgbClr val="0068B7"/>
                 </a:solidFill>
@@ -11941,20 +13017,20 @@
               </a:rPr>
               <a:t>Use this for</a:t>
             </a:r>
-            <a:endParaRPr lang="en-US" sz="950" dirty="0"/>
-          </a:p>
-        </p:txBody>
-      </p:sp>
-      <p:sp>
-        <p:nvSpPr>
-          <p:cNvPr id="16" name="Text 14"/>
-          <p:cNvSpPr/>
-          <p:nvPr/>
-        </p:nvSpPr>
-        <p:spPr>
-          <a:xfrm>
-            <a:off x="8074152" y="3959352"/>
-            <a:ext cx="2825496" cy="1170432"/>
+            <a:endParaRPr lang="en-US" sz="1300" dirty="0"/>
+          </a:p>
+        </p:txBody>
+      </p:sp>
+      <p:sp>
+        <p:nvSpPr>
+          <p:cNvPr id="17" name="Text 15"/>
+          <p:cNvSpPr/>
+          <p:nvPr/>
+        </p:nvSpPr>
+        <p:spPr>
+          <a:xfrm>
+            <a:off x="8074152" y="4023360"/>
+            <a:ext cx="2825496" cy="1097280"/>
           </a:xfrm>
           <a:prstGeom prst="rect">
             <a:avLst/>
@@ -11972,7 +13048,7 @@
               <a:buNone/>
             </a:pPr>
             <a:r>
-              <a:rPr lang="en-US" sz="1250" dirty="0">
+              <a:rPr lang="en-US" sz="1550" dirty="0">
                 <a:solidFill>
                   <a:srgbClr val="17364A"/>
                 </a:solidFill>
@@ -11982,7 +13058,7 @@
               </a:rPr>
               <a:t>Connect the concept to public health decisions, safeguards, documentation, or implementation work.</a:t>
             </a:r>
-            <a:endParaRPr lang="en-US" sz="1250" dirty="0"/>
+            <a:endParaRPr lang="en-US" sz="1550" dirty="0"/>
           </a:p>
         </p:txBody>
       </p:sp>
@@ -12179,7 +13255,7 @@
                 <a:ea typeface="Aptos" pitchFamily="34" charset="-122"/>
                 <a:cs typeface="Aptos" pitchFamily="34" charset="-120"/>
               </a:rPr>
-              <a:t>© Paula Soper</a:t>
+              <a:t>Â© Paula Soper</a:t>
             </a:r>
             <a:endParaRPr lang="en-US" sz="800" dirty="0"/>
           </a:p>
@@ -12187,7 +13263,46 @@
       </p:sp>
       <p:sp>
         <p:nvSpPr>
-          <p:cNvPr id="7" name="Shape 5"/>
+          <p:cNvPr id="7" name="Text 5"/>
+          <p:cNvSpPr/>
+          <p:nvPr/>
+        </p:nvSpPr>
+        <p:spPr>
+          <a:xfrm>
+            <a:off x="11137392" y="6510528"/>
+            <a:ext cx="411480" cy="201168"/>
+          </a:xfrm>
+          <a:prstGeom prst="rect">
+            <a:avLst/>
+          </a:prstGeom>
+          <a:noFill/>
+          <a:ln/>
+        </p:spPr>
+        <p:txBody>
+          <a:bodyPr wrap="square" lIns="0" tIns="0" rIns="0" bIns="0" rtlCol="0" anchor="ctr"/>
+          <a:lstStyle/>
+          <a:p>
+            <a:pPr algn="r" indent="0" marL="0">
+              <a:buNone/>
+            </a:pPr>
+            <a:r>
+              <a:rPr lang="en-US" sz="900" dirty="0">
+                <a:solidFill>
+                  <a:srgbClr val="5F7181"/>
+                </a:solidFill>
+                <a:latin typeface="Aptos" pitchFamily="34" charset="0"/>
+                <a:ea typeface="Aptos" pitchFamily="34" charset="-122"/>
+                <a:cs typeface="Aptos" pitchFamily="34" charset="-120"/>
+              </a:rPr>
+              <a:t>6</a:t>
+            </a:r>
+            <a:endParaRPr lang="en-US" sz="900" dirty="0"/>
+          </a:p>
+        </p:txBody>
+      </p:sp>
+      <p:sp>
+        <p:nvSpPr>
+          <p:cNvPr id="8" name="Shape 6"/>
           <p:cNvSpPr/>
           <p:nvPr/>
         </p:nvSpPr>
@@ -12212,7 +13327,7 @@
       </p:sp>
       <p:sp>
         <p:nvSpPr>
-          <p:cNvPr id="8" name="Text 6"/>
+          <p:cNvPr id="9" name="Text 7"/>
           <p:cNvSpPr/>
           <p:nvPr/>
         </p:nvSpPr>
@@ -12251,14 +13366,14 @@
       </p:sp>
       <p:sp>
         <p:nvSpPr>
-          <p:cNvPr id="9" name="Text 7"/>
+          <p:cNvPr id="10" name="Text 8"/>
           <p:cNvSpPr/>
           <p:nvPr/>
         </p:nvSpPr>
         <p:spPr>
           <a:xfrm>
             <a:off x="640080" y="621792"/>
-            <a:ext cx="10881360" cy="566928"/>
+            <a:ext cx="10881360" cy="713232"/>
           </a:xfrm>
           <a:prstGeom prst="rect">
             <a:avLst/>
@@ -12276,7 +13391,7 @@
               <a:buNone/>
             </a:pPr>
             <a:r>
-              <a:rPr lang="en-US" sz="2700" b="1" dirty="0">
+              <a:rPr lang="en-US" sz="3400" b="1" dirty="0">
                 <a:solidFill>
                   <a:srgbClr val="003A63"/>
                 </a:solidFill>
@@ -12286,20 +13401,20 @@
               </a:rPr>
               <a:t>Module Overview</a:t>
             </a:r>
-            <a:endParaRPr lang="en-US" sz="2700" dirty="0"/>
-          </a:p>
-        </p:txBody>
-      </p:sp>
-      <p:sp>
-        <p:nvSpPr>
-          <p:cNvPr id="10" name="Text 8"/>
-          <p:cNvSpPr/>
-          <p:nvPr/>
-        </p:nvSpPr>
-        <p:spPr>
-          <a:xfrm>
-            <a:off x="868680" y="1417320"/>
-            <a:ext cx="6675120" cy="4434840"/>
+            <a:endParaRPr lang="en-US" sz="3400" dirty="0"/>
+          </a:p>
+        </p:txBody>
+      </p:sp>
+      <p:sp>
+        <p:nvSpPr>
+          <p:cNvPr id="11" name="Text 9"/>
+          <p:cNvSpPr/>
+          <p:nvPr/>
+        </p:nvSpPr>
+        <p:spPr>
+          <a:xfrm>
+            <a:off x="868680" y="1508760"/>
+            <a:ext cx="6537960" cy="4160520"/>
           </a:xfrm>
           <a:prstGeom prst="rect">
             <a:avLst/>
@@ -12314,7 +13429,7 @@
           <a:lstStyle/>
           <a:p>
             <a:r>
-              <a:rPr lang="en-US" sz="1700" dirty="0">
+              <a:rPr lang="en-US" sz="2100" dirty="0">
                 <a:solidFill>
                   <a:srgbClr val="17364A"/>
                 </a:solidFill>
@@ -12322,13 +13437,13 @@
                 <a:ea typeface="Aptos" pitchFamily="34" charset="-122"/>
                 <a:cs typeface="Aptos" pitchFamily="34" charset="-120"/>
               </a:rPr>
-              <a:t>Leaders cannot manage AI risk effectively unless they define how much risk the agency is willing to accept for different.</a:t>
-            </a:r>
-            <a:endParaRPr lang="en-US" sz="1700" dirty="0"/>
-          </a:p>
-          <a:p>
-            <a:r>
-              <a:rPr lang="en-US" sz="1700" dirty="0">
+              <a:t>Leaders cannot manage AI risk effectively unless they define how much risk the agency is willing to.</a:t>
+            </a:r>
+            <a:endParaRPr lang="en-US" sz="2100" dirty="0"/>
+          </a:p>
+          <a:p>
+            <a:r>
+              <a:rPr lang="en-US" sz="2100" dirty="0">
                 <a:solidFill>
                   <a:srgbClr val="17364A"/>
                 </a:solidFill>
@@ -12336,13 +13451,13 @@
                 <a:ea typeface="Aptos" pitchFamily="34" charset="-122"/>
                 <a:cs typeface="Aptos" pitchFamily="34" charset="-120"/>
               </a:rPr>
-              <a:t>Risk appetite describes the broad level of risk an organization is willing to take in pursuit of its mission.</a:t>
-            </a:r>
-            <a:endParaRPr lang="en-US" sz="1700" dirty="0"/>
-          </a:p>
-          <a:p>
-            <a:r>
-              <a:rPr lang="en-US" sz="1700" dirty="0">
+              <a:t>Risk appetite describes the broad level of risk an organization is willing to take in pursuit of its.</a:t>
+            </a:r>
+            <a:endParaRPr lang="en-US" sz="2100" dirty="0"/>
+          </a:p>
+          <a:p>
+            <a:r>
+              <a:rPr lang="en-US" sz="2100" dirty="0">
                 <a:solidFill>
                   <a:srgbClr val="17364A"/>
                 </a:solidFill>
@@ -12350,29 +13465,15 @@
                 <a:ea typeface="Aptos" pitchFamily="34" charset="-122"/>
                 <a:cs typeface="Aptos" pitchFamily="34" charset="-120"/>
               </a:rPr>
-              <a:t>Risk tolerance translates that appetite into practical thresholds, conditions, and limits for specific AI uses.</a:t>
-            </a:r>
-            <a:endParaRPr lang="en-US" sz="1700" dirty="0"/>
-          </a:p>
-          <a:p>
-            <a:r>
-              <a:rPr lang="en-US" sz="1700" dirty="0">
-                <a:solidFill>
-                  <a:srgbClr val="17364A"/>
-                </a:solidFill>
-                <a:latin typeface="Aptos" pitchFamily="34" charset="0"/>
-                <a:ea typeface="Aptos" pitchFamily="34" charset="-122"/>
-                <a:cs typeface="Aptos" pitchFamily="34" charset="-120"/>
-              </a:rPr>
-              <a:t>This module helps public health leaders define AI risk appetite in a way that reflects public health authority, community.</a:t>
-            </a:r>
-            <a:endParaRPr lang="en-US" sz="1700" dirty="0"/>
-          </a:p>
-        </p:txBody>
-      </p:sp>
-      <p:sp>
-        <p:nvSpPr>
-          <p:cNvPr id="11" name="Shape 9"/>
+              <a:t>Risk tolerance translates that appetite into practical thresholds, conditions, and limits for specific.</a:t>
+            </a:r>
+            <a:endParaRPr lang="en-US" sz="2100" dirty="0"/>
+          </a:p>
+        </p:txBody>
+      </p:sp>
+      <p:sp>
+        <p:nvSpPr>
+          <p:cNvPr id="12" name="Shape 10"/>
           <p:cNvSpPr/>
           <p:nvPr/>
         </p:nvSpPr>
@@ -12399,14 +13500,14 @@
       </p:sp>
       <p:sp>
         <p:nvSpPr>
-          <p:cNvPr id="12" name="Text 10"/>
+          <p:cNvPr id="13" name="Text 11"/>
           <p:cNvSpPr/>
           <p:nvPr/>
         </p:nvSpPr>
         <p:spPr>
           <a:xfrm>
             <a:off x="8074152" y="1563624"/>
-            <a:ext cx="2825496" cy="201168"/>
+            <a:ext cx="2825496" cy="256032"/>
           </a:xfrm>
           <a:prstGeom prst="rect">
             <a:avLst/>
@@ -12422,7 +13523,7 @@
               <a:buNone/>
             </a:pPr>
             <a:r>
-              <a:rPr lang="en-US" sz="950" b="1" dirty="0">
+              <a:rPr lang="en-US" sz="1300" b="1" dirty="0">
                 <a:solidFill>
                   <a:srgbClr val="0068B7"/>
                 </a:solidFill>
@@ -12432,20 +13533,20 @@
               </a:rPr>
               <a:t>Key idea</a:t>
             </a:r>
-            <a:endParaRPr lang="en-US" sz="950" dirty="0"/>
-          </a:p>
-        </p:txBody>
-      </p:sp>
-      <p:sp>
-        <p:nvSpPr>
-          <p:cNvPr id="13" name="Text 11"/>
-          <p:cNvSpPr/>
-          <p:nvPr/>
-        </p:nvSpPr>
-        <p:spPr>
-          <a:xfrm>
-            <a:off x="8074152" y="1856232"/>
-            <a:ext cx="2825496" cy="1261872"/>
+            <a:endParaRPr lang="en-US" sz="1300" dirty="0"/>
+          </a:p>
+        </p:txBody>
+      </p:sp>
+      <p:sp>
+        <p:nvSpPr>
+          <p:cNvPr id="14" name="Text 12"/>
+          <p:cNvSpPr/>
+          <p:nvPr/>
+        </p:nvSpPr>
+        <p:spPr>
+          <a:xfrm>
+            <a:off x="8074152" y="1920240"/>
+            <a:ext cx="2825496" cy="1188720"/>
           </a:xfrm>
           <a:prstGeom prst="rect">
             <a:avLst/>
@@ -12463,7 +13564,7 @@
               <a:buNone/>
             </a:pPr>
             <a:r>
-              <a:rPr lang="en-US" sz="1250" dirty="0">
+              <a:rPr lang="en-US" sz="1550" dirty="0">
                 <a:solidFill>
                   <a:srgbClr val="17364A"/>
                 </a:solidFill>
@@ -12471,15 +13572,15 @@
                 <a:ea typeface="Aptos" pitchFamily="34" charset="-122"/>
                 <a:cs typeface="Aptos" pitchFamily="34" charset="-120"/>
               </a:rPr>
-              <a:t>Leaders cannot manage AI risk effectively unless they define how much risk the agency is willing to accept for different.</a:t>
-            </a:r>
-            <a:endParaRPr lang="en-US" sz="1250" dirty="0"/>
-          </a:p>
-        </p:txBody>
-      </p:sp>
-      <p:sp>
-        <p:nvSpPr>
-          <p:cNvPr id="14" name="Shape 12"/>
+              <a:t>Leaders cannot manage AI risk effectively unless they define how much risk the agency is willing to.</a:t>
+            </a:r>
+            <a:endParaRPr lang="en-US" sz="1550" dirty="0"/>
+          </a:p>
+        </p:txBody>
+      </p:sp>
+      <p:sp>
+        <p:nvSpPr>
+          <p:cNvPr id="15" name="Shape 13"/>
           <p:cNvSpPr/>
           <p:nvPr/>
         </p:nvSpPr>
@@ -12506,14 +13607,14 @@
       </p:sp>
       <p:sp>
         <p:nvSpPr>
-          <p:cNvPr id="15" name="Text 13"/>
+          <p:cNvPr id="16" name="Text 14"/>
           <p:cNvSpPr/>
           <p:nvPr/>
         </p:nvSpPr>
         <p:spPr>
           <a:xfrm>
             <a:off x="8074152" y="3666744"/>
-            <a:ext cx="2825496" cy="201168"/>
+            <a:ext cx="2825496" cy="256032"/>
           </a:xfrm>
           <a:prstGeom prst="rect">
             <a:avLst/>
@@ -12529,7 +13630,7 @@
               <a:buNone/>
             </a:pPr>
             <a:r>
-              <a:rPr lang="en-US" sz="950" b="1" dirty="0">
+              <a:rPr lang="en-US" sz="1300" b="1" dirty="0">
                 <a:solidFill>
                   <a:srgbClr val="0068B7"/>
                 </a:solidFill>
@@ -12539,20 +13640,20 @@
               </a:rPr>
               <a:t>Use this for</a:t>
             </a:r>
-            <a:endParaRPr lang="en-US" sz="950" dirty="0"/>
-          </a:p>
-        </p:txBody>
-      </p:sp>
-      <p:sp>
-        <p:nvSpPr>
-          <p:cNvPr id="16" name="Text 14"/>
-          <p:cNvSpPr/>
-          <p:nvPr/>
-        </p:nvSpPr>
-        <p:spPr>
-          <a:xfrm>
-            <a:off x="8074152" y="3959352"/>
-            <a:ext cx="2825496" cy="1170432"/>
+            <a:endParaRPr lang="en-US" sz="1300" dirty="0"/>
+          </a:p>
+        </p:txBody>
+      </p:sp>
+      <p:sp>
+        <p:nvSpPr>
+          <p:cNvPr id="17" name="Text 15"/>
+          <p:cNvSpPr/>
+          <p:nvPr/>
+        </p:nvSpPr>
+        <p:spPr>
+          <a:xfrm>
+            <a:off x="8074152" y="4023360"/>
+            <a:ext cx="2825496" cy="1097280"/>
           </a:xfrm>
           <a:prstGeom prst="rect">
             <a:avLst/>
@@ -12570,7 +13671,7 @@
               <a:buNone/>
             </a:pPr>
             <a:r>
-              <a:rPr lang="en-US" sz="1250" dirty="0">
+              <a:rPr lang="en-US" sz="1550" dirty="0">
                 <a:solidFill>
                   <a:srgbClr val="17364A"/>
                 </a:solidFill>
@@ -12580,7 +13681,7 @@
               </a:rPr>
               <a:t>Connect the concept to public health decisions, safeguards, documentation, or implementation work.</a:t>
             </a:r>
-            <a:endParaRPr lang="en-US" sz="1250" dirty="0"/>
+            <a:endParaRPr lang="en-US" sz="1550" dirty="0"/>
           </a:p>
         </p:txBody>
       </p:sp>
@@ -12777,7 +13878,7 @@
                 <a:ea typeface="Aptos" pitchFamily="34" charset="-122"/>
                 <a:cs typeface="Aptos" pitchFamily="34" charset="-120"/>
               </a:rPr>
-              <a:t>© Paula Soper</a:t>
+              <a:t>Â© Paula Soper</a:t>
             </a:r>
             <a:endParaRPr lang="en-US" sz="800" dirty="0"/>
           </a:p>
@@ -12785,7 +13886,46 @@
       </p:sp>
       <p:sp>
         <p:nvSpPr>
-          <p:cNvPr id="7" name="Shape 5"/>
+          <p:cNvPr id="7" name="Text 5"/>
+          <p:cNvSpPr/>
+          <p:nvPr/>
+        </p:nvSpPr>
+        <p:spPr>
+          <a:xfrm>
+            <a:off x="11137392" y="6510528"/>
+            <a:ext cx="411480" cy="201168"/>
+          </a:xfrm>
+          <a:prstGeom prst="rect">
+            <a:avLst/>
+          </a:prstGeom>
+          <a:noFill/>
+          <a:ln/>
+        </p:spPr>
+        <p:txBody>
+          <a:bodyPr wrap="square" lIns="0" tIns="0" rIns="0" bIns="0" rtlCol="0" anchor="ctr"/>
+          <a:lstStyle/>
+          <a:p>
+            <a:pPr algn="r" indent="0" marL="0">
+              <a:buNone/>
+            </a:pPr>
+            <a:r>
+              <a:rPr lang="en-US" sz="900" dirty="0">
+                <a:solidFill>
+                  <a:srgbClr val="5F7181"/>
+                </a:solidFill>
+                <a:latin typeface="Aptos" pitchFamily="34" charset="0"/>
+                <a:ea typeface="Aptos" pitchFamily="34" charset="-122"/>
+                <a:cs typeface="Aptos" pitchFamily="34" charset="-120"/>
+              </a:rPr>
+              <a:t>7</a:t>
+            </a:r>
+            <a:endParaRPr lang="en-US" sz="900" dirty="0"/>
+          </a:p>
+        </p:txBody>
+      </p:sp>
+      <p:sp>
+        <p:nvSpPr>
+          <p:cNvPr id="8" name="Shape 6"/>
           <p:cNvSpPr/>
           <p:nvPr/>
         </p:nvSpPr>
@@ -12810,7 +13950,7 @@
       </p:sp>
       <p:sp>
         <p:nvSpPr>
-          <p:cNvPr id="8" name="Text 6"/>
+          <p:cNvPr id="9" name="Text 7"/>
           <p:cNvSpPr/>
           <p:nvPr/>
         </p:nvSpPr>
@@ -12849,14 +13989,14 @@
       </p:sp>
       <p:sp>
         <p:nvSpPr>
-          <p:cNvPr id="9" name="Text 7"/>
+          <p:cNvPr id="10" name="Text 8"/>
           <p:cNvSpPr/>
           <p:nvPr/>
         </p:nvSpPr>
         <p:spPr>
           <a:xfrm>
             <a:off x="640080" y="621792"/>
-            <a:ext cx="10881360" cy="566928"/>
+            <a:ext cx="10881360" cy="713232"/>
           </a:xfrm>
           <a:prstGeom prst="rect">
             <a:avLst/>
@@ -12874,7 +14014,7 @@
               <a:buNone/>
             </a:pPr>
             <a:r>
-              <a:rPr lang="en-US" sz="2700" b="1" dirty="0">
+              <a:rPr lang="en-US" sz="3400" b="1" dirty="0">
                 <a:solidFill>
                   <a:srgbClr val="003A63"/>
                 </a:solidFill>
@@ -12884,20 +14024,20 @@
               </a:rPr>
               <a:t>Jurisdiction and Agency Policy Note</a:t>
             </a:r>
-            <a:endParaRPr lang="en-US" sz="2700" dirty="0"/>
-          </a:p>
-        </p:txBody>
-      </p:sp>
-      <p:sp>
-        <p:nvSpPr>
-          <p:cNvPr id="10" name="Text 8"/>
-          <p:cNvSpPr/>
-          <p:nvPr/>
-        </p:nvSpPr>
-        <p:spPr>
-          <a:xfrm>
-            <a:off x="868680" y="1417320"/>
-            <a:ext cx="6675120" cy="4434840"/>
+            <a:endParaRPr lang="en-US" sz="3400" dirty="0"/>
+          </a:p>
+        </p:txBody>
+      </p:sp>
+      <p:sp>
+        <p:nvSpPr>
+          <p:cNvPr id="11" name="Text 9"/>
+          <p:cNvSpPr/>
+          <p:nvPr/>
+        </p:nvSpPr>
+        <p:spPr>
+          <a:xfrm>
+            <a:off x="868680" y="1508760"/>
+            <a:ext cx="6537960" cy="4160520"/>
           </a:xfrm>
           <a:prstGeom prst="rect">
             <a:avLst/>
@@ -12912,7 +14052,7 @@
           <a:lstStyle/>
           <a:p>
             <a:r>
-              <a:rPr lang="en-US" sz="1700" dirty="0">
+              <a:rPr lang="en-US" sz="2100" dirty="0">
                 <a:solidFill>
                   <a:srgbClr val="17364A"/>
                 </a:solidFill>
@@ -12922,11 +14062,11 @@
               </a:rPr>
               <a:t>This module provides national-level training guidance for public health agencies and partners.</a:t>
             </a:r>
-            <a:endParaRPr lang="en-US" sz="1700" dirty="0"/>
-          </a:p>
-          <a:p>
-            <a:r>
-              <a:rPr lang="en-US" sz="1700" dirty="0">
+            <a:endParaRPr lang="en-US" sz="2100" dirty="0"/>
+          </a:p>
+          <a:p>
+            <a:r>
+              <a:rPr lang="en-US" sz="2100" dirty="0">
                 <a:solidFill>
                   <a:srgbClr val="17364A"/>
                 </a:solidFill>
@@ -12934,13 +14074,13 @@
                 <a:ea typeface="Aptos" pitchFamily="34" charset="-122"/>
                 <a:cs typeface="Aptos" pitchFamily="34" charset="-120"/>
               </a:rPr>
-              <a:t>It is not legal advice and does not replace review by agency legal counsel, privacy officers, procurement officials, civil.</a:t>
-            </a:r>
-            <a:endParaRPr lang="en-US" sz="1700" dirty="0"/>
-          </a:p>
-          <a:p>
-            <a:r>
-              <a:rPr lang="en-US" sz="1700" dirty="0">
+              <a:t>It is not legal advice and does not replace review by agency legal counsel, privacy officers,.</a:t>
+            </a:r>
+            <a:endParaRPr lang="en-US" sz="2100" dirty="0"/>
+          </a:p>
+          <a:p>
+            <a:r>
+              <a:rPr lang="en-US" sz="2100" dirty="0">
                 <a:solidFill>
                   <a:srgbClr val="17364A"/>
                 </a:solidFill>
@@ -12948,29 +14088,15 @@
                 <a:ea typeface="Aptos" pitchFamily="34" charset="-122"/>
                 <a:cs typeface="Aptos" pitchFamily="34" charset="-120"/>
               </a:rPr>
-              <a:t>Requirements may vary by state, locality, territory, Tribe, agency, funding source, data-sharing agreement, emergency.</a:t>
-            </a:r>
-            <a:endParaRPr lang="en-US" sz="1700" dirty="0"/>
-          </a:p>
-          <a:p>
-            <a:r>
-              <a:rPr lang="en-US" sz="1700" dirty="0">
-                <a:solidFill>
-                  <a:srgbClr val="17364A"/>
-                </a:solidFill>
-                <a:latin typeface="Aptos" pitchFamily="34" charset="0"/>
-                <a:ea typeface="Aptos" pitchFamily="34" charset="-122"/>
-                <a:cs typeface="Aptos" pitchFamily="34" charset="-120"/>
-              </a:rPr>
-              <a:t>Learners should use this module to identify the issues that require review and should confirm applicable requirements.</a:t>
-            </a:r>
-            <a:endParaRPr lang="en-US" sz="1700" dirty="0"/>
-          </a:p>
-        </p:txBody>
-      </p:sp>
-      <p:sp>
-        <p:nvSpPr>
-          <p:cNvPr id="11" name="Shape 9"/>
+              <a:t>Requirements may vary by state, locality, territory, Tribe, agency, funding source, data-sharing.</a:t>
+            </a:r>
+            <a:endParaRPr lang="en-US" sz="2100" dirty="0"/>
+          </a:p>
+        </p:txBody>
+      </p:sp>
+      <p:sp>
+        <p:nvSpPr>
+          <p:cNvPr id="12" name="Shape 10"/>
           <p:cNvSpPr/>
           <p:nvPr/>
         </p:nvSpPr>
@@ -12997,14 +14123,14 @@
       </p:sp>
       <p:sp>
         <p:nvSpPr>
-          <p:cNvPr id="12" name="Text 10"/>
+          <p:cNvPr id="13" name="Text 11"/>
           <p:cNvSpPr/>
           <p:nvPr/>
         </p:nvSpPr>
         <p:spPr>
           <a:xfrm>
             <a:off x="8074152" y="1563624"/>
-            <a:ext cx="2825496" cy="201168"/>
+            <a:ext cx="2825496" cy="256032"/>
           </a:xfrm>
           <a:prstGeom prst="rect">
             <a:avLst/>
@@ -13020,7 +14146,7 @@
               <a:buNone/>
             </a:pPr>
             <a:r>
-              <a:rPr lang="en-US" sz="950" b="1" dirty="0">
+              <a:rPr lang="en-US" sz="1300" b="1" dirty="0">
                 <a:solidFill>
                   <a:srgbClr val="0068B7"/>
                 </a:solidFill>
@@ -13030,20 +14156,20 @@
               </a:rPr>
               <a:t>Key idea</a:t>
             </a:r>
-            <a:endParaRPr lang="en-US" sz="950" dirty="0"/>
-          </a:p>
-        </p:txBody>
-      </p:sp>
-      <p:sp>
-        <p:nvSpPr>
-          <p:cNvPr id="13" name="Text 11"/>
-          <p:cNvSpPr/>
-          <p:nvPr/>
-        </p:nvSpPr>
-        <p:spPr>
-          <a:xfrm>
-            <a:off x="8074152" y="1856232"/>
-            <a:ext cx="2825496" cy="1261872"/>
+            <a:endParaRPr lang="en-US" sz="1300" dirty="0"/>
+          </a:p>
+        </p:txBody>
+      </p:sp>
+      <p:sp>
+        <p:nvSpPr>
+          <p:cNvPr id="14" name="Text 12"/>
+          <p:cNvSpPr/>
+          <p:nvPr/>
+        </p:nvSpPr>
+        <p:spPr>
+          <a:xfrm>
+            <a:off x="8074152" y="1920240"/>
+            <a:ext cx="2825496" cy="1188720"/>
           </a:xfrm>
           <a:prstGeom prst="rect">
             <a:avLst/>
@@ -13061,7 +14187,7 @@
               <a:buNone/>
             </a:pPr>
             <a:r>
-              <a:rPr lang="en-US" sz="1250" dirty="0">
+              <a:rPr lang="en-US" sz="1550" dirty="0">
                 <a:solidFill>
                   <a:srgbClr val="17364A"/>
                 </a:solidFill>
@@ -13071,13 +14197,13 @@
               </a:rPr>
               <a:t>This module provides national-level training guidance for public health agencies and partners.</a:t>
             </a:r>
-            <a:endParaRPr lang="en-US" sz="1250" dirty="0"/>
-          </a:p>
-        </p:txBody>
-      </p:sp>
-      <p:sp>
-        <p:nvSpPr>
-          <p:cNvPr id="14" name="Shape 12"/>
+            <a:endParaRPr lang="en-US" sz="1550" dirty="0"/>
+          </a:p>
+        </p:txBody>
+      </p:sp>
+      <p:sp>
+        <p:nvSpPr>
+          <p:cNvPr id="15" name="Shape 13"/>
           <p:cNvSpPr/>
           <p:nvPr/>
         </p:nvSpPr>
@@ -13104,14 +14230,14 @@
       </p:sp>
       <p:sp>
         <p:nvSpPr>
-          <p:cNvPr id="15" name="Text 13"/>
+          <p:cNvPr id="16" name="Text 14"/>
           <p:cNvSpPr/>
           <p:nvPr/>
         </p:nvSpPr>
         <p:spPr>
           <a:xfrm>
             <a:off x="8074152" y="3666744"/>
-            <a:ext cx="2825496" cy="201168"/>
+            <a:ext cx="2825496" cy="256032"/>
           </a:xfrm>
           <a:prstGeom prst="rect">
             <a:avLst/>
@@ -13127,7 +14253,7 @@
               <a:buNone/>
             </a:pPr>
             <a:r>
-              <a:rPr lang="en-US" sz="950" b="1" dirty="0">
+              <a:rPr lang="en-US" sz="1300" b="1" dirty="0">
                 <a:solidFill>
                   <a:srgbClr val="0068B7"/>
                 </a:solidFill>
@@ -13137,20 +14263,20 @@
               </a:rPr>
               <a:t>Use this for</a:t>
             </a:r>
-            <a:endParaRPr lang="en-US" sz="950" dirty="0"/>
-          </a:p>
-        </p:txBody>
-      </p:sp>
-      <p:sp>
-        <p:nvSpPr>
-          <p:cNvPr id="16" name="Text 14"/>
-          <p:cNvSpPr/>
-          <p:nvPr/>
-        </p:nvSpPr>
-        <p:spPr>
-          <a:xfrm>
-            <a:off x="8074152" y="3959352"/>
-            <a:ext cx="2825496" cy="1170432"/>
+            <a:endParaRPr lang="en-US" sz="1300" dirty="0"/>
+          </a:p>
+        </p:txBody>
+      </p:sp>
+      <p:sp>
+        <p:nvSpPr>
+          <p:cNvPr id="17" name="Text 15"/>
+          <p:cNvSpPr/>
+          <p:nvPr/>
+        </p:nvSpPr>
+        <p:spPr>
+          <a:xfrm>
+            <a:off x="8074152" y="4023360"/>
+            <a:ext cx="2825496" cy="1097280"/>
           </a:xfrm>
           <a:prstGeom prst="rect">
             <a:avLst/>
@@ -13168,7 +14294,7 @@
               <a:buNone/>
             </a:pPr>
             <a:r>
-              <a:rPr lang="en-US" sz="1250" dirty="0">
+              <a:rPr lang="en-US" sz="1550" dirty="0">
                 <a:solidFill>
                   <a:srgbClr val="17364A"/>
                 </a:solidFill>
@@ -13178,7 +14304,7 @@
               </a:rPr>
               <a:t>Connect the concept to public health decisions, safeguards, documentation, or implementation work.</a:t>
             </a:r>
-            <a:endParaRPr lang="en-US" sz="1250" dirty="0"/>
+            <a:endParaRPr lang="en-US" sz="1550" dirty="0"/>
           </a:p>
         </p:txBody>
       </p:sp>
@@ -13375,7 +14501,7 @@
                 <a:ea typeface="Aptos" pitchFamily="34" charset="-122"/>
                 <a:cs typeface="Aptos" pitchFamily="34" charset="-120"/>
               </a:rPr>
-              <a:t>© Paula Soper</a:t>
+              <a:t>Â© Paula Soper</a:t>
             </a:r>
             <a:endParaRPr lang="en-US" sz="800" dirty="0"/>
           </a:p>
@@ -13383,7 +14509,46 @@
       </p:sp>
       <p:sp>
         <p:nvSpPr>
-          <p:cNvPr id="7" name="Shape 5"/>
+          <p:cNvPr id="7" name="Text 5"/>
+          <p:cNvSpPr/>
+          <p:nvPr/>
+        </p:nvSpPr>
+        <p:spPr>
+          <a:xfrm>
+            <a:off x="11137392" y="6510528"/>
+            <a:ext cx="411480" cy="201168"/>
+          </a:xfrm>
+          <a:prstGeom prst="rect">
+            <a:avLst/>
+          </a:prstGeom>
+          <a:noFill/>
+          <a:ln/>
+        </p:spPr>
+        <p:txBody>
+          <a:bodyPr wrap="square" lIns="0" tIns="0" rIns="0" bIns="0" rtlCol="0" anchor="ctr"/>
+          <a:lstStyle/>
+          <a:p>
+            <a:pPr algn="r" indent="0" marL="0">
+              <a:buNone/>
+            </a:pPr>
+            <a:r>
+              <a:rPr lang="en-US" sz="900" dirty="0">
+                <a:solidFill>
+                  <a:srgbClr val="5F7181"/>
+                </a:solidFill>
+                <a:latin typeface="Aptos" pitchFamily="34" charset="0"/>
+                <a:ea typeface="Aptos" pitchFamily="34" charset="-122"/>
+                <a:cs typeface="Aptos" pitchFamily="34" charset="-120"/>
+              </a:rPr>
+              <a:t>8</a:t>
+            </a:r>
+            <a:endParaRPr lang="en-US" sz="900" dirty="0"/>
+          </a:p>
+        </p:txBody>
+      </p:sp>
+      <p:sp>
+        <p:nvSpPr>
+          <p:cNvPr id="8" name="Shape 6"/>
           <p:cNvSpPr/>
           <p:nvPr/>
         </p:nvSpPr>
@@ -13408,7 +14573,7 @@
       </p:sp>
       <p:sp>
         <p:nvSpPr>
-          <p:cNvPr id="8" name="Text 6"/>
+          <p:cNvPr id="9" name="Text 7"/>
           <p:cNvSpPr/>
           <p:nvPr/>
         </p:nvSpPr>
@@ -13447,14 +14612,14 @@
       </p:sp>
       <p:sp>
         <p:nvSpPr>
-          <p:cNvPr id="9" name="Text 7"/>
+          <p:cNvPr id="10" name="Text 8"/>
           <p:cNvSpPr/>
           <p:nvPr/>
         </p:nvSpPr>
         <p:spPr>
           <a:xfrm>
             <a:off x="640080" y="621792"/>
-            <a:ext cx="10881360" cy="566928"/>
+            <a:ext cx="10881360" cy="713232"/>
           </a:xfrm>
           <a:prstGeom prst="rect">
             <a:avLst/>
@@ -13472,7 +14637,7 @@
               <a:buNone/>
             </a:pPr>
             <a:r>
-              <a:rPr lang="en-US" sz="2700" b="1" dirty="0">
+              <a:rPr lang="en-US" sz="3400" b="1" dirty="0">
                 <a:solidFill>
                   <a:srgbClr val="003A63"/>
                 </a:solidFill>
@@ -13482,20 +14647,20 @@
               </a:rPr>
               <a:t>Why This Topic Matters for Public Health AI</a:t>
             </a:r>
-            <a:endParaRPr lang="en-US" sz="2700" dirty="0"/>
-          </a:p>
-        </p:txBody>
-      </p:sp>
-      <p:sp>
-        <p:nvSpPr>
-          <p:cNvPr id="10" name="Text 8"/>
-          <p:cNvSpPr/>
-          <p:nvPr/>
-        </p:nvSpPr>
-        <p:spPr>
-          <a:xfrm>
-            <a:off x="868680" y="1417320"/>
-            <a:ext cx="6675120" cy="4434840"/>
+            <a:endParaRPr lang="en-US" sz="3400" dirty="0"/>
+          </a:p>
+        </p:txBody>
+      </p:sp>
+      <p:sp>
+        <p:nvSpPr>
+          <p:cNvPr id="11" name="Text 9"/>
+          <p:cNvSpPr/>
+          <p:nvPr/>
+        </p:nvSpPr>
+        <p:spPr>
+          <a:xfrm>
+            <a:off x="868680" y="1508760"/>
+            <a:ext cx="6537960" cy="4160520"/>
           </a:xfrm>
           <a:prstGeom prst="rect">
             <a:avLst/>
@@ -13510,7 +14675,7 @@
           <a:lstStyle/>
           <a:p>
             <a:r>
-              <a:rPr lang="en-US" sz="1700" dirty="0">
+              <a:rPr lang="en-US" sz="2100" dirty="0">
                 <a:solidFill>
                   <a:srgbClr val="17364A"/>
                 </a:solidFill>
@@ -13520,11 +14685,11 @@
               </a:rPr>
               <a:t>Public health agencies make risk decisions every day, but AI can make those decisions less visible.</a:t>
             </a:r>
-            <a:endParaRPr lang="en-US" sz="1700" dirty="0"/>
-          </a:p>
-          <a:p>
-            <a:r>
-              <a:rPr lang="en-US" sz="1700" dirty="0">
+            <a:endParaRPr lang="en-US" sz="2100" dirty="0"/>
+          </a:p>
+          <a:p>
+            <a:r>
+              <a:rPr lang="en-US" sz="2100" dirty="0">
                 <a:solidFill>
                   <a:srgbClr val="17364A"/>
                 </a:solidFill>
@@ -13532,13 +14697,13 @@
                 <a:ea typeface="Aptos" pitchFamily="34" charset="-122"/>
                 <a:cs typeface="Aptos" pitchFamily="34" charset="-120"/>
               </a:rPr>
-              <a:t>A generative AI tool might be acceptable for drafting internal meeting notes but not for producing unsupervised public.</a:t>
-            </a:r>
-            <a:endParaRPr lang="en-US" sz="1700" dirty="0"/>
-          </a:p>
-          <a:p>
-            <a:r>
-              <a:rPr lang="en-US" sz="1700" dirty="0">
+              <a:t>A generative AI tool might be acceptable for drafting internal meeting notes but not for producing.</a:t>
+            </a:r>
+            <a:endParaRPr lang="en-US" sz="2100" dirty="0"/>
+          </a:p>
+          <a:p>
+            <a:r>
+              <a:rPr lang="en-US" sz="2100" dirty="0">
                 <a:solidFill>
                   <a:srgbClr val="17364A"/>
                 </a:solidFill>
@@ -13548,27 +14713,13 @@
               </a:rPr>
               <a:t>A predictive model might be acceptable for planning staffing levels but not for denying services.</a:t>
             </a:r>
-            <a:endParaRPr lang="en-US" sz="1700" dirty="0"/>
-          </a:p>
-          <a:p>
-            <a:r>
-              <a:rPr lang="en-US" sz="1700" dirty="0">
-                <a:solidFill>
-                  <a:srgbClr val="17364A"/>
-                </a:solidFill>
-                <a:latin typeface="Aptos" pitchFamily="34" charset="0"/>
-                <a:ea typeface="Aptos" pitchFamily="34" charset="-122"/>
-                <a:cs typeface="Aptos" pitchFamily="34" charset="-120"/>
-              </a:rPr>
-              <a:t>An agentic workflow might be acceptable for creating a draft task but not for sending an enforcement notice without human.</a:t>
-            </a:r>
-            <a:endParaRPr lang="en-US" sz="1700" dirty="0"/>
-          </a:p>
-        </p:txBody>
-      </p:sp>
-      <p:sp>
-        <p:nvSpPr>
-          <p:cNvPr id="11" name="Shape 9"/>
+            <a:endParaRPr lang="en-US" sz="2100" dirty="0"/>
+          </a:p>
+        </p:txBody>
+      </p:sp>
+      <p:sp>
+        <p:nvSpPr>
+          <p:cNvPr id="12" name="Shape 10"/>
           <p:cNvSpPr/>
           <p:nvPr/>
         </p:nvSpPr>
@@ -13595,14 +14746,14 @@
       </p:sp>
       <p:sp>
         <p:nvSpPr>
-          <p:cNvPr id="12" name="Text 10"/>
+          <p:cNvPr id="13" name="Text 11"/>
           <p:cNvSpPr/>
           <p:nvPr/>
         </p:nvSpPr>
         <p:spPr>
           <a:xfrm>
             <a:off x="8074152" y="1563624"/>
-            <a:ext cx="2825496" cy="201168"/>
+            <a:ext cx="2825496" cy="256032"/>
           </a:xfrm>
           <a:prstGeom prst="rect">
             <a:avLst/>
@@ -13618,7 +14769,7 @@
               <a:buNone/>
             </a:pPr>
             <a:r>
-              <a:rPr lang="en-US" sz="950" b="1" dirty="0">
+              <a:rPr lang="en-US" sz="1300" b="1" dirty="0">
                 <a:solidFill>
                   <a:srgbClr val="0068B7"/>
                 </a:solidFill>
@@ -13628,20 +14779,20 @@
               </a:rPr>
               <a:t>Key idea</a:t>
             </a:r>
-            <a:endParaRPr lang="en-US" sz="950" dirty="0"/>
-          </a:p>
-        </p:txBody>
-      </p:sp>
-      <p:sp>
-        <p:nvSpPr>
-          <p:cNvPr id="13" name="Text 11"/>
-          <p:cNvSpPr/>
-          <p:nvPr/>
-        </p:nvSpPr>
-        <p:spPr>
-          <a:xfrm>
-            <a:off x="8074152" y="1856232"/>
-            <a:ext cx="2825496" cy="1261872"/>
+            <a:endParaRPr lang="en-US" sz="1300" dirty="0"/>
+          </a:p>
+        </p:txBody>
+      </p:sp>
+      <p:sp>
+        <p:nvSpPr>
+          <p:cNvPr id="14" name="Text 12"/>
+          <p:cNvSpPr/>
+          <p:nvPr/>
+        </p:nvSpPr>
+        <p:spPr>
+          <a:xfrm>
+            <a:off x="8074152" y="1920240"/>
+            <a:ext cx="2825496" cy="1188720"/>
           </a:xfrm>
           <a:prstGeom prst="rect">
             <a:avLst/>
@@ -13659,7 +14810,7 @@
               <a:buNone/>
             </a:pPr>
             <a:r>
-              <a:rPr lang="en-US" sz="1250" dirty="0">
+              <a:rPr lang="en-US" sz="1550" dirty="0">
                 <a:solidFill>
                   <a:srgbClr val="17364A"/>
                 </a:solidFill>
@@ -13669,13 +14820,13 @@
               </a:rPr>
               <a:t>Public health agencies make risk decisions every day, but AI can make those decisions less visible.</a:t>
             </a:r>
-            <a:endParaRPr lang="en-US" sz="1250" dirty="0"/>
-          </a:p>
-        </p:txBody>
-      </p:sp>
-      <p:sp>
-        <p:nvSpPr>
-          <p:cNvPr id="14" name="Shape 12"/>
+            <a:endParaRPr lang="en-US" sz="1550" dirty="0"/>
+          </a:p>
+        </p:txBody>
+      </p:sp>
+      <p:sp>
+        <p:nvSpPr>
+          <p:cNvPr id="15" name="Shape 13"/>
           <p:cNvSpPr/>
           <p:nvPr/>
         </p:nvSpPr>
@@ -13702,14 +14853,14 @@
       </p:sp>
       <p:sp>
         <p:nvSpPr>
-          <p:cNvPr id="15" name="Text 13"/>
+          <p:cNvPr id="16" name="Text 14"/>
           <p:cNvSpPr/>
           <p:nvPr/>
         </p:nvSpPr>
         <p:spPr>
           <a:xfrm>
             <a:off x="8074152" y="3666744"/>
-            <a:ext cx="2825496" cy="201168"/>
+            <a:ext cx="2825496" cy="256032"/>
           </a:xfrm>
           <a:prstGeom prst="rect">
             <a:avLst/>
@@ -13725,7 +14876,7 @@
               <a:buNone/>
             </a:pPr>
             <a:r>
-              <a:rPr lang="en-US" sz="950" b="1" dirty="0">
+              <a:rPr lang="en-US" sz="1300" b="1" dirty="0">
                 <a:solidFill>
                   <a:srgbClr val="0068B7"/>
                 </a:solidFill>
@@ -13735,20 +14886,20 @@
               </a:rPr>
               <a:t>Use this for</a:t>
             </a:r>
-            <a:endParaRPr lang="en-US" sz="950" dirty="0"/>
-          </a:p>
-        </p:txBody>
-      </p:sp>
-      <p:sp>
-        <p:nvSpPr>
-          <p:cNvPr id="16" name="Text 14"/>
-          <p:cNvSpPr/>
-          <p:nvPr/>
-        </p:nvSpPr>
-        <p:spPr>
-          <a:xfrm>
-            <a:off x="8074152" y="3959352"/>
-            <a:ext cx="2825496" cy="1170432"/>
+            <a:endParaRPr lang="en-US" sz="1300" dirty="0"/>
+          </a:p>
+        </p:txBody>
+      </p:sp>
+      <p:sp>
+        <p:nvSpPr>
+          <p:cNvPr id="17" name="Text 15"/>
+          <p:cNvSpPr/>
+          <p:nvPr/>
+        </p:nvSpPr>
+        <p:spPr>
+          <a:xfrm>
+            <a:off x="8074152" y="4023360"/>
+            <a:ext cx="2825496" cy="1097280"/>
           </a:xfrm>
           <a:prstGeom prst="rect">
             <a:avLst/>
@@ -13766,7 +14917,7 @@
               <a:buNone/>
             </a:pPr>
             <a:r>
-              <a:rPr lang="en-US" sz="1250" dirty="0">
+              <a:rPr lang="en-US" sz="1550" dirty="0">
                 <a:solidFill>
                   <a:srgbClr val="17364A"/>
                 </a:solidFill>
@@ -13776,7 +14927,7 @@
               </a:rPr>
               <a:t>Connect the concept to public health decisions, safeguards, documentation, or implementation work.</a:t>
             </a:r>
-            <a:endParaRPr lang="en-US" sz="1250" dirty="0"/>
+            <a:endParaRPr lang="en-US" sz="1550" dirty="0"/>
           </a:p>
         </p:txBody>
       </p:sp>
@@ -13973,7 +15124,7 @@
                 <a:ea typeface="Aptos" pitchFamily="34" charset="-122"/>
                 <a:cs typeface="Aptos" pitchFamily="34" charset="-120"/>
               </a:rPr>
-              <a:t>© Paula Soper</a:t>
+              <a:t>Â© Paula Soper</a:t>
             </a:r>
             <a:endParaRPr lang="en-US" sz="800" dirty="0"/>
           </a:p>
@@ -13981,7 +15132,46 @@
       </p:sp>
       <p:sp>
         <p:nvSpPr>
-          <p:cNvPr id="7" name="Shape 5"/>
+          <p:cNvPr id="7" name="Text 5"/>
+          <p:cNvSpPr/>
+          <p:nvPr/>
+        </p:nvSpPr>
+        <p:spPr>
+          <a:xfrm>
+            <a:off x="11137392" y="6510528"/>
+            <a:ext cx="411480" cy="201168"/>
+          </a:xfrm>
+          <a:prstGeom prst="rect">
+            <a:avLst/>
+          </a:prstGeom>
+          <a:noFill/>
+          <a:ln/>
+        </p:spPr>
+        <p:txBody>
+          <a:bodyPr wrap="square" lIns="0" tIns="0" rIns="0" bIns="0" rtlCol="0" anchor="ctr"/>
+          <a:lstStyle/>
+          <a:p>
+            <a:pPr algn="r" indent="0" marL="0">
+              <a:buNone/>
+            </a:pPr>
+            <a:r>
+              <a:rPr lang="en-US" sz="900" dirty="0">
+                <a:solidFill>
+                  <a:srgbClr val="5F7181"/>
+                </a:solidFill>
+                <a:latin typeface="Aptos" pitchFamily="34" charset="0"/>
+                <a:ea typeface="Aptos" pitchFamily="34" charset="-122"/>
+                <a:cs typeface="Aptos" pitchFamily="34" charset="-120"/>
+              </a:rPr>
+              <a:t>9</a:t>
+            </a:r>
+            <a:endParaRPr lang="en-US" sz="900" dirty="0"/>
+          </a:p>
+        </p:txBody>
+      </p:sp>
+      <p:sp>
+        <p:nvSpPr>
+          <p:cNvPr id="8" name="Shape 6"/>
           <p:cNvSpPr/>
           <p:nvPr/>
         </p:nvSpPr>
@@ -14006,7 +15196,7 @@
       </p:sp>
       <p:sp>
         <p:nvSpPr>
-          <p:cNvPr id="8" name="Text 6"/>
+          <p:cNvPr id="9" name="Text 7"/>
           <p:cNvSpPr/>
           <p:nvPr/>
         </p:nvSpPr>
@@ -14045,14 +15235,14 @@
       </p:sp>
       <p:sp>
         <p:nvSpPr>
-          <p:cNvPr id="9" name="Text 7"/>
+          <p:cNvPr id="10" name="Text 8"/>
           <p:cNvSpPr/>
           <p:nvPr/>
         </p:nvSpPr>
         <p:spPr>
           <a:xfrm>
             <a:off x="640080" y="621792"/>
-            <a:ext cx="10881360" cy="566928"/>
+            <a:ext cx="10881360" cy="713232"/>
           </a:xfrm>
           <a:prstGeom prst="rect">
             <a:avLst/>
@@ -14070,7 +15260,7 @@
               <a:buNone/>
             </a:pPr>
             <a:r>
-              <a:rPr lang="en-US" sz="2700" b="1" dirty="0">
+              <a:rPr lang="en-US" sz="3400" b="1" dirty="0">
                 <a:solidFill>
                   <a:srgbClr val="003A63"/>
                 </a:solidFill>
@@ -14080,20 +15270,20 @@
               </a:rPr>
               <a:t>Public Health Example</a:t>
             </a:r>
-            <a:endParaRPr lang="en-US" sz="2700" dirty="0"/>
-          </a:p>
-        </p:txBody>
-      </p:sp>
-      <p:sp>
-        <p:nvSpPr>
-          <p:cNvPr id="10" name="Text 8"/>
-          <p:cNvSpPr/>
-          <p:nvPr/>
-        </p:nvSpPr>
-        <p:spPr>
-          <a:xfrm>
-            <a:off x="868680" y="1417320"/>
-            <a:ext cx="6675120" cy="4434840"/>
+            <a:endParaRPr lang="en-US" sz="3400" dirty="0"/>
+          </a:p>
+        </p:txBody>
+      </p:sp>
+      <p:sp>
+        <p:nvSpPr>
+          <p:cNvPr id="11" name="Text 9"/>
+          <p:cNvSpPr/>
+          <p:nvPr/>
+        </p:nvSpPr>
+        <p:spPr>
+          <a:xfrm>
+            <a:off x="868680" y="1508760"/>
+            <a:ext cx="6537960" cy="4160520"/>
           </a:xfrm>
           <a:prstGeom prst="rect">
             <a:avLst/>
@@ -14108,7 +15298,7 @@
           <a:lstStyle/>
           <a:p>
             <a:r>
-              <a:rPr lang="en-US" sz="1700" dirty="0">
+              <a:rPr lang="en-US" sz="2100" dirty="0">
                 <a:solidFill>
                   <a:srgbClr val="17364A"/>
                 </a:solidFill>
@@ -14116,13 +15306,13 @@
                 <a:ea typeface="Aptos" pitchFamily="34" charset="-122"/>
                 <a:cs typeface="Aptos" pitchFamily="34" charset="-120"/>
               </a:rPr>
-              <a:t>An agency may define a higher risk appetite for internal administrative uses that do not involve sensitive data, public.</a:t>
-            </a:r>
-            <a:endParaRPr lang="en-US" sz="1700" dirty="0"/>
-          </a:p>
-          <a:p>
-            <a:r>
-              <a:rPr lang="en-US" sz="1700" dirty="0">
+              <a:t>An agency may define a higher risk appetite for internal administrative uses that do not involve.</a:t>
+            </a:r>
+            <a:endParaRPr lang="en-US" sz="2100" dirty="0"/>
+          </a:p>
+          <a:p>
+            <a:r>
+              <a:rPr lang="en-US" sz="2100" dirty="0">
                 <a:solidFill>
                   <a:srgbClr val="17364A"/>
                 </a:solidFill>
@@ -14130,13 +15320,13 @@
                 <a:ea typeface="Aptos" pitchFamily="34" charset="-122"/>
                 <a:cs typeface="Aptos" pitchFamily="34" charset="-120"/>
               </a:rPr>
-              <a:t>It may define a moderate appetite for staff-facing decision support when human review, validation, and documentation are.</a:t>
-            </a:r>
-            <a:endParaRPr lang="en-US" sz="1700" dirty="0"/>
-          </a:p>
-          <a:p>
-            <a:r>
-              <a:rPr lang="en-US" sz="1700" dirty="0">
+              <a:t>It may define a moderate appetite for staff-facing decision support when human review, validation, and.</a:t>
+            </a:r>
+            <a:endParaRPr lang="en-US" sz="2100" dirty="0"/>
+          </a:p>
+          <a:p>
+            <a:r>
+              <a:rPr lang="en-US" sz="2100" dirty="0">
                 <a:solidFill>
                   <a:srgbClr val="17364A"/>
                 </a:solidFill>
@@ -14144,29 +15334,15 @@
                 <a:ea typeface="Aptos" pitchFamily="34" charset="-122"/>
                 <a:cs typeface="Aptos" pitchFamily="34" charset="-120"/>
               </a:rPr>
-              <a:t>It may define a very low appetite for unsupervised public-facing advice, automated eligibility decisions, enforcement.</a:t>
-            </a:r>
-            <a:endParaRPr lang="en-US" sz="1700" dirty="0"/>
-          </a:p>
-          <a:p>
-            <a:r>
-              <a:rPr lang="en-US" sz="1700" dirty="0">
-                <a:solidFill>
-                  <a:srgbClr val="17364A"/>
-                </a:solidFill>
-                <a:latin typeface="Aptos" pitchFamily="34" charset="0"/>
-                <a:ea typeface="Aptos" pitchFamily="34" charset="-122"/>
-                <a:cs typeface="Aptos" pitchFamily="34" charset="-120"/>
-              </a:rPr>
-              <a:t>These statements help governance reviewers make consistent decisions.</a:t>
-            </a:r>
-            <a:endParaRPr lang="en-US" sz="1700" dirty="0"/>
-          </a:p>
-        </p:txBody>
-      </p:sp>
-      <p:sp>
-        <p:nvSpPr>
-          <p:cNvPr id="11" name="Shape 9"/>
+              <a:t>It may define a very low appetite for unsupervised public-facing advice, automated eligibility.</a:t>
+            </a:r>
+            <a:endParaRPr lang="en-US" sz="2100" dirty="0"/>
+          </a:p>
+        </p:txBody>
+      </p:sp>
+      <p:sp>
+        <p:nvSpPr>
+          <p:cNvPr id="12" name="Shape 10"/>
           <p:cNvSpPr/>
           <p:nvPr/>
         </p:nvSpPr>
@@ -14193,14 +15369,14 @@
       </p:sp>
       <p:sp>
         <p:nvSpPr>
-          <p:cNvPr id="12" name="Text 10"/>
+          <p:cNvPr id="13" name="Text 11"/>
           <p:cNvSpPr/>
           <p:nvPr/>
         </p:nvSpPr>
         <p:spPr>
           <a:xfrm>
             <a:off x="8074152" y="1563624"/>
-            <a:ext cx="2825496" cy="201168"/>
+            <a:ext cx="2825496" cy="256032"/>
           </a:xfrm>
           <a:prstGeom prst="rect">
             <a:avLst/>
@@ -14216,7 +15392,7 @@
               <a:buNone/>
             </a:pPr>
             <a:r>
-              <a:rPr lang="en-US" sz="950" b="1" dirty="0">
+              <a:rPr lang="en-US" sz="1300" b="1" dirty="0">
                 <a:solidFill>
                   <a:srgbClr val="0068B7"/>
                 </a:solidFill>
@@ -14226,20 +15402,20 @@
               </a:rPr>
               <a:t>Key idea</a:t>
             </a:r>
-            <a:endParaRPr lang="en-US" sz="950" dirty="0"/>
-          </a:p>
-        </p:txBody>
-      </p:sp>
-      <p:sp>
-        <p:nvSpPr>
-          <p:cNvPr id="13" name="Text 11"/>
-          <p:cNvSpPr/>
-          <p:nvPr/>
-        </p:nvSpPr>
-        <p:spPr>
-          <a:xfrm>
-            <a:off x="8074152" y="1856232"/>
-            <a:ext cx="2825496" cy="1261872"/>
+            <a:endParaRPr lang="en-US" sz="1300" dirty="0"/>
+          </a:p>
+        </p:txBody>
+      </p:sp>
+      <p:sp>
+        <p:nvSpPr>
+          <p:cNvPr id="14" name="Text 12"/>
+          <p:cNvSpPr/>
+          <p:nvPr/>
+        </p:nvSpPr>
+        <p:spPr>
+          <a:xfrm>
+            <a:off x="8074152" y="1920240"/>
+            <a:ext cx="2825496" cy="1188720"/>
           </a:xfrm>
           <a:prstGeom prst="rect">
             <a:avLst/>
@@ -14257,7 +15433,7 @@
               <a:buNone/>
             </a:pPr>
             <a:r>
-              <a:rPr lang="en-US" sz="1250" dirty="0">
+              <a:rPr lang="en-US" sz="1550" dirty="0">
                 <a:solidFill>
                   <a:srgbClr val="17364A"/>
                 </a:solidFill>
@@ -14265,15 +15441,15 @@
                 <a:ea typeface="Aptos" pitchFamily="34" charset="-122"/>
                 <a:cs typeface="Aptos" pitchFamily="34" charset="-120"/>
               </a:rPr>
-              <a:t>An agency may define a higher risk appetite for internal administrative uses that do not involve sensitive data, public.</a:t>
-            </a:r>
-            <a:endParaRPr lang="en-US" sz="1250" dirty="0"/>
-          </a:p>
-        </p:txBody>
-      </p:sp>
-      <p:sp>
-        <p:nvSpPr>
-          <p:cNvPr id="14" name="Shape 12"/>
+              <a:t>An agency may define a higher risk appetite for internal administrative uses that do not involve.</a:t>
+            </a:r>
+            <a:endParaRPr lang="en-US" sz="1550" dirty="0"/>
+          </a:p>
+        </p:txBody>
+      </p:sp>
+      <p:sp>
+        <p:nvSpPr>
+          <p:cNvPr id="15" name="Shape 13"/>
           <p:cNvSpPr/>
           <p:nvPr/>
         </p:nvSpPr>
@@ -14300,14 +15476,14 @@
       </p:sp>
       <p:sp>
         <p:nvSpPr>
-          <p:cNvPr id="15" name="Text 13"/>
+          <p:cNvPr id="16" name="Text 14"/>
           <p:cNvSpPr/>
           <p:nvPr/>
         </p:nvSpPr>
         <p:spPr>
           <a:xfrm>
             <a:off x="8074152" y="3666744"/>
-            <a:ext cx="2825496" cy="201168"/>
+            <a:ext cx="2825496" cy="256032"/>
           </a:xfrm>
           <a:prstGeom prst="rect">
             <a:avLst/>
@@ -14323,7 +15499,7 @@
               <a:buNone/>
             </a:pPr>
             <a:r>
-              <a:rPr lang="en-US" sz="950" b="1" dirty="0">
+              <a:rPr lang="en-US" sz="1300" b="1" dirty="0">
                 <a:solidFill>
                   <a:srgbClr val="0068B7"/>
                 </a:solidFill>
@@ -14333,20 +15509,20 @@
               </a:rPr>
               <a:t>Use this for</a:t>
             </a:r>
-            <a:endParaRPr lang="en-US" sz="950" dirty="0"/>
-          </a:p>
-        </p:txBody>
-      </p:sp>
-      <p:sp>
-        <p:nvSpPr>
-          <p:cNvPr id="16" name="Text 14"/>
-          <p:cNvSpPr/>
-          <p:nvPr/>
-        </p:nvSpPr>
-        <p:spPr>
-          <a:xfrm>
-            <a:off x="8074152" y="3959352"/>
-            <a:ext cx="2825496" cy="1170432"/>
+            <a:endParaRPr lang="en-US" sz="1300" dirty="0"/>
+          </a:p>
+        </p:txBody>
+      </p:sp>
+      <p:sp>
+        <p:nvSpPr>
+          <p:cNvPr id="17" name="Text 15"/>
+          <p:cNvSpPr/>
+          <p:nvPr/>
+        </p:nvSpPr>
+        <p:spPr>
+          <a:xfrm>
+            <a:off x="8074152" y="4023360"/>
+            <a:ext cx="2825496" cy="1097280"/>
           </a:xfrm>
           <a:prstGeom prst="rect">
             <a:avLst/>
@@ -14364,7 +15540,7 @@
               <a:buNone/>
             </a:pPr>
             <a:r>
-              <a:rPr lang="en-US" sz="1250" dirty="0">
+              <a:rPr lang="en-US" sz="1550" dirty="0">
                 <a:solidFill>
                   <a:srgbClr val="17364A"/>
                 </a:solidFill>
@@ -14374,7 +15550,7 @@
               </a:rPr>
               <a:t>Connect the concept to public health decisions, safeguards, documentation, or implementation work.</a:t>
             </a:r>
-            <a:endParaRPr lang="en-US" sz="1250" dirty="0"/>
+            <a:endParaRPr lang="en-US" sz="1550" dirty="0"/>
           </a:p>
         </p:txBody>
       </p:sp>
